--- a/output/wordlabs-fer-3day.pptx
+++ b/output/wordlabs-fer-3day.pptx
@@ -4240,7 +4240,7 @@
                 <a:ea typeface="Calibri" pitchFamily="34" charset="-122"/>
                 <a:cs typeface="Calibri" pitchFamily="34" charset="-120"/>
               </a:rPr>
-              <a:t>"carry, bear, bring"</a:t>
+              <a:t>"to carry, bring, bear"</a:t>
             </a:r>
             <a:endParaRPr lang="en-US" sz="2200" dirty="0"/>
           </a:p>
@@ -5288,7 +5288,7 @@
                 <a:ea typeface="Calibri" pitchFamily="34" charset="-122"/>
                 <a:cs typeface="Calibri" pitchFamily="34" charset="-120"/>
               </a:rPr>
-              <a:t>Word Labs  •  wordlabs.app  •  Root: 'fer' = carry, bear, bring</a:t>
+              <a:t>Word Labs  •  wordlabs.app  •  Root: 'fer' = to carry, bring, bear</a:t>
             </a:r>
             <a:endParaRPr lang="en-US" sz="800" dirty="0"/>
           </a:p>
@@ -5622,7 +5622,7 @@
                 <a:ea typeface="Trebuchet MS" pitchFamily="34" charset="-122"/>
                 <a:cs typeface="Trebuchet MS" pitchFamily="34" charset="-120"/>
               </a:rPr>
-              <a:t>1</a:t>
+              <a:t>2</a:t>
             </a:r>
             <a:pPr algn="ctr" indent="0" marL="0">
               <a:buNone/>
@@ -5636,7 +5636,7 @@
                 <a:ea typeface="Trebuchet MS" pitchFamily="34" charset="-122"/>
                 <a:cs typeface="Trebuchet MS" pitchFamily="34" charset="-120"/>
               </a:rPr>
-              <a:t>  punctuation mark</a:t>
+              <a:t>  punctuation marks</a:t>
             </a:r>
             <a:endParaRPr lang="en-US" sz="2800" dirty="0"/>
           </a:p>
@@ -5928,7 +5928,7 @@
                 <a:ea typeface="Calibri" pitchFamily="34" charset="-122"/>
                 <a:cs typeface="Calibri" pitchFamily="34" charset="-120"/>
               </a:rPr>
-              <a:t>Word Labs  •  wordlabs.app  •  Root: 'fer' = carry, bear, bring</a:t>
+              <a:t>Word Labs  •  wordlabs.app  •  Root: 'fer' = to carry, bring, bear</a:t>
             </a:r>
             <a:endParaRPr lang="en-US" sz="800" dirty="0"/>
           </a:p>
@@ -6040,7 +6040,7 @@
                 <a:ea typeface="Calibri" pitchFamily="34" charset="-122"/>
                 <a:cs typeface="Calibri" pitchFamily="34" charset="-120"/>
               </a:rPr>
-              <a:t>Would you </a:t>
+              <a:t>Can you </a:t>
             </a:r>
             <a:pPr algn="l" indent="0" marL="0">
               <a:buNone/>
@@ -6057,7 +6057,7 @@
                 <a:ea typeface="Calibri" pitchFamily="34" charset="-122"/>
                 <a:cs typeface="Calibri" pitchFamily="34" charset="-120"/>
               </a:rPr>
-              <a:t>prefer</a:t>
+              <a:t>infer</a:t>
             </a:r>
             <a:pPr algn="l" indent="0" marL="0">
               <a:buNone/>
@@ -6071,7 +6071,7 @@
                 <a:ea typeface="Calibri" pitchFamily="34" charset="-122"/>
                 <a:cs typeface="Calibri" pitchFamily="34" charset="-120"/>
               </a:rPr>
-              <a:t> to </a:t>
+              <a:t> what the character is feeling, or would you </a:t>
             </a:r>
             <a:pPr algn="l" indent="0" marL="0">
               <a:buNone/>
@@ -6088,7 +6088,7 @@
                 <a:ea typeface="Calibri" pitchFamily="34" charset="-122"/>
                 <a:cs typeface="Calibri" pitchFamily="34" charset="-120"/>
               </a:rPr>
-              <a:t>transfer</a:t>
+              <a:t>prefer</a:t>
             </a:r>
             <a:pPr algn="l" indent="0" marL="0">
               <a:buNone/>
@@ -6102,7 +6102,7 @@
                 <a:ea typeface="Calibri" pitchFamily="34" charset="-122"/>
                 <a:cs typeface="Calibri" pitchFamily="34" charset="-120"/>
               </a:rPr>
-              <a:t> your work to a new notebook, or keep it where it is?</a:t>
+              <a:t> to read the passage again?</a:t>
             </a:r>
             <a:endParaRPr lang="en-US" sz="1800" dirty="0"/>
           </a:p>
@@ -6257,7 +6257,7 @@
                 <a:ea typeface="Trebuchet MS" pitchFamily="34" charset="-122"/>
                 <a:cs typeface="Trebuchet MS" pitchFamily="34" charset="-120"/>
               </a:rPr>
-              <a:t>prefer</a:t>
+              <a:t>infer</a:t>
             </a:r>
             <a:endParaRPr lang="en-US" sz="1400" dirty="0"/>
           </a:p>
@@ -6385,7 +6385,7 @@
                 <a:ea typeface="Trebuchet MS" pitchFamily="34" charset="-122"/>
                 <a:cs typeface="Trebuchet MS" pitchFamily="34" charset="-120"/>
               </a:rPr>
-              <a:t>transfer</a:t>
+              <a:t>prefer</a:t>
             </a:r>
             <a:endParaRPr lang="en-US" sz="1400" dirty="0"/>
           </a:p>
@@ -6716,7 +6716,7 @@
                 <a:ea typeface="Calibri" pitchFamily="34" charset="-122"/>
                 <a:cs typeface="Calibri" pitchFamily="34" charset="-120"/>
               </a:rPr>
-              <a:t>Word Labs  •  wordlabs.app  •  Root: 'fer' = carry, bear, bring</a:t>
+              <a:t>Word Labs  •  wordlabs.app  •  Root: 'fer' = to carry, bring, bear</a:t>
             </a:r>
             <a:endParaRPr lang="en-US" sz="800" dirty="0"/>
           </a:p>
@@ -6855,7 +6855,7 @@
                 <a:ea typeface="Trebuchet MS" pitchFamily="34" charset="-122"/>
                 <a:cs typeface="Trebuchet MS" pitchFamily="34" charset="-120"/>
               </a:rPr>
-              <a:t>prefer</a:t>
+              <a:t>infer</a:t>
             </a:r>
             <a:endParaRPr lang="en-US" sz="2800" dirty="0"/>
           </a:p>
@@ -7543,7 +7543,7 @@
                 <a:ea typeface="Calibri" pitchFamily="34" charset="-122"/>
                 <a:cs typeface="Calibri" pitchFamily="34" charset="-120"/>
               </a:rPr>
-              <a:t>Word Labs  •  wordlabs.app  •  Root: 'fer' = carry, bear, bring</a:t>
+              <a:t>Word Labs  •  wordlabs.app  •  Root: 'fer' = to carry, bring, bear</a:t>
             </a:r>
             <a:endParaRPr lang="en-US" sz="800" dirty="0"/>
           </a:p>
@@ -7682,7 +7682,7 @@
                 <a:ea typeface="Trebuchet MS" pitchFamily="34" charset="-122"/>
                 <a:cs typeface="Trebuchet MS" pitchFamily="34" charset="-120"/>
               </a:rPr>
-              <a:t>prefer</a:t>
+              <a:t>infer</a:t>
             </a:r>
             <a:endParaRPr lang="en-US" sz="2800" dirty="0"/>
           </a:p>
@@ -7821,7 +7821,7 @@
                 <a:ea typeface="Trebuchet MS" pitchFamily="34" charset="-122"/>
                 <a:cs typeface="Trebuchet MS" pitchFamily="34" charset="-120"/>
               </a:rPr>
-              <a:t>pre</a:t>
+              <a:t>in</a:t>
             </a:r>
             <a:endParaRPr lang="en-US" sz="1300" dirty="0"/>
           </a:p>
@@ -7860,7 +7860,7 @@
                 <a:ea typeface="Calibri" pitchFamily="34" charset="-122"/>
                 <a:cs typeface="Calibri" pitchFamily="34" charset="-120"/>
               </a:rPr>
-              <a:t>before</a:t>
+              <a:t>into, towards</a:t>
             </a:r>
             <a:endParaRPr lang="en-US" sz="850" dirty="0"/>
           </a:p>
@@ -7972,7 +7972,7 @@
                 <a:ea typeface="Calibri" pitchFamily="34" charset="-122"/>
                 <a:cs typeface="Calibri" pitchFamily="34" charset="-120"/>
               </a:rPr>
-              <a:t>carry, bring</a:t>
+              <a:t>to carry, bring</a:t>
             </a:r>
             <a:endParaRPr lang="en-US" sz="850" dirty="0"/>
           </a:p>
@@ -8528,7 +8528,7 @@
                 <a:ea typeface="Calibri" pitchFamily="34" charset="-122"/>
                 <a:cs typeface="Calibri" pitchFamily="34" charset="-120"/>
               </a:rPr>
-              <a:t>Word Labs  •  wordlabs.app  •  Root: 'fer' = carry, bear, bring</a:t>
+              <a:t>Word Labs  •  wordlabs.app  •  Root: 'fer' = to carry, bring, bear</a:t>
             </a:r>
             <a:endParaRPr lang="en-US" sz="800" dirty="0"/>
           </a:p>
@@ -8667,7 +8667,7 @@
                 <a:ea typeface="Trebuchet MS" pitchFamily="34" charset="-122"/>
                 <a:cs typeface="Trebuchet MS" pitchFamily="34" charset="-120"/>
               </a:rPr>
-              <a:t>prefer</a:t>
+              <a:t>infer</a:t>
             </a:r>
             <a:endParaRPr lang="en-US" sz="2800" dirty="0"/>
           </a:p>
@@ -8806,7 +8806,7 @@
                 <a:ea typeface="Trebuchet MS" pitchFamily="34" charset="-122"/>
                 <a:cs typeface="Trebuchet MS" pitchFamily="34" charset="-120"/>
               </a:rPr>
-              <a:t>pre</a:t>
+              <a:t>in</a:t>
             </a:r>
             <a:endParaRPr lang="en-US" sz="1300" dirty="0"/>
           </a:p>
@@ -8845,7 +8845,7 @@
                 <a:ea typeface="Calibri" pitchFamily="34" charset="-122"/>
                 <a:cs typeface="Calibri" pitchFamily="34" charset="-120"/>
               </a:rPr>
-              <a:t>before</a:t>
+              <a:t>into, towards</a:t>
             </a:r>
             <a:endParaRPr lang="en-US" sz="850" dirty="0"/>
           </a:p>
@@ -8957,7 +8957,7 @@
                 <a:ea typeface="Calibri" pitchFamily="34" charset="-122"/>
                 <a:cs typeface="Calibri" pitchFamily="34" charset="-120"/>
               </a:rPr>
-              <a:t>carry, bring</a:t>
+              <a:t>to carry, bring</a:t>
             </a:r>
             <a:endParaRPr lang="en-US" sz="850" dirty="0"/>
           </a:p>
@@ -9116,7 +9116,7 @@
                 <a:ea typeface="Trebuchet MS" pitchFamily="34" charset="-122"/>
                 <a:cs typeface="Trebuchet MS" pitchFamily="34" charset="-120"/>
               </a:rPr>
-              <a:t>pre</a:t>
+              <a:t>in</a:t>
             </a:r>
             <a:endParaRPr lang="en-US" sz="1400" dirty="0"/>
           </a:p>
@@ -9645,7 +9645,7 @@
                 <a:ea typeface="Calibri" pitchFamily="34" charset="-122"/>
                 <a:cs typeface="Calibri" pitchFamily="34" charset="-120"/>
               </a:rPr>
-              <a:t>Word Labs  •  wordlabs.app  •  Root: 'fer' = carry, bear, bring</a:t>
+              <a:t>Word Labs  •  wordlabs.app  •  Root: 'fer' = to carry, bring, bear</a:t>
             </a:r>
             <a:endParaRPr lang="en-US" sz="800" dirty="0"/>
           </a:p>
@@ -9784,7 +9784,7 @@
                 <a:ea typeface="Trebuchet MS" pitchFamily="34" charset="-122"/>
                 <a:cs typeface="Trebuchet MS" pitchFamily="34" charset="-120"/>
               </a:rPr>
-              <a:t>prefer</a:t>
+              <a:t>infer</a:t>
             </a:r>
             <a:endParaRPr lang="en-US" sz="2800" dirty="0"/>
           </a:p>
@@ -9923,7 +9923,7 @@
                 <a:ea typeface="Trebuchet MS" pitchFamily="34" charset="-122"/>
                 <a:cs typeface="Trebuchet MS" pitchFamily="34" charset="-120"/>
               </a:rPr>
-              <a:t>pre</a:t>
+              <a:t>in</a:t>
             </a:r>
             <a:endParaRPr lang="en-US" sz="1300" dirty="0"/>
           </a:p>
@@ -9962,7 +9962,7 @@
                 <a:ea typeface="Calibri" pitchFamily="34" charset="-122"/>
                 <a:cs typeface="Calibri" pitchFamily="34" charset="-120"/>
               </a:rPr>
-              <a:t>before</a:t>
+              <a:t>into, towards</a:t>
             </a:r>
             <a:endParaRPr lang="en-US" sz="850" dirty="0"/>
           </a:p>
@@ -10074,7 +10074,7 @@
                 <a:ea typeface="Calibri" pitchFamily="34" charset="-122"/>
                 <a:cs typeface="Calibri" pitchFamily="34" charset="-120"/>
               </a:rPr>
-              <a:t>carry, bring</a:t>
+              <a:t>to carry, bring</a:t>
             </a:r>
             <a:endParaRPr lang="en-US" sz="850" dirty="0"/>
           </a:p>
@@ -10233,7 +10233,7 @@
                 <a:ea typeface="Trebuchet MS" pitchFamily="34" charset="-122"/>
                 <a:cs typeface="Trebuchet MS" pitchFamily="34" charset="-120"/>
               </a:rPr>
-              <a:t>pre</a:t>
+              <a:t>in</a:t>
             </a:r>
             <a:endParaRPr lang="en-US" sz="1400" dirty="0"/>
           </a:p>
@@ -10445,7 +10445,7 @@
         </p:nvSpPr>
         <p:spPr>
           <a:xfrm>
-            <a:off x="2427732" y="4169664"/>
+            <a:off x="2670048" y="4169664"/>
             <a:ext cx="685800" cy="475488"/>
           </a:xfrm>
           <a:prstGeom prst="rect">
@@ -10472,7 +10472,7 @@
         </p:nvSpPr>
         <p:spPr>
           <a:xfrm>
-            <a:off x="2427732" y="4169664"/>
+            <a:off x="2670048" y="4169664"/>
             <a:ext cx="685800" cy="475488"/>
           </a:xfrm>
           <a:prstGeom prst="rect">
@@ -10497,7 +10497,7 @@
                 <a:ea typeface="Trebuchet MS" pitchFamily="34" charset="-122"/>
                 <a:cs typeface="Trebuchet MS" pitchFamily="34" charset="-120"/>
               </a:rPr>
-              <a:t>p</a:t>
+              <a:t>i</a:t>
             </a:r>
             <a:endParaRPr lang="en-US" sz="900" dirty="0"/>
           </a:p>
@@ -10511,7 +10511,7 @@
         </p:nvSpPr>
         <p:spPr>
           <a:xfrm>
-            <a:off x="3639312" y="4169664"/>
+            <a:off x="4123944" y="4169664"/>
             <a:ext cx="685800" cy="475488"/>
           </a:xfrm>
           <a:prstGeom prst="rect">
@@ -10538,7 +10538,7 @@
         </p:nvSpPr>
         <p:spPr>
           <a:xfrm>
-            <a:off x="3639312" y="4169664"/>
+            <a:off x="4123944" y="4169664"/>
             <a:ext cx="685800" cy="475488"/>
           </a:xfrm>
           <a:prstGeom prst="rect">
@@ -10563,7 +10563,7 @@
                 <a:ea typeface="Trebuchet MS" pitchFamily="34" charset="-122"/>
                 <a:cs typeface="Trebuchet MS" pitchFamily="34" charset="-120"/>
               </a:rPr>
-              <a:t>r</a:t>
+              <a:t>n</a:t>
             </a:r>
             <a:endParaRPr lang="en-US" sz="900" dirty="0"/>
           </a:p>
@@ -10577,7 +10577,7 @@
         </p:nvSpPr>
         <p:spPr>
           <a:xfrm>
-            <a:off x="4850892" y="4169664"/>
+            <a:off x="5577840" y="4169664"/>
             <a:ext cx="685800" cy="475488"/>
           </a:xfrm>
           <a:prstGeom prst="rect">
@@ -10604,7 +10604,7 @@
         </p:nvSpPr>
         <p:spPr>
           <a:xfrm>
-            <a:off x="4850892" y="4169664"/>
+            <a:off x="5577840" y="4169664"/>
             <a:ext cx="685800" cy="475488"/>
           </a:xfrm>
           <a:prstGeom prst="rect">
@@ -10629,7 +10629,7 @@
                 <a:ea typeface="Trebuchet MS" pitchFamily="34" charset="-122"/>
                 <a:cs typeface="Trebuchet MS" pitchFamily="34" charset="-120"/>
               </a:rPr>
-              <a:t>e</a:t>
+              <a:t>f</a:t>
             </a:r>
             <a:endParaRPr lang="en-US" sz="900" dirty="0"/>
           </a:p>
@@ -10643,7 +10643,7 @@
         </p:nvSpPr>
         <p:spPr>
           <a:xfrm>
-            <a:off x="6062472" y="4169664"/>
+            <a:off x="7031736" y="4169664"/>
             <a:ext cx="685800" cy="475488"/>
           </a:xfrm>
           <a:prstGeom prst="rect">
@@ -10670,73 +10670,7 @@
         </p:nvSpPr>
         <p:spPr>
           <a:xfrm>
-            <a:off x="6062472" y="4169664"/>
-            <a:ext cx="685800" cy="475488"/>
-          </a:xfrm>
-          <a:prstGeom prst="rect">
-            <a:avLst/>
-          </a:prstGeom>
-          <a:noFill/>
-          <a:ln/>
-        </p:spPr>
-        <p:txBody>
-          <a:bodyPr wrap="square" lIns="0" tIns="0" rIns="0" bIns="0" rtlCol="0" anchor="ctr"/>
-          <a:lstStyle/>
-          <a:p>
-            <a:pPr algn="ctr" indent="0" marL="0">
-              <a:buNone/>
-            </a:pPr>
-            <a:r>
-              <a:rPr lang="en-US" sz="900" b="1" dirty="0">
-                <a:solidFill>
-                  <a:srgbClr val="9D174D"/>
-                </a:solidFill>
-                <a:latin typeface="Trebuchet MS" pitchFamily="34" charset="0"/>
-                <a:ea typeface="Trebuchet MS" pitchFamily="34" charset="-122"/>
-                <a:cs typeface="Trebuchet MS" pitchFamily="34" charset="-120"/>
-              </a:rPr>
-              <a:t>f</a:t>
-            </a:r>
-            <a:endParaRPr lang="en-US" sz="900" dirty="0"/>
-          </a:p>
-        </p:txBody>
-      </p:sp>
-      <p:sp>
-        <p:nvSpPr>
-          <p:cNvPr id="41" name="Shape 39"/>
-          <p:cNvSpPr/>
-          <p:nvPr/>
-        </p:nvSpPr>
-        <p:spPr>
-          <a:xfrm>
-            <a:off x="7274052" y="4169664"/>
-            <a:ext cx="685800" cy="475488"/>
-          </a:xfrm>
-          <a:prstGeom prst="rect">
-            <a:avLst>
-              <a:gd name="adj" fmla="val 7692"/>
-            </a:avLst>
-          </a:prstGeom>
-          <a:solidFill>
-            <a:srgbClr val="FFFFFF"/>
-          </a:solidFill>
-          <a:ln w="12700">
-            <a:solidFill>
-              <a:srgbClr val="DB2777"/>
-            </a:solidFill>
-            <a:prstDash val="solid"/>
-          </a:ln>
-        </p:spPr>
-      </p:sp>
-      <p:sp>
-        <p:nvSpPr>
-          <p:cNvPr id="42" name="Text 40"/>
-          <p:cNvSpPr/>
-          <p:nvPr/>
-        </p:nvSpPr>
-        <p:spPr>
-          <a:xfrm>
-            <a:off x="7274052" y="4169664"/>
+            <a:off x="7031736" y="4169664"/>
             <a:ext cx="685800" cy="475488"/>
           </a:xfrm>
           <a:prstGeom prst="rect">
@@ -11053,7 +10987,7 @@
                 <a:ea typeface="Calibri" pitchFamily="34" charset="-122"/>
                 <a:cs typeface="Calibri" pitchFamily="34" charset="-120"/>
               </a:rPr>
-              <a:t>Word Labs  •  wordlabs.app  •  Root: 'fer' = carry, bear, bring</a:t>
+              <a:t>Word Labs  •  wordlabs.app  •  Root: 'fer' = to carry, bring, bear</a:t>
             </a:r>
             <a:endParaRPr lang="en-US" sz="800" dirty="0"/>
           </a:p>
@@ -11192,7 +11126,7 @@
                 <a:ea typeface="Trebuchet MS" pitchFamily="34" charset="-122"/>
                 <a:cs typeface="Trebuchet MS" pitchFamily="34" charset="-120"/>
               </a:rPr>
-              <a:t>transfer</a:t>
+              <a:t>prefer</a:t>
             </a:r>
             <a:endParaRPr lang="en-US" sz="2800" dirty="0"/>
           </a:p>
@@ -11880,7 +11814,7 @@
                 <a:ea typeface="Calibri" pitchFamily="34" charset="-122"/>
                 <a:cs typeface="Calibri" pitchFamily="34" charset="-120"/>
               </a:rPr>
-              <a:t>Word Labs  •  wordlabs.app  •  Root: 'fer' = carry, bear, bring</a:t>
+              <a:t>Word Labs  •  wordlabs.app  •  Root: 'fer' = to carry, bring, bear</a:t>
             </a:r>
             <a:endParaRPr lang="en-US" sz="800" dirty="0"/>
           </a:p>
@@ -12019,7 +11953,7 @@
                 <a:ea typeface="Trebuchet MS" pitchFamily="34" charset="-122"/>
                 <a:cs typeface="Trebuchet MS" pitchFamily="34" charset="-120"/>
               </a:rPr>
-              <a:t>transfer</a:t>
+              <a:t>prefer</a:t>
             </a:r>
             <a:endParaRPr lang="en-US" sz="2800" dirty="0"/>
           </a:p>
@@ -12158,7 +12092,7 @@
                 <a:ea typeface="Trebuchet MS" pitchFamily="34" charset="-122"/>
                 <a:cs typeface="Trebuchet MS" pitchFamily="34" charset="-120"/>
               </a:rPr>
-              <a:t>trans</a:t>
+              <a:t>pre</a:t>
             </a:r>
             <a:endParaRPr lang="en-US" sz="1300" dirty="0"/>
           </a:p>
@@ -12197,7 +12131,7 @@
                 <a:ea typeface="Calibri" pitchFamily="34" charset="-122"/>
                 <a:cs typeface="Calibri" pitchFamily="34" charset="-120"/>
               </a:rPr>
-              <a:t>across</a:t>
+              <a:t>before, in front of</a:t>
             </a:r>
             <a:endParaRPr lang="en-US" sz="850" dirty="0"/>
           </a:p>
@@ -12309,7 +12243,7 @@
                 <a:ea typeface="Calibri" pitchFamily="34" charset="-122"/>
                 <a:cs typeface="Calibri" pitchFamily="34" charset="-120"/>
               </a:rPr>
-              <a:t>carry, bring</a:t>
+              <a:t>to carry, bring</a:t>
             </a:r>
             <a:endParaRPr lang="en-US" sz="850" dirty="0"/>
           </a:p>
@@ -12865,7 +12799,7 @@
                 <a:ea typeface="Calibri" pitchFamily="34" charset="-122"/>
                 <a:cs typeface="Calibri" pitchFamily="34" charset="-120"/>
               </a:rPr>
-              <a:t>Word Labs  •  wordlabs.app  •  Root: 'fer' = carry, bear, bring</a:t>
+              <a:t>Word Labs  •  wordlabs.app  •  Root: 'fer' = to carry, bring, bear</a:t>
             </a:r>
             <a:endParaRPr lang="en-US" sz="800" dirty="0"/>
           </a:p>
@@ -13004,7 +12938,7 @@
                 <a:ea typeface="Trebuchet MS" pitchFamily="34" charset="-122"/>
                 <a:cs typeface="Trebuchet MS" pitchFamily="34" charset="-120"/>
               </a:rPr>
-              <a:t>transfer</a:t>
+              <a:t>prefer</a:t>
             </a:r>
             <a:endParaRPr lang="en-US" sz="2800" dirty="0"/>
           </a:p>
@@ -13143,7 +13077,7 @@
                 <a:ea typeface="Trebuchet MS" pitchFamily="34" charset="-122"/>
                 <a:cs typeface="Trebuchet MS" pitchFamily="34" charset="-120"/>
               </a:rPr>
-              <a:t>trans</a:t>
+              <a:t>pre</a:t>
             </a:r>
             <a:endParaRPr lang="en-US" sz="1300" dirty="0"/>
           </a:p>
@@ -13182,7 +13116,7 @@
                 <a:ea typeface="Calibri" pitchFamily="34" charset="-122"/>
                 <a:cs typeface="Calibri" pitchFamily="34" charset="-120"/>
               </a:rPr>
-              <a:t>across</a:t>
+              <a:t>before, in front of</a:t>
             </a:r>
             <a:endParaRPr lang="en-US" sz="850" dirty="0"/>
           </a:p>
@@ -13294,7 +13228,7 @@
                 <a:ea typeface="Calibri" pitchFamily="34" charset="-122"/>
                 <a:cs typeface="Calibri" pitchFamily="34" charset="-120"/>
               </a:rPr>
-              <a:t>carry, bring</a:t>
+              <a:t>to carry, bring</a:t>
             </a:r>
             <a:endParaRPr lang="en-US" sz="850" dirty="0"/>
           </a:p>
@@ -13453,7 +13387,7 @@
                 <a:ea typeface="Trebuchet MS" pitchFamily="34" charset="-122"/>
                 <a:cs typeface="Trebuchet MS" pitchFamily="34" charset="-120"/>
               </a:rPr>
-              <a:t>trans</a:t>
+              <a:t>pre</a:t>
             </a:r>
             <a:endParaRPr lang="en-US" sz="1400" dirty="0"/>
           </a:p>
@@ -13891,7 +13825,7 @@
                 <a:ea typeface="Calibri" pitchFamily="34" charset="-122"/>
                 <a:cs typeface="Calibri" pitchFamily="34" charset="-120"/>
               </a:rPr>
-              <a:t>Root 'fer' — carry, bear, bring</a:t>
+              <a:t>Root 'fer' — to carry, bring, bear</a:t>
             </a:r>
             <a:endParaRPr lang="en-US" sz="1600" dirty="0"/>
           </a:p>
@@ -14247,7 +14181,7 @@
                 <a:ea typeface="Calibri" pitchFamily="34" charset="-122"/>
                 <a:cs typeface="Calibri" pitchFamily="34" charset="-120"/>
               </a:rPr>
-              <a:t>Word Labs  •  wordlabs.app  •  Root: 'fer' = carry, bear, bring</a:t>
+              <a:t>Word Labs  •  wordlabs.app  •  Root: 'fer' = to carry, bring, bear</a:t>
             </a:r>
             <a:endParaRPr lang="en-US" sz="800" dirty="0"/>
           </a:p>
@@ -14386,7 +14320,7 @@
                 <a:ea typeface="Trebuchet MS" pitchFamily="34" charset="-122"/>
                 <a:cs typeface="Trebuchet MS" pitchFamily="34" charset="-120"/>
               </a:rPr>
-              <a:t>transfer</a:t>
+              <a:t>prefer</a:t>
             </a:r>
             <a:endParaRPr lang="en-US" sz="2800" dirty="0"/>
           </a:p>
@@ -14525,7 +14459,7 @@
                 <a:ea typeface="Trebuchet MS" pitchFamily="34" charset="-122"/>
                 <a:cs typeface="Trebuchet MS" pitchFamily="34" charset="-120"/>
               </a:rPr>
-              <a:t>trans</a:t>
+              <a:t>pre</a:t>
             </a:r>
             <a:endParaRPr lang="en-US" sz="1300" dirty="0"/>
           </a:p>
@@ -14564,7 +14498,7 @@
                 <a:ea typeface="Calibri" pitchFamily="34" charset="-122"/>
                 <a:cs typeface="Calibri" pitchFamily="34" charset="-120"/>
               </a:rPr>
-              <a:t>across</a:t>
+              <a:t>before, in front of</a:t>
             </a:r>
             <a:endParaRPr lang="en-US" sz="850" dirty="0"/>
           </a:p>
@@ -14676,7 +14610,7 @@
                 <a:ea typeface="Calibri" pitchFamily="34" charset="-122"/>
                 <a:cs typeface="Calibri" pitchFamily="34" charset="-120"/>
               </a:rPr>
-              <a:t>carry, bring</a:t>
+              <a:t>to carry, bring</a:t>
             </a:r>
             <a:endParaRPr lang="en-US" sz="850" dirty="0"/>
           </a:p>
@@ -14835,7 +14769,7 @@
                 <a:ea typeface="Trebuchet MS" pitchFamily="34" charset="-122"/>
                 <a:cs typeface="Trebuchet MS" pitchFamily="34" charset="-120"/>
               </a:rPr>
-              <a:t>trans</a:t>
+              <a:t>pre</a:t>
             </a:r>
             <a:endParaRPr lang="en-US" sz="1400" dirty="0"/>
           </a:p>
@@ -15047,7 +14981,7 @@
         </p:nvSpPr>
         <p:spPr>
           <a:xfrm>
-            <a:off x="2124837" y="4169664"/>
+            <a:off x="2427732" y="4169664"/>
             <a:ext cx="685800" cy="475488"/>
           </a:xfrm>
           <a:prstGeom prst="rect">
@@ -15074,7 +15008,7 @@
         </p:nvSpPr>
         <p:spPr>
           <a:xfrm>
-            <a:off x="2124837" y="4169664"/>
+            <a:off x="2427732" y="4169664"/>
             <a:ext cx="685800" cy="475488"/>
           </a:xfrm>
           <a:prstGeom prst="rect">
@@ -15099,7 +15033,7 @@
                 <a:ea typeface="Trebuchet MS" pitchFamily="34" charset="-122"/>
                 <a:cs typeface="Trebuchet MS" pitchFamily="34" charset="-120"/>
               </a:rPr>
-              <a:t>t</a:t>
+              <a:t>p</a:t>
             </a:r>
             <a:endParaRPr lang="en-US" sz="900" dirty="0"/>
           </a:p>
@@ -15113,7 +15047,7 @@
         </p:nvSpPr>
         <p:spPr>
           <a:xfrm>
-            <a:off x="3033522" y="4169664"/>
+            <a:off x="3639312" y="4169664"/>
             <a:ext cx="685800" cy="475488"/>
           </a:xfrm>
           <a:prstGeom prst="rect">
@@ -15140,7 +15074,7 @@
         </p:nvSpPr>
         <p:spPr>
           <a:xfrm>
-            <a:off x="3033522" y="4169664"/>
+            <a:off x="3639312" y="4169664"/>
             <a:ext cx="685800" cy="475488"/>
           </a:xfrm>
           <a:prstGeom prst="rect">
@@ -15179,7 +15113,7 @@
         </p:nvSpPr>
         <p:spPr>
           <a:xfrm>
-            <a:off x="3942207" y="4169664"/>
+            <a:off x="4850892" y="4169664"/>
             <a:ext cx="685800" cy="475488"/>
           </a:xfrm>
           <a:prstGeom prst="rect">
@@ -15206,7 +15140,7 @@
         </p:nvSpPr>
         <p:spPr>
           <a:xfrm>
-            <a:off x="3942207" y="4169664"/>
+            <a:off x="4850892" y="4169664"/>
             <a:ext cx="685800" cy="475488"/>
           </a:xfrm>
           <a:prstGeom prst="rect">
@@ -15231,7 +15165,7 @@
                 <a:ea typeface="Trebuchet MS" pitchFamily="34" charset="-122"/>
                 <a:cs typeface="Trebuchet MS" pitchFamily="34" charset="-120"/>
               </a:rPr>
-              <a:t>a</a:t>
+              <a:t>e</a:t>
             </a:r>
             <a:endParaRPr lang="en-US" sz="900" dirty="0"/>
           </a:p>
@@ -15245,7 +15179,7 @@
         </p:nvSpPr>
         <p:spPr>
           <a:xfrm>
-            <a:off x="4850892" y="4169664"/>
+            <a:off x="6062472" y="4169664"/>
             <a:ext cx="685800" cy="475488"/>
           </a:xfrm>
           <a:prstGeom prst="rect">
@@ -15272,7 +15206,7 @@
         </p:nvSpPr>
         <p:spPr>
           <a:xfrm>
-            <a:off x="4850892" y="4169664"/>
+            <a:off x="6062472" y="4169664"/>
             <a:ext cx="685800" cy="475488"/>
           </a:xfrm>
           <a:prstGeom prst="rect">
@@ -15297,7 +15231,7 @@
                 <a:ea typeface="Trebuchet MS" pitchFamily="34" charset="-122"/>
                 <a:cs typeface="Trebuchet MS" pitchFamily="34" charset="-120"/>
               </a:rPr>
-              <a:t>n</a:t>
+              <a:t>f</a:t>
             </a:r>
             <a:endParaRPr lang="en-US" sz="900" dirty="0"/>
           </a:p>
@@ -15311,7 +15245,7 @@
         </p:nvSpPr>
         <p:spPr>
           <a:xfrm>
-            <a:off x="5759577" y="4169664"/>
+            <a:off x="7274052" y="4169664"/>
             <a:ext cx="685800" cy="475488"/>
           </a:xfrm>
           <a:prstGeom prst="rect">
@@ -15338,139 +15272,7 @@
         </p:nvSpPr>
         <p:spPr>
           <a:xfrm>
-            <a:off x="5759577" y="4169664"/>
-            <a:ext cx="685800" cy="475488"/>
-          </a:xfrm>
-          <a:prstGeom prst="rect">
-            <a:avLst/>
-          </a:prstGeom>
-          <a:noFill/>
-          <a:ln/>
-        </p:spPr>
-        <p:txBody>
-          <a:bodyPr wrap="square" lIns="0" tIns="0" rIns="0" bIns="0" rtlCol="0" anchor="ctr"/>
-          <a:lstStyle/>
-          <a:p>
-            <a:pPr algn="ctr" indent="0" marL="0">
-              <a:buNone/>
-            </a:pPr>
-            <a:r>
-              <a:rPr lang="en-US" sz="900" b="1" dirty="0">
-                <a:solidFill>
-                  <a:srgbClr val="9D174D"/>
-                </a:solidFill>
-                <a:latin typeface="Trebuchet MS" pitchFamily="34" charset="0"/>
-                <a:ea typeface="Trebuchet MS" pitchFamily="34" charset="-122"/>
-                <a:cs typeface="Trebuchet MS" pitchFamily="34" charset="-120"/>
-              </a:rPr>
-              <a:t>s</a:t>
-            </a:r>
-            <a:endParaRPr lang="en-US" sz="900" dirty="0"/>
-          </a:p>
-        </p:txBody>
-      </p:sp>
-      <p:sp>
-        <p:nvSpPr>
-          <p:cNvPr id="43" name="Shape 41"/>
-          <p:cNvSpPr/>
-          <p:nvPr/>
-        </p:nvSpPr>
-        <p:spPr>
-          <a:xfrm>
-            <a:off x="6668262" y="4169664"/>
-            <a:ext cx="685800" cy="475488"/>
-          </a:xfrm>
-          <a:prstGeom prst="rect">
-            <a:avLst>
-              <a:gd name="adj" fmla="val 7692"/>
-            </a:avLst>
-          </a:prstGeom>
-          <a:solidFill>
-            <a:srgbClr val="FFFFFF"/>
-          </a:solidFill>
-          <a:ln w="12700">
-            <a:solidFill>
-              <a:srgbClr val="DB2777"/>
-            </a:solidFill>
-            <a:prstDash val="solid"/>
-          </a:ln>
-        </p:spPr>
-      </p:sp>
-      <p:sp>
-        <p:nvSpPr>
-          <p:cNvPr id="44" name="Text 42"/>
-          <p:cNvSpPr/>
-          <p:nvPr/>
-        </p:nvSpPr>
-        <p:spPr>
-          <a:xfrm>
-            <a:off x="6668262" y="4169664"/>
-            <a:ext cx="685800" cy="475488"/>
-          </a:xfrm>
-          <a:prstGeom prst="rect">
-            <a:avLst/>
-          </a:prstGeom>
-          <a:noFill/>
-          <a:ln/>
-        </p:spPr>
-        <p:txBody>
-          <a:bodyPr wrap="square" lIns="0" tIns="0" rIns="0" bIns="0" rtlCol="0" anchor="ctr"/>
-          <a:lstStyle/>
-          <a:p>
-            <a:pPr algn="ctr" indent="0" marL="0">
-              <a:buNone/>
-            </a:pPr>
-            <a:r>
-              <a:rPr lang="en-US" sz="900" b="1" dirty="0">
-                <a:solidFill>
-                  <a:srgbClr val="9D174D"/>
-                </a:solidFill>
-                <a:latin typeface="Trebuchet MS" pitchFamily="34" charset="0"/>
-                <a:ea typeface="Trebuchet MS" pitchFamily="34" charset="-122"/>
-                <a:cs typeface="Trebuchet MS" pitchFamily="34" charset="-120"/>
-              </a:rPr>
-              <a:t>f</a:t>
-            </a:r>
-            <a:endParaRPr lang="en-US" sz="900" dirty="0"/>
-          </a:p>
-        </p:txBody>
-      </p:sp>
-      <p:sp>
-        <p:nvSpPr>
-          <p:cNvPr id="45" name="Shape 43"/>
-          <p:cNvSpPr/>
-          <p:nvPr/>
-        </p:nvSpPr>
-        <p:spPr>
-          <a:xfrm>
-            <a:off x="7576947" y="4169664"/>
-            <a:ext cx="685800" cy="475488"/>
-          </a:xfrm>
-          <a:prstGeom prst="rect">
-            <a:avLst>
-              <a:gd name="adj" fmla="val 7692"/>
-            </a:avLst>
-          </a:prstGeom>
-          <a:solidFill>
-            <a:srgbClr val="FFFFFF"/>
-          </a:solidFill>
-          <a:ln w="12700">
-            <a:solidFill>
-              <a:srgbClr val="DB2777"/>
-            </a:solidFill>
-            <a:prstDash val="solid"/>
-          </a:ln>
-        </p:spPr>
-      </p:sp>
-      <p:sp>
-        <p:nvSpPr>
-          <p:cNvPr id="46" name="Text 44"/>
-          <p:cNvSpPr/>
-          <p:nvPr/>
-        </p:nvSpPr>
-        <p:spPr>
-          <a:xfrm>
-            <a:off x="7576947" y="4169664"/>
+            <a:off x="7274052" y="4169664"/>
             <a:ext cx="685800" cy="475488"/>
           </a:xfrm>
           <a:prstGeom prst="rect">
@@ -16069,7 +15871,7 @@
                 <a:ea typeface="Calibri" pitchFamily="34" charset="-122"/>
                 <a:cs typeface="Calibri" pitchFamily="34" charset="-120"/>
               </a:rPr>
-              <a:t>Word Labs  •  wordlabs.app  •  Root: 'fer' = carry, bear, bring</a:t>
+              <a:t>Word Labs  •  wordlabs.app  •  Root: 'fer' = to carry, bring, bear</a:t>
             </a:r>
             <a:endParaRPr lang="en-US" sz="800" dirty="0"/>
           </a:p>
@@ -16403,7 +16205,7 @@
                 <a:ea typeface="Trebuchet MS" pitchFamily="34" charset="-122"/>
                 <a:cs typeface="Trebuchet MS" pitchFamily="34" charset="-120"/>
               </a:rPr>
-              <a:t>2</a:t>
+              <a:t>0</a:t>
             </a:r>
             <a:pPr algn="ctr" indent="0" marL="0">
               <a:buNone/>
@@ -16417,7 +16219,7 @@
                 <a:ea typeface="Trebuchet MS" pitchFamily="34" charset="-122"/>
                 <a:cs typeface="Trebuchet MS" pitchFamily="34" charset="-120"/>
               </a:rPr>
-              <a:t>  punctuation marks</a:t>
+              <a:t>  punctuation mark</a:t>
             </a:r>
             <a:endParaRPr lang="en-US" sz="2800" dirty="0"/>
           </a:p>
@@ -16709,7 +16511,7 @@
                 <a:ea typeface="Calibri" pitchFamily="34" charset="-122"/>
                 <a:cs typeface="Calibri" pitchFamily="34" charset="-120"/>
               </a:rPr>
-              <a:t>Word Labs  •  wordlabs.app  •  Root: 'fer' = carry, bear, bring</a:t>
+              <a:t>Word Labs  •  wordlabs.app  •  Root: 'fer' = to carry, bring, bear</a:t>
             </a:r>
             <a:endParaRPr lang="en-US" sz="800" dirty="0"/>
           </a:p>
@@ -16821,7 +16623,7 @@
                 <a:ea typeface="Calibri" pitchFamily="34" charset="-122"/>
                 <a:cs typeface="Calibri" pitchFamily="34" charset="-120"/>
               </a:rPr>
-              <a:t>During the </a:t>
+              <a:t>The </a:t>
             </a:r>
             <a:pPr algn="l" indent="0" marL="0">
               <a:buNone/>
@@ -16852,7 +16654,7 @@
                 <a:ea typeface="Calibri" pitchFamily="34" charset="-122"/>
                 <a:cs typeface="Calibri" pitchFamily="34" charset="-120"/>
               </a:rPr>
-              <a:t>, the scientists chose to </a:t>
+              <a:t> speaker will </a:t>
             </a:r>
             <a:pPr algn="l" indent="0" marL="0">
               <a:buNone/>
@@ -16869,7 +16671,7 @@
                 <a:ea typeface="Calibri" pitchFamily="34" charset="-122"/>
                 <a:cs typeface="Calibri" pitchFamily="34" charset="-120"/>
               </a:rPr>
-              <a:t>differ</a:t>
+              <a:t>refer</a:t>
             </a:r>
             <a:pPr algn="l" indent="0" marL="0">
               <a:buNone/>
@@ -16883,7 +16685,7 @@
                 <a:ea typeface="Calibri" pitchFamily="34" charset="-122"/>
                 <a:cs typeface="Calibri" pitchFamily="34" charset="-120"/>
               </a:rPr>
-              <a:t> on their findings, but they agreed to </a:t>
+              <a:t> to the </a:t>
             </a:r>
             <a:pPr algn="l" indent="0" marL="0">
               <a:buNone/>
@@ -16900,7 +16702,7 @@
                 <a:ea typeface="Calibri" pitchFamily="34" charset="-122"/>
                 <a:cs typeface="Calibri" pitchFamily="34" charset="-120"/>
               </a:rPr>
-              <a:t>refer</a:t>
+              <a:t>transfer</a:t>
             </a:r>
             <a:pPr algn="l" indent="0" marL="0">
               <a:buNone/>
@@ -16914,7 +16716,7 @@
                 <a:ea typeface="Calibri" pitchFamily="34" charset="-122"/>
                 <a:cs typeface="Calibri" pitchFamily="34" charset="-120"/>
               </a:rPr>
-              <a:t> to the same research.</a:t>
+              <a:t> of knowledge between schools.</a:t>
             </a:r>
             <a:endParaRPr lang="en-US" sz="1800" dirty="0"/>
           </a:p>
@@ -17197,7 +16999,7 @@
                 <a:ea typeface="Trebuchet MS" pitchFamily="34" charset="-122"/>
                 <a:cs typeface="Trebuchet MS" pitchFamily="34" charset="-120"/>
               </a:rPr>
-              <a:t>differ</a:t>
+              <a:t>refer</a:t>
             </a:r>
             <a:endParaRPr lang="en-US" sz="1400" dirty="0"/>
           </a:p>
@@ -17325,7 +17127,7 @@
                 <a:ea typeface="Trebuchet MS" pitchFamily="34" charset="-122"/>
                 <a:cs typeface="Trebuchet MS" pitchFamily="34" charset="-120"/>
               </a:rPr>
-              <a:t>refer</a:t>
+              <a:t>transfer</a:t>
             </a:r>
             <a:endParaRPr lang="en-US" sz="1400" dirty="0"/>
           </a:p>
@@ -17656,7 +17458,7 @@
                 <a:ea typeface="Calibri" pitchFamily="34" charset="-122"/>
                 <a:cs typeface="Calibri" pitchFamily="34" charset="-120"/>
               </a:rPr>
-              <a:t>Word Labs  •  wordlabs.app  •  Root: 'fer' = carry, bear, bring</a:t>
+              <a:t>Word Labs  •  wordlabs.app  •  Root: 'fer' = to carry, bring, bear</a:t>
             </a:r>
             <a:endParaRPr lang="en-US" sz="800" dirty="0"/>
           </a:p>
@@ -18483,7 +18285,7 @@
                 <a:ea typeface="Calibri" pitchFamily="34" charset="-122"/>
                 <a:cs typeface="Calibri" pitchFamily="34" charset="-120"/>
               </a:rPr>
-              <a:t>Word Labs  •  wordlabs.app  •  Root: 'fer' = carry, bear, bring</a:t>
+              <a:t>Word Labs  •  wordlabs.app  •  Root: 'fer' = to carry, bring, bear</a:t>
             </a:r>
             <a:endParaRPr lang="en-US" sz="800" dirty="0"/>
           </a:p>
@@ -18912,7 +18714,7 @@
                 <a:ea typeface="Calibri" pitchFamily="34" charset="-122"/>
                 <a:cs typeface="Calibri" pitchFamily="34" charset="-120"/>
               </a:rPr>
-              <a:t>carry, bring</a:t>
+              <a:t>to carry, bring</a:t>
             </a:r>
             <a:endParaRPr lang="en-US" sz="850" dirty="0"/>
           </a:p>
@@ -19580,7 +19382,7 @@
                 <a:ea typeface="Calibri" pitchFamily="34" charset="-122"/>
                 <a:cs typeface="Calibri" pitchFamily="34" charset="-120"/>
               </a:rPr>
-              <a:t>Word Labs  •  wordlabs.app  •  Root: 'fer' = carry, bear, bring</a:t>
+              <a:t>Word Labs  •  wordlabs.app  •  Root: 'fer' = to carry, bring, bear</a:t>
             </a:r>
             <a:endParaRPr lang="en-US" sz="800" dirty="0"/>
           </a:p>
@@ -20009,7 +19811,7 @@
                 <a:ea typeface="Calibri" pitchFamily="34" charset="-122"/>
                 <a:cs typeface="Calibri" pitchFamily="34" charset="-120"/>
               </a:rPr>
-              <a:t>carry, bring</a:t>
+              <a:t>to carry, bring</a:t>
             </a:r>
             <a:endParaRPr lang="en-US" sz="850" dirty="0"/>
           </a:p>
@@ -20914,7 +20716,7 @@
                 <a:ea typeface="Calibri" pitchFamily="34" charset="-122"/>
                 <a:cs typeface="Calibri" pitchFamily="34" charset="-120"/>
               </a:rPr>
-              <a:t>Word Labs  •  wordlabs.app  •  Root: 'fer' = carry, bear, bring</a:t>
+              <a:t>Word Labs  •  wordlabs.app  •  Root: 'fer' = to carry, bring, bear</a:t>
             </a:r>
             <a:endParaRPr lang="en-US" sz="800" dirty="0"/>
           </a:p>
@@ -21343,7 +21145,7 @@
                 <a:ea typeface="Calibri" pitchFamily="34" charset="-122"/>
                 <a:cs typeface="Calibri" pitchFamily="34" charset="-120"/>
               </a:rPr>
-              <a:t>carry, bring</a:t>
+              <a:t>to carry, bring</a:t>
             </a:r>
             <a:endParaRPr lang="en-US" sz="850" dirty="0"/>
           </a:p>
@@ -22815,7 +22617,7 @@
                 <a:ea typeface="Calibri" pitchFamily="34" charset="-122"/>
                 <a:cs typeface="Calibri" pitchFamily="34" charset="-120"/>
               </a:rPr>
-              <a:t>Word Labs  •  wordlabs.app  •  Root: 'fer' = carry, bear, bring</a:t>
+              <a:t>Word Labs  •  wordlabs.app  •  Root: 'fer' = to carry, bring, bear</a:t>
             </a:r>
             <a:endParaRPr lang="en-US" sz="800" dirty="0"/>
           </a:p>
@@ -22954,7 +22756,7 @@
                 <a:ea typeface="Trebuchet MS" pitchFamily="34" charset="-122"/>
                 <a:cs typeface="Trebuchet MS" pitchFamily="34" charset="-120"/>
               </a:rPr>
-              <a:t>differ</a:t>
+              <a:t>refer</a:t>
             </a:r>
             <a:endParaRPr lang="en-US" sz="2800" dirty="0"/>
           </a:p>
@@ -23642,7 +23444,7 @@
                 <a:ea typeface="Calibri" pitchFamily="34" charset="-122"/>
                 <a:cs typeface="Calibri" pitchFamily="34" charset="-120"/>
               </a:rPr>
-              <a:t>Word Labs  •  wordlabs.app  •  Root: 'fer' = carry, bear, bring</a:t>
+              <a:t>Word Labs  •  wordlabs.app  •  Root: 'fer' = to carry, bring, bear</a:t>
             </a:r>
             <a:endParaRPr lang="en-US" sz="800" dirty="0"/>
           </a:p>
@@ -23781,7 +23583,7 @@
                 <a:ea typeface="Trebuchet MS" pitchFamily="34" charset="-122"/>
                 <a:cs typeface="Trebuchet MS" pitchFamily="34" charset="-120"/>
               </a:rPr>
-              <a:t>differ</a:t>
+              <a:t>refer</a:t>
             </a:r>
             <a:endParaRPr lang="en-US" sz="2800" dirty="0"/>
           </a:p>
@@ -23920,7 +23722,7 @@
                 <a:ea typeface="Trebuchet MS" pitchFamily="34" charset="-122"/>
                 <a:cs typeface="Trebuchet MS" pitchFamily="34" charset="-120"/>
               </a:rPr>
-              <a:t>dif</a:t>
+              <a:t>re</a:t>
             </a:r>
             <a:endParaRPr lang="en-US" sz="1300" dirty="0"/>
           </a:p>
@@ -23959,7 +23761,7 @@
                 <a:ea typeface="Calibri" pitchFamily="34" charset="-122"/>
                 <a:cs typeface="Calibri" pitchFamily="34" charset="-120"/>
               </a:rPr>
-              <a:t>apart, away</a:t>
+              <a:t>back, again</a:t>
             </a:r>
             <a:endParaRPr lang="en-US" sz="850" dirty="0"/>
           </a:p>
@@ -23967,46 +23769,7 @@
       </p:sp>
       <p:sp>
         <p:nvSpPr>
-          <p:cNvPr id="19" name="Text 17"/>
-          <p:cNvSpPr/>
-          <p:nvPr/>
-        </p:nvSpPr>
-        <p:spPr>
-          <a:xfrm>
-            <a:off x="2938272" y="2752344"/>
-            <a:ext cx="1828800" cy="182880"/>
-          </a:xfrm>
-          <a:prstGeom prst="rect">
-            <a:avLst/>
-          </a:prstGeom>
-          <a:noFill/>
-          <a:ln/>
-        </p:spPr>
-        <p:txBody>
-          <a:bodyPr wrap="square" lIns="0" tIns="0" rIns="0" bIns="0" rtlCol="0" anchor="t"/>
-          <a:lstStyle/>
-          <a:p>
-            <a:pPr algn="ctr" indent="0" marL="0">
-              <a:buNone/>
-            </a:pPr>
-            <a:r>
-              <a:rPr lang="en-US" sz="700" i="1" dirty="0">
-                <a:solidFill>
-                  <a:srgbClr val="94A3B8"/>
-                </a:solidFill>
-                <a:latin typeface="Calibri" pitchFamily="34" charset="0"/>
-                <a:ea typeface="Calibri" pitchFamily="34" charset="-122"/>
-                <a:cs typeface="Calibri" pitchFamily="34" charset="-120"/>
-              </a:rPr>
-              <a:t>dis → dif before 'f'</a:t>
-            </a:r>
-            <a:endParaRPr lang="en-US" sz="700" dirty="0"/>
-          </a:p>
-        </p:txBody>
-      </p:sp>
-      <p:sp>
-        <p:nvSpPr>
-          <p:cNvPr id="20" name="Shape 18"/>
+          <p:cNvPr id="19" name="Shape 17"/>
           <p:cNvSpPr/>
           <p:nvPr/>
         </p:nvSpPr>
@@ -24040,7 +23803,7 @@
       </p:sp>
       <p:sp>
         <p:nvSpPr>
-          <p:cNvPr id="21" name="Text 19"/>
+          <p:cNvPr id="20" name="Text 18"/>
           <p:cNvSpPr/>
           <p:nvPr/>
         </p:nvSpPr>
@@ -24079,7 +23842,7 @@
       </p:sp>
       <p:sp>
         <p:nvSpPr>
-          <p:cNvPr id="22" name="Text 20"/>
+          <p:cNvPr id="21" name="Text 19"/>
           <p:cNvSpPr/>
           <p:nvPr/>
         </p:nvSpPr>
@@ -24110,7 +23873,7 @@
                 <a:ea typeface="Calibri" pitchFamily="34" charset="-122"/>
                 <a:cs typeface="Calibri" pitchFamily="34" charset="-120"/>
               </a:rPr>
-              <a:t>carry, bring</a:t>
+              <a:t>to carry, bring</a:t>
             </a:r>
             <a:endParaRPr lang="en-US" sz="850" dirty="0"/>
           </a:p>
@@ -24118,7 +23881,7 @@
       </p:sp>
       <p:sp>
         <p:nvSpPr>
-          <p:cNvPr id="23" name="Shape 21"/>
+          <p:cNvPr id="22" name="Shape 20"/>
           <p:cNvSpPr/>
           <p:nvPr/>
         </p:nvSpPr>
@@ -24145,7 +23908,7 @@
       </p:sp>
       <p:sp>
         <p:nvSpPr>
-          <p:cNvPr id="24" name="Text 22"/>
+          <p:cNvPr id="23" name="Text 21"/>
           <p:cNvSpPr/>
           <p:nvPr/>
         </p:nvSpPr>
@@ -24184,7 +23947,7 @@
       </p:sp>
       <p:sp>
         <p:nvSpPr>
-          <p:cNvPr id="25" name="Shape 23"/>
+          <p:cNvPr id="24" name="Shape 22"/>
           <p:cNvSpPr/>
           <p:nvPr/>
         </p:nvSpPr>
@@ -24211,7 +23974,7 @@
       </p:sp>
       <p:sp>
         <p:nvSpPr>
-          <p:cNvPr id="26" name="Text 24"/>
+          <p:cNvPr id="25" name="Text 23"/>
           <p:cNvSpPr/>
           <p:nvPr/>
         </p:nvSpPr>
@@ -24250,7 +24013,7 @@
       </p:sp>
       <p:sp>
         <p:nvSpPr>
-          <p:cNvPr id="27" name="Shape 25"/>
+          <p:cNvPr id="26" name="Shape 24"/>
           <p:cNvSpPr/>
           <p:nvPr/>
         </p:nvSpPr>
@@ -24277,7 +24040,7 @@
       </p:sp>
       <p:sp>
         <p:nvSpPr>
-          <p:cNvPr id="28" name="Text 26"/>
+          <p:cNvPr id="27" name="Text 25"/>
           <p:cNvSpPr/>
           <p:nvPr/>
         </p:nvSpPr>
@@ -24316,7 +24079,7 @@
       </p:sp>
       <p:sp>
         <p:nvSpPr>
-          <p:cNvPr id="29" name="Shape 27"/>
+          <p:cNvPr id="28" name="Shape 26"/>
           <p:cNvSpPr/>
           <p:nvPr/>
         </p:nvSpPr>
@@ -24343,7 +24106,7 @@
       </p:sp>
       <p:sp>
         <p:nvSpPr>
-          <p:cNvPr id="30" name="Text 28"/>
+          <p:cNvPr id="29" name="Text 27"/>
           <p:cNvSpPr/>
           <p:nvPr/>
         </p:nvSpPr>
@@ -24666,7 +24429,7 @@
                 <a:ea typeface="Calibri" pitchFamily="34" charset="-122"/>
                 <a:cs typeface="Calibri" pitchFamily="34" charset="-120"/>
               </a:rPr>
-              <a:t>Word Labs  •  wordlabs.app  •  Root: 'fer' = carry, bear, bring</a:t>
+              <a:t>Word Labs  •  wordlabs.app  •  Root: 'fer' = to carry, bring, bear</a:t>
             </a:r>
             <a:endParaRPr lang="en-US" sz="800" dirty="0"/>
           </a:p>
@@ -24739,7 +24502,7 @@
                 <a:ea typeface="Trebuchet MS" pitchFamily="34" charset="-122"/>
                 <a:cs typeface="Trebuchet MS" pitchFamily="34" charset="-120"/>
               </a:rPr>
-              <a:t>We are learning that the root 'fer' means 'carry, bear, bring'.</a:t>
+              <a:t>We are learning that the root 'fer' means 'to carry, bring, bear'.</a:t>
             </a:r>
             <a:endParaRPr lang="en-US" sz="2000" dirty="0"/>
           </a:p>
@@ -25385,7 +25148,7 @@
                 <a:ea typeface="Calibri" pitchFamily="34" charset="-122"/>
                 <a:cs typeface="Calibri" pitchFamily="34" charset="-120"/>
               </a:rPr>
-              <a:t>Word Labs  •  wordlabs.app  •  Root: 'fer' = carry, bear, bring</a:t>
+              <a:t>Word Labs  •  wordlabs.app  •  Root: 'fer' = to carry, bring, bear</a:t>
             </a:r>
             <a:endParaRPr lang="en-US" sz="800" dirty="0"/>
           </a:p>
@@ -25524,7 +25287,7 @@
                 <a:ea typeface="Trebuchet MS" pitchFamily="34" charset="-122"/>
                 <a:cs typeface="Trebuchet MS" pitchFamily="34" charset="-120"/>
               </a:rPr>
-              <a:t>differ</a:t>
+              <a:t>refer</a:t>
             </a:r>
             <a:endParaRPr lang="en-US" sz="2800" dirty="0"/>
           </a:p>
@@ -25663,7 +25426,7 @@
                 <a:ea typeface="Trebuchet MS" pitchFamily="34" charset="-122"/>
                 <a:cs typeface="Trebuchet MS" pitchFamily="34" charset="-120"/>
               </a:rPr>
-              <a:t>dif</a:t>
+              <a:t>re</a:t>
             </a:r>
             <a:endParaRPr lang="en-US" sz="1300" dirty="0"/>
           </a:p>
@@ -25702,7 +25465,7 @@
                 <a:ea typeface="Calibri" pitchFamily="34" charset="-122"/>
                 <a:cs typeface="Calibri" pitchFamily="34" charset="-120"/>
               </a:rPr>
-              <a:t>apart, away</a:t>
+              <a:t>back, again</a:t>
             </a:r>
             <a:endParaRPr lang="en-US" sz="850" dirty="0"/>
           </a:p>
@@ -25710,46 +25473,7 @@
       </p:sp>
       <p:sp>
         <p:nvSpPr>
-          <p:cNvPr id="19" name="Text 17"/>
-          <p:cNvSpPr/>
-          <p:nvPr/>
-        </p:nvSpPr>
-        <p:spPr>
-          <a:xfrm>
-            <a:off x="2938272" y="2752344"/>
-            <a:ext cx="1828800" cy="182880"/>
-          </a:xfrm>
-          <a:prstGeom prst="rect">
-            <a:avLst/>
-          </a:prstGeom>
-          <a:noFill/>
-          <a:ln/>
-        </p:spPr>
-        <p:txBody>
-          <a:bodyPr wrap="square" lIns="0" tIns="0" rIns="0" bIns="0" rtlCol="0" anchor="t"/>
-          <a:lstStyle/>
-          <a:p>
-            <a:pPr algn="ctr" indent="0" marL="0">
-              <a:buNone/>
-            </a:pPr>
-            <a:r>
-              <a:rPr lang="en-US" sz="700" i="1" dirty="0">
-                <a:solidFill>
-                  <a:srgbClr val="94A3B8"/>
-                </a:solidFill>
-                <a:latin typeface="Calibri" pitchFamily="34" charset="0"/>
-                <a:ea typeface="Calibri" pitchFamily="34" charset="-122"/>
-                <a:cs typeface="Calibri" pitchFamily="34" charset="-120"/>
-              </a:rPr>
-              <a:t>dis → dif before 'f'</a:t>
-            </a:r>
-            <a:endParaRPr lang="en-US" sz="700" dirty="0"/>
-          </a:p>
-        </p:txBody>
-      </p:sp>
-      <p:sp>
-        <p:nvSpPr>
-          <p:cNvPr id="20" name="Shape 18"/>
+          <p:cNvPr id="19" name="Shape 17"/>
           <p:cNvSpPr/>
           <p:nvPr/>
         </p:nvSpPr>
@@ -25783,7 +25507,7 @@
       </p:sp>
       <p:sp>
         <p:nvSpPr>
-          <p:cNvPr id="21" name="Text 19"/>
+          <p:cNvPr id="20" name="Text 18"/>
           <p:cNvSpPr/>
           <p:nvPr/>
         </p:nvSpPr>
@@ -25822,7 +25546,7 @@
       </p:sp>
       <p:sp>
         <p:nvSpPr>
-          <p:cNvPr id="22" name="Text 20"/>
+          <p:cNvPr id="21" name="Text 19"/>
           <p:cNvSpPr/>
           <p:nvPr/>
         </p:nvSpPr>
@@ -25853,7 +25577,7 @@
                 <a:ea typeface="Calibri" pitchFamily="34" charset="-122"/>
                 <a:cs typeface="Calibri" pitchFamily="34" charset="-120"/>
               </a:rPr>
-              <a:t>carry, bring</a:t>
+              <a:t>to carry, bring</a:t>
             </a:r>
             <a:endParaRPr lang="en-US" sz="850" dirty="0"/>
           </a:p>
@@ -25861,7 +25585,7 @@
       </p:sp>
       <p:sp>
         <p:nvSpPr>
-          <p:cNvPr id="23" name="Shape 21"/>
+          <p:cNvPr id="22" name="Shape 20"/>
           <p:cNvSpPr/>
           <p:nvPr/>
         </p:nvSpPr>
@@ -25888,7 +25612,7 @@
       </p:sp>
       <p:sp>
         <p:nvSpPr>
-          <p:cNvPr id="24" name="Text 22"/>
+          <p:cNvPr id="23" name="Text 21"/>
           <p:cNvSpPr/>
           <p:nvPr/>
         </p:nvSpPr>
@@ -25927,7 +25651,7 @@
       </p:sp>
       <p:sp>
         <p:nvSpPr>
-          <p:cNvPr id="25" name="Shape 23"/>
+          <p:cNvPr id="24" name="Shape 22"/>
           <p:cNvSpPr/>
           <p:nvPr/>
         </p:nvSpPr>
@@ -25954,7 +25678,7 @@
       </p:sp>
       <p:sp>
         <p:nvSpPr>
-          <p:cNvPr id="26" name="Shape 24"/>
+          <p:cNvPr id="25" name="Shape 23"/>
           <p:cNvSpPr/>
           <p:nvPr/>
         </p:nvSpPr>
@@ -25981,7 +25705,7 @@
       </p:sp>
       <p:sp>
         <p:nvSpPr>
-          <p:cNvPr id="27" name="Text 25"/>
+          <p:cNvPr id="26" name="Text 24"/>
           <p:cNvSpPr/>
           <p:nvPr/>
         </p:nvSpPr>
@@ -26012,7 +25736,7 @@
                 <a:ea typeface="Trebuchet MS" pitchFamily="34" charset="-122"/>
                 <a:cs typeface="Trebuchet MS" pitchFamily="34" charset="-120"/>
               </a:rPr>
-              <a:t>dif</a:t>
+              <a:t>re</a:t>
             </a:r>
             <a:endParaRPr lang="en-US" sz="1400" dirty="0"/>
           </a:p>
@@ -26020,7 +25744,7 @@
       </p:sp>
       <p:sp>
         <p:nvSpPr>
-          <p:cNvPr id="28" name="Text 26"/>
+          <p:cNvPr id="27" name="Text 25"/>
           <p:cNvSpPr/>
           <p:nvPr/>
         </p:nvSpPr>
@@ -26059,7 +25783,7 @@
       </p:sp>
       <p:sp>
         <p:nvSpPr>
-          <p:cNvPr id="29" name="Shape 27"/>
+          <p:cNvPr id="28" name="Shape 26"/>
           <p:cNvSpPr/>
           <p:nvPr/>
         </p:nvSpPr>
@@ -26086,7 +25810,7 @@
       </p:sp>
       <p:sp>
         <p:nvSpPr>
-          <p:cNvPr id="30" name="Text 28"/>
+          <p:cNvPr id="29" name="Text 27"/>
           <p:cNvSpPr/>
           <p:nvPr/>
         </p:nvSpPr>
@@ -26125,7 +25849,7 @@
       </p:sp>
       <p:sp>
         <p:nvSpPr>
-          <p:cNvPr id="31" name="Shape 29"/>
+          <p:cNvPr id="30" name="Shape 28"/>
           <p:cNvSpPr/>
           <p:nvPr/>
         </p:nvSpPr>
@@ -26152,7 +25876,7 @@
       </p:sp>
       <p:sp>
         <p:nvSpPr>
-          <p:cNvPr id="32" name="Text 30"/>
+          <p:cNvPr id="31" name="Text 29"/>
           <p:cNvSpPr/>
           <p:nvPr/>
         </p:nvSpPr>
@@ -26191,7 +25915,7 @@
       </p:sp>
       <p:sp>
         <p:nvSpPr>
-          <p:cNvPr id="33" name="Shape 31"/>
+          <p:cNvPr id="32" name="Shape 30"/>
           <p:cNvSpPr/>
           <p:nvPr/>
         </p:nvSpPr>
@@ -26218,7 +25942,7 @@
       </p:sp>
       <p:sp>
         <p:nvSpPr>
-          <p:cNvPr id="34" name="Text 32"/>
+          <p:cNvPr id="33" name="Text 31"/>
           <p:cNvSpPr/>
           <p:nvPr/>
         </p:nvSpPr>
@@ -26541,7 +26265,7 @@
                 <a:ea typeface="Calibri" pitchFamily="34" charset="-122"/>
                 <a:cs typeface="Calibri" pitchFamily="34" charset="-120"/>
               </a:rPr>
-              <a:t>Word Labs  •  wordlabs.app  •  Root: 'fer' = carry, bear, bring</a:t>
+              <a:t>Word Labs  •  wordlabs.app  •  Root: 'fer' = to carry, bring, bear</a:t>
             </a:r>
             <a:endParaRPr lang="en-US" sz="800" dirty="0"/>
           </a:p>
@@ -26680,7 +26404,7 @@
                 <a:ea typeface="Trebuchet MS" pitchFamily="34" charset="-122"/>
                 <a:cs typeface="Trebuchet MS" pitchFamily="34" charset="-120"/>
               </a:rPr>
-              <a:t>differ</a:t>
+              <a:t>refer</a:t>
             </a:r>
             <a:endParaRPr lang="en-US" sz="2800" dirty="0"/>
           </a:p>
@@ -26819,7 +26543,7 @@
                 <a:ea typeface="Trebuchet MS" pitchFamily="34" charset="-122"/>
                 <a:cs typeface="Trebuchet MS" pitchFamily="34" charset="-120"/>
               </a:rPr>
-              <a:t>dif</a:t>
+              <a:t>re</a:t>
             </a:r>
             <a:endParaRPr lang="en-US" sz="1300" dirty="0"/>
           </a:p>
@@ -26858,7 +26582,7 @@
                 <a:ea typeface="Calibri" pitchFamily="34" charset="-122"/>
                 <a:cs typeface="Calibri" pitchFamily="34" charset="-120"/>
               </a:rPr>
-              <a:t>apart, away</a:t>
+              <a:t>back, again</a:t>
             </a:r>
             <a:endParaRPr lang="en-US" sz="850" dirty="0"/>
           </a:p>
@@ -26866,46 +26590,7 @@
       </p:sp>
       <p:sp>
         <p:nvSpPr>
-          <p:cNvPr id="19" name="Text 17"/>
-          <p:cNvSpPr/>
-          <p:nvPr/>
-        </p:nvSpPr>
-        <p:spPr>
-          <a:xfrm>
-            <a:off x="2938272" y="2752344"/>
-            <a:ext cx="1828800" cy="182880"/>
-          </a:xfrm>
-          <a:prstGeom prst="rect">
-            <a:avLst/>
-          </a:prstGeom>
-          <a:noFill/>
-          <a:ln/>
-        </p:spPr>
-        <p:txBody>
-          <a:bodyPr wrap="square" lIns="0" tIns="0" rIns="0" bIns="0" rtlCol="0" anchor="t"/>
-          <a:lstStyle/>
-          <a:p>
-            <a:pPr algn="ctr" indent="0" marL="0">
-              <a:buNone/>
-            </a:pPr>
-            <a:r>
-              <a:rPr lang="en-US" sz="700" i="1" dirty="0">
-                <a:solidFill>
-                  <a:srgbClr val="94A3B8"/>
-                </a:solidFill>
-                <a:latin typeface="Calibri" pitchFamily="34" charset="0"/>
-                <a:ea typeface="Calibri" pitchFamily="34" charset="-122"/>
-                <a:cs typeface="Calibri" pitchFamily="34" charset="-120"/>
-              </a:rPr>
-              <a:t>dis → dif before 'f'</a:t>
-            </a:r>
-            <a:endParaRPr lang="en-US" sz="700" dirty="0"/>
-          </a:p>
-        </p:txBody>
-      </p:sp>
-      <p:sp>
-        <p:nvSpPr>
-          <p:cNvPr id="20" name="Shape 18"/>
+          <p:cNvPr id="19" name="Shape 17"/>
           <p:cNvSpPr/>
           <p:nvPr/>
         </p:nvSpPr>
@@ -26939,7 +26624,7 @@
       </p:sp>
       <p:sp>
         <p:nvSpPr>
-          <p:cNvPr id="21" name="Text 19"/>
+          <p:cNvPr id="20" name="Text 18"/>
           <p:cNvSpPr/>
           <p:nvPr/>
         </p:nvSpPr>
@@ -26978,7 +26663,7 @@
       </p:sp>
       <p:sp>
         <p:nvSpPr>
-          <p:cNvPr id="22" name="Text 20"/>
+          <p:cNvPr id="21" name="Text 19"/>
           <p:cNvSpPr/>
           <p:nvPr/>
         </p:nvSpPr>
@@ -27009,7 +26694,7 @@
                 <a:ea typeface="Calibri" pitchFamily="34" charset="-122"/>
                 <a:cs typeface="Calibri" pitchFamily="34" charset="-120"/>
               </a:rPr>
-              <a:t>carry, bring</a:t>
+              <a:t>to carry, bring</a:t>
             </a:r>
             <a:endParaRPr lang="en-US" sz="850" dirty="0"/>
           </a:p>
@@ -27017,7 +26702,7 @@
       </p:sp>
       <p:sp>
         <p:nvSpPr>
-          <p:cNvPr id="23" name="Shape 21"/>
+          <p:cNvPr id="22" name="Shape 20"/>
           <p:cNvSpPr/>
           <p:nvPr/>
         </p:nvSpPr>
@@ -27044,7 +26729,7 @@
       </p:sp>
       <p:sp>
         <p:nvSpPr>
-          <p:cNvPr id="24" name="Text 22"/>
+          <p:cNvPr id="23" name="Text 21"/>
           <p:cNvSpPr/>
           <p:nvPr/>
         </p:nvSpPr>
@@ -27083,7 +26768,7 @@
       </p:sp>
       <p:sp>
         <p:nvSpPr>
-          <p:cNvPr id="25" name="Shape 23"/>
+          <p:cNvPr id="24" name="Shape 22"/>
           <p:cNvSpPr/>
           <p:nvPr/>
         </p:nvSpPr>
@@ -27110,7 +26795,7 @@
       </p:sp>
       <p:sp>
         <p:nvSpPr>
-          <p:cNvPr id="26" name="Shape 24"/>
+          <p:cNvPr id="25" name="Shape 23"/>
           <p:cNvSpPr/>
           <p:nvPr/>
         </p:nvSpPr>
@@ -27137,7 +26822,7 @@
       </p:sp>
       <p:sp>
         <p:nvSpPr>
-          <p:cNvPr id="27" name="Text 25"/>
+          <p:cNvPr id="26" name="Text 24"/>
           <p:cNvSpPr/>
           <p:nvPr/>
         </p:nvSpPr>
@@ -27168,7 +26853,7 @@
                 <a:ea typeface="Trebuchet MS" pitchFamily="34" charset="-122"/>
                 <a:cs typeface="Trebuchet MS" pitchFamily="34" charset="-120"/>
               </a:rPr>
-              <a:t>dif</a:t>
+              <a:t>re</a:t>
             </a:r>
             <a:endParaRPr lang="en-US" sz="1400" dirty="0"/>
           </a:p>
@@ -27176,7 +26861,7 @@
       </p:sp>
       <p:sp>
         <p:nvSpPr>
-          <p:cNvPr id="28" name="Text 26"/>
+          <p:cNvPr id="27" name="Text 25"/>
           <p:cNvSpPr/>
           <p:nvPr/>
         </p:nvSpPr>
@@ -27215,7 +26900,7 @@
       </p:sp>
       <p:sp>
         <p:nvSpPr>
-          <p:cNvPr id="29" name="Shape 27"/>
+          <p:cNvPr id="28" name="Shape 26"/>
           <p:cNvSpPr/>
           <p:nvPr/>
         </p:nvSpPr>
@@ -27242,7 +26927,7 @@
       </p:sp>
       <p:sp>
         <p:nvSpPr>
-          <p:cNvPr id="30" name="Text 28"/>
+          <p:cNvPr id="29" name="Text 27"/>
           <p:cNvSpPr/>
           <p:nvPr/>
         </p:nvSpPr>
@@ -27281,7 +26966,7 @@
       </p:sp>
       <p:sp>
         <p:nvSpPr>
-          <p:cNvPr id="31" name="Shape 29"/>
+          <p:cNvPr id="30" name="Shape 28"/>
           <p:cNvSpPr/>
           <p:nvPr/>
         </p:nvSpPr>
@@ -27308,7 +26993,7 @@
       </p:sp>
       <p:sp>
         <p:nvSpPr>
-          <p:cNvPr id="32" name="Text 30"/>
+          <p:cNvPr id="31" name="Text 29"/>
           <p:cNvSpPr/>
           <p:nvPr/>
         </p:nvSpPr>
@@ -27347,7 +27032,7 @@
       </p:sp>
       <p:sp>
         <p:nvSpPr>
-          <p:cNvPr id="33" name="Shape 31"/>
+          <p:cNvPr id="32" name="Shape 30"/>
           <p:cNvSpPr/>
           <p:nvPr/>
         </p:nvSpPr>
@@ -27374,7 +27059,7 @@
       </p:sp>
       <p:sp>
         <p:nvSpPr>
-          <p:cNvPr id="34" name="Shape 32"/>
+          <p:cNvPr id="33" name="Shape 31"/>
           <p:cNvSpPr/>
           <p:nvPr/>
         </p:nvSpPr>
@@ -27401,7 +27086,7 @@
       </p:sp>
       <p:sp>
         <p:nvSpPr>
-          <p:cNvPr id="35" name="Text 33"/>
+          <p:cNvPr id="34" name="Text 32"/>
           <p:cNvSpPr/>
           <p:nvPr/>
         </p:nvSpPr>
@@ -27432,7 +27117,7 @@
                 <a:ea typeface="Trebuchet MS" pitchFamily="34" charset="-122"/>
                 <a:cs typeface="Trebuchet MS" pitchFamily="34" charset="-120"/>
               </a:rPr>
-              <a:t>d</a:t>
+              <a:t>r</a:t>
             </a:r>
             <a:endParaRPr lang="en-US" sz="900" dirty="0"/>
           </a:p>
@@ -27440,7 +27125,7 @@
       </p:sp>
       <p:sp>
         <p:nvSpPr>
-          <p:cNvPr id="36" name="Shape 34"/>
+          <p:cNvPr id="35" name="Shape 33"/>
           <p:cNvSpPr/>
           <p:nvPr/>
         </p:nvSpPr>
@@ -27467,7 +27152,7 @@
       </p:sp>
       <p:sp>
         <p:nvSpPr>
-          <p:cNvPr id="37" name="Text 35"/>
+          <p:cNvPr id="36" name="Text 34"/>
           <p:cNvSpPr/>
           <p:nvPr/>
         </p:nvSpPr>
@@ -27498,7 +27183,7 @@
                 <a:ea typeface="Trebuchet MS" pitchFamily="34" charset="-122"/>
                 <a:cs typeface="Trebuchet MS" pitchFamily="34" charset="-120"/>
               </a:rPr>
-              <a:t>i</a:t>
+              <a:t>e</a:t>
             </a:r>
             <a:endParaRPr lang="en-US" sz="900" dirty="0"/>
           </a:p>
@@ -27506,7 +27191,7 @@
       </p:sp>
       <p:sp>
         <p:nvSpPr>
-          <p:cNvPr id="38" name="Shape 36"/>
+          <p:cNvPr id="37" name="Shape 35"/>
           <p:cNvSpPr/>
           <p:nvPr/>
         </p:nvSpPr>
@@ -27533,7 +27218,7 @@
       </p:sp>
       <p:sp>
         <p:nvSpPr>
-          <p:cNvPr id="39" name="Text 37"/>
+          <p:cNvPr id="38" name="Text 36"/>
           <p:cNvSpPr/>
           <p:nvPr/>
         </p:nvSpPr>
@@ -27564,7 +27249,7 @@
                 <a:ea typeface="Trebuchet MS" pitchFamily="34" charset="-122"/>
                 <a:cs typeface="Trebuchet MS" pitchFamily="34" charset="-120"/>
               </a:rPr>
-              <a:t>ff</a:t>
+              <a:t>f</a:t>
             </a:r>
             <a:endParaRPr lang="en-US" sz="900" dirty="0"/>
           </a:p>
@@ -27572,7 +27257,7 @@
       </p:sp>
       <p:sp>
         <p:nvSpPr>
-          <p:cNvPr id="40" name="Shape 38"/>
+          <p:cNvPr id="39" name="Shape 37"/>
           <p:cNvSpPr/>
           <p:nvPr/>
         </p:nvSpPr>
@@ -27599,7 +27284,7 @@
       </p:sp>
       <p:sp>
         <p:nvSpPr>
-          <p:cNvPr id="41" name="Text 39"/>
+          <p:cNvPr id="40" name="Text 38"/>
           <p:cNvSpPr/>
           <p:nvPr/>
         </p:nvSpPr>
@@ -27922,7 +27607,7 @@
                 <a:ea typeface="Calibri" pitchFamily="34" charset="-122"/>
                 <a:cs typeface="Calibri" pitchFamily="34" charset="-120"/>
               </a:rPr>
-              <a:t>Word Labs  •  wordlabs.app  •  Root: 'fer' = carry, bear, bring</a:t>
+              <a:t>Word Labs  •  wordlabs.app  •  Root: 'fer' = to carry, bring, bear</a:t>
             </a:r>
             <a:endParaRPr lang="en-US" sz="800" dirty="0"/>
           </a:p>
@@ -28061,7 +27746,7 @@
                 <a:ea typeface="Trebuchet MS" pitchFamily="34" charset="-122"/>
                 <a:cs typeface="Trebuchet MS" pitchFamily="34" charset="-120"/>
               </a:rPr>
-              <a:t>refer</a:t>
+              <a:t>transfer</a:t>
             </a:r>
             <a:endParaRPr lang="en-US" sz="2800" dirty="0"/>
           </a:p>
@@ -28749,7 +28434,7 @@
                 <a:ea typeface="Calibri" pitchFamily="34" charset="-122"/>
                 <a:cs typeface="Calibri" pitchFamily="34" charset="-120"/>
               </a:rPr>
-              <a:t>Word Labs  •  wordlabs.app  •  Root: 'fer' = carry, bear, bring</a:t>
+              <a:t>Word Labs  •  wordlabs.app  •  Root: 'fer' = to carry, bring, bear</a:t>
             </a:r>
             <a:endParaRPr lang="en-US" sz="800" dirty="0"/>
           </a:p>
@@ -28888,7 +28573,7 @@
                 <a:ea typeface="Trebuchet MS" pitchFamily="34" charset="-122"/>
                 <a:cs typeface="Trebuchet MS" pitchFamily="34" charset="-120"/>
               </a:rPr>
-              <a:t>refer</a:t>
+              <a:t>transfer</a:t>
             </a:r>
             <a:endParaRPr lang="en-US" sz="2800" dirty="0"/>
           </a:p>
@@ -29027,7 +28712,7 @@
                 <a:ea typeface="Trebuchet MS" pitchFamily="34" charset="-122"/>
                 <a:cs typeface="Trebuchet MS" pitchFamily="34" charset="-120"/>
               </a:rPr>
-              <a:t>re</a:t>
+              <a:t>trans</a:t>
             </a:r>
             <a:endParaRPr lang="en-US" sz="1300" dirty="0"/>
           </a:p>
@@ -29066,7 +28751,7 @@
                 <a:ea typeface="Calibri" pitchFamily="34" charset="-122"/>
                 <a:cs typeface="Calibri" pitchFamily="34" charset="-120"/>
               </a:rPr>
-              <a:t>back, again</a:t>
+              <a:t>across, through</a:t>
             </a:r>
             <a:endParaRPr lang="en-US" sz="850" dirty="0"/>
           </a:p>
@@ -29178,7 +28863,7 @@
                 <a:ea typeface="Calibri" pitchFamily="34" charset="-122"/>
                 <a:cs typeface="Calibri" pitchFamily="34" charset="-120"/>
               </a:rPr>
-              <a:t>carry, bring</a:t>
+              <a:t>to carry, bring</a:t>
             </a:r>
             <a:endParaRPr lang="en-US" sz="850" dirty="0"/>
           </a:p>
@@ -29734,7 +29419,7 @@
                 <a:ea typeface="Calibri" pitchFamily="34" charset="-122"/>
                 <a:cs typeface="Calibri" pitchFamily="34" charset="-120"/>
               </a:rPr>
-              <a:t>Word Labs  •  wordlabs.app  •  Root: 'fer' = carry, bear, bring</a:t>
+              <a:t>Word Labs  •  wordlabs.app  •  Root: 'fer' = to carry, bring, bear</a:t>
             </a:r>
             <a:endParaRPr lang="en-US" sz="800" dirty="0"/>
           </a:p>
@@ -29873,7 +29558,7 @@
                 <a:ea typeface="Trebuchet MS" pitchFamily="34" charset="-122"/>
                 <a:cs typeface="Trebuchet MS" pitchFamily="34" charset="-120"/>
               </a:rPr>
-              <a:t>refer</a:t>
+              <a:t>transfer</a:t>
             </a:r>
             <a:endParaRPr lang="en-US" sz="2800" dirty="0"/>
           </a:p>
@@ -30012,7 +29697,7 @@
                 <a:ea typeface="Trebuchet MS" pitchFamily="34" charset="-122"/>
                 <a:cs typeface="Trebuchet MS" pitchFamily="34" charset="-120"/>
               </a:rPr>
-              <a:t>re</a:t>
+              <a:t>trans</a:t>
             </a:r>
             <a:endParaRPr lang="en-US" sz="1300" dirty="0"/>
           </a:p>
@@ -30051,7 +29736,7 @@
                 <a:ea typeface="Calibri" pitchFamily="34" charset="-122"/>
                 <a:cs typeface="Calibri" pitchFamily="34" charset="-120"/>
               </a:rPr>
-              <a:t>back, again</a:t>
+              <a:t>across, through</a:t>
             </a:r>
             <a:endParaRPr lang="en-US" sz="850" dirty="0"/>
           </a:p>
@@ -30163,7 +29848,7 @@
                 <a:ea typeface="Calibri" pitchFamily="34" charset="-122"/>
                 <a:cs typeface="Calibri" pitchFamily="34" charset="-120"/>
               </a:rPr>
-              <a:t>carry, bring</a:t>
+              <a:t>to carry, bring</a:t>
             </a:r>
             <a:endParaRPr lang="en-US" sz="850" dirty="0"/>
           </a:p>
@@ -30322,7 +30007,7 @@
                 <a:ea typeface="Trebuchet MS" pitchFamily="34" charset="-122"/>
                 <a:cs typeface="Trebuchet MS" pitchFamily="34" charset="-120"/>
               </a:rPr>
-              <a:t>re</a:t>
+              <a:t>trans</a:t>
             </a:r>
             <a:endParaRPr lang="en-US" sz="1400" dirty="0"/>
           </a:p>
@@ -30851,7 +30536,7 @@
                 <a:ea typeface="Calibri" pitchFamily="34" charset="-122"/>
                 <a:cs typeface="Calibri" pitchFamily="34" charset="-120"/>
               </a:rPr>
-              <a:t>Word Labs  •  wordlabs.app  •  Root: 'fer' = carry, bear, bring</a:t>
+              <a:t>Word Labs  •  wordlabs.app  •  Root: 'fer' = to carry, bring, bear</a:t>
             </a:r>
             <a:endParaRPr lang="en-US" sz="800" dirty="0"/>
           </a:p>
@@ -30990,7 +30675,7 @@
                 <a:ea typeface="Trebuchet MS" pitchFamily="34" charset="-122"/>
                 <a:cs typeface="Trebuchet MS" pitchFamily="34" charset="-120"/>
               </a:rPr>
-              <a:t>refer</a:t>
+              <a:t>transfer</a:t>
             </a:r>
             <a:endParaRPr lang="en-US" sz="2800" dirty="0"/>
           </a:p>
@@ -31129,7 +30814,7 @@
                 <a:ea typeface="Trebuchet MS" pitchFamily="34" charset="-122"/>
                 <a:cs typeface="Trebuchet MS" pitchFamily="34" charset="-120"/>
               </a:rPr>
-              <a:t>re</a:t>
+              <a:t>trans</a:t>
             </a:r>
             <a:endParaRPr lang="en-US" sz="1300" dirty="0"/>
           </a:p>
@@ -31168,7 +30853,7 @@
                 <a:ea typeface="Calibri" pitchFamily="34" charset="-122"/>
                 <a:cs typeface="Calibri" pitchFamily="34" charset="-120"/>
               </a:rPr>
-              <a:t>back, again</a:t>
+              <a:t>across, through</a:t>
             </a:r>
             <a:endParaRPr lang="en-US" sz="850" dirty="0"/>
           </a:p>
@@ -31280,7 +30965,7 @@
                 <a:ea typeface="Calibri" pitchFamily="34" charset="-122"/>
                 <a:cs typeface="Calibri" pitchFamily="34" charset="-120"/>
               </a:rPr>
-              <a:t>carry, bring</a:t>
+              <a:t>to carry, bring</a:t>
             </a:r>
             <a:endParaRPr lang="en-US" sz="850" dirty="0"/>
           </a:p>
@@ -31439,7 +31124,7 @@
                 <a:ea typeface="Trebuchet MS" pitchFamily="34" charset="-122"/>
                 <a:cs typeface="Trebuchet MS" pitchFamily="34" charset="-120"/>
               </a:rPr>
-              <a:t>re</a:t>
+              <a:t>trans</a:t>
             </a:r>
             <a:endParaRPr lang="en-US" sz="1400" dirty="0"/>
           </a:p>
@@ -31651,7 +31336,7 @@
         </p:nvSpPr>
         <p:spPr>
           <a:xfrm>
-            <a:off x="2670048" y="4169664"/>
+            <a:off x="2124837" y="4169664"/>
             <a:ext cx="685800" cy="475488"/>
           </a:xfrm>
           <a:prstGeom prst="rect">
@@ -31678,7 +31363,7 @@
         </p:nvSpPr>
         <p:spPr>
           <a:xfrm>
-            <a:off x="2670048" y="4169664"/>
+            <a:off x="2124837" y="4169664"/>
             <a:ext cx="685800" cy="475488"/>
           </a:xfrm>
           <a:prstGeom prst="rect">
@@ -31703,7 +31388,7 @@
                 <a:ea typeface="Trebuchet MS" pitchFamily="34" charset="-122"/>
                 <a:cs typeface="Trebuchet MS" pitchFamily="34" charset="-120"/>
               </a:rPr>
-              <a:t>r</a:t>
+              <a:t>t</a:t>
             </a:r>
             <a:endParaRPr lang="en-US" sz="900" dirty="0"/>
           </a:p>
@@ -31717,7 +31402,7 @@
         </p:nvSpPr>
         <p:spPr>
           <a:xfrm>
-            <a:off x="4123944" y="4169664"/>
+            <a:off x="3033522" y="4169664"/>
             <a:ext cx="685800" cy="475488"/>
           </a:xfrm>
           <a:prstGeom prst="rect">
@@ -31744,7 +31429,7 @@
         </p:nvSpPr>
         <p:spPr>
           <a:xfrm>
-            <a:off x="4123944" y="4169664"/>
+            <a:off x="3033522" y="4169664"/>
             <a:ext cx="685800" cy="475488"/>
           </a:xfrm>
           <a:prstGeom prst="rect">
@@ -31769,7 +31454,7 @@
                 <a:ea typeface="Trebuchet MS" pitchFamily="34" charset="-122"/>
                 <a:cs typeface="Trebuchet MS" pitchFamily="34" charset="-120"/>
               </a:rPr>
-              <a:t>e</a:t>
+              <a:t>r</a:t>
             </a:r>
             <a:endParaRPr lang="en-US" sz="900" dirty="0"/>
           </a:p>
@@ -31783,7 +31468,7 @@
         </p:nvSpPr>
         <p:spPr>
           <a:xfrm>
-            <a:off x="5577840" y="4169664"/>
+            <a:off x="3942207" y="4169664"/>
             <a:ext cx="685800" cy="475488"/>
           </a:xfrm>
           <a:prstGeom prst="rect">
@@ -31810,7 +31495,7 @@
         </p:nvSpPr>
         <p:spPr>
           <a:xfrm>
-            <a:off x="5577840" y="4169664"/>
+            <a:off x="3942207" y="4169664"/>
             <a:ext cx="685800" cy="475488"/>
           </a:xfrm>
           <a:prstGeom prst="rect">
@@ -31835,7 +31520,7 @@
                 <a:ea typeface="Trebuchet MS" pitchFamily="34" charset="-122"/>
                 <a:cs typeface="Trebuchet MS" pitchFamily="34" charset="-120"/>
               </a:rPr>
-              <a:t>f</a:t>
+              <a:t>a</a:t>
             </a:r>
             <a:endParaRPr lang="en-US" sz="900" dirty="0"/>
           </a:p>
@@ -31849,7 +31534,7 @@
         </p:nvSpPr>
         <p:spPr>
           <a:xfrm>
-            <a:off x="7031736" y="4169664"/>
+            <a:off x="4850892" y="4169664"/>
             <a:ext cx="685800" cy="475488"/>
           </a:xfrm>
           <a:prstGeom prst="rect">
@@ -31876,7 +31561,205 @@
         </p:nvSpPr>
         <p:spPr>
           <a:xfrm>
-            <a:off x="7031736" y="4169664"/>
+            <a:off x="4850892" y="4169664"/>
+            <a:ext cx="685800" cy="475488"/>
+          </a:xfrm>
+          <a:prstGeom prst="rect">
+            <a:avLst/>
+          </a:prstGeom>
+          <a:noFill/>
+          <a:ln/>
+        </p:spPr>
+        <p:txBody>
+          <a:bodyPr wrap="square" lIns="0" tIns="0" rIns="0" bIns="0" rtlCol="0" anchor="ctr"/>
+          <a:lstStyle/>
+          <a:p>
+            <a:pPr algn="ctr" indent="0" marL="0">
+              <a:buNone/>
+            </a:pPr>
+            <a:r>
+              <a:rPr lang="en-US" sz="900" b="1" dirty="0">
+                <a:solidFill>
+                  <a:srgbClr val="9D174D"/>
+                </a:solidFill>
+                <a:latin typeface="Trebuchet MS" pitchFamily="34" charset="0"/>
+                <a:ea typeface="Trebuchet MS" pitchFamily="34" charset="-122"/>
+                <a:cs typeface="Trebuchet MS" pitchFamily="34" charset="-120"/>
+              </a:rPr>
+              <a:t>n</a:t>
+            </a:r>
+            <a:endParaRPr lang="en-US" sz="900" dirty="0"/>
+          </a:p>
+        </p:txBody>
+      </p:sp>
+      <p:sp>
+        <p:nvSpPr>
+          <p:cNvPr id="41" name="Shape 39"/>
+          <p:cNvSpPr/>
+          <p:nvPr/>
+        </p:nvSpPr>
+        <p:spPr>
+          <a:xfrm>
+            <a:off x="5759577" y="4169664"/>
+            <a:ext cx="685800" cy="475488"/>
+          </a:xfrm>
+          <a:prstGeom prst="rect">
+            <a:avLst>
+              <a:gd name="adj" fmla="val 7692"/>
+            </a:avLst>
+          </a:prstGeom>
+          <a:solidFill>
+            <a:srgbClr val="FFFFFF"/>
+          </a:solidFill>
+          <a:ln w="12700">
+            <a:solidFill>
+              <a:srgbClr val="DB2777"/>
+            </a:solidFill>
+            <a:prstDash val="solid"/>
+          </a:ln>
+        </p:spPr>
+      </p:sp>
+      <p:sp>
+        <p:nvSpPr>
+          <p:cNvPr id="42" name="Text 40"/>
+          <p:cNvSpPr/>
+          <p:nvPr/>
+        </p:nvSpPr>
+        <p:spPr>
+          <a:xfrm>
+            <a:off x="5759577" y="4169664"/>
+            <a:ext cx="685800" cy="475488"/>
+          </a:xfrm>
+          <a:prstGeom prst="rect">
+            <a:avLst/>
+          </a:prstGeom>
+          <a:noFill/>
+          <a:ln/>
+        </p:spPr>
+        <p:txBody>
+          <a:bodyPr wrap="square" lIns="0" tIns="0" rIns="0" bIns="0" rtlCol="0" anchor="ctr"/>
+          <a:lstStyle/>
+          <a:p>
+            <a:pPr algn="ctr" indent="0" marL="0">
+              <a:buNone/>
+            </a:pPr>
+            <a:r>
+              <a:rPr lang="en-US" sz="900" b="1" dirty="0">
+                <a:solidFill>
+                  <a:srgbClr val="9D174D"/>
+                </a:solidFill>
+                <a:latin typeface="Trebuchet MS" pitchFamily="34" charset="0"/>
+                <a:ea typeface="Trebuchet MS" pitchFamily="34" charset="-122"/>
+                <a:cs typeface="Trebuchet MS" pitchFamily="34" charset="-120"/>
+              </a:rPr>
+              <a:t>s</a:t>
+            </a:r>
+            <a:endParaRPr lang="en-US" sz="900" dirty="0"/>
+          </a:p>
+        </p:txBody>
+      </p:sp>
+      <p:sp>
+        <p:nvSpPr>
+          <p:cNvPr id="43" name="Shape 41"/>
+          <p:cNvSpPr/>
+          <p:nvPr/>
+        </p:nvSpPr>
+        <p:spPr>
+          <a:xfrm>
+            <a:off x="6668262" y="4169664"/>
+            <a:ext cx="685800" cy="475488"/>
+          </a:xfrm>
+          <a:prstGeom prst="rect">
+            <a:avLst>
+              <a:gd name="adj" fmla="val 7692"/>
+            </a:avLst>
+          </a:prstGeom>
+          <a:solidFill>
+            <a:srgbClr val="FFFFFF"/>
+          </a:solidFill>
+          <a:ln w="12700">
+            <a:solidFill>
+              <a:srgbClr val="DB2777"/>
+            </a:solidFill>
+            <a:prstDash val="solid"/>
+          </a:ln>
+        </p:spPr>
+      </p:sp>
+      <p:sp>
+        <p:nvSpPr>
+          <p:cNvPr id="44" name="Text 42"/>
+          <p:cNvSpPr/>
+          <p:nvPr/>
+        </p:nvSpPr>
+        <p:spPr>
+          <a:xfrm>
+            <a:off x="6668262" y="4169664"/>
+            <a:ext cx="685800" cy="475488"/>
+          </a:xfrm>
+          <a:prstGeom prst="rect">
+            <a:avLst/>
+          </a:prstGeom>
+          <a:noFill/>
+          <a:ln/>
+        </p:spPr>
+        <p:txBody>
+          <a:bodyPr wrap="square" lIns="0" tIns="0" rIns="0" bIns="0" rtlCol="0" anchor="ctr"/>
+          <a:lstStyle/>
+          <a:p>
+            <a:pPr algn="ctr" indent="0" marL="0">
+              <a:buNone/>
+            </a:pPr>
+            <a:r>
+              <a:rPr lang="en-US" sz="900" b="1" dirty="0">
+                <a:solidFill>
+                  <a:srgbClr val="9D174D"/>
+                </a:solidFill>
+                <a:latin typeface="Trebuchet MS" pitchFamily="34" charset="0"/>
+                <a:ea typeface="Trebuchet MS" pitchFamily="34" charset="-122"/>
+                <a:cs typeface="Trebuchet MS" pitchFamily="34" charset="-120"/>
+              </a:rPr>
+              <a:t>f</a:t>
+            </a:r>
+            <a:endParaRPr lang="en-US" sz="900" dirty="0"/>
+          </a:p>
+        </p:txBody>
+      </p:sp>
+      <p:sp>
+        <p:nvSpPr>
+          <p:cNvPr id="45" name="Shape 43"/>
+          <p:cNvSpPr/>
+          <p:nvPr/>
+        </p:nvSpPr>
+        <p:spPr>
+          <a:xfrm>
+            <a:off x="7576947" y="4169664"/>
+            <a:ext cx="685800" cy="475488"/>
+          </a:xfrm>
+          <a:prstGeom prst="rect">
+            <a:avLst>
+              <a:gd name="adj" fmla="val 7692"/>
+            </a:avLst>
+          </a:prstGeom>
+          <a:solidFill>
+            <a:srgbClr val="FFFFFF"/>
+          </a:solidFill>
+          <a:ln w="12700">
+            <a:solidFill>
+              <a:srgbClr val="DB2777"/>
+            </a:solidFill>
+            <a:prstDash val="solid"/>
+          </a:ln>
+        </p:spPr>
+      </p:sp>
+      <p:sp>
+        <p:nvSpPr>
+          <p:cNvPr id="46" name="Text 44"/>
+          <p:cNvSpPr/>
+          <p:nvPr/>
+        </p:nvSpPr>
+        <p:spPr>
+          <a:xfrm>
+            <a:off x="7576947" y="4169664"/>
             <a:ext cx="685800" cy="475488"/>
           </a:xfrm>
           <a:prstGeom prst="rect">
@@ -32193,7 +32076,7 @@
                 <a:ea typeface="Calibri" pitchFamily="34" charset="-122"/>
                 <a:cs typeface="Calibri" pitchFamily="34" charset="-120"/>
               </a:rPr>
-              <a:t>Word Labs  •  wordlabs.app  •  Root: 'fer' = carry, bear, bring</a:t>
+              <a:t>Word Labs  •  wordlabs.app  •  Root: 'fer' = to carry, bring, bear</a:t>
             </a:r>
             <a:endParaRPr lang="en-US" sz="800" dirty="0"/>
           </a:p>
@@ -33362,7 +33245,7 @@
                 <a:ea typeface="Calibri" pitchFamily="34" charset="-122"/>
                 <a:cs typeface="Calibri" pitchFamily="34" charset="-120"/>
               </a:rPr>
-              <a:t>Word Labs  •  wordlabs.app  •  Root: 'fer' = carry, bear, bring</a:t>
+              <a:t>Word Labs  •  wordlabs.app  •  Root: 'fer' = to carry, bring, bear</a:t>
             </a:r>
             <a:endParaRPr lang="en-US" sz="800" dirty="0"/>
           </a:p>
@@ -34161,7 +34044,7 @@
                 <a:ea typeface="Trebuchet MS" pitchFamily="34" charset="-122"/>
                 <a:cs typeface="Trebuchet MS" pitchFamily="34" charset="-120"/>
               </a:rPr>
-              <a:t>dif-</a:t>
+              <a:t>in-</a:t>
             </a:r>
             <a:endParaRPr lang="en-US" sz="1300" dirty="0"/>
           </a:p>
@@ -34250,7 +34133,7 @@
                 <a:ea typeface="Trebuchet MS" pitchFamily="34" charset="-122"/>
                 <a:cs typeface="Trebuchet MS" pitchFamily="34" charset="-120"/>
               </a:rPr>
-              <a:t>-ed</a:t>
+              <a:t>-ing</a:t>
             </a:r>
             <a:endParaRPr lang="en-US" sz="1300" dirty="0"/>
           </a:p>
@@ -34314,7 +34197,7 @@
                 <a:ea typeface="Trebuchet MS" pitchFamily="34" charset="-122"/>
                 <a:cs typeface="Trebuchet MS" pitchFamily="34" charset="-120"/>
               </a:rPr>
-              <a:t>pre-</a:t>
+              <a:t>of-</a:t>
             </a:r>
             <a:endParaRPr lang="en-US" sz="1300" dirty="0"/>
           </a:p>
@@ -34403,7 +34286,7 @@
                 <a:ea typeface="Trebuchet MS" pitchFamily="34" charset="-122"/>
                 <a:cs typeface="Trebuchet MS" pitchFamily="34" charset="-120"/>
               </a:rPr>
-              <a:t>-ing</a:t>
+              <a:t>-ed</a:t>
             </a:r>
             <a:endParaRPr lang="en-US" sz="1300" dirty="0"/>
           </a:p>
@@ -34706,7 +34589,7 @@
                 <a:ea typeface="Trebuchet MS" pitchFamily="34" charset="-122"/>
                 <a:cs typeface="Trebuchet MS" pitchFamily="34" charset="-120"/>
               </a:rPr>
-              <a:t>differ</a:t>
+              <a:t>infer</a:t>
             </a:r>
             <a:endParaRPr lang="en-US" sz="1200" dirty="0"/>
           </a:p>
@@ -34772,7 +34655,7 @@
                 <a:ea typeface="Trebuchet MS" pitchFamily="34" charset="-122"/>
                 <a:cs typeface="Trebuchet MS" pitchFamily="34" charset="-120"/>
               </a:rPr>
-              <a:t>prefer</a:t>
+              <a:t>offer</a:t>
             </a:r>
             <a:endParaRPr lang="en-US" sz="1200" dirty="0"/>
           </a:p>
@@ -34838,7 +34721,7 @@
                 <a:ea typeface="Trebuchet MS" pitchFamily="34" charset="-122"/>
                 <a:cs typeface="Trebuchet MS" pitchFamily="34" charset="-120"/>
               </a:rPr>
-              <a:t>infer</a:t>
+              <a:t>prefer</a:t>
             </a:r>
             <a:endParaRPr lang="en-US" sz="1200" dirty="0"/>
           </a:p>
@@ -34904,7 +34787,7 @@
                 <a:ea typeface="Trebuchet MS" pitchFamily="34" charset="-122"/>
                 <a:cs typeface="Trebuchet MS" pitchFamily="34" charset="-120"/>
               </a:rPr>
-              <a:t>offer</a:t>
+              <a:t>different</a:t>
             </a:r>
             <a:endParaRPr lang="en-US" sz="1200" dirty="0"/>
           </a:p>
@@ -35262,7 +35145,7 @@
                 <a:ea typeface="Calibri" pitchFamily="34" charset="-122"/>
                 <a:cs typeface="Calibri" pitchFamily="34" charset="-120"/>
               </a:rPr>
-              <a:t>Word Labs  •  wordlabs.app  •  Root: 'fer' = carry, bear, bring</a:t>
+              <a:t>Word Labs  •  wordlabs.app  •  Root: 'fer' = to carry, bring, bear</a:t>
             </a:r>
             <a:endParaRPr lang="en-US" sz="800" dirty="0"/>
           </a:p>
@@ -35426,7 +35309,7 @@
                 <a:ea typeface="Calibri" pitchFamily="34" charset="-122"/>
                 <a:cs typeface="Calibri" pitchFamily="34" charset="-120"/>
               </a:rPr>
-              <a:t>The core part of a word carrying its basic meaning. For example, 'fer' means 'carry, bear, bring'.</a:t>
+              <a:t>The core part of a word carrying its basic meaning. For example, 'fer' means 'to carry, bring, bear'.</a:t>
             </a:r>
             <a:endParaRPr lang="en-US" sz="1350" dirty="0"/>
           </a:p>
@@ -36046,7 +35929,7 @@
                 <a:ea typeface="Calibri" pitchFamily="34" charset="-122"/>
                 <a:cs typeface="Calibri" pitchFamily="34" charset="-120"/>
               </a:rPr>
-              <a:t>Word Labs  •  wordlabs.app  •  Root: 'fer' = carry, bear, bring</a:t>
+              <a:t>Word Labs  •  wordlabs.app  •  Root: 'fer' = to carry, bring, bear</a:t>
             </a:r>
             <a:endParaRPr lang="en-US" sz="800" dirty="0"/>
           </a:p>
@@ -36158,7 +36041,7 @@
                 <a:ea typeface="Calibri" pitchFamily="34" charset="-122"/>
                 <a:cs typeface="Calibri" pitchFamily="34" charset="-120"/>
               </a:rPr>
-              <a:t>1.  The root 'fer' comes from Latin and means to carry or bring.</a:t>
+              <a:t>1.  The root 'fer' originally comes from Greek and means to speak.</a:t>
             </a:r>
             <a:endParaRPr lang="en-US" sz="1300" dirty="0"/>
           </a:p>
@@ -36181,11 +36064,11 @@
             </a:avLst>
           </a:prstGeom>
           <a:solidFill>
-            <a:srgbClr val="DCFCE7"/>
-          </a:solidFill>
-          <a:ln w="12700">
-            <a:solidFill>
-              <a:srgbClr val="16A34A"/>
+            <a:srgbClr val="FEE2E2"/>
+          </a:solidFill>
+          <a:ln w="12700">
+            <a:solidFill>
+              <a:srgbClr val="DC2626"/>
             </a:solidFill>
             <a:prstDash val="solid"/>
           </a:ln>
@@ -36218,13 +36101,13 @@
             <a:r>
               <a:rPr lang="en-US" sz="1100" b="1" dirty="0">
                 <a:solidFill>
-                  <a:srgbClr val="16A34A"/>
+                  <a:srgbClr val="DC2626"/>
                 </a:solidFill>
                 <a:latin typeface="Trebuchet MS" pitchFamily="34" charset="0"/>
                 <a:ea typeface="Trebuchet MS" pitchFamily="34" charset="-122"/>
                 <a:cs typeface="Trebuchet MS" pitchFamily="34" charset="-120"/>
               </a:rPr>
-              <a:t>TRUE</a:t>
+              <a:t>FALSE</a:t>
             </a:r>
             <a:endParaRPr lang="en-US" sz="1100" dirty="0"/>
           </a:p>
@@ -36297,7 +36180,7 @@
                 <a:ea typeface="Calibri" pitchFamily="34" charset="-122"/>
                 <a:cs typeface="Calibri" pitchFamily="34" charset="-120"/>
               </a:rPr>
-              <a:t>2.  The word 'prefer' means to like two things equally.</a:t>
+              <a:t>2.  In the word 'conference', the root 'fer' helps carry the idea of bringing people together.</a:t>
             </a:r>
             <a:endParaRPr lang="en-US" sz="1300" dirty="0"/>
           </a:p>
@@ -36320,11 +36203,11 @@
             </a:avLst>
           </a:prstGeom>
           <a:solidFill>
-            <a:srgbClr val="FEE2E2"/>
-          </a:solidFill>
-          <a:ln w="12700">
-            <a:solidFill>
-              <a:srgbClr val="DC2626"/>
+            <a:srgbClr val="DCFCE7"/>
+          </a:solidFill>
+          <a:ln w="12700">
+            <a:solidFill>
+              <a:srgbClr val="16A34A"/>
             </a:solidFill>
             <a:prstDash val="solid"/>
           </a:ln>
@@ -36357,13 +36240,13 @@
             <a:r>
               <a:rPr lang="en-US" sz="1100" b="1" dirty="0">
                 <a:solidFill>
-                  <a:srgbClr val="DC2626"/>
+                  <a:srgbClr val="16A34A"/>
                 </a:solidFill>
                 <a:latin typeface="Trebuchet MS" pitchFamily="34" charset="0"/>
                 <a:ea typeface="Trebuchet MS" pitchFamily="34" charset="-122"/>
                 <a:cs typeface="Trebuchet MS" pitchFamily="34" charset="-120"/>
               </a:rPr>
-              <a:t>FALSE</a:t>
+              <a:t>TRUE</a:t>
             </a:r>
             <a:endParaRPr lang="en-US" sz="1100" dirty="0"/>
           </a:p>
@@ -36436,7 +36319,7 @@
                 <a:ea typeface="Calibri" pitchFamily="34" charset="-122"/>
                 <a:cs typeface="Calibri" pitchFamily="34" charset="-120"/>
               </a:rPr>
-              <a:t>3.  The word 'transfer' contains the root 'fer', meaning to carry across.</a:t>
+              <a:t>3.  The root 'fer' comes from a Latin word meaning to carry or bring.</a:t>
             </a:r>
             <a:endParaRPr lang="en-US" sz="1300" dirty="0"/>
           </a:p>
@@ -36575,7 +36458,7 @@
                 <a:ea typeface="Calibri" pitchFamily="34" charset="-122"/>
                 <a:cs typeface="Calibri" pitchFamily="34" charset="-120"/>
               </a:rPr>
-              <a:t>4.  The word 'infer' uses 'fer' to mean working out something by carrying ideas together.</a:t>
+              <a:t>4.  The word 'transfer' means to keep something in the same place.</a:t>
             </a:r>
             <a:endParaRPr lang="en-US" sz="1300" dirty="0"/>
           </a:p>
@@ -36598,11 +36481,11 @@
             </a:avLst>
           </a:prstGeom>
           <a:solidFill>
-            <a:srgbClr val="DCFCE7"/>
-          </a:solidFill>
-          <a:ln w="12700">
-            <a:solidFill>
-              <a:srgbClr val="16A34A"/>
+            <a:srgbClr val="FEE2E2"/>
+          </a:solidFill>
+          <a:ln w="12700">
+            <a:solidFill>
+              <a:srgbClr val="DC2626"/>
             </a:solidFill>
             <a:prstDash val="solid"/>
           </a:ln>
@@ -36635,13 +36518,13 @@
             <a:r>
               <a:rPr lang="en-US" sz="1100" b="1" dirty="0">
                 <a:solidFill>
-                  <a:srgbClr val="16A34A"/>
+                  <a:srgbClr val="DC2626"/>
                 </a:solidFill>
                 <a:latin typeface="Trebuchet MS" pitchFamily="34" charset="0"/>
                 <a:ea typeface="Trebuchet MS" pitchFamily="34" charset="-122"/>
                 <a:cs typeface="Trebuchet MS" pitchFamily="34" charset="-120"/>
               </a:rPr>
-              <a:t>TRUE</a:t>
+              <a:t>FALSE</a:t>
             </a:r>
             <a:endParaRPr lang="en-US" sz="1100" dirty="0"/>
           </a:p>
@@ -36714,7 +36597,7 @@
                 <a:ea typeface="Calibri" pitchFamily="34" charset="-122"/>
                 <a:cs typeface="Calibri" pitchFamily="34" charset="-120"/>
               </a:rPr>
-              <a:t>5.  The root 'fer' originally comes from Greek.</a:t>
+              <a:t>5.  The word 'prefer' contains the root 'fer', meaning to carry or bring.</a:t>
             </a:r>
             <a:endParaRPr lang="en-US" sz="1300" dirty="0"/>
           </a:p>
@@ -36737,11 +36620,11 @@
             </a:avLst>
           </a:prstGeom>
           <a:solidFill>
-            <a:srgbClr val="FEE2E2"/>
-          </a:solidFill>
-          <a:ln w="12700">
-            <a:solidFill>
-              <a:srgbClr val="DC2626"/>
+            <a:srgbClr val="DCFCE7"/>
+          </a:solidFill>
+          <a:ln w="12700">
+            <a:solidFill>
+              <a:srgbClr val="16A34A"/>
             </a:solidFill>
             <a:prstDash val="solid"/>
           </a:ln>
@@ -36774,13 +36657,13 @@
             <a:r>
               <a:rPr lang="en-US" sz="1100" b="1" dirty="0">
                 <a:solidFill>
-                  <a:srgbClr val="DC2626"/>
+                  <a:srgbClr val="16A34A"/>
                 </a:solidFill>
                 <a:latin typeface="Trebuchet MS" pitchFamily="34" charset="0"/>
                 <a:ea typeface="Trebuchet MS" pitchFamily="34" charset="-122"/>
                 <a:cs typeface="Trebuchet MS" pitchFamily="34" charset="-120"/>
               </a:rPr>
-              <a:t>FALSE</a:t>
+              <a:t>TRUE</a:t>
             </a:r>
             <a:endParaRPr lang="en-US" sz="1100" dirty="0"/>
           </a:p>
@@ -37072,7 +36955,7 @@
                 <a:ea typeface="Calibri" pitchFamily="34" charset="-122"/>
                 <a:cs typeface="Calibri" pitchFamily="34" charset="-120"/>
               </a:rPr>
-              <a:t>Word Labs  •  wordlabs.app  •  Root: 'fer' = carry, bear, bring</a:t>
+              <a:t>Word Labs  •  wordlabs.app  •  Root: 'fer' = to carry, bring, bear</a:t>
             </a:r>
             <a:endParaRPr lang="en-US" sz="800" dirty="0"/>
           </a:p>
@@ -37209,7 +37092,7 @@
                 <a:ea typeface="Trebuchet MS" pitchFamily="34" charset="-122"/>
                 <a:cs typeface="Trebuchet MS" pitchFamily="34" charset="-120"/>
               </a:rPr>
-              <a:t>carry, bear, bring</a:t>
+              <a:t>to carry, bring, bear</a:t>
             </a:r>
             <a:endParaRPr lang="en-US" sz="2000" dirty="0"/>
           </a:p>
@@ -37551,7 +37434,7 @@
                 <a:ea typeface="Trebuchet MS" pitchFamily="34" charset="-122"/>
                 <a:cs typeface="Trebuchet MS" pitchFamily="34" charset="-120"/>
               </a:rPr>
-              <a:t>differ</a:t>
+              <a:t>infer</a:t>
             </a:r>
             <a:endParaRPr lang="en-US" sz="1300" dirty="0"/>
           </a:p>
@@ -37617,7 +37500,7 @@
                 <a:ea typeface="Trebuchet MS" pitchFamily="34" charset="-122"/>
                 <a:cs typeface="Trebuchet MS" pitchFamily="34" charset="-120"/>
               </a:rPr>
-              <a:t>prefer</a:t>
+              <a:t>offer</a:t>
             </a:r>
             <a:endParaRPr lang="en-US" sz="1300" dirty="0"/>
           </a:p>
@@ -37683,7 +37566,7 @@
                 <a:ea typeface="Trebuchet MS" pitchFamily="34" charset="-122"/>
                 <a:cs typeface="Trebuchet MS" pitchFamily="34" charset="-120"/>
               </a:rPr>
-              <a:t>infer</a:t>
+              <a:t>prefer</a:t>
             </a:r>
             <a:endParaRPr lang="en-US" sz="1300" dirty="0"/>
           </a:p>
@@ -37749,7 +37632,7 @@
                 <a:ea typeface="Trebuchet MS" pitchFamily="34" charset="-122"/>
                 <a:cs typeface="Trebuchet MS" pitchFamily="34" charset="-120"/>
               </a:rPr>
-              <a:t>offer</a:t>
+              <a:t>different</a:t>
             </a:r>
             <a:endParaRPr lang="en-US" sz="1300" dirty="0"/>
           </a:p>
@@ -38041,7 +37924,7 @@
                 <a:ea typeface="Calibri" pitchFamily="34" charset="-122"/>
                 <a:cs typeface="Calibri" pitchFamily="34" charset="-120"/>
               </a:rPr>
-              <a:t>Word Labs  •  wordlabs.app  •  Root: 'fer' = carry, bear, bring</a:t>
+              <a:t>Word Labs  •  wordlabs.app  •  Root: 'fer' = to carry, bring, bear</a:t>
             </a:r>
             <a:endParaRPr lang="en-US" sz="800" dirty="0"/>
           </a:p>
@@ -38840,7 +38723,7 @@
                 <a:ea typeface="Trebuchet MS" pitchFamily="34" charset="-122"/>
                 <a:cs typeface="Trebuchet MS" pitchFamily="34" charset="-120"/>
               </a:rPr>
-              <a:t>dif-</a:t>
+              <a:t>in-</a:t>
             </a:r>
             <a:endParaRPr lang="en-US" sz="1300" dirty="0"/>
           </a:p>
@@ -38929,7 +38812,7 @@
                 <a:ea typeface="Trebuchet MS" pitchFamily="34" charset="-122"/>
                 <a:cs typeface="Trebuchet MS" pitchFamily="34" charset="-120"/>
               </a:rPr>
-              <a:t>-ed</a:t>
+              <a:t>-ing</a:t>
             </a:r>
             <a:endParaRPr lang="en-US" sz="1300" dirty="0"/>
           </a:p>
@@ -38993,7 +38876,7 @@
                 <a:ea typeface="Trebuchet MS" pitchFamily="34" charset="-122"/>
                 <a:cs typeface="Trebuchet MS" pitchFamily="34" charset="-120"/>
               </a:rPr>
-              <a:t>pre-</a:t>
+              <a:t>of-</a:t>
             </a:r>
             <a:endParaRPr lang="en-US" sz="1300" dirty="0"/>
           </a:p>
@@ -39082,7 +38965,7 @@
                 <a:ea typeface="Trebuchet MS" pitchFamily="34" charset="-122"/>
                 <a:cs typeface="Trebuchet MS" pitchFamily="34" charset="-120"/>
               </a:rPr>
-              <a:t>-ing</a:t>
+              <a:t>-ed</a:t>
             </a:r>
             <a:endParaRPr lang="en-US" sz="1300" dirty="0"/>
           </a:p>
@@ -39815,7 +39698,7 @@
                 <a:ea typeface="Calibri" pitchFamily="34" charset="-122"/>
                 <a:cs typeface="Calibri" pitchFamily="34" charset="-120"/>
               </a:rPr>
-              <a:t>Word Labs  •  wordlabs.app  •  Root: 'fer' = carry, bear, bring</a:t>
+              <a:t>Word Labs  •  wordlabs.app  •  Root: 'fer' = to carry, bring, bear</a:t>
             </a:r>
             <a:endParaRPr lang="en-US" sz="800" dirty="0"/>
           </a:p>
@@ -39993,7 +39876,7 @@
                 <a:ea typeface="Calibri" pitchFamily="34" charset="-122"/>
                 <a:cs typeface="Calibri" pitchFamily="34" charset="-120"/>
               </a:rPr>
-              <a:t>To move something from one place to another, like transferring money to a different bank account.</a:t>
+              <a:t>To move something from one place to another, like transferring money to a friend.</a:t>
             </a:r>
             <a:endParaRPr lang="en-US" sz="1200" dirty="0"/>
           </a:p>
@@ -40132,7 +40015,7 @@
                 <a:ea typeface="Calibri" pitchFamily="34" charset="-122"/>
                 <a:cs typeface="Calibri" pitchFamily="34" charset="-120"/>
               </a:rPr>
-              <a:t>To be unlike something else; when two things are not the same.</a:t>
+              <a:t>To figure something out from clues, even if it isn't directly stated.</a:t>
             </a:r>
             <a:endParaRPr lang="en-US" sz="1200" dirty="0"/>
           </a:p>
@@ -40271,7 +40154,7 @@
                 <a:ea typeface="Calibri" pitchFamily="34" charset="-122"/>
                 <a:cs typeface="Calibri" pitchFamily="34" charset="-120"/>
               </a:rPr>
-              <a:t>A large meeting where people come together to talk and share ideas.</a:t>
+              <a:t>A meeting where people come together to talk and share ideas.</a:t>
             </a:r>
             <a:endParaRPr lang="en-US" sz="1200" dirty="0"/>
           </a:p>
@@ -40344,7 +40227,7 @@
                 <a:ea typeface="Trebuchet MS" pitchFamily="34" charset="-122"/>
                 <a:cs typeface="Trebuchet MS" pitchFamily="34" charset="-120"/>
               </a:rPr>
-              <a:t>differ</a:t>
+              <a:t>infer</a:t>
             </a:r>
             <a:endParaRPr lang="en-US" sz="1200" dirty="0"/>
           </a:p>
@@ -40410,7 +40293,7 @@
                 <a:ea typeface="Calibri" pitchFamily="34" charset="-122"/>
                 <a:cs typeface="Calibri" pitchFamily="34" charset="-120"/>
               </a:rPr>
-              <a:t>To like one thing more than another, like preferring chocolate over vanilla.</a:t>
+              <a:t>To give or present something to someone for them to take or accept.</a:t>
             </a:r>
             <a:endParaRPr lang="en-US" sz="1200" dirty="0"/>
           </a:p>
@@ -40483,7 +40366,7 @@
                 <a:ea typeface="Trebuchet MS" pitchFamily="34" charset="-122"/>
                 <a:cs typeface="Trebuchet MS" pitchFamily="34" charset="-120"/>
               </a:rPr>
-              <a:t>prefer</a:t>
+              <a:t>offer</a:t>
             </a:r>
             <a:endParaRPr lang="en-US" sz="1200" dirty="0"/>
           </a:p>
@@ -40549,7 +40432,7 @@
                 <a:ea typeface="Calibri" pitchFamily="34" charset="-122"/>
                 <a:cs typeface="Calibri" pitchFamily="34" charset="-120"/>
               </a:rPr>
-              <a:t>To present something to someone, like offering a friend a piece of your lunch.</a:t>
+              <a:t>Not the same as something else; having qualities that set it apart.</a:t>
             </a:r>
             <a:endParaRPr lang="en-US" sz="1200" dirty="0"/>
           </a:p>
@@ -40622,7 +40505,7 @@
                 <a:ea typeface="Trebuchet MS" pitchFamily="34" charset="-122"/>
                 <a:cs typeface="Trebuchet MS" pitchFamily="34" charset="-120"/>
               </a:rPr>
-              <a:t>infer</a:t>
+              <a:t>prefer</a:t>
             </a:r>
             <a:endParaRPr lang="en-US" sz="1200" dirty="0"/>
           </a:p>
@@ -40688,7 +40571,7 @@
                 <a:ea typeface="Calibri" pitchFamily="34" charset="-122"/>
                 <a:cs typeface="Calibri" pitchFamily="34" charset="-120"/>
               </a:rPr>
-              <a:t>To work out something that isn't directly said, using clues you already have.</a:t>
+              <a:t>To like one thing more than another thing.</a:t>
             </a:r>
             <a:endParaRPr lang="en-US" sz="1200" dirty="0"/>
           </a:p>
@@ -40761,7 +40644,7 @@
                 <a:ea typeface="Trebuchet MS" pitchFamily="34" charset="-122"/>
                 <a:cs typeface="Trebuchet MS" pitchFamily="34" charset="-120"/>
               </a:rPr>
-              <a:t>offer</a:t>
+              <a:t>different</a:t>
             </a:r>
             <a:endParaRPr lang="en-US" sz="1200" dirty="0"/>
           </a:p>
@@ -41119,7 +41002,7 @@
                 <a:ea typeface="Calibri" pitchFamily="34" charset="-122"/>
                 <a:cs typeface="Calibri" pitchFamily="34" charset="-120"/>
               </a:rPr>
-              <a:t>Word Labs  •  wordlabs.app  •  Root: 'fer' = carry, bear, bring</a:t>
+              <a:t>Word Labs  •  wordlabs.app  •  Root: 'fer' = to carry, bring, bear</a:t>
             </a:r>
             <a:endParaRPr lang="en-US" sz="800" dirty="0"/>
           </a:p>
@@ -41322,7 +41205,7 @@
                 <a:ea typeface="Calibri" pitchFamily="34" charset="-122"/>
                 <a:cs typeface="Calibri" pitchFamily="34" charset="-120"/>
               </a:rPr>
-              <a:t>The teacher asked us to refer to page twelve in our textbooks for the answers.</a:t>
+              <a:t>The teacher asked us to refer to our textbooks when we needed help with the questions.</a:t>
             </a:r>
             <a:endParaRPr lang="en-US" sz="1500" dirty="0"/>
           </a:p>
@@ -41486,7 +41369,7 @@
                 <a:ea typeface="Calibri" pitchFamily="34" charset="-122"/>
                 <a:cs typeface="Calibri" pitchFamily="34" charset="-120"/>
               </a:rPr>
-              <a:t>Scientists infer that the dinosaurs disappeared after a massive asteroid hit Earth.</a:t>
+              <a:t>We had to transfer all of our work from our rough drafts into our good copies.</a:t>
             </a:r>
             <a:endParaRPr lang="en-US" sz="1500" dirty="0"/>
           </a:p>
@@ -41650,7 +41533,7 @@
                 <a:ea typeface="Calibri" pitchFamily="34" charset="-122"/>
                 <a:cs typeface="Calibri" pitchFamily="34" charset="-120"/>
               </a:rPr>
-              <a:t>We need to transfer all the books from the old classroom to the new one.</a:t>
+              <a:t>I prefer reading adventure stories over watching television on a rainy afternoon.</a:t>
             </a:r>
             <a:endParaRPr lang="en-US" sz="1500" dirty="0"/>
           </a:p>

--- a/output/wordlabs-fer-3day.pptx
+++ b/output/wordlabs-fer-3day.pptx
@@ -4240,7 +4240,7 @@
                 <a:ea typeface="Calibri" pitchFamily="34" charset="-122"/>
                 <a:cs typeface="Calibri" pitchFamily="34" charset="-120"/>
               </a:rPr>
-              <a:t>"to carry, bring, bear"</a:t>
+              <a:t>"carry; bring"</a:t>
             </a:r>
             <a:endParaRPr lang="en-US" sz="2200" dirty="0"/>
           </a:p>
@@ -4279,7 +4279,7 @@
                 <a:ea typeface="Calibri" pitchFamily="34" charset="-122"/>
                 <a:cs typeface="Calibri" pitchFamily="34" charset="-120"/>
               </a:rPr>
-              <a:t>Origin: Latin: ferre</a:t>
+              <a:t>Origin: Latin root</a:t>
             </a:r>
             <a:endParaRPr lang="en-US" sz="1300" dirty="0"/>
           </a:p>
@@ -5288,7 +5288,7 @@
                 <a:ea typeface="Calibri" pitchFamily="34" charset="-122"/>
                 <a:cs typeface="Calibri" pitchFamily="34" charset="-120"/>
               </a:rPr>
-              <a:t>Word Labs  •  wordlabs.app  •  Root: 'fer' = to carry, bring, bear</a:t>
+              <a:t>Word Labs  •  wordlabs.app  •  Root: 'fer' = carry; bring</a:t>
             </a:r>
             <a:endParaRPr lang="en-US" sz="800" dirty="0"/>
           </a:p>
@@ -5622,7 +5622,7 @@
                 <a:ea typeface="Trebuchet MS" pitchFamily="34" charset="-122"/>
                 <a:cs typeface="Trebuchet MS" pitchFamily="34" charset="-120"/>
               </a:rPr>
-              <a:t>2</a:t>
+              <a:t>0</a:t>
             </a:r>
             <a:pPr algn="ctr" indent="0" marL="0">
               <a:buNone/>
@@ -5636,7 +5636,7 @@
                 <a:ea typeface="Trebuchet MS" pitchFamily="34" charset="-122"/>
                 <a:cs typeface="Trebuchet MS" pitchFamily="34" charset="-120"/>
               </a:rPr>
-              <a:t>  punctuation marks</a:t>
+              <a:t>  punctuation mark</a:t>
             </a:r>
             <a:endParaRPr lang="en-US" sz="2800" dirty="0"/>
           </a:p>
@@ -5928,7 +5928,7 @@
                 <a:ea typeface="Calibri" pitchFamily="34" charset="-122"/>
                 <a:cs typeface="Calibri" pitchFamily="34" charset="-120"/>
               </a:rPr>
-              <a:t>Word Labs  •  wordlabs.app  •  Root: 'fer' = to carry, bring, bear</a:t>
+              <a:t>Word Labs  •  wordlabs.app  •  Root: 'fer' = carry; bring</a:t>
             </a:r>
             <a:endParaRPr lang="en-US" sz="800" dirty="0"/>
           </a:p>
@@ -6040,7 +6040,7 @@
                 <a:ea typeface="Calibri" pitchFamily="34" charset="-122"/>
                 <a:cs typeface="Calibri" pitchFamily="34" charset="-120"/>
               </a:rPr>
-              <a:t>Can you </a:t>
+              <a:t>She will </a:t>
             </a:r>
             <a:pPr algn="l" indent="0" marL="0">
               <a:buNone/>
@@ -6057,7 +6057,7 @@
                 <a:ea typeface="Calibri" pitchFamily="34" charset="-122"/>
                 <a:cs typeface="Calibri" pitchFamily="34" charset="-120"/>
               </a:rPr>
-              <a:t>infer</a:t>
+              <a:t>offer</a:t>
             </a:r>
             <a:pPr algn="l" indent="0" marL="0">
               <a:buNone/>
@@ -6071,7 +6071,7 @@
                 <a:ea typeface="Calibri" pitchFamily="34" charset="-122"/>
                 <a:cs typeface="Calibri" pitchFamily="34" charset="-120"/>
               </a:rPr>
-              <a:t> what the character is feeling, or would you </a:t>
+              <a:t> her friend a slice of chocolate cake. The bakery </a:t>
             </a:r>
             <a:pPr algn="l" indent="0" marL="0">
               <a:buNone/>
@@ -6088,7 +6088,7 @@
                 <a:ea typeface="Calibri" pitchFamily="34" charset="-122"/>
                 <a:cs typeface="Calibri" pitchFamily="34" charset="-120"/>
               </a:rPr>
-              <a:t>prefer</a:t>
+              <a:t>offers</a:t>
             </a:r>
             <a:pPr algn="l" indent="0" marL="0">
               <a:buNone/>
@@ -6102,7 +6102,7 @@
                 <a:ea typeface="Calibri" pitchFamily="34" charset="-122"/>
                 <a:cs typeface="Calibri" pitchFamily="34" charset="-120"/>
               </a:rPr>
-              <a:t> to read the passage again?</a:t>
+              <a:t> fresh warm bread every morning.</a:t>
             </a:r>
             <a:endParaRPr lang="en-US" sz="1800" dirty="0"/>
           </a:p>
@@ -6257,7 +6257,7 @@
                 <a:ea typeface="Trebuchet MS" pitchFamily="34" charset="-122"/>
                 <a:cs typeface="Trebuchet MS" pitchFamily="34" charset="-120"/>
               </a:rPr>
-              <a:t>infer</a:t>
+              <a:t>offer</a:t>
             </a:r>
             <a:endParaRPr lang="en-US" sz="1400" dirty="0"/>
           </a:p>
@@ -6385,7 +6385,7 @@
                 <a:ea typeface="Trebuchet MS" pitchFamily="34" charset="-122"/>
                 <a:cs typeface="Trebuchet MS" pitchFamily="34" charset="-120"/>
               </a:rPr>
-              <a:t>prefer</a:t>
+              <a:t>offers</a:t>
             </a:r>
             <a:endParaRPr lang="en-US" sz="1400" dirty="0"/>
           </a:p>
@@ -6716,7 +6716,7 @@
                 <a:ea typeface="Calibri" pitchFamily="34" charset="-122"/>
                 <a:cs typeface="Calibri" pitchFamily="34" charset="-120"/>
               </a:rPr>
-              <a:t>Word Labs  •  wordlabs.app  •  Root: 'fer' = to carry, bring, bear</a:t>
+              <a:t>Word Labs  •  wordlabs.app  •  Root: 'fer' = carry; bring</a:t>
             </a:r>
             <a:endParaRPr lang="en-US" sz="800" dirty="0"/>
           </a:p>
@@ -6855,7 +6855,7 @@
                 <a:ea typeface="Trebuchet MS" pitchFamily="34" charset="-122"/>
                 <a:cs typeface="Trebuchet MS" pitchFamily="34" charset="-120"/>
               </a:rPr>
-              <a:t>infer</a:t>
+              <a:t>offer</a:t>
             </a:r>
             <a:endParaRPr lang="en-US" sz="2800" dirty="0"/>
           </a:p>
@@ -7543,7 +7543,7 @@
                 <a:ea typeface="Calibri" pitchFamily="34" charset="-122"/>
                 <a:cs typeface="Calibri" pitchFamily="34" charset="-120"/>
               </a:rPr>
-              <a:t>Word Labs  •  wordlabs.app  •  Root: 'fer' = to carry, bring, bear</a:t>
+              <a:t>Word Labs  •  wordlabs.app  •  Root: 'fer' = carry; bring</a:t>
             </a:r>
             <a:endParaRPr lang="en-US" sz="800" dirty="0"/>
           </a:p>
@@ -7682,7 +7682,7 @@
                 <a:ea typeface="Trebuchet MS" pitchFamily="34" charset="-122"/>
                 <a:cs typeface="Trebuchet MS" pitchFamily="34" charset="-120"/>
               </a:rPr>
-              <a:t>infer</a:t>
+              <a:t>offer</a:t>
             </a:r>
             <a:endParaRPr lang="en-US" sz="2800" dirty="0"/>
           </a:p>
@@ -7821,7 +7821,7 @@
                 <a:ea typeface="Trebuchet MS" pitchFamily="34" charset="-122"/>
                 <a:cs typeface="Trebuchet MS" pitchFamily="34" charset="-120"/>
               </a:rPr>
-              <a:t>in</a:t>
+              <a:t>ob</a:t>
             </a:r>
             <a:endParaRPr lang="en-US" sz="1300" dirty="0"/>
           </a:p>
@@ -7860,7 +7860,7 @@
                 <a:ea typeface="Calibri" pitchFamily="34" charset="-122"/>
                 <a:cs typeface="Calibri" pitchFamily="34" charset="-120"/>
               </a:rPr>
-              <a:t>into, towards</a:t>
+              <a:t>against; in the way of; towards</a:t>
             </a:r>
             <a:endParaRPr lang="en-US" sz="850" dirty="0"/>
           </a:p>
@@ -7972,7 +7972,7 @@
                 <a:ea typeface="Calibri" pitchFamily="34" charset="-122"/>
                 <a:cs typeface="Calibri" pitchFamily="34" charset="-120"/>
               </a:rPr>
-              <a:t>to carry, bring</a:t>
+              <a:t>carry; bring</a:t>
             </a:r>
             <a:endParaRPr lang="en-US" sz="850" dirty="0"/>
           </a:p>
@@ -8528,7 +8528,7 @@
                 <a:ea typeface="Calibri" pitchFamily="34" charset="-122"/>
                 <a:cs typeface="Calibri" pitchFamily="34" charset="-120"/>
               </a:rPr>
-              <a:t>Word Labs  •  wordlabs.app  •  Root: 'fer' = to carry, bring, bear</a:t>
+              <a:t>Word Labs  •  wordlabs.app  •  Root: 'fer' = carry; bring</a:t>
             </a:r>
             <a:endParaRPr lang="en-US" sz="800" dirty="0"/>
           </a:p>
@@ -8667,7 +8667,7 @@
                 <a:ea typeface="Trebuchet MS" pitchFamily="34" charset="-122"/>
                 <a:cs typeface="Trebuchet MS" pitchFamily="34" charset="-120"/>
               </a:rPr>
-              <a:t>infer</a:t>
+              <a:t>offer</a:t>
             </a:r>
             <a:endParaRPr lang="en-US" sz="2800" dirty="0"/>
           </a:p>
@@ -8806,7 +8806,7 @@
                 <a:ea typeface="Trebuchet MS" pitchFamily="34" charset="-122"/>
                 <a:cs typeface="Trebuchet MS" pitchFamily="34" charset="-120"/>
               </a:rPr>
-              <a:t>in</a:t>
+              <a:t>ob</a:t>
             </a:r>
             <a:endParaRPr lang="en-US" sz="1300" dirty="0"/>
           </a:p>
@@ -8845,7 +8845,7 @@
                 <a:ea typeface="Calibri" pitchFamily="34" charset="-122"/>
                 <a:cs typeface="Calibri" pitchFamily="34" charset="-120"/>
               </a:rPr>
-              <a:t>into, towards</a:t>
+              <a:t>against; in the way of; towards</a:t>
             </a:r>
             <a:endParaRPr lang="en-US" sz="850" dirty="0"/>
           </a:p>
@@ -8957,7 +8957,7 @@
                 <a:ea typeface="Calibri" pitchFamily="34" charset="-122"/>
                 <a:cs typeface="Calibri" pitchFamily="34" charset="-120"/>
               </a:rPr>
-              <a:t>to carry, bring</a:t>
+              <a:t>carry; bring</a:t>
             </a:r>
             <a:endParaRPr lang="en-US" sz="850" dirty="0"/>
           </a:p>
@@ -9116,7 +9116,7 @@
                 <a:ea typeface="Trebuchet MS" pitchFamily="34" charset="-122"/>
                 <a:cs typeface="Trebuchet MS" pitchFamily="34" charset="-120"/>
               </a:rPr>
-              <a:t>in</a:t>
+              <a:t>of</a:t>
             </a:r>
             <a:endParaRPr lang="en-US" sz="1400" dirty="0"/>
           </a:p>
@@ -9645,7 +9645,7 @@
                 <a:ea typeface="Calibri" pitchFamily="34" charset="-122"/>
                 <a:cs typeface="Calibri" pitchFamily="34" charset="-120"/>
               </a:rPr>
-              <a:t>Word Labs  •  wordlabs.app  •  Root: 'fer' = to carry, bring, bear</a:t>
+              <a:t>Word Labs  •  wordlabs.app  •  Root: 'fer' = carry; bring</a:t>
             </a:r>
             <a:endParaRPr lang="en-US" sz="800" dirty="0"/>
           </a:p>
@@ -9784,7 +9784,7 @@
                 <a:ea typeface="Trebuchet MS" pitchFamily="34" charset="-122"/>
                 <a:cs typeface="Trebuchet MS" pitchFamily="34" charset="-120"/>
               </a:rPr>
-              <a:t>infer</a:t>
+              <a:t>offer</a:t>
             </a:r>
             <a:endParaRPr lang="en-US" sz="2800" dirty="0"/>
           </a:p>
@@ -9923,7 +9923,7 @@
                 <a:ea typeface="Trebuchet MS" pitchFamily="34" charset="-122"/>
                 <a:cs typeface="Trebuchet MS" pitchFamily="34" charset="-120"/>
               </a:rPr>
-              <a:t>in</a:t>
+              <a:t>ob</a:t>
             </a:r>
             <a:endParaRPr lang="en-US" sz="1300" dirty="0"/>
           </a:p>
@@ -9962,7 +9962,7 @@
                 <a:ea typeface="Calibri" pitchFamily="34" charset="-122"/>
                 <a:cs typeface="Calibri" pitchFamily="34" charset="-120"/>
               </a:rPr>
-              <a:t>into, towards</a:t>
+              <a:t>against; in the way of; towards</a:t>
             </a:r>
             <a:endParaRPr lang="en-US" sz="850" dirty="0"/>
           </a:p>
@@ -10074,7 +10074,7 @@
                 <a:ea typeface="Calibri" pitchFamily="34" charset="-122"/>
                 <a:cs typeface="Calibri" pitchFamily="34" charset="-120"/>
               </a:rPr>
-              <a:t>to carry, bring</a:t>
+              <a:t>carry; bring</a:t>
             </a:r>
             <a:endParaRPr lang="en-US" sz="850" dirty="0"/>
           </a:p>
@@ -10233,7 +10233,7 @@
                 <a:ea typeface="Trebuchet MS" pitchFamily="34" charset="-122"/>
                 <a:cs typeface="Trebuchet MS" pitchFamily="34" charset="-120"/>
               </a:rPr>
-              <a:t>in</a:t>
+              <a:t>of</a:t>
             </a:r>
             <a:endParaRPr lang="en-US" sz="1400" dirty="0"/>
           </a:p>
@@ -10445,7 +10445,7 @@
         </p:nvSpPr>
         <p:spPr>
           <a:xfrm>
-            <a:off x="2670048" y="4169664"/>
+            <a:off x="3033522" y="4169664"/>
             <a:ext cx="685800" cy="475488"/>
           </a:xfrm>
           <a:prstGeom prst="rect">
@@ -10472,7 +10472,7 @@
         </p:nvSpPr>
         <p:spPr>
           <a:xfrm>
-            <a:off x="2670048" y="4169664"/>
+            <a:off x="3033522" y="4169664"/>
             <a:ext cx="685800" cy="475488"/>
           </a:xfrm>
           <a:prstGeom prst="rect">
@@ -10489,7 +10489,7 @@
               <a:buNone/>
             </a:pPr>
             <a:r>
-              <a:rPr lang="en-US" sz="900" b="1" dirty="0">
+              <a:rPr lang="en-US" sz="1000" b="1" dirty="0">
                 <a:solidFill>
                   <a:srgbClr val="9D174D"/>
                 </a:solidFill>
@@ -10497,9 +10497,9 @@
                 <a:ea typeface="Trebuchet MS" pitchFamily="34" charset="-122"/>
                 <a:cs typeface="Trebuchet MS" pitchFamily="34" charset="-120"/>
               </a:rPr>
-              <a:t>i</a:t>
-            </a:r>
-            <a:endParaRPr lang="en-US" sz="900" dirty="0"/>
+              <a:t>o</a:t>
+            </a:r>
+            <a:endParaRPr lang="en-US" sz="1000" dirty="0"/>
           </a:p>
         </p:txBody>
       </p:sp>
@@ -10511,7 +10511,7 @@
         </p:nvSpPr>
         <p:spPr>
           <a:xfrm>
-            <a:off x="4123944" y="4169664"/>
+            <a:off x="4850892" y="4169664"/>
             <a:ext cx="685800" cy="475488"/>
           </a:xfrm>
           <a:prstGeom prst="rect">
@@ -10538,7 +10538,7 @@
         </p:nvSpPr>
         <p:spPr>
           <a:xfrm>
-            <a:off x="4123944" y="4169664"/>
+            <a:off x="4850892" y="4169664"/>
             <a:ext cx="685800" cy="475488"/>
           </a:xfrm>
           <a:prstGeom prst="rect">
@@ -10555,7 +10555,7 @@
               <a:buNone/>
             </a:pPr>
             <a:r>
-              <a:rPr lang="en-US" sz="900" b="1" dirty="0">
+              <a:rPr lang="en-US" sz="1000" b="1" dirty="0">
                 <a:solidFill>
                   <a:srgbClr val="9D174D"/>
                 </a:solidFill>
@@ -10563,9 +10563,9 @@
                 <a:ea typeface="Trebuchet MS" pitchFamily="34" charset="-122"/>
                 <a:cs typeface="Trebuchet MS" pitchFamily="34" charset="-120"/>
               </a:rPr>
-              <a:t>n</a:t>
-            </a:r>
-            <a:endParaRPr lang="en-US" sz="900" dirty="0"/>
+              <a:t>ff</a:t>
+            </a:r>
+            <a:endParaRPr lang="en-US" sz="1000" dirty="0"/>
           </a:p>
         </p:txBody>
       </p:sp>
@@ -10577,7 +10577,7 @@
         </p:nvSpPr>
         <p:spPr>
           <a:xfrm>
-            <a:off x="5577840" y="4169664"/>
+            <a:off x="6668262" y="4169664"/>
             <a:ext cx="685800" cy="475488"/>
           </a:xfrm>
           <a:prstGeom prst="rect">
@@ -10604,7 +10604,7 @@
         </p:nvSpPr>
         <p:spPr>
           <a:xfrm>
-            <a:off x="5577840" y="4169664"/>
+            <a:off x="6668262" y="4169664"/>
             <a:ext cx="685800" cy="475488"/>
           </a:xfrm>
           <a:prstGeom prst="rect">
@@ -10621,7 +10621,7 @@
               <a:buNone/>
             </a:pPr>
             <a:r>
-              <a:rPr lang="en-US" sz="900" b="1" dirty="0">
+              <a:rPr lang="en-US" sz="1000" b="1" dirty="0">
                 <a:solidFill>
                   <a:srgbClr val="9D174D"/>
                 </a:solidFill>
@@ -10629,75 +10629,9 @@
                 <a:ea typeface="Trebuchet MS" pitchFamily="34" charset="-122"/>
                 <a:cs typeface="Trebuchet MS" pitchFamily="34" charset="-120"/>
               </a:rPr>
-              <a:t>f</a:t>
-            </a:r>
-            <a:endParaRPr lang="en-US" sz="900" dirty="0"/>
-          </a:p>
-        </p:txBody>
-      </p:sp>
-      <p:sp>
-        <p:nvSpPr>
-          <p:cNvPr id="39" name="Shape 37"/>
-          <p:cNvSpPr/>
-          <p:nvPr/>
-        </p:nvSpPr>
-        <p:spPr>
-          <a:xfrm>
-            <a:off x="7031736" y="4169664"/>
-            <a:ext cx="685800" cy="475488"/>
-          </a:xfrm>
-          <a:prstGeom prst="rect">
-            <a:avLst>
-              <a:gd name="adj" fmla="val 7692"/>
-            </a:avLst>
-          </a:prstGeom>
-          <a:solidFill>
-            <a:srgbClr val="FFFFFF"/>
-          </a:solidFill>
-          <a:ln w="12700">
-            <a:solidFill>
-              <a:srgbClr val="DB2777"/>
-            </a:solidFill>
-            <a:prstDash val="solid"/>
-          </a:ln>
-        </p:spPr>
-      </p:sp>
-      <p:sp>
-        <p:nvSpPr>
-          <p:cNvPr id="40" name="Text 38"/>
-          <p:cNvSpPr/>
-          <p:nvPr/>
-        </p:nvSpPr>
-        <p:spPr>
-          <a:xfrm>
-            <a:off x="7031736" y="4169664"/>
-            <a:ext cx="685800" cy="475488"/>
-          </a:xfrm>
-          <a:prstGeom prst="rect">
-            <a:avLst/>
-          </a:prstGeom>
-          <a:noFill/>
-          <a:ln/>
-        </p:spPr>
-        <p:txBody>
-          <a:bodyPr wrap="square" lIns="0" tIns="0" rIns="0" bIns="0" rtlCol="0" anchor="ctr"/>
-          <a:lstStyle/>
-          <a:p>
-            <a:pPr algn="ctr" indent="0" marL="0">
-              <a:buNone/>
-            </a:pPr>
-            <a:r>
-              <a:rPr lang="en-US" sz="900" b="1" dirty="0">
-                <a:solidFill>
-                  <a:srgbClr val="9D174D"/>
-                </a:solidFill>
-                <a:latin typeface="Trebuchet MS" pitchFamily="34" charset="0"/>
-                <a:ea typeface="Trebuchet MS" pitchFamily="34" charset="-122"/>
-                <a:cs typeface="Trebuchet MS" pitchFamily="34" charset="-120"/>
-              </a:rPr>
               <a:t>er</a:t>
             </a:r>
-            <a:endParaRPr lang="en-US" sz="900" dirty="0"/>
+            <a:endParaRPr lang="en-US" sz="1000" dirty="0"/>
           </a:p>
         </p:txBody>
       </p:sp>
@@ -10987,7 +10921,7 @@
                 <a:ea typeface="Calibri" pitchFamily="34" charset="-122"/>
                 <a:cs typeface="Calibri" pitchFamily="34" charset="-120"/>
               </a:rPr>
-              <a:t>Word Labs  •  wordlabs.app  •  Root: 'fer' = to carry, bring, bear</a:t>
+              <a:t>Word Labs  •  wordlabs.app  •  Root: 'fer' = carry; bring</a:t>
             </a:r>
             <a:endParaRPr lang="en-US" sz="800" dirty="0"/>
           </a:p>
@@ -11126,7 +11060,7 @@
                 <a:ea typeface="Trebuchet MS" pitchFamily="34" charset="-122"/>
                 <a:cs typeface="Trebuchet MS" pitchFamily="34" charset="-120"/>
               </a:rPr>
-              <a:t>prefer</a:t>
+              <a:t>offers</a:t>
             </a:r>
             <a:endParaRPr lang="en-US" sz="2800" dirty="0"/>
           </a:p>
@@ -11814,7 +11748,7 @@
                 <a:ea typeface="Calibri" pitchFamily="34" charset="-122"/>
                 <a:cs typeface="Calibri" pitchFamily="34" charset="-120"/>
               </a:rPr>
-              <a:t>Word Labs  •  wordlabs.app  •  Root: 'fer' = to carry, bring, bear</a:t>
+              <a:t>Word Labs  •  wordlabs.app  •  Root: 'fer' = carry; bring</a:t>
             </a:r>
             <a:endParaRPr lang="en-US" sz="800" dirty="0"/>
           </a:p>
@@ -11953,7 +11887,7 @@
                 <a:ea typeface="Trebuchet MS" pitchFamily="34" charset="-122"/>
                 <a:cs typeface="Trebuchet MS" pitchFamily="34" charset="-120"/>
               </a:rPr>
-              <a:t>prefer</a:t>
+              <a:t>offers</a:t>
             </a:r>
             <a:endParaRPr lang="en-US" sz="2800" dirty="0"/>
           </a:p>
@@ -12033,7 +11967,7 @@
         </p:nvSpPr>
         <p:spPr>
           <a:xfrm>
-            <a:off x="2938272" y="2258568"/>
+            <a:off x="2221992" y="2258568"/>
             <a:ext cx="1828800" cy="292608"/>
           </a:xfrm>
           <a:prstGeom prst="rect">
@@ -12067,7 +12001,7 @@
         </p:nvSpPr>
         <p:spPr>
           <a:xfrm>
-            <a:off x="2938272" y="2258568"/>
+            <a:off x="2221992" y="2258568"/>
             <a:ext cx="1828800" cy="292608"/>
           </a:xfrm>
           <a:prstGeom prst="rect">
@@ -12092,7 +12026,7 @@
                 <a:ea typeface="Trebuchet MS" pitchFamily="34" charset="-122"/>
                 <a:cs typeface="Trebuchet MS" pitchFamily="34" charset="-120"/>
               </a:rPr>
-              <a:t>pre</a:t>
+              <a:t>ob</a:t>
             </a:r>
             <a:endParaRPr lang="en-US" sz="1300" dirty="0"/>
           </a:p>
@@ -12106,7 +12040,7 @@
         </p:nvSpPr>
         <p:spPr>
           <a:xfrm>
-            <a:off x="2938272" y="2569464"/>
+            <a:off x="2221992" y="2569464"/>
             <a:ext cx="1828800" cy="201168"/>
           </a:xfrm>
           <a:prstGeom prst="rect">
@@ -12131,7 +12065,7 @@
                 <a:ea typeface="Calibri" pitchFamily="34" charset="-122"/>
                 <a:cs typeface="Calibri" pitchFamily="34" charset="-120"/>
               </a:rPr>
-              <a:t>before, in front of</a:t>
+              <a:t>against; in the way of; towards</a:t>
             </a:r>
             <a:endParaRPr lang="en-US" sz="850" dirty="0"/>
           </a:p>
@@ -12145,7 +12079,7 @@
         </p:nvSpPr>
         <p:spPr>
           <a:xfrm>
-            <a:off x="5803392" y="2258568"/>
+            <a:off x="4370832" y="2258568"/>
             <a:ext cx="1828800" cy="292608"/>
           </a:xfrm>
           <a:prstGeom prst="rect">
@@ -12179,7 +12113,7 @@
         </p:nvSpPr>
         <p:spPr>
           <a:xfrm>
-            <a:off x="5803392" y="2258568"/>
+            <a:off x="4370832" y="2258568"/>
             <a:ext cx="1828800" cy="292608"/>
           </a:xfrm>
           <a:prstGeom prst="rect">
@@ -12218,7 +12152,7 @@
         </p:nvSpPr>
         <p:spPr>
           <a:xfrm>
-            <a:off x="5803392" y="2569464"/>
+            <a:off x="4370832" y="2569464"/>
             <a:ext cx="1828800" cy="201168"/>
           </a:xfrm>
           <a:prstGeom prst="rect">
@@ -12243,7 +12177,7 @@
                 <a:ea typeface="Calibri" pitchFamily="34" charset="-122"/>
                 <a:cs typeface="Calibri" pitchFamily="34" charset="-120"/>
               </a:rPr>
-              <a:t>to carry, bring</a:t>
+              <a:t>carry; bring</a:t>
             </a:r>
             <a:endParaRPr lang="en-US" sz="850" dirty="0"/>
           </a:p>
@@ -12252,6 +12186,118 @@
       <p:sp>
         <p:nvSpPr>
           <p:cNvPr id="22" name="Shape 20"/>
+          <p:cNvSpPr/>
+          <p:nvPr/>
+        </p:nvSpPr>
+        <p:spPr>
+          <a:xfrm>
+            <a:off x="6519672" y="2258568"/>
+            <a:ext cx="1828800" cy="292608"/>
+          </a:xfrm>
+          <a:prstGeom prst="rect">
+            <a:avLst>
+              <a:gd name="adj" fmla="val 25000"/>
+            </a:avLst>
+          </a:prstGeom>
+          <a:solidFill>
+            <a:srgbClr val="FCE7F3"/>
+          </a:solidFill>
+          <a:ln w="19050">
+            <a:solidFill>
+              <a:srgbClr val="DB2777"/>
+            </a:solidFill>
+            <a:prstDash val="solid"/>
+          </a:ln>
+          <a:effectLst>
+            <a:outerShdw sx="100000" sy="100000" kx="0" ky="0" algn="bl" rotWithShape="0" blurRad="101600" dist="38100" dir="8100000">
+              <a:srgbClr val="000000">
+                <a:alpha val="12000"/>
+              </a:srgbClr>
+            </a:outerShdw>
+          </a:effectLst>
+        </p:spPr>
+      </p:sp>
+      <p:sp>
+        <p:nvSpPr>
+          <p:cNvPr id="23" name="Text 21"/>
+          <p:cNvSpPr/>
+          <p:nvPr/>
+        </p:nvSpPr>
+        <p:spPr>
+          <a:xfrm>
+            <a:off x="6519672" y="2258568"/>
+            <a:ext cx="1828800" cy="292608"/>
+          </a:xfrm>
+          <a:prstGeom prst="rect">
+            <a:avLst/>
+          </a:prstGeom>
+          <a:noFill/>
+          <a:ln/>
+        </p:spPr>
+        <p:txBody>
+          <a:bodyPr wrap="square" lIns="0" tIns="0" rIns="0" bIns="0" rtlCol="0" anchor="ctr"/>
+          <a:lstStyle/>
+          <a:p>
+            <a:pPr algn="ctr" indent="0" marL="0">
+              <a:buNone/>
+            </a:pPr>
+            <a:r>
+              <a:rPr lang="en-US" sz="1300" b="1" dirty="0">
+                <a:solidFill>
+                  <a:srgbClr val="9D174D"/>
+                </a:solidFill>
+                <a:latin typeface="Trebuchet MS" pitchFamily="34" charset="0"/>
+                <a:ea typeface="Trebuchet MS" pitchFamily="34" charset="-122"/>
+                <a:cs typeface="Trebuchet MS" pitchFamily="34" charset="-120"/>
+              </a:rPr>
+              <a:t>s</a:t>
+            </a:r>
+            <a:endParaRPr lang="en-US" sz="1300" dirty="0"/>
+          </a:p>
+        </p:txBody>
+      </p:sp>
+      <p:sp>
+        <p:nvSpPr>
+          <p:cNvPr id="24" name="Text 22"/>
+          <p:cNvSpPr/>
+          <p:nvPr/>
+        </p:nvSpPr>
+        <p:spPr>
+          <a:xfrm>
+            <a:off x="6519672" y="2569464"/>
+            <a:ext cx="1828800" cy="201168"/>
+          </a:xfrm>
+          <a:prstGeom prst="rect">
+            <a:avLst/>
+          </a:prstGeom>
+          <a:noFill/>
+          <a:ln/>
+        </p:spPr>
+        <p:txBody>
+          <a:bodyPr wrap="square" lIns="0" tIns="0" rIns="0" bIns="0" rtlCol="0" anchor="t"/>
+          <a:lstStyle/>
+          <a:p>
+            <a:pPr algn="ctr" indent="0" marL="0">
+              <a:buNone/>
+            </a:pPr>
+            <a:r>
+              <a:rPr lang="en-US" sz="850" dirty="0">
+                <a:solidFill>
+                  <a:srgbClr val="475569"/>
+                </a:solidFill>
+                <a:latin typeface="Calibri" pitchFamily="34" charset="0"/>
+                <a:ea typeface="Calibri" pitchFamily="34" charset="-122"/>
+                <a:cs typeface="Calibri" pitchFamily="34" charset="-120"/>
+              </a:rPr>
+              <a:t>plural or present tense</a:t>
+            </a:r>
+            <a:endParaRPr lang="en-US" sz="850" dirty="0"/>
+          </a:p>
+        </p:txBody>
+      </p:sp>
+      <p:sp>
+        <p:nvSpPr>
+          <p:cNvPr id="25" name="Shape 23"/>
           <p:cNvSpPr/>
           <p:nvPr/>
         </p:nvSpPr>
@@ -12278,7 +12324,7 @@
       </p:sp>
       <p:sp>
         <p:nvSpPr>
-          <p:cNvPr id="23" name="Text 21"/>
+          <p:cNvPr id="26" name="Text 24"/>
           <p:cNvSpPr/>
           <p:nvPr/>
         </p:nvSpPr>
@@ -12317,7 +12363,7 @@
       </p:sp>
       <p:sp>
         <p:nvSpPr>
-          <p:cNvPr id="24" name="Shape 22"/>
+          <p:cNvPr id="27" name="Shape 25"/>
           <p:cNvSpPr/>
           <p:nvPr/>
         </p:nvSpPr>
@@ -12344,7 +12390,7 @@
       </p:sp>
       <p:sp>
         <p:nvSpPr>
-          <p:cNvPr id="25" name="Text 23"/>
+          <p:cNvPr id="28" name="Text 26"/>
           <p:cNvSpPr/>
           <p:nvPr/>
         </p:nvSpPr>
@@ -12383,7 +12429,7 @@
       </p:sp>
       <p:sp>
         <p:nvSpPr>
-          <p:cNvPr id="26" name="Shape 24"/>
+          <p:cNvPr id="29" name="Shape 27"/>
           <p:cNvSpPr/>
           <p:nvPr/>
         </p:nvSpPr>
@@ -12410,7 +12456,7 @@
       </p:sp>
       <p:sp>
         <p:nvSpPr>
-          <p:cNvPr id="27" name="Text 25"/>
+          <p:cNvPr id="30" name="Text 28"/>
           <p:cNvSpPr/>
           <p:nvPr/>
         </p:nvSpPr>
@@ -12449,7 +12495,7 @@
       </p:sp>
       <p:sp>
         <p:nvSpPr>
-          <p:cNvPr id="28" name="Shape 26"/>
+          <p:cNvPr id="31" name="Shape 29"/>
           <p:cNvSpPr/>
           <p:nvPr/>
         </p:nvSpPr>
@@ -12476,7 +12522,7 @@
       </p:sp>
       <p:sp>
         <p:nvSpPr>
-          <p:cNvPr id="29" name="Text 27"/>
+          <p:cNvPr id="32" name="Text 30"/>
           <p:cNvSpPr/>
           <p:nvPr/>
         </p:nvSpPr>
@@ -12799,7 +12845,7 @@
                 <a:ea typeface="Calibri" pitchFamily="34" charset="-122"/>
                 <a:cs typeface="Calibri" pitchFamily="34" charset="-120"/>
               </a:rPr>
-              <a:t>Word Labs  •  wordlabs.app  •  Root: 'fer' = to carry, bring, bear</a:t>
+              <a:t>Word Labs  •  wordlabs.app  •  Root: 'fer' = carry; bring</a:t>
             </a:r>
             <a:endParaRPr lang="en-US" sz="800" dirty="0"/>
           </a:p>
@@ -12938,7 +12984,7 @@
                 <a:ea typeface="Trebuchet MS" pitchFamily="34" charset="-122"/>
                 <a:cs typeface="Trebuchet MS" pitchFamily="34" charset="-120"/>
               </a:rPr>
-              <a:t>prefer</a:t>
+              <a:t>offers</a:t>
             </a:r>
             <a:endParaRPr lang="en-US" sz="2800" dirty="0"/>
           </a:p>
@@ -13018,7 +13064,7 @@
         </p:nvSpPr>
         <p:spPr>
           <a:xfrm>
-            <a:off x="2938272" y="2258568"/>
+            <a:off x="2221992" y="2258568"/>
             <a:ext cx="1828800" cy="292608"/>
           </a:xfrm>
           <a:prstGeom prst="rect">
@@ -13052,7 +13098,7 @@
         </p:nvSpPr>
         <p:spPr>
           <a:xfrm>
-            <a:off x="2938272" y="2258568"/>
+            <a:off x="2221992" y="2258568"/>
             <a:ext cx="1828800" cy="292608"/>
           </a:xfrm>
           <a:prstGeom prst="rect">
@@ -13077,7 +13123,7 @@
                 <a:ea typeface="Trebuchet MS" pitchFamily="34" charset="-122"/>
                 <a:cs typeface="Trebuchet MS" pitchFamily="34" charset="-120"/>
               </a:rPr>
-              <a:t>pre</a:t>
+              <a:t>ob</a:t>
             </a:r>
             <a:endParaRPr lang="en-US" sz="1300" dirty="0"/>
           </a:p>
@@ -13091,7 +13137,7 @@
         </p:nvSpPr>
         <p:spPr>
           <a:xfrm>
-            <a:off x="2938272" y="2569464"/>
+            <a:off x="2221992" y="2569464"/>
             <a:ext cx="1828800" cy="201168"/>
           </a:xfrm>
           <a:prstGeom prst="rect">
@@ -13116,7 +13162,7 @@
                 <a:ea typeface="Calibri" pitchFamily="34" charset="-122"/>
                 <a:cs typeface="Calibri" pitchFamily="34" charset="-120"/>
               </a:rPr>
-              <a:t>before, in front of</a:t>
+              <a:t>against; in the way of; towards</a:t>
             </a:r>
             <a:endParaRPr lang="en-US" sz="850" dirty="0"/>
           </a:p>
@@ -13130,7 +13176,7 @@
         </p:nvSpPr>
         <p:spPr>
           <a:xfrm>
-            <a:off x="5803392" y="2258568"/>
+            <a:off x="4370832" y="2258568"/>
             <a:ext cx="1828800" cy="292608"/>
           </a:xfrm>
           <a:prstGeom prst="rect">
@@ -13164,7 +13210,7 @@
         </p:nvSpPr>
         <p:spPr>
           <a:xfrm>
-            <a:off x="5803392" y="2258568"/>
+            <a:off x="4370832" y="2258568"/>
             <a:ext cx="1828800" cy="292608"/>
           </a:xfrm>
           <a:prstGeom prst="rect">
@@ -13203,7 +13249,7 @@
         </p:nvSpPr>
         <p:spPr>
           <a:xfrm>
-            <a:off x="5803392" y="2569464"/>
+            <a:off x="4370832" y="2569464"/>
             <a:ext cx="1828800" cy="201168"/>
           </a:xfrm>
           <a:prstGeom prst="rect">
@@ -13228,7 +13274,7 @@
                 <a:ea typeface="Calibri" pitchFamily="34" charset="-122"/>
                 <a:cs typeface="Calibri" pitchFamily="34" charset="-120"/>
               </a:rPr>
-              <a:t>to carry, bring</a:t>
+              <a:t>carry; bring</a:t>
             </a:r>
             <a:endParaRPr lang="en-US" sz="850" dirty="0"/>
           </a:p>
@@ -13237,6 +13283,118 @@
       <p:sp>
         <p:nvSpPr>
           <p:cNvPr id="22" name="Shape 20"/>
+          <p:cNvSpPr/>
+          <p:nvPr/>
+        </p:nvSpPr>
+        <p:spPr>
+          <a:xfrm>
+            <a:off x="6519672" y="2258568"/>
+            <a:ext cx="1828800" cy="292608"/>
+          </a:xfrm>
+          <a:prstGeom prst="rect">
+            <a:avLst>
+              <a:gd name="adj" fmla="val 25000"/>
+            </a:avLst>
+          </a:prstGeom>
+          <a:solidFill>
+            <a:srgbClr val="FCE7F3"/>
+          </a:solidFill>
+          <a:ln w="19050">
+            <a:solidFill>
+              <a:srgbClr val="DB2777"/>
+            </a:solidFill>
+            <a:prstDash val="solid"/>
+          </a:ln>
+          <a:effectLst>
+            <a:outerShdw sx="100000" sy="100000" kx="0" ky="0" algn="bl" rotWithShape="0" blurRad="101600" dist="38100" dir="8100000">
+              <a:srgbClr val="000000">
+                <a:alpha val="12000"/>
+              </a:srgbClr>
+            </a:outerShdw>
+          </a:effectLst>
+        </p:spPr>
+      </p:sp>
+      <p:sp>
+        <p:nvSpPr>
+          <p:cNvPr id="23" name="Text 21"/>
+          <p:cNvSpPr/>
+          <p:nvPr/>
+        </p:nvSpPr>
+        <p:spPr>
+          <a:xfrm>
+            <a:off x="6519672" y="2258568"/>
+            <a:ext cx="1828800" cy="292608"/>
+          </a:xfrm>
+          <a:prstGeom prst="rect">
+            <a:avLst/>
+          </a:prstGeom>
+          <a:noFill/>
+          <a:ln/>
+        </p:spPr>
+        <p:txBody>
+          <a:bodyPr wrap="square" lIns="0" tIns="0" rIns="0" bIns="0" rtlCol="0" anchor="ctr"/>
+          <a:lstStyle/>
+          <a:p>
+            <a:pPr algn="ctr" indent="0" marL="0">
+              <a:buNone/>
+            </a:pPr>
+            <a:r>
+              <a:rPr lang="en-US" sz="1300" b="1" dirty="0">
+                <a:solidFill>
+                  <a:srgbClr val="9D174D"/>
+                </a:solidFill>
+                <a:latin typeface="Trebuchet MS" pitchFamily="34" charset="0"/>
+                <a:ea typeface="Trebuchet MS" pitchFamily="34" charset="-122"/>
+                <a:cs typeface="Trebuchet MS" pitchFamily="34" charset="-120"/>
+              </a:rPr>
+              <a:t>s</a:t>
+            </a:r>
+            <a:endParaRPr lang="en-US" sz="1300" dirty="0"/>
+          </a:p>
+        </p:txBody>
+      </p:sp>
+      <p:sp>
+        <p:nvSpPr>
+          <p:cNvPr id="24" name="Text 22"/>
+          <p:cNvSpPr/>
+          <p:nvPr/>
+        </p:nvSpPr>
+        <p:spPr>
+          <a:xfrm>
+            <a:off x="6519672" y="2569464"/>
+            <a:ext cx="1828800" cy="201168"/>
+          </a:xfrm>
+          <a:prstGeom prst="rect">
+            <a:avLst/>
+          </a:prstGeom>
+          <a:noFill/>
+          <a:ln/>
+        </p:spPr>
+        <p:txBody>
+          <a:bodyPr wrap="square" lIns="0" tIns="0" rIns="0" bIns="0" rtlCol="0" anchor="t"/>
+          <a:lstStyle/>
+          <a:p>
+            <a:pPr algn="ctr" indent="0" marL="0">
+              <a:buNone/>
+            </a:pPr>
+            <a:r>
+              <a:rPr lang="en-US" sz="850" dirty="0">
+                <a:solidFill>
+                  <a:srgbClr val="475569"/>
+                </a:solidFill>
+                <a:latin typeface="Calibri" pitchFamily="34" charset="0"/>
+                <a:ea typeface="Calibri" pitchFamily="34" charset="-122"/>
+                <a:cs typeface="Calibri" pitchFamily="34" charset="-120"/>
+              </a:rPr>
+              <a:t>plural or present tense</a:t>
+            </a:r>
+            <a:endParaRPr lang="en-US" sz="850" dirty="0"/>
+          </a:p>
+        </p:txBody>
+      </p:sp>
+      <p:sp>
+        <p:nvSpPr>
+          <p:cNvPr id="25" name="Shape 23"/>
           <p:cNvSpPr/>
           <p:nvPr/>
         </p:nvSpPr>
@@ -13263,7 +13421,7 @@
       </p:sp>
       <p:sp>
         <p:nvSpPr>
-          <p:cNvPr id="23" name="Text 21"/>
+          <p:cNvPr id="26" name="Text 24"/>
           <p:cNvSpPr/>
           <p:nvPr/>
         </p:nvSpPr>
@@ -13302,7 +13460,7 @@
       </p:sp>
       <p:sp>
         <p:nvSpPr>
-          <p:cNvPr id="24" name="Shape 22"/>
+          <p:cNvPr id="27" name="Shape 25"/>
           <p:cNvSpPr/>
           <p:nvPr/>
         </p:nvSpPr>
@@ -13329,7 +13487,7 @@
       </p:sp>
       <p:sp>
         <p:nvSpPr>
-          <p:cNvPr id="25" name="Shape 23"/>
+          <p:cNvPr id="28" name="Shape 26"/>
           <p:cNvSpPr/>
           <p:nvPr/>
         </p:nvSpPr>
@@ -13356,7 +13514,7 @@
       </p:sp>
       <p:sp>
         <p:nvSpPr>
-          <p:cNvPr id="26" name="Text 24"/>
+          <p:cNvPr id="29" name="Text 27"/>
           <p:cNvSpPr/>
           <p:nvPr/>
         </p:nvSpPr>
@@ -13387,7 +13545,7 @@
                 <a:ea typeface="Trebuchet MS" pitchFamily="34" charset="-122"/>
                 <a:cs typeface="Trebuchet MS" pitchFamily="34" charset="-120"/>
               </a:rPr>
-              <a:t>pre</a:t>
+              <a:t>of</a:t>
             </a:r>
             <a:endParaRPr lang="en-US" sz="1400" dirty="0"/>
           </a:p>
@@ -13395,7 +13553,7 @@
       </p:sp>
       <p:sp>
         <p:nvSpPr>
-          <p:cNvPr id="27" name="Text 25"/>
+          <p:cNvPr id="30" name="Text 28"/>
           <p:cNvSpPr/>
           <p:nvPr/>
         </p:nvSpPr>
@@ -13434,7 +13592,7 @@
       </p:sp>
       <p:sp>
         <p:nvSpPr>
-          <p:cNvPr id="28" name="Shape 26"/>
+          <p:cNvPr id="31" name="Shape 29"/>
           <p:cNvSpPr/>
           <p:nvPr/>
         </p:nvSpPr>
@@ -13461,7 +13619,7 @@
       </p:sp>
       <p:sp>
         <p:nvSpPr>
-          <p:cNvPr id="29" name="Text 27"/>
+          <p:cNvPr id="32" name="Text 30"/>
           <p:cNvSpPr/>
           <p:nvPr/>
         </p:nvSpPr>
@@ -13492,7 +13650,7 @@
                 <a:ea typeface="Trebuchet MS" pitchFamily="34" charset="-122"/>
                 <a:cs typeface="Trebuchet MS" pitchFamily="34" charset="-120"/>
               </a:rPr>
-              <a:t>fer</a:t>
+              <a:t>fers</a:t>
             </a:r>
             <a:endParaRPr lang="en-US" sz="1400" dirty="0"/>
           </a:p>
@@ -13500,7 +13658,7 @@
       </p:sp>
       <p:sp>
         <p:nvSpPr>
-          <p:cNvPr id="30" name="Shape 28"/>
+          <p:cNvPr id="33" name="Shape 31"/>
           <p:cNvSpPr/>
           <p:nvPr/>
         </p:nvSpPr>
@@ -13527,7 +13685,7 @@
       </p:sp>
       <p:sp>
         <p:nvSpPr>
-          <p:cNvPr id="31" name="Text 29"/>
+          <p:cNvPr id="34" name="Text 32"/>
           <p:cNvSpPr/>
           <p:nvPr/>
         </p:nvSpPr>
@@ -13566,7 +13724,7 @@
       </p:sp>
       <p:sp>
         <p:nvSpPr>
-          <p:cNvPr id="32" name="Shape 30"/>
+          <p:cNvPr id="35" name="Shape 33"/>
           <p:cNvSpPr/>
           <p:nvPr/>
         </p:nvSpPr>
@@ -13593,7 +13751,7 @@
       </p:sp>
       <p:sp>
         <p:nvSpPr>
-          <p:cNvPr id="33" name="Text 31"/>
+          <p:cNvPr id="36" name="Text 34"/>
           <p:cNvSpPr/>
           <p:nvPr/>
         </p:nvSpPr>
@@ -13825,7 +13983,7 @@
                 <a:ea typeface="Calibri" pitchFamily="34" charset="-122"/>
                 <a:cs typeface="Calibri" pitchFamily="34" charset="-120"/>
               </a:rPr>
-              <a:t>Root 'fer' — to carry, bring, bear</a:t>
+              <a:t>Root 'fer' — carry; bring</a:t>
             </a:r>
             <a:endParaRPr lang="en-US" sz="1600" dirty="0"/>
           </a:p>
@@ -14181,7 +14339,7 @@
                 <a:ea typeface="Calibri" pitchFamily="34" charset="-122"/>
                 <a:cs typeface="Calibri" pitchFamily="34" charset="-120"/>
               </a:rPr>
-              <a:t>Word Labs  •  wordlabs.app  •  Root: 'fer' = to carry, bring, bear</a:t>
+              <a:t>Word Labs  •  wordlabs.app  •  Root: 'fer' = carry; bring</a:t>
             </a:r>
             <a:endParaRPr lang="en-US" sz="800" dirty="0"/>
           </a:p>
@@ -14320,7 +14478,7 @@
                 <a:ea typeface="Trebuchet MS" pitchFamily="34" charset="-122"/>
                 <a:cs typeface="Trebuchet MS" pitchFamily="34" charset="-120"/>
               </a:rPr>
-              <a:t>prefer</a:t>
+              <a:t>offers</a:t>
             </a:r>
             <a:endParaRPr lang="en-US" sz="2800" dirty="0"/>
           </a:p>
@@ -14400,7 +14558,7 @@
         </p:nvSpPr>
         <p:spPr>
           <a:xfrm>
-            <a:off x="2938272" y="2258568"/>
+            <a:off x="2221992" y="2258568"/>
             <a:ext cx="1828800" cy="292608"/>
           </a:xfrm>
           <a:prstGeom prst="rect">
@@ -14434,7 +14592,7 @@
         </p:nvSpPr>
         <p:spPr>
           <a:xfrm>
-            <a:off x="2938272" y="2258568"/>
+            <a:off x="2221992" y="2258568"/>
             <a:ext cx="1828800" cy="292608"/>
           </a:xfrm>
           <a:prstGeom prst="rect">
@@ -14459,7 +14617,7 @@
                 <a:ea typeface="Trebuchet MS" pitchFamily="34" charset="-122"/>
                 <a:cs typeface="Trebuchet MS" pitchFamily="34" charset="-120"/>
               </a:rPr>
-              <a:t>pre</a:t>
+              <a:t>ob</a:t>
             </a:r>
             <a:endParaRPr lang="en-US" sz="1300" dirty="0"/>
           </a:p>
@@ -14473,7 +14631,7 @@
         </p:nvSpPr>
         <p:spPr>
           <a:xfrm>
-            <a:off x="2938272" y="2569464"/>
+            <a:off x="2221992" y="2569464"/>
             <a:ext cx="1828800" cy="201168"/>
           </a:xfrm>
           <a:prstGeom prst="rect">
@@ -14498,7 +14656,7 @@
                 <a:ea typeface="Calibri" pitchFamily="34" charset="-122"/>
                 <a:cs typeface="Calibri" pitchFamily="34" charset="-120"/>
               </a:rPr>
-              <a:t>before, in front of</a:t>
+              <a:t>against; in the way of; towards</a:t>
             </a:r>
             <a:endParaRPr lang="en-US" sz="850" dirty="0"/>
           </a:p>
@@ -14512,7 +14670,7 @@
         </p:nvSpPr>
         <p:spPr>
           <a:xfrm>
-            <a:off x="5803392" y="2258568"/>
+            <a:off x="4370832" y="2258568"/>
             <a:ext cx="1828800" cy="292608"/>
           </a:xfrm>
           <a:prstGeom prst="rect">
@@ -14546,7 +14704,7 @@
         </p:nvSpPr>
         <p:spPr>
           <a:xfrm>
-            <a:off x="5803392" y="2258568"/>
+            <a:off x="4370832" y="2258568"/>
             <a:ext cx="1828800" cy="292608"/>
           </a:xfrm>
           <a:prstGeom prst="rect">
@@ -14585,7 +14743,7 @@
         </p:nvSpPr>
         <p:spPr>
           <a:xfrm>
-            <a:off x="5803392" y="2569464"/>
+            <a:off x="4370832" y="2569464"/>
             <a:ext cx="1828800" cy="201168"/>
           </a:xfrm>
           <a:prstGeom prst="rect">
@@ -14610,7 +14768,7 @@
                 <a:ea typeface="Calibri" pitchFamily="34" charset="-122"/>
                 <a:cs typeface="Calibri" pitchFamily="34" charset="-120"/>
               </a:rPr>
-              <a:t>to carry, bring</a:t>
+              <a:t>carry; bring</a:t>
             </a:r>
             <a:endParaRPr lang="en-US" sz="850" dirty="0"/>
           </a:p>
@@ -14619,6 +14777,118 @@
       <p:sp>
         <p:nvSpPr>
           <p:cNvPr id="22" name="Shape 20"/>
+          <p:cNvSpPr/>
+          <p:nvPr/>
+        </p:nvSpPr>
+        <p:spPr>
+          <a:xfrm>
+            <a:off x="6519672" y="2258568"/>
+            <a:ext cx="1828800" cy="292608"/>
+          </a:xfrm>
+          <a:prstGeom prst="rect">
+            <a:avLst>
+              <a:gd name="adj" fmla="val 25000"/>
+            </a:avLst>
+          </a:prstGeom>
+          <a:solidFill>
+            <a:srgbClr val="FCE7F3"/>
+          </a:solidFill>
+          <a:ln w="19050">
+            <a:solidFill>
+              <a:srgbClr val="DB2777"/>
+            </a:solidFill>
+            <a:prstDash val="solid"/>
+          </a:ln>
+          <a:effectLst>
+            <a:outerShdw sx="100000" sy="100000" kx="0" ky="0" algn="bl" rotWithShape="0" blurRad="101600" dist="38100" dir="8100000">
+              <a:srgbClr val="000000">
+                <a:alpha val="12000"/>
+              </a:srgbClr>
+            </a:outerShdw>
+          </a:effectLst>
+        </p:spPr>
+      </p:sp>
+      <p:sp>
+        <p:nvSpPr>
+          <p:cNvPr id="23" name="Text 21"/>
+          <p:cNvSpPr/>
+          <p:nvPr/>
+        </p:nvSpPr>
+        <p:spPr>
+          <a:xfrm>
+            <a:off x="6519672" y="2258568"/>
+            <a:ext cx="1828800" cy="292608"/>
+          </a:xfrm>
+          <a:prstGeom prst="rect">
+            <a:avLst/>
+          </a:prstGeom>
+          <a:noFill/>
+          <a:ln/>
+        </p:spPr>
+        <p:txBody>
+          <a:bodyPr wrap="square" lIns="0" tIns="0" rIns="0" bIns="0" rtlCol="0" anchor="ctr"/>
+          <a:lstStyle/>
+          <a:p>
+            <a:pPr algn="ctr" indent="0" marL="0">
+              <a:buNone/>
+            </a:pPr>
+            <a:r>
+              <a:rPr lang="en-US" sz="1300" b="1" dirty="0">
+                <a:solidFill>
+                  <a:srgbClr val="9D174D"/>
+                </a:solidFill>
+                <a:latin typeface="Trebuchet MS" pitchFamily="34" charset="0"/>
+                <a:ea typeface="Trebuchet MS" pitchFamily="34" charset="-122"/>
+                <a:cs typeface="Trebuchet MS" pitchFamily="34" charset="-120"/>
+              </a:rPr>
+              <a:t>s</a:t>
+            </a:r>
+            <a:endParaRPr lang="en-US" sz="1300" dirty="0"/>
+          </a:p>
+        </p:txBody>
+      </p:sp>
+      <p:sp>
+        <p:nvSpPr>
+          <p:cNvPr id="24" name="Text 22"/>
+          <p:cNvSpPr/>
+          <p:nvPr/>
+        </p:nvSpPr>
+        <p:spPr>
+          <a:xfrm>
+            <a:off x="6519672" y="2569464"/>
+            <a:ext cx="1828800" cy="201168"/>
+          </a:xfrm>
+          <a:prstGeom prst="rect">
+            <a:avLst/>
+          </a:prstGeom>
+          <a:noFill/>
+          <a:ln/>
+        </p:spPr>
+        <p:txBody>
+          <a:bodyPr wrap="square" lIns="0" tIns="0" rIns="0" bIns="0" rtlCol="0" anchor="t"/>
+          <a:lstStyle/>
+          <a:p>
+            <a:pPr algn="ctr" indent="0" marL="0">
+              <a:buNone/>
+            </a:pPr>
+            <a:r>
+              <a:rPr lang="en-US" sz="850" dirty="0">
+                <a:solidFill>
+                  <a:srgbClr val="475569"/>
+                </a:solidFill>
+                <a:latin typeface="Calibri" pitchFamily="34" charset="0"/>
+                <a:ea typeface="Calibri" pitchFamily="34" charset="-122"/>
+                <a:cs typeface="Calibri" pitchFamily="34" charset="-120"/>
+              </a:rPr>
+              <a:t>plural or present tense</a:t>
+            </a:r>
+            <a:endParaRPr lang="en-US" sz="850" dirty="0"/>
+          </a:p>
+        </p:txBody>
+      </p:sp>
+      <p:sp>
+        <p:nvSpPr>
+          <p:cNvPr id="25" name="Shape 23"/>
           <p:cNvSpPr/>
           <p:nvPr/>
         </p:nvSpPr>
@@ -14645,7 +14915,7 @@
       </p:sp>
       <p:sp>
         <p:nvSpPr>
-          <p:cNvPr id="23" name="Text 21"/>
+          <p:cNvPr id="26" name="Text 24"/>
           <p:cNvSpPr/>
           <p:nvPr/>
         </p:nvSpPr>
@@ -14684,7 +14954,7 @@
       </p:sp>
       <p:sp>
         <p:nvSpPr>
-          <p:cNvPr id="24" name="Shape 22"/>
+          <p:cNvPr id="27" name="Shape 25"/>
           <p:cNvSpPr/>
           <p:nvPr/>
         </p:nvSpPr>
@@ -14711,7 +14981,7 @@
       </p:sp>
       <p:sp>
         <p:nvSpPr>
-          <p:cNvPr id="25" name="Shape 23"/>
+          <p:cNvPr id="28" name="Shape 26"/>
           <p:cNvSpPr/>
           <p:nvPr/>
         </p:nvSpPr>
@@ -14738,7 +15008,7 @@
       </p:sp>
       <p:sp>
         <p:nvSpPr>
-          <p:cNvPr id="26" name="Text 24"/>
+          <p:cNvPr id="29" name="Text 27"/>
           <p:cNvSpPr/>
           <p:nvPr/>
         </p:nvSpPr>
@@ -14769,7 +15039,7 @@
                 <a:ea typeface="Trebuchet MS" pitchFamily="34" charset="-122"/>
                 <a:cs typeface="Trebuchet MS" pitchFamily="34" charset="-120"/>
               </a:rPr>
-              <a:t>pre</a:t>
+              <a:t>of</a:t>
             </a:r>
             <a:endParaRPr lang="en-US" sz="1400" dirty="0"/>
           </a:p>
@@ -14777,7 +15047,7 @@
       </p:sp>
       <p:sp>
         <p:nvSpPr>
-          <p:cNvPr id="27" name="Text 25"/>
+          <p:cNvPr id="30" name="Text 28"/>
           <p:cNvSpPr/>
           <p:nvPr/>
         </p:nvSpPr>
@@ -14816,7 +15086,7 @@
       </p:sp>
       <p:sp>
         <p:nvSpPr>
-          <p:cNvPr id="28" name="Shape 26"/>
+          <p:cNvPr id="31" name="Shape 29"/>
           <p:cNvSpPr/>
           <p:nvPr/>
         </p:nvSpPr>
@@ -14843,7 +15113,7 @@
       </p:sp>
       <p:sp>
         <p:nvSpPr>
-          <p:cNvPr id="29" name="Text 27"/>
+          <p:cNvPr id="32" name="Text 30"/>
           <p:cNvSpPr/>
           <p:nvPr/>
         </p:nvSpPr>
@@ -14874,7 +15144,7 @@
                 <a:ea typeface="Trebuchet MS" pitchFamily="34" charset="-122"/>
                 <a:cs typeface="Trebuchet MS" pitchFamily="34" charset="-120"/>
               </a:rPr>
-              <a:t>fer</a:t>
+              <a:t>fers</a:t>
             </a:r>
             <a:endParaRPr lang="en-US" sz="1400" dirty="0"/>
           </a:p>
@@ -14882,7 +15152,7 @@
       </p:sp>
       <p:sp>
         <p:nvSpPr>
-          <p:cNvPr id="30" name="Shape 28"/>
+          <p:cNvPr id="33" name="Shape 31"/>
           <p:cNvSpPr/>
           <p:nvPr/>
         </p:nvSpPr>
@@ -14909,7 +15179,7 @@
       </p:sp>
       <p:sp>
         <p:nvSpPr>
-          <p:cNvPr id="31" name="Text 29"/>
+          <p:cNvPr id="34" name="Text 32"/>
           <p:cNvSpPr/>
           <p:nvPr/>
         </p:nvSpPr>
@@ -14948,7 +15218,7 @@
       </p:sp>
       <p:sp>
         <p:nvSpPr>
-          <p:cNvPr id="32" name="Shape 30"/>
+          <p:cNvPr id="35" name="Shape 33"/>
           <p:cNvSpPr/>
           <p:nvPr/>
         </p:nvSpPr>
@@ -14975,13 +15245,13 @@
       </p:sp>
       <p:sp>
         <p:nvSpPr>
-          <p:cNvPr id="33" name="Shape 31"/>
-          <p:cNvSpPr/>
-          <p:nvPr/>
-        </p:nvSpPr>
-        <p:spPr>
-          <a:xfrm>
-            <a:off x="2427732" y="4169664"/>
+          <p:cNvPr id="36" name="Shape 34"/>
+          <p:cNvSpPr/>
+          <p:nvPr/>
+        </p:nvSpPr>
+        <p:spPr>
+          <a:xfrm>
+            <a:off x="2670048" y="4169664"/>
             <a:ext cx="685800" cy="475488"/>
           </a:xfrm>
           <a:prstGeom prst="rect">
@@ -15002,13 +15272,13 @@
       </p:sp>
       <p:sp>
         <p:nvSpPr>
-          <p:cNvPr id="34" name="Text 32"/>
-          <p:cNvSpPr/>
-          <p:nvPr/>
-        </p:nvSpPr>
-        <p:spPr>
-          <a:xfrm>
-            <a:off x="2427732" y="4169664"/>
+          <p:cNvPr id="37" name="Text 35"/>
+          <p:cNvSpPr/>
+          <p:nvPr/>
+        </p:nvSpPr>
+        <p:spPr>
+          <a:xfrm>
+            <a:off x="2670048" y="4169664"/>
             <a:ext cx="685800" cy="475488"/>
           </a:xfrm>
           <a:prstGeom prst="rect">
@@ -15033,7 +15303,7 @@
                 <a:ea typeface="Trebuchet MS" pitchFamily="34" charset="-122"/>
                 <a:cs typeface="Trebuchet MS" pitchFamily="34" charset="-120"/>
               </a:rPr>
-              <a:t>p</a:t>
+              <a:t>o</a:t>
             </a:r>
             <a:endParaRPr lang="en-US" sz="900" dirty="0"/>
           </a:p>
@@ -15041,13 +15311,13 @@
       </p:sp>
       <p:sp>
         <p:nvSpPr>
-          <p:cNvPr id="35" name="Shape 33"/>
-          <p:cNvSpPr/>
-          <p:nvPr/>
-        </p:nvSpPr>
-        <p:spPr>
-          <a:xfrm>
-            <a:off x="3639312" y="4169664"/>
+          <p:cNvPr id="38" name="Shape 36"/>
+          <p:cNvSpPr/>
+          <p:nvPr/>
+        </p:nvSpPr>
+        <p:spPr>
+          <a:xfrm>
+            <a:off x="4123944" y="4169664"/>
             <a:ext cx="685800" cy="475488"/>
           </a:xfrm>
           <a:prstGeom prst="rect">
@@ -15068,13 +15338,13 @@
       </p:sp>
       <p:sp>
         <p:nvSpPr>
-          <p:cNvPr id="36" name="Text 34"/>
-          <p:cNvSpPr/>
-          <p:nvPr/>
-        </p:nvSpPr>
-        <p:spPr>
-          <a:xfrm>
-            <a:off x="3639312" y="4169664"/>
+          <p:cNvPr id="39" name="Text 37"/>
+          <p:cNvSpPr/>
+          <p:nvPr/>
+        </p:nvSpPr>
+        <p:spPr>
+          <a:xfrm>
+            <a:off x="4123944" y="4169664"/>
             <a:ext cx="685800" cy="475488"/>
           </a:xfrm>
           <a:prstGeom prst="rect">
@@ -15099,7 +15369,7 @@
                 <a:ea typeface="Trebuchet MS" pitchFamily="34" charset="-122"/>
                 <a:cs typeface="Trebuchet MS" pitchFamily="34" charset="-120"/>
               </a:rPr>
-              <a:t>r</a:t>
+              <a:t>ff</a:t>
             </a:r>
             <a:endParaRPr lang="en-US" sz="900" dirty="0"/>
           </a:p>
@@ -15107,13 +15377,13 @@
       </p:sp>
       <p:sp>
         <p:nvSpPr>
-          <p:cNvPr id="37" name="Shape 35"/>
-          <p:cNvSpPr/>
-          <p:nvPr/>
-        </p:nvSpPr>
-        <p:spPr>
-          <a:xfrm>
-            <a:off x="4850892" y="4169664"/>
+          <p:cNvPr id="40" name="Shape 38"/>
+          <p:cNvSpPr/>
+          <p:nvPr/>
+        </p:nvSpPr>
+        <p:spPr>
+          <a:xfrm>
+            <a:off x="5577840" y="4169664"/>
             <a:ext cx="685800" cy="475488"/>
           </a:xfrm>
           <a:prstGeom prst="rect">
@@ -15134,13 +15404,13 @@
       </p:sp>
       <p:sp>
         <p:nvSpPr>
-          <p:cNvPr id="38" name="Text 36"/>
-          <p:cNvSpPr/>
-          <p:nvPr/>
-        </p:nvSpPr>
-        <p:spPr>
-          <a:xfrm>
-            <a:off x="4850892" y="4169664"/>
+          <p:cNvPr id="41" name="Text 39"/>
+          <p:cNvSpPr/>
+          <p:nvPr/>
+        </p:nvSpPr>
+        <p:spPr>
+          <a:xfrm>
+            <a:off x="5577840" y="4169664"/>
             <a:ext cx="685800" cy="475488"/>
           </a:xfrm>
           <a:prstGeom prst="rect">
@@ -15165,7 +15435,7 @@
                 <a:ea typeface="Trebuchet MS" pitchFamily="34" charset="-122"/>
                 <a:cs typeface="Trebuchet MS" pitchFamily="34" charset="-120"/>
               </a:rPr>
-              <a:t>e</a:t>
+              <a:t>er</a:t>
             </a:r>
             <a:endParaRPr lang="en-US" sz="900" dirty="0"/>
           </a:p>
@@ -15173,13 +15443,13 @@
       </p:sp>
       <p:sp>
         <p:nvSpPr>
-          <p:cNvPr id="39" name="Shape 37"/>
-          <p:cNvSpPr/>
-          <p:nvPr/>
-        </p:nvSpPr>
-        <p:spPr>
-          <a:xfrm>
-            <a:off x="6062472" y="4169664"/>
+          <p:cNvPr id="42" name="Shape 40"/>
+          <p:cNvSpPr/>
+          <p:nvPr/>
+        </p:nvSpPr>
+        <p:spPr>
+          <a:xfrm>
+            <a:off x="7031736" y="4169664"/>
             <a:ext cx="685800" cy="475488"/>
           </a:xfrm>
           <a:prstGeom prst="rect">
@@ -15200,13 +15470,13 @@
       </p:sp>
       <p:sp>
         <p:nvSpPr>
-          <p:cNvPr id="40" name="Text 38"/>
-          <p:cNvSpPr/>
-          <p:nvPr/>
-        </p:nvSpPr>
-        <p:spPr>
-          <a:xfrm>
-            <a:off x="6062472" y="4169664"/>
+          <p:cNvPr id="43" name="Text 41"/>
+          <p:cNvSpPr/>
+          <p:nvPr/>
+        </p:nvSpPr>
+        <p:spPr>
+          <a:xfrm>
+            <a:off x="7031736" y="4169664"/>
             <a:ext cx="685800" cy="475488"/>
           </a:xfrm>
           <a:prstGeom prst="rect">
@@ -15231,73 +15501,7 @@
                 <a:ea typeface="Trebuchet MS" pitchFamily="34" charset="-122"/>
                 <a:cs typeface="Trebuchet MS" pitchFamily="34" charset="-120"/>
               </a:rPr>
-              <a:t>f</a:t>
-            </a:r>
-            <a:endParaRPr lang="en-US" sz="900" dirty="0"/>
-          </a:p>
-        </p:txBody>
-      </p:sp>
-      <p:sp>
-        <p:nvSpPr>
-          <p:cNvPr id="41" name="Shape 39"/>
-          <p:cNvSpPr/>
-          <p:nvPr/>
-        </p:nvSpPr>
-        <p:spPr>
-          <a:xfrm>
-            <a:off x="7274052" y="4169664"/>
-            <a:ext cx="685800" cy="475488"/>
-          </a:xfrm>
-          <a:prstGeom prst="rect">
-            <a:avLst>
-              <a:gd name="adj" fmla="val 7692"/>
-            </a:avLst>
-          </a:prstGeom>
-          <a:solidFill>
-            <a:srgbClr val="FFFFFF"/>
-          </a:solidFill>
-          <a:ln w="12700">
-            <a:solidFill>
-              <a:srgbClr val="DB2777"/>
-            </a:solidFill>
-            <a:prstDash val="solid"/>
-          </a:ln>
-        </p:spPr>
-      </p:sp>
-      <p:sp>
-        <p:nvSpPr>
-          <p:cNvPr id="42" name="Text 40"/>
-          <p:cNvSpPr/>
-          <p:nvPr/>
-        </p:nvSpPr>
-        <p:spPr>
-          <a:xfrm>
-            <a:off x="7274052" y="4169664"/>
-            <a:ext cx="685800" cy="475488"/>
-          </a:xfrm>
-          <a:prstGeom prst="rect">
-            <a:avLst/>
-          </a:prstGeom>
-          <a:noFill/>
-          <a:ln/>
-        </p:spPr>
-        <p:txBody>
-          <a:bodyPr wrap="square" lIns="0" tIns="0" rIns="0" bIns="0" rtlCol="0" anchor="ctr"/>
-          <a:lstStyle/>
-          <a:p>
-            <a:pPr algn="ctr" indent="0" marL="0">
-              <a:buNone/>
-            </a:pPr>
-            <a:r>
-              <a:rPr lang="en-US" sz="900" b="1" dirty="0">
-                <a:solidFill>
-                  <a:srgbClr val="9D174D"/>
-                </a:solidFill>
-                <a:latin typeface="Trebuchet MS" pitchFamily="34" charset="0"/>
-                <a:ea typeface="Trebuchet MS" pitchFamily="34" charset="-122"/>
-                <a:cs typeface="Trebuchet MS" pitchFamily="34" charset="-120"/>
-              </a:rPr>
-              <a:t>er</a:t>
+              <a:t>s</a:t>
             </a:r>
             <a:endParaRPr lang="en-US" sz="900" dirty="0"/>
           </a:p>
@@ -15871,7 +16075,7 @@
                 <a:ea typeface="Calibri" pitchFamily="34" charset="-122"/>
                 <a:cs typeface="Calibri" pitchFamily="34" charset="-120"/>
               </a:rPr>
-              <a:t>Word Labs  •  wordlabs.app  •  Root: 'fer' = to carry, bring, bear</a:t>
+              <a:t>Word Labs  •  wordlabs.app  •  Root: 'fer' = carry; bring</a:t>
             </a:r>
             <a:endParaRPr lang="en-US" sz="800" dirty="0"/>
           </a:p>
@@ -16511,7 +16715,7 @@
                 <a:ea typeface="Calibri" pitchFamily="34" charset="-122"/>
                 <a:cs typeface="Calibri" pitchFamily="34" charset="-120"/>
               </a:rPr>
-              <a:t>Word Labs  •  wordlabs.app  •  Root: 'fer' = to carry, bring, bear</a:t>
+              <a:t>Word Labs  •  wordlabs.app  •  Root: 'fer' = carry; bring</a:t>
             </a:r>
             <a:endParaRPr lang="en-US" sz="800" dirty="0"/>
           </a:p>
@@ -16623,7 +16827,7 @@
                 <a:ea typeface="Calibri" pitchFamily="34" charset="-122"/>
                 <a:cs typeface="Calibri" pitchFamily="34" charset="-120"/>
               </a:rPr>
-              <a:t>The </a:t>
+              <a:t>He </a:t>
             </a:r>
             <a:pPr algn="l" indent="0" marL="0">
               <a:buNone/>
@@ -16640,7 +16844,7 @@
                 <a:ea typeface="Calibri" pitchFamily="34" charset="-122"/>
                 <a:cs typeface="Calibri" pitchFamily="34" charset="-120"/>
               </a:rPr>
-              <a:t>conference</a:t>
+              <a:t>offered</a:t>
             </a:r>
             <a:pPr algn="l" indent="0" marL="0">
               <a:buNone/>
@@ -16654,7 +16858,7 @@
                 <a:ea typeface="Calibri" pitchFamily="34" charset="-122"/>
                 <a:cs typeface="Calibri" pitchFamily="34" charset="-120"/>
               </a:rPr>
-              <a:t> speaker will </a:t>
+              <a:t> his seat to the elderly man on the bus. The shop is </a:t>
             </a:r>
             <a:pPr algn="l" indent="0" marL="0">
               <a:buNone/>
@@ -16671,7 +16875,7 @@
                 <a:ea typeface="Calibri" pitchFamily="34" charset="-122"/>
                 <a:cs typeface="Calibri" pitchFamily="34" charset="-120"/>
               </a:rPr>
-              <a:t>refer</a:t>
+              <a:t>offering</a:t>
             </a:r>
             <a:pPr algn="l" indent="0" marL="0">
               <a:buNone/>
@@ -16685,7 +16889,7 @@
                 <a:ea typeface="Calibri" pitchFamily="34" charset="-122"/>
                 <a:cs typeface="Calibri" pitchFamily="34" charset="-120"/>
               </a:rPr>
-              <a:t> to the </a:t>
+              <a:t> a big discount on all books this week. The festival had many food </a:t>
             </a:r>
             <a:pPr algn="l" indent="0" marL="0">
               <a:buNone/>
@@ -16702,7 +16906,7 @@
                 <a:ea typeface="Calibri" pitchFamily="34" charset="-122"/>
                 <a:cs typeface="Calibri" pitchFamily="34" charset="-120"/>
               </a:rPr>
-              <a:t>transfer</a:t>
+              <a:t>offerings</a:t>
             </a:r>
             <a:pPr algn="l" indent="0" marL="0">
               <a:buNone/>
@@ -16716,7 +16920,7 @@
                 <a:ea typeface="Calibri" pitchFamily="34" charset="-122"/>
                 <a:cs typeface="Calibri" pitchFamily="34" charset="-120"/>
               </a:rPr>
-              <a:t> of knowledge between schools.</a:t>
+              <a:t> for visitors to try.</a:t>
             </a:r>
             <a:endParaRPr lang="en-US" sz="1800" dirty="0"/>
           </a:p>
@@ -16871,7 +17075,7 @@
                 <a:ea typeface="Trebuchet MS" pitchFamily="34" charset="-122"/>
                 <a:cs typeface="Trebuchet MS" pitchFamily="34" charset="-120"/>
               </a:rPr>
-              <a:t>conference</a:t>
+              <a:t>offered</a:t>
             </a:r>
             <a:endParaRPr lang="en-US" sz="1400" dirty="0"/>
           </a:p>
@@ -16999,7 +17203,7 @@
                 <a:ea typeface="Trebuchet MS" pitchFamily="34" charset="-122"/>
                 <a:cs typeface="Trebuchet MS" pitchFamily="34" charset="-120"/>
               </a:rPr>
-              <a:t>refer</a:t>
+              <a:t>offering</a:t>
             </a:r>
             <a:endParaRPr lang="en-US" sz="1400" dirty="0"/>
           </a:p>
@@ -17127,7 +17331,7 @@
                 <a:ea typeface="Trebuchet MS" pitchFamily="34" charset="-122"/>
                 <a:cs typeface="Trebuchet MS" pitchFamily="34" charset="-120"/>
               </a:rPr>
-              <a:t>transfer</a:t>
+              <a:t>offerings</a:t>
             </a:r>
             <a:endParaRPr lang="en-US" sz="1400" dirty="0"/>
           </a:p>
@@ -17458,7 +17662,7 @@
                 <a:ea typeface="Calibri" pitchFamily="34" charset="-122"/>
                 <a:cs typeface="Calibri" pitchFamily="34" charset="-120"/>
               </a:rPr>
-              <a:t>Word Labs  •  wordlabs.app  •  Root: 'fer' = to carry, bring, bear</a:t>
+              <a:t>Word Labs  •  wordlabs.app  •  Root: 'fer' = carry; bring</a:t>
             </a:r>
             <a:endParaRPr lang="en-US" sz="800" dirty="0"/>
           </a:p>
@@ -17597,7 +17801,7 @@
                 <a:ea typeface="Trebuchet MS" pitchFamily="34" charset="-122"/>
                 <a:cs typeface="Trebuchet MS" pitchFamily="34" charset="-120"/>
               </a:rPr>
-              <a:t>conference</a:t>
+              <a:t>offered</a:t>
             </a:r>
             <a:endParaRPr lang="en-US" sz="2800" dirty="0"/>
           </a:p>
@@ -18285,7 +18489,7 @@
                 <a:ea typeface="Calibri" pitchFamily="34" charset="-122"/>
                 <a:cs typeface="Calibri" pitchFamily="34" charset="-120"/>
               </a:rPr>
-              <a:t>Word Labs  •  wordlabs.app  •  Root: 'fer' = to carry, bring, bear</a:t>
+              <a:t>Word Labs  •  wordlabs.app  •  Root: 'fer' = carry; bring</a:t>
             </a:r>
             <a:endParaRPr lang="en-US" sz="800" dirty="0"/>
           </a:p>
@@ -18424,7 +18628,7 @@
                 <a:ea typeface="Trebuchet MS" pitchFamily="34" charset="-122"/>
                 <a:cs typeface="Trebuchet MS" pitchFamily="34" charset="-120"/>
               </a:rPr>
-              <a:t>conference</a:t>
+              <a:t>offered</a:t>
             </a:r>
             <a:endParaRPr lang="en-US" sz="2800" dirty="0"/>
           </a:p>
@@ -18563,7 +18767,7 @@
                 <a:ea typeface="Trebuchet MS" pitchFamily="34" charset="-122"/>
                 <a:cs typeface="Trebuchet MS" pitchFamily="34" charset="-120"/>
               </a:rPr>
-              <a:t>con</a:t>
+              <a:t>ob</a:t>
             </a:r>
             <a:endParaRPr lang="en-US" sz="1300" dirty="0"/>
           </a:p>
@@ -18602,7 +18806,7 @@
                 <a:ea typeface="Calibri" pitchFamily="34" charset="-122"/>
                 <a:cs typeface="Calibri" pitchFamily="34" charset="-120"/>
               </a:rPr>
-              <a:t>together, with</a:t>
+              <a:t>against; in the way of; towards</a:t>
             </a:r>
             <a:endParaRPr lang="en-US" sz="850" dirty="0"/>
           </a:p>
@@ -18714,7 +18918,7 @@
                 <a:ea typeface="Calibri" pitchFamily="34" charset="-122"/>
                 <a:cs typeface="Calibri" pitchFamily="34" charset="-120"/>
               </a:rPr>
-              <a:t>to carry, bring</a:t>
+              <a:t>carry; bring</a:t>
             </a:r>
             <a:endParaRPr lang="en-US" sz="850" dirty="0"/>
           </a:p>
@@ -18787,7 +18991,7 @@
                 <a:ea typeface="Trebuchet MS" pitchFamily="34" charset="-122"/>
                 <a:cs typeface="Trebuchet MS" pitchFamily="34" charset="-120"/>
               </a:rPr>
-              <a:t>ence</a:t>
+              <a:t>ed</a:t>
             </a:r>
             <a:endParaRPr lang="en-US" sz="1300" dirty="0"/>
           </a:p>
@@ -18826,7 +19030,7 @@
                 <a:ea typeface="Calibri" pitchFamily="34" charset="-122"/>
                 <a:cs typeface="Calibri" pitchFamily="34" charset="-120"/>
               </a:rPr>
-              <a:t>state or quality of</a:t>
+              <a:t>past tense</a:t>
             </a:r>
             <a:endParaRPr lang="en-US" sz="850" dirty="0"/>
           </a:p>
@@ -19382,7 +19586,7 @@
                 <a:ea typeface="Calibri" pitchFamily="34" charset="-122"/>
                 <a:cs typeface="Calibri" pitchFamily="34" charset="-120"/>
               </a:rPr>
-              <a:t>Word Labs  •  wordlabs.app  •  Root: 'fer' = to carry, bring, bear</a:t>
+              <a:t>Word Labs  •  wordlabs.app  •  Root: 'fer' = carry; bring</a:t>
             </a:r>
             <a:endParaRPr lang="en-US" sz="800" dirty="0"/>
           </a:p>
@@ -19521,7 +19725,7 @@
                 <a:ea typeface="Trebuchet MS" pitchFamily="34" charset="-122"/>
                 <a:cs typeface="Trebuchet MS" pitchFamily="34" charset="-120"/>
               </a:rPr>
-              <a:t>conference</a:t>
+              <a:t>offered</a:t>
             </a:r>
             <a:endParaRPr lang="en-US" sz="2800" dirty="0"/>
           </a:p>
@@ -19660,7 +19864,7 @@
                 <a:ea typeface="Trebuchet MS" pitchFamily="34" charset="-122"/>
                 <a:cs typeface="Trebuchet MS" pitchFamily="34" charset="-120"/>
               </a:rPr>
-              <a:t>con</a:t>
+              <a:t>ob</a:t>
             </a:r>
             <a:endParaRPr lang="en-US" sz="1300" dirty="0"/>
           </a:p>
@@ -19699,7 +19903,7 @@
                 <a:ea typeface="Calibri" pitchFamily="34" charset="-122"/>
                 <a:cs typeface="Calibri" pitchFamily="34" charset="-120"/>
               </a:rPr>
-              <a:t>together, with</a:t>
+              <a:t>against; in the way of; towards</a:t>
             </a:r>
             <a:endParaRPr lang="en-US" sz="850" dirty="0"/>
           </a:p>
@@ -19811,7 +20015,7 @@
                 <a:ea typeface="Calibri" pitchFamily="34" charset="-122"/>
                 <a:cs typeface="Calibri" pitchFamily="34" charset="-120"/>
               </a:rPr>
-              <a:t>to carry, bring</a:t>
+              <a:t>carry; bring</a:t>
             </a:r>
             <a:endParaRPr lang="en-US" sz="850" dirty="0"/>
           </a:p>
@@ -19884,7 +20088,7 @@
                 <a:ea typeface="Trebuchet MS" pitchFamily="34" charset="-122"/>
                 <a:cs typeface="Trebuchet MS" pitchFamily="34" charset="-120"/>
               </a:rPr>
-              <a:t>ence</a:t>
+              <a:t>ed</a:t>
             </a:r>
             <a:endParaRPr lang="en-US" sz="1300" dirty="0"/>
           </a:p>
@@ -19923,7 +20127,7 @@
                 <a:ea typeface="Calibri" pitchFamily="34" charset="-122"/>
                 <a:cs typeface="Calibri" pitchFamily="34" charset="-120"/>
               </a:rPr>
-              <a:t>state or quality of</a:t>
+              <a:t>past tense</a:t>
             </a:r>
             <a:endParaRPr lang="en-US" sz="850" dirty="0"/>
           </a:p>
@@ -20030,7 +20234,7 @@
         </p:nvSpPr>
         <p:spPr>
           <a:xfrm>
-            <a:off x="2313432" y="3364992"/>
+            <a:off x="2999232" y="3364992"/>
             <a:ext cx="1645920" cy="475488"/>
           </a:xfrm>
           <a:prstGeom prst="rect">
@@ -20057,7 +20261,7 @@
         </p:nvSpPr>
         <p:spPr>
           <a:xfrm>
-            <a:off x="2313432" y="3364992"/>
+            <a:off x="2999232" y="3364992"/>
             <a:ext cx="1645920" cy="475488"/>
           </a:xfrm>
           <a:prstGeom prst="rect">
@@ -20082,7 +20286,7 @@
                 <a:ea typeface="Trebuchet MS" pitchFamily="34" charset="-122"/>
                 <a:cs typeface="Trebuchet MS" pitchFamily="34" charset="-120"/>
               </a:rPr>
-              <a:t>con</a:t>
+              <a:t>off</a:t>
             </a:r>
             <a:endParaRPr lang="en-US" sz="1400" dirty="0"/>
           </a:p>
@@ -20096,8 +20300,8 @@
         </p:nvSpPr>
         <p:spPr>
           <a:xfrm>
-            <a:off x="3959352" y="3364992"/>
-            <a:ext cx="411480" cy="475488"/>
+            <a:off x="4645152" y="3364992"/>
+            <a:ext cx="1097280" cy="475488"/>
           </a:xfrm>
           <a:prstGeom prst="rect">
             <a:avLst/>
@@ -20135,7 +20339,7 @@
         </p:nvSpPr>
         <p:spPr>
           <a:xfrm>
-            <a:off x="4370832" y="3364992"/>
+            <a:off x="5742432" y="3364992"/>
             <a:ext cx="1645920" cy="475488"/>
           </a:xfrm>
           <a:prstGeom prst="rect">
@@ -20162,7 +20366,7 @@
         </p:nvSpPr>
         <p:spPr>
           <a:xfrm>
-            <a:off x="4370832" y="3364992"/>
+            <a:off x="5742432" y="3364992"/>
             <a:ext cx="1645920" cy="475488"/>
           </a:xfrm>
           <a:prstGeom prst="rect">
@@ -20187,7 +20391,7 @@
                 <a:ea typeface="Trebuchet MS" pitchFamily="34" charset="-122"/>
                 <a:cs typeface="Trebuchet MS" pitchFamily="34" charset="-120"/>
               </a:rPr>
-              <a:t>fer</a:t>
+              <a:t>ered</a:t>
             </a:r>
             <a:endParaRPr lang="en-US" sz="1400" dirty="0"/>
           </a:p>
@@ -20195,14 +20399,41 @@
       </p:sp>
       <p:sp>
         <p:nvSpPr>
-          <p:cNvPr id="33" name="Text 31"/>
-          <p:cNvSpPr/>
-          <p:nvPr/>
-        </p:nvSpPr>
-        <p:spPr>
-          <a:xfrm>
-            <a:off x="6016752" y="3364992"/>
-            <a:ext cx="411480" cy="475488"/>
+          <p:cNvPr id="33" name="Shape 31"/>
+          <p:cNvSpPr/>
+          <p:nvPr/>
+        </p:nvSpPr>
+        <p:spPr>
+          <a:xfrm>
+            <a:off x="365760" y="4096512"/>
+            <a:ext cx="1371600" cy="804672"/>
+          </a:xfrm>
+          <a:prstGeom prst="rect">
+            <a:avLst>
+              <a:gd name="adj" fmla="val 6818"/>
+            </a:avLst>
+          </a:prstGeom>
+          <a:solidFill>
+            <a:srgbClr val="E2E8F0"/>
+          </a:solidFill>
+          <a:ln w="12700">
+            <a:solidFill>
+              <a:srgbClr val="E2E8F0"/>
+            </a:solidFill>
+            <a:prstDash val="solid"/>
+          </a:ln>
+        </p:spPr>
+      </p:sp>
+      <p:sp>
+        <p:nvSpPr>
+          <p:cNvPr id="34" name="Text 32"/>
+          <p:cNvSpPr/>
+          <p:nvPr/>
+        </p:nvSpPr>
+        <p:spPr>
+          <a:xfrm>
+            <a:off x="365760" y="4096512"/>
+            <a:ext cx="1371600" cy="804672"/>
           </a:xfrm>
           <a:prstGeom prst="rect">
             <a:avLst/>
@@ -20218,96 +20449,30 @@
               <a:buNone/>
             </a:pPr>
             <a:r>
-              <a:rPr lang="en-US" sz="1600" b="1" dirty="0">
-                <a:solidFill>
-                  <a:srgbClr val="0D9488"/>
+              <a:rPr lang="en-US" sz="1100" b="1" dirty="0">
+                <a:solidFill>
+                  <a:srgbClr val="475569"/>
                 </a:solidFill>
                 <a:latin typeface="Trebuchet MS" pitchFamily="34" charset="0"/>
                 <a:ea typeface="Trebuchet MS" pitchFamily="34" charset="-122"/>
                 <a:cs typeface="Trebuchet MS" pitchFamily="34" charset="-120"/>
               </a:rPr>
-              <a:t>·</a:t>
-            </a:r>
-            <a:endParaRPr lang="en-US" sz="1600" dirty="0"/>
-          </a:p>
-        </p:txBody>
-      </p:sp>
-      <p:sp>
-        <p:nvSpPr>
-          <p:cNvPr id="34" name="Shape 32"/>
-          <p:cNvSpPr/>
-          <p:nvPr/>
-        </p:nvSpPr>
-        <p:spPr>
-          <a:xfrm>
-            <a:off x="6428232" y="3364992"/>
-            <a:ext cx="1645920" cy="475488"/>
-          </a:xfrm>
-          <a:prstGeom prst="rect">
-            <a:avLst>
-              <a:gd name="adj" fmla="val 9615"/>
-            </a:avLst>
-          </a:prstGeom>
-          <a:solidFill>
-            <a:srgbClr val="FFFFFF"/>
-          </a:solidFill>
-          <a:ln w="12700">
-            <a:solidFill>
-              <a:srgbClr val="0D9488"/>
-            </a:solidFill>
-            <a:prstDash val="solid"/>
-          </a:ln>
-        </p:spPr>
-      </p:sp>
-      <p:sp>
-        <p:nvSpPr>
-          <p:cNvPr id="35" name="Text 33"/>
-          <p:cNvSpPr/>
-          <p:nvPr/>
-        </p:nvSpPr>
-        <p:spPr>
-          <a:xfrm>
-            <a:off x="6428232" y="3364992"/>
-            <a:ext cx="1645920" cy="475488"/>
-          </a:xfrm>
-          <a:prstGeom prst="rect">
-            <a:avLst/>
-          </a:prstGeom>
-          <a:noFill/>
-          <a:ln/>
-        </p:spPr>
-        <p:txBody>
-          <a:bodyPr wrap="square" lIns="0" tIns="0" rIns="0" bIns="0" rtlCol="0" anchor="ctr"/>
-          <a:lstStyle/>
-          <a:p>
-            <a:pPr algn="ctr" indent="0" marL="0">
-              <a:buNone/>
-            </a:pPr>
-            <a:r>
-              <a:rPr lang="en-US" sz="1400" b="1" dirty="0">
-                <a:solidFill>
-                  <a:srgbClr val="0D9488"/>
-                </a:solidFill>
-                <a:latin typeface="Trebuchet MS" pitchFamily="34" charset="0"/>
-                <a:ea typeface="Trebuchet MS" pitchFamily="34" charset="-122"/>
-                <a:cs typeface="Trebuchet MS" pitchFamily="34" charset="-120"/>
-              </a:rPr>
-              <a:t>ence</a:t>
-            </a:r>
-            <a:endParaRPr lang="en-US" sz="1400" dirty="0"/>
-          </a:p>
-        </p:txBody>
-      </p:sp>
-      <p:sp>
-        <p:nvSpPr>
-          <p:cNvPr id="36" name="Shape 34"/>
-          <p:cNvSpPr/>
-          <p:nvPr/>
-        </p:nvSpPr>
-        <p:spPr>
-          <a:xfrm>
-            <a:off x="365760" y="4096512"/>
-            <a:ext cx="1371600" cy="804672"/>
+              <a:t>Phonemes</a:t>
+            </a:r>
+            <a:endParaRPr lang="en-US" sz="1100" dirty="0"/>
+          </a:p>
+        </p:txBody>
+      </p:sp>
+      <p:sp>
+        <p:nvSpPr>
+          <p:cNvPr id="35" name="Shape 33"/>
+          <p:cNvSpPr/>
+          <p:nvPr/>
+        </p:nvSpPr>
+        <p:spPr>
+          <a:xfrm>
+            <a:off x="1874520" y="4096512"/>
+            <a:ext cx="6903720" cy="804672"/>
           </a:xfrm>
           <a:prstGeom prst="rect">
             <a:avLst>
@@ -20315,85 +20480,19 @@
             </a:avLst>
           </a:prstGeom>
           <a:solidFill>
-            <a:srgbClr val="E2E8F0"/>
+            <a:srgbClr val="F8FAFC"/>
           </a:solidFill>
           <a:ln w="12700">
             <a:solidFill>
               <a:srgbClr val="E2E8F0"/>
             </a:solidFill>
-            <a:prstDash val="solid"/>
-          </a:ln>
-        </p:spPr>
-      </p:sp>
-      <p:sp>
-        <p:nvSpPr>
-          <p:cNvPr id="37" name="Text 35"/>
-          <p:cNvSpPr/>
-          <p:nvPr/>
-        </p:nvSpPr>
-        <p:spPr>
-          <a:xfrm>
-            <a:off x="365760" y="4096512"/>
-            <a:ext cx="1371600" cy="804672"/>
-          </a:xfrm>
-          <a:prstGeom prst="rect">
-            <a:avLst/>
-          </a:prstGeom>
-          <a:noFill/>
-          <a:ln/>
-        </p:spPr>
-        <p:txBody>
-          <a:bodyPr wrap="square" lIns="0" tIns="0" rIns="0" bIns="0" rtlCol="0" anchor="ctr"/>
-          <a:lstStyle/>
-          <a:p>
-            <a:pPr algn="ctr" indent="0" marL="0">
-              <a:buNone/>
-            </a:pPr>
-            <a:r>
-              <a:rPr lang="en-US" sz="1100" b="1" dirty="0">
-                <a:solidFill>
-                  <a:srgbClr val="475569"/>
-                </a:solidFill>
-                <a:latin typeface="Trebuchet MS" pitchFamily="34" charset="0"/>
-                <a:ea typeface="Trebuchet MS" pitchFamily="34" charset="-122"/>
-                <a:cs typeface="Trebuchet MS" pitchFamily="34" charset="-120"/>
-              </a:rPr>
-              <a:t>Phonemes</a:t>
-            </a:r>
-            <a:endParaRPr lang="en-US" sz="1100" dirty="0"/>
-          </a:p>
-        </p:txBody>
-      </p:sp>
-      <p:sp>
-        <p:nvSpPr>
-          <p:cNvPr id="38" name="Shape 36"/>
-          <p:cNvSpPr/>
-          <p:nvPr/>
-        </p:nvSpPr>
-        <p:spPr>
-          <a:xfrm>
-            <a:off x="1874520" y="4096512"/>
-            <a:ext cx="6903720" cy="804672"/>
-          </a:xfrm>
-          <a:prstGeom prst="rect">
-            <a:avLst>
-              <a:gd name="adj" fmla="val 6818"/>
-            </a:avLst>
-          </a:prstGeom>
-          <a:solidFill>
-            <a:srgbClr val="F8FAFC"/>
-          </a:solidFill>
-          <a:ln w="12700">
-            <a:solidFill>
-              <a:srgbClr val="E2E8F0"/>
-            </a:solidFill>
             <a:prstDash val="dash"/>
           </a:ln>
         </p:spPr>
       </p:sp>
       <p:sp>
         <p:nvSpPr>
-          <p:cNvPr id="39" name="Text 37"/>
+          <p:cNvPr id="36" name="Text 34"/>
           <p:cNvSpPr/>
           <p:nvPr/>
         </p:nvSpPr>
@@ -20716,7 +20815,7 @@
                 <a:ea typeface="Calibri" pitchFamily="34" charset="-122"/>
                 <a:cs typeface="Calibri" pitchFamily="34" charset="-120"/>
               </a:rPr>
-              <a:t>Word Labs  •  wordlabs.app  •  Root: 'fer' = to carry, bring, bear</a:t>
+              <a:t>Word Labs  •  wordlabs.app  •  Root: 'fer' = carry; bring</a:t>
             </a:r>
             <a:endParaRPr lang="en-US" sz="800" dirty="0"/>
           </a:p>
@@ -20855,7 +20954,7 @@
                 <a:ea typeface="Trebuchet MS" pitchFamily="34" charset="-122"/>
                 <a:cs typeface="Trebuchet MS" pitchFamily="34" charset="-120"/>
               </a:rPr>
-              <a:t>conference</a:t>
+              <a:t>offered</a:t>
             </a:r>
             <a:endParaRPr lang="en-US" sz="2800" dirty="0"/>
           </a:p>
@@ -20994,7 +21093,7 @@
                 <a:ea typeface="Trebuchet MS" pitchFamily="34" charset="-122"/>
                 <a:cs typeface="Trebuchet MS" pitchFamily="34" charset="-120"/>
               </a:rPr>
-              <a:t>con</a:t>
+              <a:t>ob</a:t>
             </a:r>
             <a:endParaRPr lang="en-US" sz="1300" dirty="0"/>
           </a:p>
@@ -21033,7 +21132,7 @@
                 <a:ea typeface="Calibri" pitchFamily="34" charset="-122"/>
                 <a:cs typeface="Calibri" pitchFamily="34" charset="-120"/>
               </a:rPr>
-              <a:t>together, with</a:t>
+              <a:t>against; in the way of; towards</a:t>
             </a:r>
             <a:endParaRPr lang="en-US" sz="850" dirty="0"/>
           </a:p>
@@ -21145,7 +21244,7 @@
                 <a:ea typeface="Calibri" pitchFamily="34" charset="-122"/>
                 <a:cs typeface="Calibri" pitchFamily="34" charset="-120"/>
               </a:rPr>
-              <a:t>to carry, bring</a:t>
+              <a:t>carry; bring</a:t>
             </a:r>
             <a:endParaRPr lang="en-US" sz="850" dirty="0"/>
           </a:p>
@@ -21218,7 +21317,7 @@
                 <a:ea typeface="Trebuchet MS" pitchFamily="34" charset="-122"/>
                 <a:cs typeface="Trebuchet MS" pitchFamily="34" charset="-120"/>
               </a:rPr>
-              <a:t>ence</a:t>
+              <a:t>ed</a:t>
             </a:r>
             <a:endParaRPr lang="en-US" sz="1300" dirty="0"/>
           </a:p>
@@ -21257,7 +21356,7 @@
                 <a:ea typeface="Calibri" pitchFamily="34" charset="-122"/>
                 <a:cs typeface="Calibri" pitchFamily="34" charset="-120"/>
               </a:rPr>
-              <a:t>state or quality of</a:t>
+              <a:t>past tense</a:t>
             </a:r>
             <a:endParaRPr lang="en-US" sz="850" dirty="0"/>
           </a:p>
@@ -21364,7 +21463,7 @@
         </p:nvSpPr>
         <p:spPr>
           <a:xfrm>
-            <a:off x="2313432" y="3364992"/>
+            <a:off x="2999232" y="3364992"/>
             <a:ext cx="1645920" cy="475488"/>
           </a:xfrm>
           <a:prstGeom prst="rect">
@@ -21391,7 +21490,7 @@
         </p:nvSpPr>
         <p:spPr>
           <a:xfrm>
-            <a:off x="2313432" y="3364992"/>
+            <a:off x="2999232" y="3364992"/>
             <a:ext cx="1645920" cy="475488"/>
           </a:xfrm>
           <a:prstGeom prst="rect">
@@ -21416,7 +21515,7 @@
                 <a:ea typeface="Trebuchet MS" pitchFamily="34" charset="-122"/>
                 <a:cs typeface="Trebuchet MS" pitchFamily="34" charset="-120"/>
               </a:rPr>
-              <a:t>con</a:t>
+              <a:t>off</a:t>
             </a:r>
             <a:endParaRPr lang="en-US" sz="1400" dirty="0"/>
           </a:p>
@@ -21430,8 +21529,8 @@
         </p:nvSpPr>
         <p:spPr>
           <a:xfrm>
-            <a:off x="3959352" y="3364992"/>
-            <a:ext cx="411480" cy="475488"/>
+            <a:off x="4645152" y="3364992"/>
+            <a:ext cx="1097280" cy="475488"/>
           </a:xfrm>
           <a:prstGeom prst="rect">
             <a:avLst/>
@@ -21469,7 +21568,7 @@
         </p:nvSpPr>
         <p:spPr>
           <a:xfrm>
-            <a:off x="4370832" y="3364992"/>
+            <a:off x="5742432" y="3364992"/>
             <a:ext cx="1645920" cy="475488"/>
           </a:xfrm>
           <a:prstGeom prst="rect">
@@ -21496,7 +21595,7 @@
         </p:nvSpPr>
         <p:spPr>
           <a:xfrm>
-            <a:off x="4370832" y="3364992"/>
+            <a:off x="5742432" y="3364992"/>
             <a:ext cx="1645920" cy="475488"/>
           </a:xfrm>
           <a:prstGeom prst="rect">
@@ -21521,7 +21620,7 @@
                 <a:ea typeface="Trebuchet MS" pitchFamily="34" charset="-122"/>
                 <a:cs typeface="Trebuchet MS" pitchFamily="34" charset="-120"/>
               </a:rPr>
-              <a:t>fer</a:t>
+              <a:t>ered</a:t>
             </a:r>
             <a:endParaRPr lang="en-US" sz="1400" dirty="0"/>
           </a:p>
@@ -21529,14 +21628,41 @@
       </p:sp>
       <p:sp>
         <p:nvSpPr>
-          <p:cNvPr id="33" name="Text 31"/>
-          <p:cNvSpPr/>
-          <p:nvPr/>
-        </p:nvSpPr>
-        <p:spPr>
-          <a:xfrm>
-            <a:off x="6016752" y="3364992"/>
-            <a:ext cx="411480" cy="475488"/>
+          <p:cNvPr id="33" name="Shape 31"/>
+          <p:cNvSpPr/>
+          <p:nvPr/>
+        </p:nvSpPr>
+        <p:spPr>
+          <a:xfrm>
+            <a:off x="365760" y="4096512"/>
+            <a:ext cx="1371600" cy="804672"/>
+          </a:xfrm>
+          <a:prstGeom prst="rect">
+            <a:avLst>
+              <a:gd name="adj" fmla="val 6818"/>
+            </a:avLst>
+          </a:prstGeom>
+          <a:solidFill>
+            <a:srgbClr val="E2E8F0"/>
+          </a:solidFill>
+          <a:ln w="12700">
+            <a:solidFill>
+              <a:srgbClr val="E2E8F0"/>
+            </a:solidFill>
+            <a:prstDash val="solid"/>
+          </a:ln>
+        </p:spPr>
+      </p:sp>
+      <p:sp>
+        <p:nvSpPr>
+          <p:cNvPr id="34" name="Text 32"/>
+          <p:cNvSpPr/>
+          <p:nvPr/>
+        </p:nvSpPr>
+        <p:spPr>
+          <a:xfrm>
+            <a:off x="365760" y="4096512"/>
+            <a:ext cx="1371600" cy="804672"/>
           </a:xfrm>
           <a:prstGeom prst="rect">
             <a:avLst/>
@@ -21552,57 +21678,84 @@
               <a:buNone/>
             </a:pPr>
             <a:r>
-              <a:rPr lang="en-US" sz="1600" b="1" dirty="0">
-                <a:solidFill>
-                  <a:srgbClr val="0D9488"/>
+              <a:rPr lang="en-US" sz="1100" b="1" dirty="0">
+                <a:solidFill>
+                  <a:srgbClr val="475569"/>
                 </a:solidFill>
                 <a:latin typeface="Trebuchet MS" pitchFamily="34" charset="0"/>
                 <a:ea typeface="Trebuchet MS" pitchFamily="34" charset="-122"/>
                 <a:cs typeface="Trebuchet MS" pitchFamily="34" charset="-120"/>
               </a:rPr>
-              <a:t>·</a:t>
-            </a:r>
-            <a:endParaRPr lang="en-US" sz="1600" dirty="0"/>
-          </a:p>
-        </p:txBody>
-      </p:sp>
-      <p:sp>
-        <p:nvSpPr>
-          <p:cNvPr id="34" name="Shape 32"/>
-          <p:cNvSpPr/>
-          <p:nvPr/>
-        </p:nvSpPr>
-        <p:spPr>
-          <a:xfrm>
-            <a:off x="6428232" y="3364992"/>
-            <a:ext cx="1645920" cy="475488"/>
+              <a:t>Phonemes</a:t>
+            </a:r>
+            <a:endParaRPr lang="en-US" sz="1100" dirty="0"/>
+          </a:p>
+        </p:txBody>
+      </p:sp>
+      <p:sp>
+        <p:nvSpPr>
+          <p:cNvPr id="35" name="Shape 33"/>
+          <p:cNvSpPr/>
+          <p:nvPr/>
+        </p:nvSpPr>
+        <p:spPr>
+          <a:xfrm>
+            <a:off x="1874520" y="4096512"/>
+            <a:ext cx="6903720" cy="658368"/>
           </a:xfrm>
           <a:prstGeom prst="rect">
             <a:avLst>
-              <a:gd name="adj" fmla="val 9615"/>
+              <a:gd name="adj" fmla="val 8333"/>
             </a:avLst>
           </a:prstGeom>
           <a:solidFill>
+            <a:srgbClr val="FCE7F3"/>
+          </a:solidFill>
+          <a:ln w="12700">
+            <a:solidFill>
+              <a:srgbClr val="DB2777"/>
+            </a:solidFill>
+            <a:prstDash val="solid"/>
+          </a:ln>
+        </p:spPr>
+      </p:sp>
+      <p:sp>
+        <p:nvSpPr>
+          <p:cNvPr id="36" name="Shape 34"/>
+          <p:cNvSpPr/>
+          <p:nvPr/>
+        </p:nvSpPr>
+        <p:spPr>
+          <a:xfrm>
+            <a:off x="2427732" y="4169664"/>
+            <a:ext cx="685800" cy="475488"/>
+          </a:xfrm>
+          <a:prstGeom prst="rect">
+            <a:avLst>
+              <a:gd name="adj" fmla="val 7692"/>
+            </a:avLst>
+          </a:prstGeom>
+          <a:solidFill>
             <a:srgbClr val="FFFFFF"/>
           </a:solidFill>
           <a:ln w="12700">
             <a:solidFill>
-              <a:srgbClr val="0D9488"/>
-            </a:solidFill>
-            <a:prstDash val="solid"/>
-          </a:ln>
-        </p:spPr>
-      </p:sp>
-      <p:sp>
-        <p:nvSpPr>
-          <p:cNvPr id="35" name="Text 33"/>
-          <p:cNvSpPr/>
-          <p:nvPr/>
-        </p:nvSpPr>
-        <p:spPr>
-          <a:xfrm>
-            <a:off x="6428232" y="3364992"/>
-            <a:ext cx="1645920" cy="475488"/>
+              <a:srgbClr val="DB2777"/>
+            </a:solidFill>
+            <a:prstDash val="solid"/>
+          </a:ln>
+        </p:spPr>
+      </p:sp>
+      <p:sp>
+        <p:nvSpPr>
+          <p:cNvPr id="37" name="Text 35"/>
+          <p:cNvSpPr/>
+          <p:nvPr/>
+        </p:nvSpPr>
+        <p:spPr>
+          <a:xfrm>
+            <a:off x="2427732" y="4169664"/>
+            <a:ext cx="685800" cy="475488"/>
           </a:xfrm>
           <a:prstGeom prst="rect">
             <a:avLst/>
@@ -21618,57 +21771,57 @@
               <a:buNone/>
             </a:pPr>
             <a:r>
-              <a:rPr lang="en-US" sz="1400" b="1" dirty="0">
-                <a:solidFill>
-                  <a:srgbClr val="0D9488"/>
+              <a:rPr lang="en-US" sz="900" b="1" dirty="0">
+                <a:solidFill>
+                  <a:srgbClr val="9D174D"/>
                 </a:solidFill>
                 <a:latin typeface="Trebuchet MS" pitchFamily="34" charset="0"/>
                 <a:ea typeface="Trebuchet MS" pitchFamily="34" charset="-122"/>
                 <a:cs typeface="Trebuchet MS" pitchFamily="34" charset="-120"/>
               </a:rPr>
-              <a:t>ence</a:t>
-            </a:r>
-            <a:endParaRPr lang="en-US" sz="1400" dirty="0"/>
-          </a:p>
-        </p:txBody>
-      </p:sp>
-      <p:sp>
-        <p:nvSpPr>
-          <p:cNvPr id="36" name="Shape 34"/>
-          <p:cNvSpPr/>
-          <p:nvPr/>
-        </p:nvSpPr>
-        <p:spPr>
-          <a:xfrm>
-            <a:off x="365760" y="4096512"/>
-            <a:ext cx="1371600" cy="804672"/>
+              <a:t>o</a:t>
+            </a:r>
+            <a:endParaRPr lang="en-US" sz="900" dirty="0"/>
+          </a:p>
+        </p:txBody>
+      </p:sp>
+      <p:sp>
+        <p:nvSpPr>
+          <p:cNvPr id="38" name="Shape 36"/>
+          <p:cNvSpPr/>
+          <p:nvPr/>
+        </p:nvSpPr>
+        <p:spPr>
+          <a:xfrm>
+            <a:off x="3639312" y="4169664"/>
+            <a:ext cx="685800" cy="475488"/>
           </a:xfrm>
           <a:prstGeom prst="rect">
             <a:avLst>
-              <a:gd name="adj" fmla="val 6818"/>
+              <a:gd name="adj" fmla="val 7692"/>
             </a:avLst>
           </a:prstGeom>
           <a:solidFill>
-            <a:srgbClr val="E2E8F0"/>
-          </a:solidFill>
-          <a:ln w="12700">
-            <a:solidFill>
-              <a:srgbClr val="E2E8F0"/>
-            </a:solidFill>
-            <a:prstDash val="solid"/>
-          </a:ln>
-        </p:spPr>
-      </p:sp>
-      <p:sp>
-        <p:nvSpPr>
-          <p:cNvPr id="37" name="Text 35"/>
-          <p:cNvSpPr/>
-          <p:nvPr/>
-        </p:nvSpPr>
-        <p:spPr>
-          <a:xfrm>
-            <a:off x="365760" y="4096512"/>
-            <a:ext cx="1371600" cy="804672"/>
+            <a:srgbClr val="FFFFFF"/>
+          </a:solidFill>
+          <a:ln w="12700">
+            <a:solidFill>
+              <a:srgbClr val="DB2777"/>
+            </a:solidFill>
+            <a:prstDash val="solid"/>
+          </a:ln>
+        </p:spPr>
+      </p:sp>
+      <p:sp>
+        <p:nvSpPr>
+          <p:cNvPr id="39" name="Text 37"/>
+          <p:cNvSpPr/>
+          <p:nvPr/>
+        </p:nvSpPr>
+        <p:spPr>
+          <a:xfrm>
+            <a:off x="3639312" y="4169664"/>
+            <a:ext cx="685800" cy="475488"/>
           </a:xfrm>
           <a:prstGeom prst="rect">
             <a:avLst/>
@@ -21684,38 +21837,38 @@
               <a:buNone/>
             </a:pPr>
             <a:r>
-              <a:rPr lang="en-US" sz="1100" b="1" dirty="0">
-                <a:solidFill>
-                  <a:srgbClr val="475569"/>
+              <a:rPr lang="en-US" sz="900" b="1" dirty="0">
+                <a:solidFill>
+                  <a:srgbClr val="9D174D"/>
                 </a:solidFill>
                 <a:latin typeface="Trebuchet MS" pitchFamily="34" charset="0"/>
                 <a:ea typeface="Trebuchet MS" pitchFamily="34" charset="-122"/>
                 <a:cs typeface="Trebuchet MS" pitchFamily="34" charset="-120"/>
               </a:rPr>
-              <a:t>Phonemes</a:t>
-            </a:r>
-            <a:endParaRPr lang="en-US" sz="1100" dirty="0"/>
-          </a:p>
-        </p:txBody>
-      </p:sp>
-      <p:sp>
-        <p:nvSpPr>
-          <p:cNvPr id="38" name="Shape 36"/>
-          <p:cNvSpPr/>
-          <p:nvPr/>
-        </p:nvSpPr>
-        <p:spPr>
-          <a:xfrm>
-            <a:off x="1874520" y="4096512"/>
-            <a:ext cx="6903720" cy="804672"/>
+              <a:t>ff</a:t>
+            </a:r>
+            <a:endParaRPr lang="en-US" sz="900" dirty="0"/>
+          </a:p>
+        </p:txBody>
+      </p:sp>
+      <p:sp>
+        <p:nvSpPr>
+          <p:cNvPr id="40" name="Shape 38"/>
+          <p:cNvSpPr/>
+          <p:nvPr/>
+        </p:nvSpPr>
+        <p:spPr>
+          <a:xfrm>
+            <a:off x="4850892" y="4169664"/>
+            <a:ext cx="685800" cy="475488"/>
           </a:xfrm>
           <a:prstGeom prst="rect">
             <a:avLst>
-              <a:gd name="adj" fmla="val 6818"/>
+              <a:gd name="adj" fmla="val 7692"/>
             </a:avLst>
           </a:prstGeom>
           <a:solidFill>
-            <a:srgbClr val="FCE7F3"/>
+            <a:srgbClr val="FFFFFF"/>
           </a:solidFill>
           <a:ln w="12700">
             <a:solidFill>
@@ -21727,41 +21880,14 @@
       </p:sp>
       <p:sp>
         <p:nvSpPr>
-          <p:cNvPr id="39" name="Shape 37"/>
-          <p:cNvSpPr/>
-          <p:nvPr/>
-        </p:nvSpPr>
-        <p:spPr>
-          <a:xfrm>
-            <a:off x="2023872" y="4169664"/>
-            <a:ext cx="685800" cy="384048"/>
-          </a:xfrm>
-          <a:prstGeom prst="rect">
-            <a:avLst>
-              <a:gd name="adj" fmla="val 9524"/>
-            </a:avLst>
-          </a:prstGeom>
-          <a:solidFill>
-            <a:srgbClr val="FFFFFF"/>
-          </a:solidFill>
-          <a:ln w="12700">
-            <a:solidFill>
-              <a:srgbClr val="DB2777"/>
-            </a:solidFill>
-            <a:prstDash val="solid"/>
-          </a:ln>
-        </p:spPr>
-      </p:sp>
-      <p:sp>
-        <p:nvSpPr>
-          <p:cNvPr id="40" name="Text 38"/>
-          <p:cNvSpPr/>
-          <p:nvPr/>
-        </p:nvSpPr>
-        <p:spPr>
-          <a:xfrm>
-            <a:off x="2023872" y="4169664"/>
-            <a:ext cx="685800" cy="384048"/>
+          <p:cNvPr id="41" name="Text 39"/>
+          <p:cNvSpPr/>
+          <p:nvPr/>
+        </p:nvSpPr>
+        <p:spPr>
+          <a:xfrm>
+            <a:off x="4850892" y="4169664"/>
+            <a:ext cx="685800" cy="475488"/>
           </a:xfrm>
           <a:prstGeom prst="rect">
             <a:avLst/>
@@ -21785,7 +21911,7 @@
                 <a:ea typeface="Trebuchet MS" pitchFamily="34" charset="-122"/>
                 <a:cs typeface="Trebuchet MS" pitchFamily="34" charset="-120"/>
               </a:rPr>
-              <a:t>c</a:t>
+              <a:t>er</a:t>
             </a:r>
             <a:endParaRPr lang="en-US" sz="900" dirty="0"/>
           </a:p>
@@ -21793,57 +21919,18 @@
       </p:sp>
       <p:sp>
         <p:nvSpPr>
-          <p:cNvPr id="41" name="Text 39"/>
-          <p:cNvSpPr/>
-          <p:nvPr/>
-        </p:nvSpPr>
-        <p:spPr>
-          <a:xfrm>
-            <a:off x="2023872" y="4572000"/>
-            <a:ext cx="685800" cy="219456"/>
-          </a:xfrm>
-          <a:prstGeom prst="rect">
-            <a:avLst/>
-          </a:prstGeom>
-          <a:noFill/>
-          <a:ln/>
-        </p:spPr>
-        <p:txBody>
-          <a:bodyPr wrap="square" lIns="0" tIns="0" rIns="0" bIns="0" rtlCol="0" anchor="t"/>
-          <a:lstStyle/>
-          <a:p>
-            <a:pPr algn="ctr" indent="0" marL="0">
-              <a:buNone/>
-            </a:pPr>
-            <a:r>
-              <a:rPr lang="en-US" sz="750" i="1" dirty="0">
-                <a:solidFill>
-                  <a:srgbClr val="94A3B8"/>
-                </a:solidFill>
-                <a:latin typeface="Calibri" pitchFamily="34" charset="0"/>
-                <a:ea typeface="Calibri" pitchFamily="34" charset="-122"/>
-                <a:cs typeface="Calibri" pitchFamily="34" charset="-120"/>
-              </a:rPr>
-              <a:t>/k/</a:t>
-            </a:r>
-            <a:endParaRPr lang="en-US" sz="750" dirty="0"/>
-          </a:p>
-        </p:txBody>
-      </p:sp>
-      <p:sp>
-        <p:nvSpPr>
           <p:cNvPr id="42" name="Shape 40"/>
           <p:cNvSpPr/>
           <p:nvPr/>
         </p:nvSpPr>
         <p:spPr>
           <a:xfrm>
-            <a:off x="2831592" y="4169664"/>
-            <a:ext cx="685800" cy="384048"/>
+            <a:off x="6062472" y="4169664"/>
+            <a:ext cx="685800" cy="475488"/>
           </a:xfrm>
           <a:prstGeom prst="rect">
             <a:avLst>
-              <a:gd name="adj" fmla="val 9524"/>
+              <a:gd name="adj" fmla="val 7692"/>
             </a:avLst>
           </a:prstGeom>
           <a:solidFill>
@@ -21865,8 +21952,8 @@
         </p:nvSpPr>
         <p:spPr>
           <a:xfrm>
-            <a:off x="2831592" y="4169664"/>
-            <a:ext cx="685800" cy="384048"/>
+            <a:off x="6062472" y="4169664"/>
+            <a:ext cx="685800" cy="475488"/>
           </a:xfrm>
           <a:prstGeom prst="rect">
             <a:avLst/>
@@ -21890,7 +21977,7 @@
                 <a:ea typeface="Trebuchet MS" pitchFamily="34" charset="-122"/>
                 <a:cs typeface="Trebuchet MS" pitchFamily="34" charset="-120"/>
               </a:rPr>
-              <a:t>o</a:t>
+              <a:t>e</a:t>
             </a:r>
             <a:endParaRPr lang="en-US" sz="900" dirty="0"/>
           </a:p>
@@ -21904,12 +21991,12 @@
         </p:nvSpPr>
         <p:spPr>
           <a:xfrm>
-            <a:off x="3639312" y="4169664"/>
-            <a:ext cx="685800" cy="384048"/>
+            <a:off x="7274052" y="4169664"/>
+            <a:ext cx="685800" cy="475488"/>
           </a:xfrm>
           <a:prstGeom prst="rect">
             <a:avLst>
-              <a:gd name="adj" fmla="val 9524"/>
+              <a:gd name="adj" fmla="val 7692"/>
             </a:avLst>
           </a:prstGeom>
           <a:solidFill>
@@ -21931,8 +22018,8 @@
         </p:nvSpPr>
         <p:spPr>
           <a:xfrm>
-            <a:off x="3639312" y="4169664"/>
-            <a:ext cx="685800" cy="384048"/>
+            <a:off x="7274052" y="4169664"/>
+            <a:ext cx="685800" cy="475488"/>
           </a:xfrm>
           <a:prstGeom prst="rect">
             <a:avLst/>
@@ -21956,378 +22043,9 @@
                 <a:ea typeface="Trebuchet MS" pitchFamily="34" charset="-122"/>
                 <a:cs typeface="Trebuchet MS" pitchFamily="34" charset="-120"/>
               </a:rPr>
-              <a:t>n</a:t>
+              <a:t>d</a:t>
             </a:r>
             <a:endParaRPr lang="en-US" sz="900" dirty="0"/>
-          </a:p>
-        </p:txBody>
-      </p:sp>
-      <p:sp>
-        <p:nvSpPr>
-          <p:cNvPr id="46" name="Shape 44"/>
-          <p:cNvSpPr/>
-          <p:nvPr/>
-        </p:nvSpPr>
-        <p:spPr>
-          <a:xfrm>
-            <a:off x="4447032" y="4169664"/>
-            <a:ext cx="685800" cy="384048"/>
-          </a:xfrm>
-          <a:prstGeom prst="rect">
-            <a:avLst>
-              <a:gd name="adj" fmla="val 9524"/>
-            </a:avLst>
-          </a:prstGeom>
-          <a:solidFill>
-            <a:srgbClr val="FFFFFF"/>
-          </a:solidFill>
-          <a:ln w="12700">
-            <a:solidFill>
-              <a:srgbClr val="DB2777"/>
-            </a:solidFill>
-            <a:prstDash val="solid"/>
-          </a:ln>
-        </p:spPr>
-      </p:sp>
-      <p:sp>
-        <p:nvSpPr>
-          <p:cNvPr id="47" name="Text 45"/>
-          <p:cNvSpPr/>
-          <p:nvPr/>
-        </p:nvSpPr>
-        <p:spPr>
-          <a:xfrm>
-            <a:off x="4447032" y="4169664"/>
-            <a:ext cx="685800" cy="384048"/>
-          </a:xfrm>
-          <a:prstGeom prst="rect">
-            <a:avLst/>
-          </a:prstGeom>
-          <a:noFill/>
-          <a:ln/>
-        </p:spPr>
-        <p:txBody>
-          <a:bodyPr wrap="square" lIns="0" tIns="0" rIns="0" bIns="0" rtlCol="0" anchor="ctr"/>
-          <a:lstStyle/>
-          <a:p>
-            <a:pPr algn="ctr" indent="0" marL="0">
-              <a:buNone/>
-            </a:pPr>
-            <a:r>
-              <a:rPr lang="en-US" sz="900" b="1" dirty="0">
-                <a:solidFill>
-                  <a:srgbClr val="9D174D"/>
-                </a:solidFill>
-                <a:latin typeface="Trebuchet MS" pitchFamily="34" charset="0"/>
-                <a:ea typeface="Trebuchet MS" pitchFamily="34" charset="-122"/>
-                <a:cs typeface="Trebuchet MS" pitchFamily="34" charset="-120"/>
-              </a:rPr>
-              <a:t>f</a:t>
-            </a:r>
-            <a:endParaRPr lang="en-US" sz="900" dirty="0"/>
-          </a:p>
-        </p:txBody>
-      </p:sp>
-      <p:sp>
-        <p:nvSpPr>
-          <p:cNvPr id="48" name="Shape 46"/>
-          <p:cNvSpPr/>
-          <p:nvPr/>
-        </p:nvSpPr>
-        <p:spPr>
-          <a:xfrm>
-            <a:off x="5254752" y="4169664"/>
-            <a:ext cx="685800" cy="384048"/>
-          </a:xfrm>
-          <a:prstGeom prst="rect">
-            <a:avLst>
-              <a:gd name="adj" fmla="val 9524"/>
-            </a:avLst>
-          </a:prstGeom>
-          <a:solidFill>
-            <a:srgbClr val="FFFFFF"/>
-          </a:solidFill>
-          <a:ln w="12700">
-            <a:solidFill>
-              <a:srgbClr val="DB2777"/>
-            </a:solidFill>
-            <a:prstDash val="solid"/>
-          </a:ln>
-        </p:spPr>
-      </p:sp>
-      <p:sp>
-        <p:nvSpPr>
-          <p:cNvPr id="49" name="Text 47"/>
-          <p:cNvSpPr/>
-          <p:nvPr/>
-        </p:nvSpPr>
-        <p:spPr>
-          <a:xfrm>
-            <a:off x="5254752" y="4169664"/>
-            <a:ext cx="685800" cy="384048"/>
-          </a:xfrm>
-          <a:prstGeom prst="rect">
-            <a:avLst/>
-          </a:prstGeom>
-          <a:noFill/>
-          <a:ln/>
-        </p:spPr>
-        <p:txBody>
-          <a:bodyPr wrap="square" lIns="0" tIns="0" rIns="0" bIns="0" rtlCol="0" anchor="ctr"/>
-          <a:lstStyle/>
-          <a:p>
-            <a:pPr algn="ctr" indent="0" marL="0">
-              <a:buNone/>
-            </a:pPr>
-            <a:r>
-              <a:rPr lang="en-US" sz="900" b="1" dirty="0">
-                <a:solidFill>
-                  <a:srgbClr val="9D174D"/>
-                </a:solidFill>
-                <a:latin typeface="Trebuchet MS" pitchFamily="34" charset="0"/>
-                <a:ea typeface="Trebuchet MS" pitchFamily="34" charset="-122"/>
-                <a:cs typeface="Trebuchet MS" pitchFamily="34" charset="-120"/>
-              </a:rPr>
-              <a:t>er</a:t>
-            </a:r>
-            <a:endParaRPr lang="en-US" sz="900" dirty="0"/>
-          </a:p>
-        </p:txBody>
-      </p:sp>
-      <p:sp>
-        <p:nvSpPr>
-          <p:cNvPr id="50" name="Shape 48"/>
-          <p:cNvSpPr/>
-          <p:nvPr/>
-        </p:nvSpPr>
-        <p:spPr>
-          <a:xfrm>
-            <a:off x="6062472" y="4169664"/>
-            <a:ext cx="685800" cy="384048"/>
-          </a:xfrm>
-          <a:prstGeom prst="rect">
-            <a:avLst>
-              <a:gd name="adj" fmla="val 9524"/>
-            </a:avLst>
-          </a:prstGeom>
-          <a:solidFill>
-            <a:srgbClr val="FFFFFF"/>
-          </a:solidFill>
-          <a:ln w="12700">
-            <a:solidFill>
-              <a:srgbClr val="DB2777"/>
-            </a:solidFill>
-            <a:prstDash val="solid"/>
-          </a:ln>
-        </p:spPr>
-      </p:sp>
-      <p:sp>
-        <p:nvSpPr>
-          <p:cNvPr id="51" name="Text 49"/>
-          <p:cNvSpPr/>
-          <p:nvPr/>
-        </p:nvSpPr>
-        <p:spPr>
-          <a:xfrm>
-            <a:off x="6062472" y="4169664"/>
-            <a:ext cx="685800" cy="384048"/>
-          </a:xfrm>
-          <a:prstGeom prst="rect">
-            <a:avLst/>
-          </a:prstGeom>
-          <a:noFill/>
-          <a:ln/>
-        </p:spPr>
-        <p:txBody>
-          <a:bodyPr wrap="square" lIns="0" tIns="0" rIns="0" bIns="0" rtlCol="0" anchor="ctr"/>
-          <a:lstStyle/>
-          <a:p>
-            <a:pPr algn="ctr" indent="0" marL="0">
-              <a:buNone/>
-            </a:pPr>
-            <a:r>
-              <a:rPr lang="en-US" sz="900" b="1" dirty="0">
-                <a:solidFill>
-                  <a:srgbClr val="9D174D"/>
-                </a:solidFill>
-                <a:latin typeface="Trebuchet MS" pitchFamily="34" charset="0"/>
-                <a:ea typeface="Trebuchet MS" pitchFamily="34" charset="-122"/>
-                <a:cs typeface="Trebuchet MS" pitchFamily="34" charset="-120"/>
-              </a:rPr>
-              <a:t>e</a:t>
-            </a:r>
-            <a:endParaRPr lang="en-US" sz="900" dirty="0"/>
-          </a:p>
-        </p:txBody>
-      </p:sp>
-      <p:sp>
-        <p:nvSpPr>
-          <p:cNvPr id="52" name="Shape 50"/>
-          <p:cNvSpPr/>
-          <p:nvPr/>
-        </p:nvSpPr>
-        <p:spPr>
-          <a:xfrm>
-            <a:off x="6870192" y="4169664"/>
-            <a:ext cx="685800" cy="384048"/>
-          </a:xfrm>
-          <a:prstGeom prst="rect">
-            <a:avLst>
-              <a:gd name="adj" fmla="val 9524"/>
-            </a:avLst>
-          </a:prstGeom>
-          <a:solidFill>
-            <a:srgbClr val="FFFFFF"/>
-          </a:solidFill>
-          <a:ln w="12700">
-            <a:solidFill>
-              <a:srgbClr val="DB2777"/>
-            </a:solidFill>
-            <a:prstDash val="solid"/>
-          </a:ln>
-        </p:spPr>
-      </p:sp>
-      <p:sp>
-        <p:nvSpPr>
-          <p:cNvPr id="53" name="Text 51"/>
-          <p:cNvSpPr/>
-          <p:nvPr/>
-        </p:nvSpPr>
-        <p:spPr>
-          <a:xfrm>
-            <a:off x="6870192" y="4169664"/>
-            <a:ext cx="685800" cy="384048"/>
-          </a:xfrm>
-          <a:prstGeom prst="rect">
-            <a:avLst/>
-          </a:prstGeom>
-          <a:noFill/>
-          <a:ln/>
-        </p:spPr>
-        <p:txBody>
-          <a:bodyPr wrap="square" lIns="0" tIns="0" rIns="0" bIns="0" rtlCol="0" anchor="ctr"/>
-          <a:lstStyle/>
-          <a:p>
-            <a:pPr algn="ctr" indent="0" marL="0">
-              <a:buNone/>
-            </a:pPr>
-            <a:r>
-              <a:rPr lang="en-US" sz="900" b="1" dirty="0">
-                <a:solidFill>
-                  <a:srgbClr val="9D174D"/>
-                </a:solidFill>
-                <a:latin typeface="Trebuchet MS" pitchFamily="34" charset="0"/>
-                <a:ea typeface="Trebuchet MS" pitchFamily="34" charset="-122"/>
-                <a:cs typeface="Trebuchet MS" pitchFamily="34" charset="-120"/>
-              </a:rPr>
-              <a:t>n</a:t>
-            </a:r>
-            <a:endParaRPr lang="en-US" sz="900" dirty="0"/>
-          </a:p>
-        </p:txBody>
-      </p:sp>
-      <p:sp>
-        <p:nvSpPr>
-          <p:cNvPr id="54" name="Shape 52"/>
-          <p:cNvSpPr/>
-          <p:nvPr/>
-        </p:nvSpPr>
-        <p:spPr>
-          <a:xfrm>
-            <a:off x="7677912" y="4169664"/>
-            <a:ext cx="685800" cy="384048"/>
-          </a:xfrm>
-          <a:prstGeom prst="rect">
-            <a:avLst>
-              <a:gd name="adj" fmla="val 9524"/>
-            </a:avLst>
-          </a:prstGeom>
-          <a:solidFill>
-            <a:srgbClr val="FFFFFF"/>
-          </a:solidFill>
-          <a:ln w="12700">
-            <a:solidFill>
-              <a:srgbClr val="DB2777"/>
-            </a:solidFill>
-            <a:prstDash val="solid"/>
-          </a:ln>
-        </p:spPr>
-      </p:sp>
-      <p:sp>
-        <p:nvSpPr>
-          <p:cNvPr id="55" name="Text 53"/>
-          <p:cNvSpPr/>
-          <p:nvPr/>
-        </p:nvSpPr>
-        <p:spPr>
-          <a:xfrm>
-            <a:off x="7677912" y="4169664"/>
-            <a:ext cx="685800" cy="384048"/>
-          </a:xfrm>
-          <a:prstGeom prst="rect">
-            <a:avLst/>
-          </a:prstGeom>
-          <a:noFill/>
-          <a:ln/>
-        </p:spPr>
-        <p:txBody>
-          <a:bodyPr wrap="square" lIns="0" tIns="0" rIns="0" bIns="0" rtlCol="0" anchor="ctr"/>
-          <a:lstStyle/>
-          <a:p>
-            <a:pPr algn="ctr" indent="0" marL="0">
-              <a:buNone/>
-            </a:pPr>
-            <a:r>
-              <a:rPr lang="en-US" sz="900" b="1" dirty="0">
-                <a:solidFill>
-                  <a:srgbClr val="9D174D"/>
-                </a:solidFill>
-                <a:latin typeface="Trebuchet MS" pitchFamily="34" charset="0"/>
-                <a:ea typeface="Trebuchet MS" pitchFamily="34" charset="-122"/>
-                <a:cs typeface="Trebuchet MS" pitchFamily="34" charset="-120"/>
-              </a:rPr>
-              <a:t>ce</a:t>
-            </a:r>
-            <a:endParaRPr lang="en-US" sz="900" dirty="0"/>
-          </a:p>
-        </p:txBody>
-      </p:sp>
-      <p:sp>
-        <p:nvSpPr>
-          <p:cNvPr id="56" name="Text 54"/>
-          <p:cNvSpPr/>
-          <p:nvPr/>
-        </p:nvSpPr>
-        <p:spPr>
-          <a:xfrm>
-            <a:off x="7677912" y="4572000"/>
-            <a:ext cx="685800" cy="219456"/>
-          </a:xfrm>
-          <a:prstGeom prst="rect">
-            <a:avLst/>
-          </a:prstGeom>
-          <a:noFill/>
-          <a:ln/>
-        </p:spPr>
-        <p:txBody>
-          <a:bodyPr wrap="square" lIns="0" tIns="0" rIns="0" bIns="0" rtlCol="0" anchor="t"/>
-          <a:lstStyle/>
-          <a:p>
-            <a:pPr algn="ctr" indent="0" marL="0">
-              <a:buNone/>
-            </a:pPr>
-            <a:r>
-              <a:rPr lang="en-US" sz="750" i="1" dirty="0">
-                <a:solidFill>
-                  <a:srgbClr val="94A3B8"/>
-                </a:solidFill>
-                <a:latin typeface="Calibri" pitchFamily="34" charset="0"/>
-                <a:ea typeface="Calibri" pitchFamily="34" charset="-122"/>
-                <a:cs typeface="Calibri" pitchFamily="34" charset="-120"/>
-              </a:rPr>
-              <a:t>/s/</a:t>
-            </a:r>
-            <a:endParaRPr lang="en-US" sz="750" dirty="0"/>
           </a:p>
         </p:txBody>
       </p:sp>
@@ -22617,7 +22335,7 @@
                 <a:ea typeface="Calibri" pitchFamily="34" charset="-122"/>
                 <a:cs typeface="Calibri" pitchFamily="34" charset="-120"/>
               </a:rPr>
-              <a:t>Word Labs  •  wordlabs.app  •  Root: 'fer' = to carry, bring, bear</a:t>
+              <a:t>Word Labs  •  wordlabs.app  •  Root: 'fer' = carry; bring</a:t>
             </a:r>
             <a:endParaRPr lang="en-US" sz="800" dirty="0"/>
           </a:p>
@@ -22756,7 +22474,7 @@
                 <a:ea typeface="Trebuchet MS" pitchFamily="34" charset="-122"/>
                 <a:cs typeface="Trebuchet MS" pitchFamily="34" charset="-120"/>
               </a:rPr>
-              <a:t>refer</a:t>
+              <a:t>offering</a:t>
             </a:r>
             <a:endParaRPr lang="en-US" sz="2800" dirty="0"/>
           </a:p>
@@ -23444,7 +23162,7 @@
                 <a:ea typeface="Calibri" pitchFamily="34" charset="-122"/>
                 <a:cs typeface="Calibri" pitchFamily="34" charset="-120"/>
               </a:rPr>
-              <a:t>Word Labs  •  wordlabs.app  •  Root: 'fer' = to carry, bring, bear</a:t>
+              <a:t>Word Labs  •  wordlabs.app  •  Root: 'fer' = carry; bring</a:t>
             </a:r>
             <a:endParaRPr lang="en-US" sz="800" dirty="0"/>
           </a:p>
@@ -23583,7 +23301,7 @@
                 <a:ea typeface="Trebuchet MS" pitchFamily="34" charset="-122"/>
                 <a:cs typeface="Trebuchet MS" pitchFamily="34" charset="-120"/>
               </a:rPr>
-              <a:t>refer</a:t>
+              <a:t>offering</a:t>
             </a:r>
             <a:endParaRPr lang="en-US" sz="2800" dirty="0"/>
           </a:p>
@@ -23663,7 +23381,7 @@
         </p:nvSpPr>
         <p:spPr>
           <a:xfrm>
-            <a:off x="2938272" y="2258568"/>
+            <a:off x="2221992" y="2258568"/>
             <a:ext cx="1828800" cy="292608"/>
           </a:xfrm>
           <a:prstGeom prst="rect">
@@ -23697,7 +23415,7 @@
         </p:nvSpPr>
         <p:spPr>
           <a:xfrm>
-            <a:off x="2938272" y="2258568"/>
+            <a:off x="2221992" y="2258568"/>
             <a:ext cx="1828800" cy="292608"/>
           </a:xfrm>
           <a:prstGeom prst="rect">
@@ -23722,7 +23440,7 @@
                 <a:ea typeface="Trebuchet MS" pitchFamily="34" charset="-122"/>
                 <a:cs typeface="Trebuchet MS" pitchFamily="34" charset="-120"/>
               </a:rPr>
-              <a:t>re</a:t>
+              <a:t>ob</a:t>
             </a:r>
             <a:endParaRPr lang="en-US" sz="1300" dirty="0"/>
           </a:p>
@@ -23736,7 +23454,7 @@
         </p:nvSpPr>
         <p:spPr>
           <a:xfrm>
-            <a:off x="2938272" y="2569464"/>
+            <a:off x="2221992" y="2569464"/>
             <a:ext cx="1828800" cy="201168"/>
           </a:xfrm>
           <a:prstGeom prst="rect">
@@ -23761,7 +23479,7 @@
                 <a:ea typeface="Calibri" pitchFamily="34" charset="-122"/>
                 <a:cs typeface="Calibri" pitchFamily="34" charset="-120"/>
               </a:rPr>
-              <a:t>back, again</a:t>
+              <a:t>against; in the way of; towards</a:t>
             </a:r>
             <a:endParaRPr lang="en-US" sz="850" dirty="0"/>
           </a:p>
@@ -23775,7 +23493,7 @@
         </p:nvSpPr>
         <p:spPr>
           <a:xfrm>
-            <a:off x="5803392" y="2258568"/>
+            <a:off x="4370832" y="2258568"/>
             <a:ext cx="1828800" cy="292608"/>
           </a:xfrm>
           <a:prstGeom prst="rect">
@@ -23809,7 +23527,7 @@
         </p:nvSpPr>
         <p:spPr>
           <a:xfrm>
-            <a:off x="5803392" y="2258568"/>
+            <a:off x="4370832" y="2258568"/>
             <a:ext cx="1828800" cy="292608"/>
           </a:xfrm>
           <a:prstGeom prst="rect">
@@ -23848,7 +23566,7 @@
         </p:nvSpPr>
         <p:spPr>
           <a:xfrm>
-            <a:off x="5803392" y="2569464"/>
+            <a:off x="4370832" y="2569464"/>
             <a:ext cx="1828800" cy="201168"/>
           </a:xfrm>
           <a:prstGeom prst="rect">
@@ -23873,7 +23591,7 @@
                 <a:ea typeface="Calibri" pitchFamily="34" charset="-122"/>
                 <a:cs typeface="Calibri" pitchFamily="34" charset="-120"/>
               </a:rPr>
-              <a:t>to carry, bring</a:t>
+              <a:t>carry; bring</a:t>
             </a:r>
             <a:endParaRPr lang="en-US" sz="850" dirty="0"/>
           </a:p>
@@ -23882,6 +23600,118 @@
       <p:sp>
         <p:nvSpPr>
           <p:cNvPr id="22" name="Shape 20"/>
+          <p:cNvSpPr/>
+          <p:nvPr/>
+        </p:nvSpPr>
+        <p:spPr>
+          <a:xfrm>
+            <a:off x="6519672" y="2258568"/>
+            <a:ext cx="1828800" cy="292608"/>
+          </a:xfrm>
+          <a:prstGeom prst="rect">
+            <a:avLst>
+              <a:gd name="adj" fmla="val 25000"/>
+            </a:avLst>
+          </a:prstGeom>
+          <a:solidFill>
+            <a:srgbClr val="FCE7F3"/>
+          </a:solidFill>
+          <a:ln w="19050">
+            <a:solidFill>
+              <a:srgbClr val="DB2777"/>
+            </a:solidFill>
+            <a:prstDash val="solid"/>
+          </a:ln>
+          <a:effectLst>
+            <a:outerShdw sx="100000" sy="100000" kx="0" ky="0" algn="bl" rotWithShape="0" blurRad="101600" dist="38100" dir="8100000">
+              <a:srgbClr val="000000">
+                <a:alpha val="12000"/>
+              </a:srgbClr>
+            </a:outerShdw>
+          </a:effectLst>
+        </p:spPr>
+      </p:sp>
+      <p:sp>
+        <p:nvSpPr>
+          <p:cNvPr id="23" name="Text 21"/>
+          <p:cNvSpPr/>
+          <p:nvPr/>
+        </p:nvSpPr>
+        <p:spPr>
+          <a:xfrm>
+            <a:off x="6519672" y="2258568"/>
+            <a:ext cx="1828800" cy="292608"/>
+          </a:xfrm>
+          <a:prstGeom prst="rect">
+            <a:avLst/>
+          </a:prstGeom>
+          <a:noFill/>
+          <a:ln/>
+        </p:spPr>
+        <p:txBody>
+          <a:bodyPr wrap="square" lIns="0" tIns="0" rIns="0" bIns="0" rtlCol="0" anchor="ctr"/>
+          <a:lstStyle/>
+          <a:p>
+            <a:pPr algn="ctr" indent="0" marL="0">
+              <a:buNone/>
+            </a:pPr>
+            <a:r>
+              <a:rPr lang="en-US" sz="1300" b="1" dirty="0">
+                <a:solidFill>
+                  <a:srgbClr val="9D174D"/>
+                </a:solidFill>
+                <a:latin typeface="Trebuchet MS" pitchFamily="34" charset="0"/>
+                <a:ea typeface="Trebuchet MS" pitchFamily="34" charset="-122"/>
+                <a:cs typeface="Trebuchet MS" pitchFamily="34" charset="-120"/>
+              </a:rPr>
+              <a:t>ing</a:t>
+            </a:r>
+            <a:endParaRPr lang="en-US" sz="1300" dirty="0"/>
+          </a:p>
+        </p:txBody>
+      </p:sp>
+      <p:sp>
+        <p:nvSpPr>
+          <p:cNvPr id="24" name="Text 22"/>
+          <p:cNvSpPr/>
+          <p:nvPr/>
+        </p:nvSpPr>
+        <p:spPr>
+          <a:xfrm>
+            <a:off x="6519672" y="2569464"/>
+            <a:ext cx="1828800" cy="201168"/>
+          </a:xfrm>
+          <a:prstGeom prst="rect">
+            <a:avLst/>
+          </a:prstGeom>
+          <a:noFill/>
+          <a:ln/>
+        </p:spPr>
+        <p:txBody>
+          <a:bodyPr wrap="square" lIns="0" tIns="0" rIns="0" bIns="0" rtlCol="0" anchor="t"/>
+          <a:lstStyle/>
+          <a:p>
+            <a:pPr algn="ctr" indent="0" marL="0">
+              <a:buNone/>
+            </a:pPr>
+            <a:r>
+              <a:rPr lang="en-US" sz="850" dirty="0">
+                <a:solidFill>
+                  <a:srgbClr val="475569"/>
+                </a:solidFill>
+                <a:latin typeface="Calibri" pitchFamily="34" charset="0"/>
+                <a:ea typeface="Calibri" pitchFamily="34" charset="-122"/>
+                <a:cs typeface="Calibri" pitchFamily="34" charset="-120"/>
+              </a:rPr>
+              <a:t>happening now</a:t>
+            </a:r>
+            <a:endParaRPr lang="en-US" sz="850" dirty="0"/>
+          </a:p>
+        </p:txBody>
+      </p:sp>
+      <p:sp>
+        <p:nvSpPr>
+          <p:cNvPr id="25" name="Shape 23"/>
           <p:cNvSpPr/>
           <p:nvPr/>
         </p:nvSpPr>
@@ -23908,7 +23738,7 @@
       </p:sp>
       <p:sp>
         <p:nvSpPr>
-          <p:cNvPr id="23" name="Text 21"/>
+          <p:cNvPr id="26" name="Text 24"/>
           <p:cNvSpPr/>
           <p:nvPr/>
         </p:nvSpPr>
@@ -23947,7 +23777,7 @@
       </p:sp>
       <p:sp>
         <p:nvSpPr>
-          <p:cNvPr id="24" name="Shape 22"/>
+          <p:cNvPr id="27" name="Shape 25"/>
           <p:cNvSpPr/>
           <p:nvPr/>
         </p:nvSpPr>
@@ -23974,7 +23804,7 @@
       </p:sp>
       <p:sp>
         <p:nvSpPr>
-          <p:cNvPr id="25" name="Text 23"/>
+          <p:cNvPr id="28" name="Text 26"/>
           <p:cNvSpPr/>
           <p:nvPr/>
         </p:nvSpPr>
@@ -24013,7 +23843,7 @@
       </p:sp>
       <p:sp>
         <p:nvSpPr>
-          <p:cNvPr id="26" name="Shape 24"/>
+          <p:cNvPr id="29" name="Shape 27"/>
           <p:cNvSpPr/>
           <p:nvPr/>
         </p:nvSpPr>
@@ -24040,7 +23870,7 @@
       </p:sp>
       <p:sp>
         <p:nvSpPr>
-          <p:cNvPr id="27" name="Text 25"/>
+          <p:cNvPr id="30" name="Text 28"/>
           <p:cNvSpPr/>
           <p:nvPr/>
         </p:nvSpPr>
@@ -24079,7 +23909,7 @@
       </p:sp>
       <p:sp>
         <p:nvSpPr>
-          <p:cNvPr id="28" name="Shape 26"/>
+          <p:cNvPr id="31" name="Shape 29"/>
           <p:cNvSpPr/>
           <p:nvPr/>
         </p:nvSpPr>
@@ -24106,7 +23936,7 @@
       </p:sp>
       <p:sp>
         <p:nvSpPr>
-          <p:cNvPr id="29" name="Text 27"/>
+          <p:cNvPr id="32" name="Text 30"/>
           <p:cNvSpPr/>
           <p:nvPr/>
         </p:nvSpPr>
@@ -24429,7 +24259,7 @@
                 <a:ea typeface="Calibri" pitchFamily="34" charset="-122"/>
                 <a:cs typeface="Calibri" pitchFamily="34" charset="-120"/>
               </a:rPr>
-              <a:t>Word Labs  •  wordlabs.app  •  Root: 'fer' = to carry, bring, bear</a:t>
+              <a:t>Word Labs  •  wordlabs.app  •  Root: 'fer' = carry; bring</a:t>
             </a:r>
             <a:endParaRPr lang="en-US" sz="800" dirty="0"/>
           </a:p>
@@ -24502,7 +24332,7 @@
                 <a:ea typeface="Trebuchet MS" pitchFamily="34" charset="-122"/>
                 <a:cs typeface="Trebuchet MS" pitchFamily="34" charset="-120"/>
               </a:rPr>
-              <a:t>We are learning that the root 'fer' means 'to carry, bring, bear'.</a:t>
+              <a:t>We are learning that the root 'fer' means 'carry; bring'.</a:t>
             </a:r>
             <a:endParaRPr lang="en-US" sz="2000" dirty="0"/>
           </a:p>
@@ -25148,7 +24978,7 @@
                 <a:ea typeface="Calibri" pitchFamily="34" charset="-122"/>
                 <a:cs typeface="Calibri" pitchFamily="34" charset="-120"/>
               </a:rPr>
-              <a:t>Word Labs  •  wordlabs.app  •  Root: 'fer' = to carry, bring, bear</a:t>
+              <a:t>Word Labs  •  wordlabs.app  •  Root: 'fer' = carry; bring</a:t>
             </a:r>
             <a:endParaRPr lang="en-US" sz="800" dirty="0"/>
           </a:p>
@@ -25287,7 +25117,7 @@
                 <a:ea typeface="Trebuchet MS" pitchFamily="34" charset="-122"/>
                 <a:cs typeface="Trebuchet MS" pitchFamily="34" charset="-120"/>
               </a:rPr>
-              <a:t>refer</a:t>
+              <a:t>offering</a:t>
             </a:r>
             <a:endParaRPr lang="en-US" sz="2800" dirty="0"/>
           </a:p>
@@ -25367,7 +25197,7 @@
         </p:nvSpPr>
         <p:spPr>
           <a:xfrm>
-            <a:off x="2938272" y="2258568"/>
+            <a:off x="2221992" y="2258568"/>
             <a:ext cx="1828800" cy="292608"/>
           </a:xfrm>
           <a:prstGeom prst="rect">
@@ -25401,7 +25231,7 @@
         </p:nvSpPr>
         <p:spPr>
           <a:xfrm>
-            <a:off x="2938272" y="2258568"/>
+            <a:off x="2221992" y="2258568"/>
             <a:ext cx="1828800" cy="292608"/>
           </a:xfrm>
           <a:prstGeom prst="rect">
@@ -25426,7 +25256,7 @@
                 <a:ea typeface="Trebuchet MS" pitchFamily="34" charset="-122"/>
                 <a:cs typeface="Trebuchet MS" pitchFamily="34" charset="-120"/>
               </a:rPr>
-              <a:t>re</a:t>
+              <a:t>ob</a:t>
             </a:r>
             <a:endParaRPr lang="en-US" sz="1300" dirty="0"/>
           </a:p>
@@ -25440,7 +25270,7 @@
         </p:nvSpPr>
         <p:spPr>
           <a:xfrm>
-            <a:off x="2938272" y="2569464"/>
+            <a:off x="2221992" y="2569464"/>
             <a:ext cx="1828800" cy="201168"/>
           </a:xfrm>
           <a:prstGeom prst="rect">
@@ -25465,7 +25295,7 @@
                 <a:ea typeface="Calibri" pitchFamily="34" charset="-122"/>
                 <a:cs typeface="Calibri" pitchFamily="34" charset="-120"/>
               </a:rPr>
-              <a:t>back, again</a:t>
+              <a:t>against; in the way of; towards</a:t>
             </a:r>
             <a:endParaRPr lang="en-US" sz="850" dirty="0"/>
           </a:p>
@@ -25479,7 +25309,7 @@
         </p:nvSpPr>
         <p:spPr>
           <a:xfrm>
-            <a:off x="5803392" y="2258568"/>
+            <a:off x="4370832" y="2258568"/>
             <a:ext cx="1828800" cy="292608"/>
           </a:xfrm>
           <a:prstGeom prst="rect">
@@ -25513,7 +25343,7 @@
         </p:nvSpPr>
         <p:spPr>
           <a:xfrm>
-            <a:off x="5803392" y="2258568"/>
+            <a:off x="4370832" y="2258568"/>
             <a:ext cx="1828800" cy="292608"/>
           </a:xfrm>
           <a:prstGeom prst="rect">
@@ -25552,7 +25382,7 @@
         </p:nvSpPr>
         <p:spPr>
           <a:xfrm>
-            <a:off x="5803392" y="2569464"/>
+            <a:off x="4370832" y="2569464"/>
             <a:ext cx="1828800" cy="201168"/>
           </a:xfrm>
           <a:prstGeom prst="rect">
@@ -25577,7 +25407,7 @@
                 <a:ea typeface="Calibri" pitchFamily="34" charset="-122"/>
                 <a:cs typeface="Calibri" pitchFamily="34" charset="-120"/>
               </a:rPr>
-              <a:t>to carry, bring</a:t>
+              <a:t>carry; bring</a:t>
             </a:r>
             <a:endParaRPr lang="en-US" sz="850" dirty="0"/>
           </a:p>
@@ -25586,6 +25416,118 @@
       <p:sp>
         <p:nvSpPr>
           <p:cNvPr id="22" name="Shape 20"/>
+          <p:cNvSpPr/>
+          <p:nvPr/>
+        </p:nvSpPr>
+        <p:spPr>
+          <a:xfrm>
+            <a:off x="6519672" y="2258568"/>
+            <a:ext cx="1828800" cy="292608"/>
+          </a:xfrm>
+          <a:prstGeom prst="rect">
+            <a:avLst>
+              <a:gd name="adj" fmla="val 25000"/>
+            </a:avLst>
+          </a:prstGeom>
+          <a:solidFill>
+            <a:srgbClr val="FCE7F3"/>
+          </a:solidFill>
+          <a:ln w="19050">
+            <a:solidFill>
+              <a:srgbClr val="DB2777"/>
+            </a:solidFill>
+            <a:prstDash val="solid"/>
+          </a:ln>
+          <a:effectLst>
+            <a:outerShdw sx="100000" sy="100000" kx="0" ky="0" algn="bl" rotWithShape="0" blurRad="101600" dist="38100" dir="8100000">
+              <a:srgbClr val="000000">
+                <a:alpha val="12000"/>
+              </a:srgbClr>
+            </a:outerShdw>
+          </a:effectLst>
+        </p:spPr>
+      </p:sp>
+      <p:sp>
+        <p:nvSpPr>
+          <p:cNvPr id="23" name="Text 21"/>
+          <p:cNvSpPr/>
+          <p:nvPr/>
+        </p:nvSpPr>
+        <p:spPr>
+          <a:xfrm>
+            <a:off x="6519672" y="2258568"/>
+            <a:ext cx="1828800" cy="292608"/>
+          </a:xfrm>
+          <a:prstGeom prst="rect">
+            <a:avLst/>
+          </a:prstGeom>
+          <a:noFill/>
+          <a:ln/>
+        </p:spPr>
+        <p:txBody>
+          <a:bodyPr wrap="square" lIns="0" tIns="0" rIns="0" bIns="0" rtlCol="0" anchor="ctr"/>
+          <a:lstStyle/>
+          <a:p>
+            <a:pPr algn="ctr" indent="0" marL="0">
+              <a:buNone/>
+            </a:pPr>
+            <a:r>
+              <a:rPr lang="en-US" sz="1300" b="1" dirty="0">
+                <a:solidFill>
+                  <a:srgbClr val="9D174D"/>
+                </a:solidFill>
+                <a:latin typeface="Trebuchet MS" pitchFamily="34" charset="0"/>
+                <a:ea typeface="Trebuchet MS" pitchFamily="34" charset="-122"/>
+                <a:cs typeface="Trebuchet MS" pitchFamily="34" charset="-120"/>
+              </a:rPr>
+              <a:t>ing</a:t>
+            </a:r>
+            <a:endParaRPr lang="en-US" sz="1300" dirty="0"/>
+          </a:p>
+        </p:txBody>
+      </p:sp>
+      <p:sp>
+        <p:nvSpPr>
+          <p:cNvPr id="24" name="Text 22"/>
+          <p:cNvSpPr/>
+          <p:nvPr/>
+        </p:nvSpPr>
+        <p:spPr>
+          <a:xfrm>
+            <a:off x="6519672" y="2569464"/>
+            <a:ext cx="1828800" cy="201168"/>
+          </a:xfrm>
+          <a:prstGeom prst="rect">
+            <a:avLst/>
+          </a:prstGeom>
+          <a:noFill/>
+          <a:ln/>
+        </p:spPr>
+        <p:txBody>
+          <a:bodyPr wrap="square" lIns="0" tIns="0" rIns="0" bIns="0" rtlCol="0" anchor="t"/>
+          <a:lstStyle/>
+          <a:p>
+            <a:pPr algn="ctr" indent="0" marL="0">
+              <a:buNone/>
+            </a:pPr>
+            <a:r>
+              <a:rPr lang="en-US" sz="850" dirty="0">
+                <a:solidFill>
+                  <a:srgbClr val="475569"/>
+                </a:solidFill>
+                <a:latin typeface="Calibri" pitchFamily="34" charset="0"/>
+                <a:ea typeface="Calibri" pitchFamily="34" charset="-122"/>
+                <a:cs typeface="Calibri" pitchFamily="34" charset="-120"/>
+              </a:rPr>
+              <a:t>happening now</a:t>
+            </a:r>
+            <a:endParaRPr lang="en-US" sz="850" dirty="0"/>
+          </a:p>
+        </p:txBody>
+      </p:sp>
+      <p:sp>
+        <p:nvSpPr>
+          <p:cNvPr id="25" name="Shape 23"/>
           <p:cNvSpPr/>
           <p:nvPr/>
         </p:nvSpPr>
@@ -25612,7 +25554,7 @@
       </p:sp>
       <p:sp>
         <p:nvSpPr>
-          <p:cNvPr id="23" name="Text 21"/>
+          <p:cNvPr id="26" name="Text 24"/>
           <p:cNvSpPr/>
           <p:nvPr/>
         </p:nvSpPr>
@@ -25651,7 +25593,7 @@
       </p:sp>
       <p:sp>
         <p:nvSpPr>
-          <p:cNvPr id="24" name="Shape 22"/>
+          <p:cNvPr id="27" name="Shape 25"/>
           <p:cNvSpPr/>
           <p:nvPr/>
         </p:nvSpPr>
@@ -25678,13 +25620,13 @@
       </p:sp>
       <p:sp>
         <p:nvSpPr>
-          <p:cNvPr id="25" name="Shape 23"/>
-          <p:cNvSpPr/>
-          <p:nvPr/>
-        </p:nvSpPr>
-        <p:spPr>
-          <a:xfrm>
-            <a:off x="2999232" y="3364992"/>
+          <p:cNvPr id="28" name="Shape 26"/>
+          <p:cNvSpPr/>
+          <p:nvPr/>
+        </p:nvSpPr>
+        <p:spPr>
+          <a:xfrm>
+            <a:off x="2313432" y="3364992"/>
             <a:ext cx="1645920" cy="475488"/>
           </a:xfrm>
           <a:prstGeom prst="rect">
@@ -25705,13 +25647,13 @@
       </p:sp>
       <p:sp>
         <p:nvSpPr>
-          <p:cNvPr id="26" name="Text 24"/>
-          <p:cNvSpPr/>
-          <p:nvPr/>
-        </p:nvSpPr>
-        <p:spPr>
-          <a:xfrm>
-            <a:off x="2999232" y="3364992"/>
+          <p:cNvPr id="29" name="Text 27"/>
+          <p:cNvSpPr/>
+          <p:nvPr/>
+        </p:nvSpPr>
+        <p:spPr>
+          <a:xfrm>
+            <a:off x="2313432" y="3364992"/>
             <a:ext cx="1645920" cy="475488"/>
           </a:xfrm>
           <a:prstGeom prst="rect">
@@ -25736,7 +25678,7 @@
                 <a:ea typeface="Trebuchet MS" pitchFamily="34" charset="-122"/>
                 <a:cs typeface="Trebuchet MS" pitchFamily="34" charset="-120"/>
               </a:rPr>
-              <a:t>re</a:t>
+              <a:t>of</a:t>
             </a:r>
             <a:endParaRPr lang="en-US" sz="1400" dirty="0"/>
           </a:p>
@@ -25744,14 +25686,14 @@
       </p:sp>
       <p:sp>
         <p:nvSpPr>
-          <p:cNvPr id="27" name="Text 25"/>
-          <p:cNvSpPr/>
-          <p:nvPr/>
-        </p:nvSpPr>
-        <p:spPr>
-          <a:xfrm>
-            <a:off x="4645152" y="3364992"/>
-            <a:ext cx="1097280" cy="475488"/>
+          <p:cNvPr id="30" name="Text 28"/>
+          <p:cNvSpPr/>
+          <p:nvPr/>
+        </p:nvSpPr>
+        <p:spPr>
+          <a:xfrm>
+            <a:off x="3959352" y="3364992"/>
+            <a:ext cx="411480" cy="475488"/>
           </a:xfrm>
           <a:prstGeom prst="rect">
             <a:avLst/>
@@ -25783,13 +25725,13 @@
       </p:sp>
       <p:sp>
         <p:nvSpPr>
-          <p:cNvPr id="28" name="Shape 26"/>
-          <p:cNvSpPr/>
-          <p:nvPr/>
-        </p:nvSpPr>
-        <p:spPr>
-          <a:xfrm>
-            <a:off x="5742432" y="3364992"/>
+          <p:cNvPr id="31" name="Shape 29"/>
+          <p:cNvSpPr/>
+          <p:nvPr/>
+        </p:nvSpPr>
+        <p:spPr>
+          <a:xfrm>
+            <a:off x="4370832" y="3364992"/>
             <a:ext cx="1645920" cy="475488"/>
           </a:xfrm>
           <a:prstGeom prst="rect">
@@ -25810,13 +25752,13 @@
       </p:sp>
       <p:sp>
         <p:nvSpPr>
-          <p:cNvPr id="29" name="Text 27"/>
-          <p:cNvSpPr/>
-          <p:nvPr/>
-        </p:nvSpPr>
-        <p:spPr>
-          <a:xfrm>
-            <a:off x="5742432" y="3364992"/>
+          <p:cNvPr id="32" name="Text 30"/>
+          <p:cNvSpPr/>
+          <p:nvPr/>
+        </p:nvSpPr>
+        <p:spPr>
+          <a:xfrm>
+            <a:off x="4370832" y="3364992"/>
             <a:ext cx="1645920" cy="475488"/>
           </a:xfrm>
           <a:prstGeom prst="rect">
@@ -25849,7 +25791,112 @@
       </p:sp>
       <p:sp>
         <p:nvSpPr>
-          <p:cNvPr id="30" name="Shape 28"/>
+          <p:cNvPr id="33" name="Text 31"/>
+          <p:cNvSpPr/>
+          <p:nvPr/>
+        </p:nvSpPr>
+        <p:spPr>
+          <a:xfrm>
+            <a:off x="6016752" y="3364992"/>
+            <a:ext cx="411480" cy="475488"/>
+          </a:xfrm>
+          <a:prstGeom prst="rect">
+            <a:avLst/>
+          </a:prstGeom>
+          <a:noFill/>
+          <a:ln/>
+        </p:spPr>
+        <p:txBody>
+          <a:bodyPr wrap="square" lIns="0" tIns="0" rIns="0" bIns="0" rtlCol="0" anchor="ctr"/>
+          <a:lstStyle/>
+          <a:p>
+            <a:pPr algn="ctr" indent="0" marL="0">
+              <a:buNone/>
+            </a:pPr>
+            <a:r>
+              <a:rPr lang="en-US" sz="1600" b="1" dirty="0">
+                <a:solidFill>
+                  <a:srgbClr val="0D9488"/>
+                </a:solidFill>
+                <a:latin typeface="Trebuchet MS" pitchFamily="34" charset="0"/>
+                <a:ea typeface="Trebuchet MS" pitchFamily="34" charset="-122"/>
+                <a:cs typeface="Trebuchet MS" pitchFamily="34" charset="-120"/>
+              </a:rPr>
+              <a:t>·</a:t>
+            </a:r>
+            <a:endParaRPr lang="en-US" sz="1600" dirty="0"/>
+          </a:p>
+        </p:txBody>
+      </p:sp>
+      <p:sp>
+        <p:nvSpPr>
+          <p:cNvPr id="34" name="Shape 32"/>
+          <p:cNvSpPr/>
+          <p:nvPr/>
+        </p:nvSpPr>
+        <p:spPr>
+          <a:xfrm>
+            <a:off x="6428232" y="3364992"/>
+            <a:ext cx="1645920" cy="475488"/>
+          </a:xfrm>
+          <a:prstGeom prst="rect">
+            <a:avLst>
+              <a:gd name="adj" fmla="val 9615"/>
+            </a:avLst>
+          </a:prstGeom>
+          <a:solidFill>
+            <a:srgbClr val="FFFFFF"/>
+          </a:solidFill>
+          <a:ln w="12700">
+            <a:solidFill>
+              <a:srgbClr val="0D9488"/>
+            </a:solidFill>
+            <a:prstDash val="solid"/>
+          </a:ln>
+        </p:spPr>
+      </p:sp>
+      <p:sp>
+        <p:nvSpPr>
+          <p:cNvPr id="35" name="Text 33"/>
+          <p:cNvSpPr/>
+          <p:nvPr/>
+        </p:nvSpPr>
+        <p:spPr>
+          <a:xfrm>
+            <a:off x="6428232" y="3364992"/>
+            <a:ext cx="1645920" cy="475488"/>
+          </a:xfrm>
+          <a:prstGeom prst="rect">
+            <a:avLst/>
+          </a:prstGeom>
+          <a:noFill/>
+          <a:ln/>
+        </p:spPr>
+        <p:txBody>
+          <a:bodyPr wrap="square" lIns="0" tIns="0" rIns="0" bIns="0" rtlCol="0" anchor="ctr"/>
+          <a:lstStyle/>
+          <a:p>
+            <a:pPr algn="ctr" indent="0" marL="0">
+              <a:buNone/>
+            </a:pPr>
+            <a:r>
+              <a:rPr lang="en-US" sz="1400" b="1" dirty="0">
+                <a:solidFill>
+                  <a:srgbClr val="0D9488"/>
+                </a:solidFill>
+                <a:latin typeface="Trebuchet MS" pitchFamily="34" charset="0"/>
+                <a:ea typeface="Trebuchet MS" pitchFamily="34" charset="-122"/>
+                <a:cs typeface="Trebuchet MS" pitchFamily="34" charset="-120"/>
+              </a:rPr>
+              <a:t>ing</a:t>
+            </a:r>
+            <a:endParaRPr lang="en-US" sz="1400" dirty="0"/>
+          </a:p>
+        </p:txBody>
+      </p:sp>
+      <p:sp>
+        <p:nvSpPr>
+          <p:cNvPr id="36" name="Shape 34"/>
           <p:cNvSpPr/>
           <p:nvPr/>
         </p:nvSpPr>
@@ -25876,7 +25923,7 @@
       </p:sp>
       <p:sp>
         <p:nvSpPr>
-          <p:cNvPr id="31" name="Text 29"/>
+          <p:cNvPr id="37" name="Text 35"/>
           <p:cNvSpPr/>
           <p:nvPr/>
         </p:nvSpPr>
@@ -25915,7 +25962,7 @@
       </p:sp>
       <p:sp>
         <p:nvSpPr>
-          <p:cNvPr id="32" name="Shape 30"/>
+          <p:cNvPr id="38" name="Shape 36"/>
           <p:cNvSpPr/>
           <p:nvPr/>
         </p:nvSpPr>
@@ -25942,7 +25989,7 @@
       </p:sp>
       <p:sp>
         <p:nvSpPr>
-          <p:cNvPr id="33" name="Text 31"/>
+          <p:cNvPr id="39" name="Text 37"/>
           <p:cNvSpPr/>
           <p:nvPr/>
         </p:nvSpPr>
@@ -26265,7 +26312,7 @@
                 <a:ea typeface="Calibri" pitchFamily="34" charset="-122"/>
                 <a:cs typeface="Calibri" pitchFamily="34" charset="-120"/>
               </a:rPr>
-              <a:t>Word Labs  •  wordlabs.app  •  Root: 'fer' = to carry, bring, bear</a:t>
+              <a:t>Word Labs  •  wordlabs.app  •  Root: 'fer' = carry; bring</a:t>
             </a:r>
             <a:endParaRPr lang="en-US" sz="800" dirty="0"/>
           </a:p>
@@ -26404,7 +26451,7 @@
                 <a:ea typeface="Trebuchet MS" pitchFamily="34" charset="-122"/>
                 <a:cs typeface="Trebuchet MS" pitchFamily="34" charset="-120"/>
               </a:rPr>
-              <a:t>refer</a:t>
+              <a:t>offering</a:t>
             </a:r>
             <a:endParaRPr lang="en-US" sz="2800" dirty="0"/>
           </a:p>
@@ -26484,7 +26531,7 @@
         </p:nvSpPr>
         <p:spPr>
           <a:xfrm>
-            <a:off x="2938272" y="2258568"/>
+            <a:off x="2221992" y="2258568"/>
             <a:ext cx="1828800" cy="292608"/>
           </a:xfrm>
           <a:prstGeom prst="rect">
@@ -26518,7 +26565,7 @@
         </p:nvSpPr>
         <p:spPr>
           <a:xfrm>
-            <a:off x="2938272" y="2258568"/>
+            <a:off x="2221992" y="2258568"/>
             <a:ext cx="1828800" cy="292608"/>
           </a:xfrm>
           <a:prstGeom prst="rect">
@@ -26543,7 +26590,7 @@
                 <a:ea typeface="Trebuchet MS" pitchFamily="34" charset="-122"/>
                 <a:cs typeface="Trebuchet MS" pitchFamily="34" charset="-120"/>
               </a:rPr>
-              <a:t>re</a:t>
+              <a:t>ob</a:t>
             </a:r>
             <a:endParaRPr lang="en-US" sz="1300" dirty="0"/>
           </a:p>
@@ -26557,7 +26604,7 @@
         </p:nvSpPr>
         <p:spPr>
           <a:xfrm>
-            <a:off x="2938272" y="2569464"/>
+            <a:off x="2221992" y="2569464"/>
             <a:ext cx="1828800" cy="201168"/>
           </a:xfrm>
           <a:prstGeom prst="rect">
@@ -26582,7 +26629,7 @@
                 <a:ea typeface="Calibri" pitchFamily="34" charset="-122"/>
                 <a:cs typeface="Calibri" pitchFamily="34" charset="-120"/>
               </a:rPr>
-              <a:t>back, again</a:t>
+              <a:t>against; in the way of; towards</a:t>
             </a:r>
             <a:endParaRPr lang="en-US" sz="850" dirty="0"/>
           </a:p>
@@ -26596,7 +26643,7 @@
         </p:nvSpPr>
         <p:spPr>
           <a:xfrm>
-            <a:off x="5803392" y="2258568"/>
+            <a:off x="4370832" y="2258568"/>
             <a:ext cx="1828800" cy="292608"/>
           </a:xfrm>
           <a:prstGeom prst="rect">
@@ -26630,7 +26677,7 @@
         </p:nvSpPr>
         <p:spPr>
           <a:xfrm>
-            <a:off x="5803392" y="2258568"/>
+            <a:off x="4370832" y="2258568"/>
             <a:ext cx="1828800" cy="292608"/>
           </a:xfrm>
           <a:prstGeom prst="rect">
@@ -26669,7 +26716,7 @@
         </p:nvSpPr>
         <p:spPr>
           <a:xfrm>
-            <a:off x="5803392" y="2569464"/>
+            <a:off x="4370832" y="2569464"/>
             <a:ext cx="1828800" cy="201168"/>
           </a:xfrm>
           <a:prstGeom prst="rect">
@@ -26694,7 +26741,7 @@
                 <a:ea typeface="Calibri" pitchFamily="34" charset="-122"/>
                 <a:cs typeface="Calibri" pitchFamily="34" charset="-120"/>
               </a:rPr>
-              <a:t>to carry, bring</a:t>
+              <a:t>carry; bring</a:t>
             </a:r>
             <a:endParaRPr lang="en-US" sz="850" dirty="0"/>
           </a:p>
@@ -26703,6 +26750,118 @@
       <p:sp>
         <p:nvSpPr>
           <p:cNvPr id="22" name="Shape 20"/>
+          <p:cNvSpPr/>
+          <p:nvPr/>
+        </p:nvSpPr>
+        <p:spPr>
+          <a:xfrm>
+            <a:off x="6519672" y="2258568"/>
+            <a:ext cx="1828800" cy="292608"/>
+          </a:xfrm>
+          <a:prstGeom prst="rect">
+            <a:avLst>
+              <a:gd name="adj" fmla="val 25000"/>
+            </a:avLst>
+          </a:prstGeom>
+          <a:solidFill>
+            <a:srgbClr val="FCE7F3"/>
+          </a:solidFill>
+          <a:ln w="19050">
+            <a:solidFill>
+              <a:srgbClr val="DB2777"/>
+            </a:solidFill>
+            <a:prstDash val="solid"/>
+          </a:ln>
+          <a:effectLst>
+            <a:outerShdw sx="100000" sy="100000" kx="0" ky="0" algn="bl" rotWithShape="0" blurRad="101600" dist="38100" dir="8100000">
+              <a:srgbClr val="000000">
+                <a:alpha val="12000"/>
+              </a:srgbClr>
+            </a:outerShdw>
+          </a:effectLst>
+        </p:spPr>
+      </p:sp>
+      <p:sp>
+        <p:nvSpPr>
+          <p:cNvPr id="23" name="Text 21"/>
+          <p:cNvSpPr/>
+          <p:nvPr/>
+        </p:nvSpPr>
+        <p:spPr>
+          <a:xfrm>
+            <a:off x="6519672" y="2258568"/>
+            <a:ext cx="1828800" cy="292608"/>
+          </a:xfrm>
+          <a:prstGeom prst="rect">
+            <a:avLst/>
+          </a:prstGeom>
+          <a:noFill/>
+          <a:ln/>
+        </p:spPr>
+        <p:txBody>
+          <a:bodyPr wrap="square" lIns="0" tIns="0" rIns="0" bIns="0" rtlCol="0" anchor="ctr"/>
+          <a:lstStyle/>
+          <a:p>
+            <a:pPr algn="ctr" indent="0" marL="0">
+              <a:buNone/>
+            </a:pPr>
+            <a:r>
+              <a:rPr lang="en-US" sz="1300" b="1" dirty="0">
+                <a:solidFill>
+                  <a:srgbClr val="9D174D"/>
+                </a:solidFill>
+                <a:latin typeface="Trebuchet MS" pitchFamily="34" charset="0"/>
+                <a:ea typeface="Trebuchet MS" pitchFamily="34" charset="-122"/>
+                <a:cs typeface="Trebuchet MS" pitchFamily="34" charset="-120"/>
+              </a:rPr>
+              <a:t>ing</a:t>
+            </a:r>
+            <a:endParaRPr lang="en-US" sz="1300" dirty="0"/>
+          </a:p>
+        </p:txBody>
+      </p:sp>
+      <p:sp>
+        <p:nvSpPr>
+          <p:cNvPr id="24" name="Text 22"/>
+          <p:cNvSpPr/>
+          <p:nvPr/>
+        </p:nvSpPr>
+        <p:spPr>
+          <a:xfrm>
+            <a:off x="6519672" y="2569464"/>
+            <a:ext cx="1828800" cy="201168"/>
+          </a:xfrm>
+          <a:prstGeom prst="rect">
+            <a:avLst/>
+          </a:prstGeom>
+          <a:noFill/>
+          <a:ln/>
+        </p:spPr>
+        <p:txBody>
+          <a:bodyPr wrap="square" lIns="0" tIns="0" rIns="0" bIns="0" rtlCol="0" anchor="t"/>
+          <a:lstStyle/>
+          <a:p>
+            <a:pPr algn="ctr" indent="0" marL="0">
+              <a:buNone/>
+            </a:pPr>
+            <a:r>
+              <a:rPr lang="en-US" sz="850" dirty="0">
+                <a:solidFill>
+                  <a:srgbClr val="475569"/>
+                </a:solidFill>
+                <a:latin typeface="Calibri" pitchFamily="34" charset="0"/>
+                <a:ea typeface="Calibri" pitchFamily="34" charset="-122"/>
+                <a:cs typeface="Calibri" pitchFamily="34" charset="-120"/>
+              </a:rPr>
+              <a:t>happening now</a:t>
+            </a:r>
+            <a:endParaRPr lang="en-US" sz="850" dirty="0"/>
+          </a:p>
+        </p:txBody>
+      </p:sp>
+      <p:sp>
+        <p:nvSpPr>
+          <p:cNvPr id="25" name="Shape 23"/>
           <p:cNvSpPr/>
           <p:nvPr/>
         </p:nvSpPr>
@@ -26729,7 +26888,7 @@
       </p:sp>
       <p:sp>
         <p:nvSpPr>
-          <p:cNvPr id="23" name="Text 21"/>
+          <p:cNvPr id="26" name="Text 24"/>
           <p:cNvSpPr/>
           <p:nvPr/>
         </p:nvSpPr>
@@ -26768,7 +26927,7 @@
       </p:sp>
       <p:sp>
         <p:nvSpPr>
-          <p:cNvPr id="24" name="Shape 22"/>
+          <p:cNvPr id="27" name="Shape 25"/>
           <p:cNvSpPr/>
           <p:nvPr/>
         </p:nvSpPr>
@@ -26795,13 +26954,13 @@
       </p:sp>
       <p:sp>
         <p:nvSpPr>
-          <p:cNvPr id="25" name="Shape 23"/>
-          <p:cNvSpPr/>
-          <p:nvPr/>
-        </p:nvSpPr>
-        <p:spPr>
-          <a:xfrm>
-            <a:off x="2999232" y="3364992"/>
+          <p:cNvPr id="28" name="Shape 26"/>
+          <p:cNvSpPr/>
+          <p:nvPr/>
+        </p:nvSpPr>
+        <p:spPr>
+          <a:xfrm>
+            <a:off x="2313432" y="3364992"/>
             <a:ext cx="1645920" cy="475488"/>
           </a:xfrm>
           <a:prstGeom prst="rect">
@@ -26822,13 +26981,13 @@
       </p:sp>
       <p:sp>
         <p:nvSpPr>
-          <p:cNvPr id="26" name="Text 24"/>
-          <p:cNvSpPr/>
-          <p:nvPr/>
-        </p:nvSpPr>
-        <p:spPr>
-          <a:xfrm>
-            <a:off x="2999232" y="3364992"/>
+          <p:cNvPr id="29" name="Text 27"/>
+          <p:cNvSpPr/>
+          <p:nvPr/>
+        </p:nvSpPr>
+        <p:spPr>
+          <a:xfrm>
+            <a:off x="2313432" y="3364992"/>
             <a:ext cx="1645920" cy="475488"/>
           </a:xfrm>
           <a:prstGeom prst="rect">
@@ -26853,7 +27012,7 @@
                 <a:ea typeface="Trebuchet MS" pitchFamily="34" charset="-122"/>
                 <a:cs typeface="Trebuchet MS" pitchFamily="34" charset="-120"/>
               </a:rPr>
-              <a:t>re</a:t>
+              <a:t>of</a:t>
             </a:r>
             <a:endParaRPr lang="en-US" sz="1400" dirty="0"/>
           </a:p>
@@ -26861,14 +27020,14 @@
       </p:sp>
       <p:sp>
         <p:nvSpPr>
-          <p:cNvPr id="27" name="Text 25"/>
-          <p:cNvSpPr/>
-          <p:nvPr/>
-        </p:nvSpPr>
-        <p:spPr>
-          <a:xfrm>
-            <a:off x="4645152" y="3364992"/>
-            <a:ext cx="1097280" cy="475488"/>
+          <p:cNvPr id="30" name="Text 28"/>
+          <p:cNvSpPr/>
+          <p:nvPr/>
+        </p:nvSpPr>
+        <p:spPr>
+          <a:xfrm>
+            <a:off x="3959352" y="3364992"/>
+            <a:ext cx="411480" cy="475488"/>
           </a:xfrm>
           <a:prstGeom prst="rect">
             <a:avLst/>
@@ -26900,13 +27059,13 @@
       </p:sp>
       <p:sp>
         <p:nvSpPr>
-          <p:cNvPr id="28" name="Shape 26"/>
-          <p:cNvSpPr/>
-          <p:nvPr/>
-        </p:nvSpPr>
-        <p:spPr>
-          <a:xfrm>
-            <a:off x="5742432" y="3364992"/>
+          <p:cNvPr id="31" name="Shape 29"/>
+          <p:cNvSpPr/>
+          <p:nvPr/>
+        </p:nvSpPr>
+        <p:spPr>
+          <a:xfrm>
+            <a:off x="4370832" y="3364992"/>
             <a:ext cx="1645920" cy="475488"/>
           </a:xfrm>
           <a:prstGeom prst="rect">
@@ -26927,13 +27086,13 @@
       </p:sp>
       <p:sp>
         <p:nvSpPr>
-          <p:cNvPr id="29" name="Text 27"/>
-          <p:cNvSpPr/>
-          <p:nvPr/>
-        </p:nvSpPr>
-        <p:spPr>
-          <a:xfrm>
-            <a:off x="5742432" y="3364992"/>
+          <p:cNvPr id="32" name="Text 30"/>
+          <p:cNvSpPr/>
+          <p:nvPr/>
+        </p:nvSpPr>
+        <p:spPr>
+          <a:xfrm>
+            <a:off x="4370832" y="3364992"/>
             <a:ext cx="1645920" cy="475488"/>
           </a:xfrm>
           <a:prstGeom prst="rect">
@@ -26966,7 +27125,112 @@
       </p:sp>
       <p:sp>
         <p:nvSpPr>
-          <p:cNvPr id="30" name="Shape 28"/>
+          <p:cNvPr id="33" name="Text 31"/>
+          <p:cNvSpPr/>
+          <p:nvPr/>
+        </p:nvSpPr>
+        <p:spPr>
+          <a:xfrm>
+            <a:off x="6016752" y="3364992"/>
+            <a:ext cx="411480" cy="475488"/>
+          </a:xfrm>
+          <a:prstGeom prst="rect">
+            <a:avLst/>
+          </a:prstGeom>
+          <a:noFill/>
+          <a:ln/>
+        </p:spPr>
+        <p:txBody>
+          <a:bodyPr wrap="square" lIns="0" tIns="0" rIns="0" bIns="0" rtlCol="0" anchor="ctr"/>
+          <a:lstStyle/>
+          <a:p>
+            <a:pPr algn="ctr" indent="0" marL="0">
+              <a:buNone/>
+            </a:pPr>
+            <a:r>
+              <a:rPr lang="en-US" sz="1600" b="1" dirty="0">
+                <a:solidFill>
+                  <a:srgbClr val="0D9488"/>
+                </a:solidFill>
+                <a:latin typeface="Trebuchet MS" pitchFamily="34" charset="0"/>
+                <a:ea typeface="Trebuchet MS" pitchFamily="34" charset="-122"/>
+                <a:cs typeface="Trebuchet MS" pitchFamily="34" charset="-120"/>
+              </a:rPr>
+              <a:t>·</a:t>
+            </a:r>
+            <a:endParaRPr lang="en-US" sz="1600" dirty="0"/>
+          </a:p>
+        </p:txBody>
+      </p:sp>
+      <p:sp>
+        <p:nvSpPr>
+          <p:cNvPr id="34" name="Shape 32"/>
+          <p:cNvSpPr/>
+          <p:nvPr/>
+        </p:nvSpPr>
+        <p:spPr>
+          <a:xfrm>
+            <a:off x="6428232" y="3364992"/>
+            <a:ext cx="1645920" cy="475488"/>
+          </a:xfrm>
+          <a:prstGeom prst="rect">
+            <a:avLst>
+              <a:gd name="adj" fmla="val 9615"/>
+            </a:avLst>
+          </a:prstGeom>
+          <a:solidFill>
+            <a:srgbClr val="FFFFFF"/>
+          </a:solidFill>
+          <a:ln w="12700">
+            <a:solidFill>
+              <a:srgbClr val="0D9488"/>
+            </a:solidFill>
+            <a:prstDash val="solid"/>
+          </a:ln>
+        </p:spPr>
+      </p:sp>
+      <p:sp>
+        <p:nvSpPr>
+          <p:cNvPr id="35" name="Text 33"/>
+          <p:cNvSpPr/>
+          <p:nvPr/>
+        </p:nvSpPr>
+        <p:spPr>
+          <a:xfrm>
+            <a:off x="6428232" y="3364992"/>
+            <a:ext cx="1645920" cy="475488"/>
+          </a:xfrm>
+          <a:prstGeom prst="rect">
+            <a:avLst/>
+          </a:prstGeom>
+          <a:noFill/>
+          <a:ln/>
+        </p:spPr>
+        <p:txBody>
+          <a:bodyPr wrap="square" lIns="0" tIns="0" rIns="0" bIns="0" rtlCol="0" anchor="ctr"/>
+          <a:lstStyle/>
+          <a:p>
+            <a:pPr algn="ctr" indent="0" marL="0">
+              <a:buNone/>
+            </a:pPr>
+            <a:r>
+              <a:rPr lang="en-US" sz="1400" b="1" dirty="0">
+                <a:solidFill>
+                  <a:srgbClr val="0D9488"/>
+                </a:solidFill>
+                <a:latin typeface="Trebuchet MS" pitchFamily="34" charset="0"/>
+                <a:ea typeface="Trebuchet MS" pitchFamily="34" charset="-122"/>
+                <a:cs typeface="Trebuchet MS" pitchFamily="34" charset="-120"/>
+              </a:rPr>
+              <a:t>ing</a:t>
+            </a:r>
+            <a:endParaRPr lang="en-US" sz="1400" dirty="0"/>
+          </a:p>
+        </p:txBody>
+      </p:sp>
+      <p:sp>
+        <p:nvSpPr>
+          <p:cNvPr id="36" name="Shape 34"/>
           <p:cNvSpPr/>
           <p:nvPr/>
         </p:nvSpPr>
@@ -26993,7 +27257,7 @@
       </p:sp>
       <p:sp>
         <p:nvSpPr>
-          <p:cNvPr id="31" name="Text 29"/>
+          <p:cNvPr id="37" name="Text 35"/>
           <p:cNvSpPr/>
           <p:nvPr/>
         </p:nvSpPr>
@@ -27032,7 +27296,7 @@
       </p:sp>
       <p:sp>
         <p:nvSpPr>
-          <p:cNvPr id="32" name="Shape 30"/>
+          <p:cNvPr id="38" name="Shape 36"/>
           <p:cNvSpPr/>
           <p:nvPr/>
         </p:nvSpPr>
@@ -27059,13 +27323,13 @@
       </p:sp>
       <p:sp>
         <p:nvSpPr>
-          <p:cNvPr id="33" name="Shape 31"/>
-          <p:cNvSpPr/>
-          <p:nvPr/>
-        </p:nvSpPr>
-        <p:spPr>
-          <a:xfrm>
-            <a:off x="2670048" y="4169664"/>
+          <p:cNvPr id="39" name="Shape 37"/>
+          <p:cNvSpPr/>
+          <p:nvPr/>
+        </p:nvSpPr>
+        <p:spPr>
+          <a:xfrm>
+            <a:off x="2427732" y="4169664"/>
             <a:ext cx="685800" cy="475488"/>
           </a:xfrm>
           <a:prstGeom prst="rect">
@@ -27086,13 +27350,13 @@
       </p:sp>
       <p:sp>
         <p:nvSpPr>
-          <p:cNvPr id="34" name="Text 32"/>
-          <p:cNvSpPr/>
-          <p:nvPr/>
-        </p:nvSpPr>
-        <p:spPr>
-          <a:xfrm>
-            <a:off x="2670048" y="4169664"/>
+          <p:cNvPr id="40" name="Text 38"/>
+          <p:cNvSpPr/>
+          <p:nvPr/>
+        </p:nvSpPr>
+        <p:spPr>
+          <a:xfrm>
+            <a:off x="2427732" y="4169664"/>
             <a:ext cx="685800" cy="475488"/>
           </a:xfrm>
           <a:prstGeom prst="rect">
@@ -27117,7 +27381,7 @@
                 <a:ea typeface="Trebuchet MS" pitchFamily="34" charset="-122"/>
                 <a:cs typeface="Trebuchet MS" pitchFamily="34" charset="-120"/>
               </a:rPr>
-              <a:t>r</a:t>
+              <a:t>o</a:t>
             </a:r>
             <a:endParaRPr lang="en-US" sz="900" dirty="0"/>
           </a:p>
@@ -27125,13 +27389,13 @@
       </p:sp>
       <p:sp>
         <p:nvSpPr>
-          <p:cNvPr id="35" name="Shape 33"/>
-          <p:cNvSpPr/>
-          <p:nvPr/>
-        </p:nvSpPr>
-        <p:spPr>
-          <a:xfrm>
-            <a:off x="4123944" y="4169664"/>
+          <p:cNvPr id="41" name="Shape 39"/>
+          <p:cNvSpPr/>
+          <p:nvPr/>
+        </p:nvSpPr>
+        <p:spPr>
+          <a:xfrm>
+            <a:off x="3639312" y="4169664"/>
             <a:ext cx="685800" cy="475488"/>
           </a:xfrm>
           <a:prstGeom prst="rect">
@@ -27152,13 +27416,13 @@
       </p:sp>
       <p:sp>
         <p:nvSpPr>
-          <p:cNvPr id="36" name="Text 34"/>
-          <p:cNvSpPr/>
-          <p:nvPr/>
-        </p:nvSpPr>
-        <p:spPr>
-          <a:xfrm>
-            <a:off x="4123944" y="4169664"/>
+          <p:cNvPr id="42" name="Text 40"/>
+          <p:cNvSpPr/>
+          <p:nvPr/>
+        </p:nvSpPr>
+        <p:spPr>
+          <a:xfrm>
+            <a:off x="3639312" y="4169664"/>
             <a:ext cx="685800" cy="475488"/>
           </a:xfrm>
           <a:prstGeom prst="rect">
@@ -27183,7 +27447,7 @@
                 <a:ea typeface="Trebuchet MS" pitchFamily="34" charset="-122"/>
                 <a:cs typeface="Trebuchet MS" pitchFamily="34" charset="-120"/>
               </a:rPr>
-              <a:t>e</a:t>
+              <a:t>ff</a:t>
             </a:r>
             <a:endParaRPr lang="en-US" sz="900" dirty="0"/>
           </a:p>
@@ -27191,13 +27455,13 @@
       </p:sp>
       <p:sp>
         <p:nvSpPr>
-          <p:cNvPr id="37" name="Shape 35"/>
-          <p:cNvSpPr/>
-          <p:nvPr/>
-        </p:nvSpPr>
-        <p:spPr>
-          <a:xfrm>
-            <a:off x="5577840" y="4169664"/>
+          <p:cNvPr id="43" name="Shape 41"/>
+          <p:cNvSpPr/>
+          <p:nvPr/>
+        </p:nvSpPr>
+        <p:spPr>
+          <a:xfrm>
+            <a:off x="4850892" y="4169664"/>
             <a:ext cx="685800" cy="475488"/>
           </a:xfrm>
           <a:prstGeom prst="rect">
@@ -27218,13 +27482,13 @@
       </p:sp>
       <p:sp>
         <p:nvSpPr>
-          <p:cNvPr id="38" name="Text 36"/>
-          <p:cNvSpPr/>
-          <p:nvPr/>
-        </p:nvSpPr>
-        <p:spPr>
-          <a:xfrm>
-            <a:off x="5577840" y="4169664"/>
+          <p:cNvPr id="44" name="Text 42"/>
+          <p:cNvSpPr/>
+          <p:nvPr/>
+        </p:nvSpPr>
+        <p:spPr>
+          <a:xfrm>
+            <a:off x="4850892" y="4169664"/>
             <a:ext cx="685800" cy="475488"/>
           </a:xfrm>
           <a:prstGeom prst="rect">
@@ -27249,7 +27513,7 @@
                 <a:ea typeface="Trebuchet MS" pitchFamily="34" charset="-122"/>
                 <a:cs typeface="Trebuchet MS" pitchFamily="34" charset="-120"/>
               </a:rPr>
-              <a:t>f</a:t>
+              <a:t>er</a:t>
             </a:r>
             <a:endParaRPr lang="en-US" sz="900" dirty="0"/>
           </a:p>
@@ -27257,13 +27521,13 @@
       </p:sp>
       <p:sp>
         <p:nvSpPr>
-          <p:cNvPr id="39" name="Shape 37"/>
-          <p:cNvSpPr/>
-          <p:nvPr/>
-        </p:nvSpPr>
-        <p:spPr>
-          <a:xfrm>
-            <a:off x="7031736" y="4169664"/>
+          <p:cNvPr id="45" name="Shape 43"/>
+          <p:cNvSpPr/>
+          <p:nvPr/>
+        </p:nvSpPr>
+        <p:spPr>
+          <a:xfrm>
+            <a:off x="6062472" y="4169664"/>
             <a:ext cx="685800" cy="475488"/>
           </a:xfrm>
           <a:prstGeom prst="rect">
@@ -27284,13 +27548,13 @@
       </p:sp>
       <p:sp>
         <p:nvSpPr>
-          <p:cNvPr id="40" name="Text 38"/>
-          <p:cNvSpPr/>
-          <p:nvPr/>
-        </p:nvSpPr>
-        <p:spPr>
-          <a:xfrm>
-            <a:off x="7031736" y="4169664"/>
+          <p:cNvPr id="46" name="Text 44"/>
+          <p:cNvSpPr/>
+          <p:nvPr/>
+        </p:nvSpPr>
+        <p:spPr>
+          <a:xfrm>
+            <a:off x="6062472" y="4169664"/>
             <a:ext cx="685800" cy="475488"/>
           </a:xfrm>
           <a:prstGeom prst="rect">
@@ -27315,7 +27579,73 @@
                 <a:ea typeface="Trebuchet MS" pitchFamily="34" charset="-122"/>
                 <a:cs typeface="Trebuchet MS" pitchFamily="34" charset="-120"/>
               </a:rPr>
-              <a:t>er</a:t>
+              <a:t>i</a:t>
+            </a:r>
+            <a:endParaRPr lang="en-US" sz="900" dirty="0"/>
+          </a:p>
+        </p:txBody>
+      </p:sp>
+      <p:sp>
+        <p:nvSpPr>
+          <p:cNvPr id="47" name="Shape 45"/>
+          <p:cNvSpPr/>
+          <p:nvPr/>
+        </p:nvSpPr>
+        <p:spPr>
+          <a:xfrm>
+            <a:off x="7274052" y="4169664"/>
+            <a:ext cx="685800" cy="475488"/>
+          </a:xfrm>
+          <a:prstGeom prst="rect">
+            <a:avLst>
+              <a:gd name="adj" fmla="val 7692"/>
+            </a:avLst>
+          </a:prstGeom>
+          <a:solidFill>
+            <a:srgbClr val="FFFFFF"/>
+          </a:solidFill>
+          <a:ln w="12700">
+            <a:solidFill>
+              <a:srgbClr val="DB2777"/>
+            </a:solidFill>
+            <a:prstDash val="solid"/>
+          </a:ln>
+        </p:spPr>
+      </p:sp>
+      <p:sp>
+        <p:nvSpPr>
+          <p:cNvPr id="48" name="Text 46"/>
+          <p:cNvSpPr/>
+          <p:nvPr/>
+        </p:nvSpPr>
+        <p:spPr>
+          <a:xfrm>
+            <a:off x="7274052" y="4169664"/>
+            <a:ext cx="685800" cy="475488"/>
+          </a:xfrm>
+          <a:prstGeom prst="rect">
+            <a:avLst/>
+          </a:prstGeom>
+          <a:noFill/>
+          <a:ln/>
+        </p:spPr>
+        <p:txBody>
+          <a:bodyPr wrap="square" lIns="0" tIns="0" rIns="0" bIns="0" rtlCol="0" anchor="ctr"/>
+          <a:lstStyle/>
+          <a:p>
+            <a:pPr algn="ctr" indent="0" marL="0">
+              <a:buNone/>
+            </a:pPr>
+            <a:r>
+              <a:rPr lang="en-US" sz="900" b="1" dirty="0">
+                <a:solidFill>
+                  <a:srgbClr val="9D174D"/>
+                </a:solidFill>
+                <a:latin typeface="Trebuchet MS" pitchFamily="34" charset="0"/>
+                <a:ea typeface="Trebuchet MS" pitchFamily="34" charset="-122"/>
+                <a:cs typeface="Trebuchet MS" pitchFamily="34" charset="-120"/>
+              </a:rPr>
+              <a:t>ng</a:t>
             </a:r>
             <a:endParaRPr lang="en-US" sz="900" dirty="0"/>
           </a:p>
@@ -27607,7 +27937,7 @@
                 <a:ea typeface="Calibri" pitchFamily="34" charset="-122"/>
                 <a:cs typeface="Calibri" pitchFamily="34" charset="-120"/>
               </a:rPr>
-              <a:t>Word Labs  •  wordlabs.app  •  Root: 'fer' = to carry, bring, bear</a:t>
+              <a:t>Word Labs  •  wordlabs.app  •  Root: 'fer' = carry; bring</a:t>
             </a:r>
             <a:endParaRPr lang="en-US" sz="800" dirty="0"/>
           </a:p>
@@ -27746,7 +28076,7 @@
                 <a:ea typeface="Trebuchet MS" pitchFamily="34" charset="-122"/>
                 <a:cs typeface="Trebuchet MS" pitchFamily="34" charset="-120"/>
               </a:rPr>
-              <a:t>transfer</a:t>
+              <a:t>offerings</a:t>
             </a:r>
             <a:endParaRPr lang="en-US" sz="2800" dirty="0"/>
           </a:p>
@@ -28434,7 +28764,7 @@
                 <a:ea typeface="Calibri" pitchFamily="34" charset="-122"/>
                 <a:cs typeface="Calibri" pitchFamily="34" charset="-120"/>
               </a:rPr>
-              <a:t>Word Labs  •  wordlabs.app  •  Root: 'fer' = to carry, bring, bear</a:t>
+              <a:t>Word Labs  •  wordlabs.app  •  Root: 'fer' = carry; bring</a:t>
             </a:r>
             <a:endParaRPr lang="en-US" sz="800" dirty="0"/>
           </a:p>
@@ -28573,7 +28903,7 @@
                 <a:ea typeface="Trebuchet MS" pitchFamily="34" charset="-122"/>
                 <a:cs typeface="Trebuchet MS" pitchFamily="34" charset="-120"/>
               </a:rPr>
-              <a:t>transfer</a:t>
+              <a:t>offerings</a:t>
             </a:r>
             <a:endParaRPr lang="en-US" sz="2800" dirty="0"/>
           </a:p>
@@ -28653,8 +28983,8 @@
         </p:nvSpPr>
         <p:spPr>
           <a:xfrm>
-            <a:off x="2938272" y="2258568"/>
-            <a:ext cx="1828800" cy="292608"/>
+            <a:off x="1989734" y="2258568"/>
+            <a:ext cx="1581912" cy="292608"/>
           </a:xfrm>
           <a:prstGeom prst="rect">
             <a:avLst>
@@ -28687,8 +29017,8 @@
         </p:nvSpPr>
         <p:spPr>
           <a:xfrm>
-            <a:off x="2938272" y="2258568"/>
-            <a:ext cx="1828800" cy="292608"/>
+            <a:off x="1989734" y="2258568"/>
+            <a:ext cx="1581912" cy="292608"/>
           </a:xfrm>
           <a:prstGeom prst="rect">
             <a:avLst/>
@@ -28712,7 +29042,7 @@
                 <a:ea typeface="Trebuchet MS" pitchFamily="34" charset="-122"/>
                 <a:cs typeface="Trebuchet MS" pitchFamily="34" charset="-120"/>
               </a:rPr>
-              <a:t>trans</a:t>
+              <a:t>ob</a:t>
             </a:r>
             <a:endParaRPr lang="en-US" sz="1300" dirty="0"/>
           </a:p>
@@ -28726,8 +29056,8 @@
         </p:nvSpPr>
         <p:spPr>
           <a:xfrm>
-            <a:off x="2938272" y="2569464"/>
-            <a:ext cx="1828800" cy="201168"/>
+            <a:off x="1989734" y="2569464"/>
+            <a:ext cx="1581912" cy="201168"/>
           </a:xfrm>
           <a:prstGeom prst="rect">
             <a:avLst/>
@@ -28751,7 +29081,7 @@
                 <a:ea typeface="Calibri" pitchFamily="34" charset="-122"/>
                 <a:cs typeface="Calibri" pitchFamily="34" charset="-120"/>
               </a:rPr>
-              <a:t>across, through</a:t>
+              <a:t>against; in the way of; towards</a:t>
             </a:r>
             <a:endParaRPr lang="en-US" sz="850" dirty="0"/>
           </a:p>
@@ -28765,8 +29095,8 @@
         </p:nvSpPr>
         <p:spPr>
           <a:xfrm>
-            <a:off x="5803392" y="2258568"/>
-            <a:ext cx="1828800" cy="292608"/>
+            <a:off x="3659429" y="2258568"/>
+            <a:ext cx="1581912" cy="292608"/>
           </a:xfrm>
           <a:prstGeom prst="rect">
             <a:avLst>
@@ -28799,8 +29129,8 @@
         </p:nvSpPr>
         <p:spPr>
           <a:xfrm>
-            <a:off x="5803392" y="2258568"/>
-            <a:ext cx="1828800" cy="292608"/>
+            <a:off x="3659429" y="2258568"/>
+            <a:ext cx="1581912" cy="292608"/>
           </a:xfrm>
           <a:prstGeom prst="rect">
             <a:avLst/>
@@ -28838,8 +29168,8 @@
         </p:nvSpPr>
         <p:spPr>
           <a:xfrm>
-            <a:off x="5803392" y="2569464"/>
-            <a:ext cx="1828800" cy="201168"/>
+            <a:off x="3659429" y="2569464"/>
+            <a:ext cx="1581912" cy="201168"/>
           </a:xfrm>
           <a:prstGeom prst="rect">
             <a:avLst/>
@@ -28863,7 +29193,7 @@
                 <a:ea typeface="Calibri" pitchFamily="34" charset="-122"/>
                 <a:cs typeface="Calibri" pitchFamily="34" charset="-120"/>
               </a:rPr>
-              <a:t>to carry, bring</a:t>
+              <a:t>carry; bring</a:t>
             </a:r>
             <a:endParaRPr lang="en-US" sz="850" dirty="0"/>
           </a:p>
@@ -28872,6 +29202,230 @@
       <p:sp>
         <p:nvSpPr>
           <p:cNvPr id="22" name="Shape 20"/>
+          <p:cNvSpPr/>
+          <p:nvPr/>
+        </p:nvSpPr>
+        <p:spPr>
+          <a:xfrm>
+            <a:off x="5329123" y="2258568"/>
+            <a:ext cx="1581912" cy="292608"/>
+          </a:xfrm>
+          <a:prstGeom prst="rect">
+            <a:avLst>
+              <a:gd name="adj" fmla="val 25000"/>
+            </a:avLst>
+          </a:prstGeom>
+          <a:solidFill>
+            <a:srgbClr val="FCE7F3"/>
+          </a:solidFill>
+          <a:ln w="19050">
+            <a:solidFill>
+              <a:srgbClr val="DB2777"/>
+            </a:solidFill>
+            <a:prstDash val="solid"/>
+          </a:ln>
+          <a:effectLst>
+            <a:outerShdw sx="100000" sy="100000" kx="0" ky="0" algn="bl" rotWithShape="0" blurRad="101600" dist="38100" dir="8100000">
+              <a:srgbClr val="000000">
+                <a:alpha val="12000"/>
+              </a:srgbClr>
+            </a:outerShdw>
+          </a:effectLst>
+        </p:spPr>
+      </p:sp>
+      <p:sp>
+        <p:nvSpPr>
+          <p:cNvPr id="23" name="Text 21"/>
+          <p:cNvSpPr/>
+          <p:nvPr/>
+        </p:nvSpPr>
+        <p:spPr>
+          <a:xfrm>
+            <a:off x="5329123" y="2258568"/>
+            <a:ext cx="1581912" cy="292608"/>
+          </a:xfrm>
+          <a:prstGeom prst="rect">
+            <a:avLst/>
+          </a:prstGeom>
+          <a:noFill/>
+          <a:ln/>
+        </p:spPr>
+        <p:txBody>
+          <a:bodyPr wrap="square" lIns="0" tIns="0" rIns="0" bIns="0" rtlCol="0" anchor="ctr"/>
+          <a:lstStyle/>
+          <a:p>
+            <a:pPr algn="ctr" indent="0" marL="0">
+              <a:buNone/>
+            </a:pPr>
+            <a:r>
+              <a:rPr lang="en-US" sz="1300" b="1" dirty="0">
+                <a:solidFill>
+                  <a:srgbClr val="9D174D"/>
+                </a:solidFill>
+                <a:latin typeface="Trebuchet MS" pitchFamily="34" charset="0"/>
+                <a:ea typeface="Trebuchet MS" pitchFamily="34" charset="-122"/>
+                <a:cs typeface="Trebuchet MS" pitchFamily="34" charset="-120"/>
+              </a:rPr>
+              <a:t>ing</a:t>
+            </a:r>
+            <a:endParaRPr lang="en-US" sz="1300" dirty="0"/>
+          </a:p>
+        </p:txBody>
+      </p:sp>
+      <p:sp>
+        <p:nvSpPr>
+          <p:cNvPr id="24" name="Text 22"/>
+          <p:cNvSpPr/>
+          <p:nvPr/>
+        </p:nvSpPr>
+        <p:spPr>
+          <a:xfrm>
+            <a:off x="5329123" y="2569464"/>
+            <a:ext cx="1581912" cy="201168"/>
+          </a:xfrm>
+          <a:prstGeom prst="rect">
+            <a:avLst/>
+          </a:prstGeom>
+          <a:noFill/>
+          <a:ln/>
+        </p:spPr>
+        <p:txBody>
+          <a:bodyPr wrap="square" lIns="0" tIns="0" rIns="0" bIns="0" rtlCol="0" anchor="t"/>
+          <a:lstStyle/>
+          <a:p>
+            <a:pPr algn="ctr" indent="0" marL="0">
+              <a:buNone/>
+            </a:pPr>
+            <a:r>
+              <a:rPr lang="en-US" sz="850" dirty="0">
+                <a:solidFill>
+                  <a:srgbClr val="475569"/>
+                </a:solidFill>
+                <a:latin typeface="Calibri" pitchFamily="34" charset="0"/>
+                <a:ea typeface="Calibri" pitchFamily="34" charset="-122"/>
+                <a:cs typeface="Calibri" pitchFamily="34" charset="-120"/>
+              </a:rPr>
+              <a:t>happening now</a:t>
+            </a:r>
+            <a:endParaRPr lang="en-US" sz="850" dirty="0"/>
+          </a:p>
+        </p:txBody>
+      </p:sp>
+      <p:sp>
+        <p:nvSpPr>
+          <p:cNvPr id="25" name="Shape 23"/>
+          <p:cNvSpPr/>
+          <p:nvPr/>
+        </p:nvSpPr>
+        <p:spPr>
+          <a:xfrm>
+            <a:off x="6998818" y="2258568"/>
+            <a:ext cx="1581912" cy="292608"/>
+          </a:xfrm>
+          <a:prstGeom prst="rect">
+            <a:avLst>
+              <a:gd name="adj" fmla="val 25000"/>
+            </a:avLst>
+          </a:prstGeom>
+          <a:solidFill>
+            <a:srgbClr val="FCE7F3"/>
+          </a:solidFill>
+          <a:ln w="19050">
+            <a:solidFill>
+              <a:srgbClr val="DB2777"/>
+            </a:solidFill>
+            <a:prstDash val="solid"/>
+          </a:ln>
+          <a:effectLst>
+            <a:outerShdw sx="100000" sy="100000" kx="0" ky="0" algn="bl" rotWithShape="0" blurRad="101600" dist="38100" dir="8100000">
+              <a:srgbClr val="000000">
+                <a:alpha val="12000"/>
+              </a:srgbClr>
+            </a:outerShdw>
+          </a:effectLst>
+        </p:spPr>
+      </p:sp>
+      <p:sp>
+        <p:nvSpPr>
+          <p:cNvPr id="26" name="Text 24"/>
+          <p:cNvSpPr/>
+          <p:nvPr/>
+        </p:nvSpPr>
+        <p:spPr>
+          <a:xfrm>
+            <a:off x="6998818" y="2258568"/>
+            <a:ext cx="1581912" cy="292608"/>
+          </a:xfrm>
+          <a:prstGeom prst="rect">
+            <a:avLst/>
+          </a:prstGeom>
+          <a:noFill/>
+          <a:ln/>
+        </p:spPr>
+        <p:txBody>
+          <a:bodyPr wrap="square" lIns="0" tIns="0" rIns="0" bIns="0" rtlCol="0" anchor="ctr"/>
+          <a:lstStyle/>
+          <a:p>
+            <a:pPr algn="ctr" indent="0" marL="0">
+              <a:buNone/>
+            </a:pPr>
+            <a:r>
+              <a:rPr lang="en-US" sz="1300" b="1" dirty="0">
+                <a:solidFill>
+                  <a:srgbClr val="9D174D"/>
+                </a:solidFill>
+                <a:latin typeface="Trebuchet MS" pitchFamily="34" charset="0"/>
+                <a:ea typeface="Trebuchet MS" pitchFamily="34" charset="-122"/>
+                <a:cs typeface="Trebuchet MS" pitchFamily="34" charset="-120"/>
+              </a:rPr>
+              <a:t>s</a:t>
+            </a:r>
+            <a:endParaRPr lang="en-US" sz="1300" dirty="0"/>
+          </a:p>
+        </p:txBody>
+      </p:sp>
+      <p:sp>
+        <p:nvSpPr>
+          <p:cNvPr id="27" name="Text 25"/>
+          <p:cNvSpPr/>
+          <p:nvPr/>
+        </p:nvSpPr>
+        <p:spPr>
+          <a:xfrm>
+            <a:off x="6998818" y="2569464"/>
+            <a:ext cx="1581912" cy="201168"/>
+          </a:xfrm>
+          <a:prstGeom prst="rect">
+            <a:avLst/>
+          </a:prstGeom>
+          <a:noFill/>
+          <a:ln/>
+        </p:spPr>
+        <p:txBody>
+          <a:bodyPr wrap="square" lIns="0" tIns="0" rIns="0" bIns="0" rtlCol="0" anchor="t"/>
+          <a:lstStyle/>
+          <a:p>
+            <a:pPr algn="ctr" indent="0" marL="0">
+              <a:buNone/>
+            </a:pPr>
+            <a:r>
+              <a:rPr lang="en-US" sz="850" dirty="0">
+                <a:solidFill>
+                  <a:srgbClr val="475569"/>
+                </a:solidFill>
+                <a:latin typeface="Calibri" pitchFamily="34" charset="0"/>
+                <a:ea typeface="Calibri" pitchFamily="34" charset="-122"/>
+                <a:cs typeface="Calibri" pitchFamily="34" charset="-120"/>
+              </a:rPr>
+              <a:t>plural or present tense</a:t>
+            </a:r>
+            <a:endParaRPr lang="en-US" sz="850" dirty="0"/>
+          </a:p>
+        </p:txBody>
+      </p:sp>
+      <p:sp>
+        <p:nvSpPr>
+          <p:cNvPr id="28" name="Shape 26"/>
           <p:cNvSpPr/>
           <p:nvPr/>
         </p:nvSpPr>
@@ -28898,7 +29452,7 @@
       </p:sp>
       <p:sp>
         <p:nvSpPr>
-          <p:cNvPr id="23" name="Text 21"/>
+          <p:cNvPr id="29" name="Text 27"/>
           <p:cNvSpPr/>
           <p:nvPr/>
         </p:nvSpPr>
@@ -28937,7 +29491,7 @@
       </p:sp>
       <p:sp>
         <p:nvSpPr>
-          <p:cNvPr id="24" name="Shape 22"/>
+          <p:cNvPr id="30" name="Shape 28"/>
           <p:cNvSpPr/>
           <p:nvPr/>
         </p:nvSpPr>
@@ -28964,7 +29518,7 @@
       </p:sp>
       <p:sp>
         <p:nvSpPr>
-          <p:cNvPr id="25" name="Text 23"/>
+          <p:cNvPr id="31" name="Text 29"/>
           <p:cNvSpPr/>
           <p:nvPr/>
         </p:nvSpPr>
@@ -29003,7 +29557,7 @@
       </p:sp>
       <p:sp>
         <p:nvSpPr>
-          <p:cNvPr id="26" name="Shape 24"/>
+          <p:cNvPr id="32" name="Shape 30"/>
           <p:cNvSpPr/>
           <p:nvPr/>
         </p:nvSpPr>
@@ -29030,7 +29584,7 @@
       </p:sp>
       <p:sp>
         <p:nvSpPr>
-          <p:cNvPr id="27" name="Text 25"/>
+          <p:cNvPr id="33" name="Text 31"/>
           <p:cNvSpPr/>
           <p:nvPr/>
         </p:nvSpPr>
@@ -29069,7 +29623,7 @@
       </p:sp>
       <p:sp>
         <p:nvSpPr>
-          <p:cNvPr id="28" name="Shape 26"/>
+          <p:cNvPr id="34" name="Shape 32"/>
           <p:cNvSpPr/>
           <p:nvPr/>
         </p:nvSpPr>
@@ -29096,7 +29650,7 @@
       </p:sp>
       <p:sp>
         <p:nvSpPr>
-          <p:cNvPr id="29" name="Text 27"/>
+          <p:cNvPr id="35" name="Text 33"/>
           <p:cNvSpPr/>
           <p:nvPr/>
         </p:nvSpPr>
@@ -29419,7 +29973,7 @@
                 <a:ea typeface="Calibri" pitchFamily="34" charset="-122"/>
                 <a:cs typeface="Calibri" pitchFamily="34" charset="-120"/>
               </a:rPr>
-              <a:t>Word Labs  •  wordlabs.app  •  Root: 'fer' = to carry, bring, bear</a:t>
+              <a:t>Word Labs  •  wordlabs.app  •  Root: 'fer' = carry; bring</a:t>
             </a:r>
             <a:endParaRPr lang="en-US" sz="800" dirty="0"/>
           </a:p>
@@ -29558,7 +30112,7 @@
                 <a:ea typeface="Trebuchet MS" pitchFamily="34" charset="-122"/>
                 <a:cs typeface="Trebuchet MS" pitchFamily="34" charset="-120"/>
               </a:rPr>
-              <a:t>transfer</a:t>
+              <a:t>offerings</a:t>
             </a:r>
             <a:endParaRPr lang="en-US" sz="2800" dirty="0"/>
           </a:p>
@@ -29638,8 +30192,8 @@
         </p:nvSpPr>
         <p:spPr>
           <a:xfrm>
-            <a:off x="2938272" y="2258568"/>
-            <a:ext cx="1828800" cy="292608"/>
+            <a:off x="1989734" y="2258568"/>
+            <a:ext cx="1581912" cy="292608"/>
           </a:xfrm>
           <a:prstGeom prst="rect">
             <a:avLst>
@@ -29672,8 +30226,8 @@
         </p:nvSpPr>
         <p:spPr>
           <a:xfrm>
-            <a:off x="2938272" y="2258568"/>
-            <a:ext cx="1828800" cy="292608"/>
+            <a:off x="1989734" y="2258568"/>
+            <a:ext cx="1581912" cy="292608"/>
           </a:xfrm>
           <a:prstGeom prst="rect">
             <a:avLst/>
@@ -29697,7 +30251,7 @@
                 <a:ea typeface="Trebuchet MS" pitchFamily="34" charset="-122"/>
                 <a:cs typeface="Trebuchet MS" pitchFamily="34" charset="-120"/>
               </a:rPr>
-              <a:t>trans</a:t>
+              <a:t>ob</a:t>
             </a:r>
             <a:endParaRPr lang="en-US" sz="1300" dirty="0"/>
           </a:p>
@@ -29711,8 +30265,8 @@
         </p:nvSpPr>
         <p:spPr>
           <a:xfrm>
-            <a:off x="2938272" y="2569464"/>
-            <a:ext cx="1828800" cy="201168"/>
+            <a:off x="1989734" y="2569464"/>
+            <a:ext cx="1581912" cy="201168"/>
           </a:xfrm>
           <a:prstGeom prst="rect">
             <a:avLst/>
@@ -29736,7 +30290,7 @@
                 <a:ea typeface="Calibri" pitchFamily="34" charset="-122"/>
                 <a:cs typeface="Calibri" pitchFamily="34" charset="-120"/>
               </a:rPr>
-              <a:t>across, through</a:t>
+              <a:t>against; in the way of; towards</a:t>
             </a:r>
             <a:endParaRPr lang="en-US" sz="850" dirty="0"/>
           </a:p>
@@ -29750,8 +30304,8 @@
         </p:nvSpPr>
         <p:spPr>
           <a:xfrm>
-            <a:off x="5803392" y="2258568"/>
-            <a:ext cx="1828800" cy="292608"/>
+            <a:off x="3659429" y="2258568"/>
+            <a:ext cx="1581912" cy="292608"/>
           </a:xfrm>
           <a:prstGeom prst="rect">
             <a:avLst>
@@ -29784,8 +30338,8 @@
         </p:nvSpPr>
         <p:spPr>
           <a:xfrm>
-            <a:off x="5803392" y="2258568"/>
-            <a:ext cx="1828800" cy="292608"/>
+            <a:off x="3659429" y="2258568"/>
+            <a:ext cx="1581912" cy="292608"/>
           </a:xfrm>
           <a:prstGeom prst="rect">
             <a:avLst/>
@@ -29823,8 +30377,8 @@
         </p:nvSpPr>
         <p:spPr>
           <a:xfrm>
-            <a:off x="5803392" y="2569464"/>
-            <a:ext cx="1828800" cy="201168"/>
+            <a:off x="3659429" y="2569464"/>
+            <a:ext cx="1581912" cy="201168"/>
           </a:xfrm>
           <a:prstGeom prst="rect">
             <a:avLst/>
@@ -29848,7 +30402,7 @@
                 <a:ea typeface="Calibri" pitchFamily="34" charset="-122"/>
                 <a:cs typeface="Calibri" pitchFamily="34" charset="-120"/>
               </a:rPr>
-              <a:t>to carry, bring</a:t>
+              <a:t>carry; bring</a:t>
             </a:r>
             <a:endParaRPr lang="en-US" sz="850" dirty="0"/>
           </a:p>
@@ -29857,6 +30411,230 @@
       <p:sp>
         <p:nvSpPr>
           <p:cNvPr id="22" name="Shape 20"/>
+          <p:cNvSpPr/>
+          <p:nvPr/>
+        </p:nvSpPr>
+        <p:spPr>
+          <a:xfrm>
+            <a:off x="5329123" y="2258568"/>
+            <a:ext cx="1581912" cy="292608"/>
+          </a:xfrm>
+          <a:prstGeom prst="rect">
+            <a:avLst>
+              <a:gd name="adj" fmla="val 25000"/>
+            </a:avLst>
+          </a:prstGeom>
+          <a:solidFill>
+            <a:srgbClr val="FCE7F3"/>
+          </a:solidFill>
+          <a:ln w="19050">
+            <a:solidFill>
+              <a:srgbClr val="DB2777"/>
+            </a:solidFill>
+            <a:prstDash val="solid"/>
+          </a:ln>
+          <a:effectLst>
+            <a:outerShdw sx="100000" sy="100000" kx="0" ky="0" algn="bl" rotWithShape="0" blurRad="101600" dist="38100" dir="8100000">
+              <a:srgbClr val="000000">
+                <a:alpha val="12000"/>
+              </a:srgbClr>
+            </a:outerShdw>
+          </a:effectLst>
+        </p:spPr>
+      </p:sp>
+      <p:sp>
+        <p:nvSpPr>
+          <p:cNvPr id="23" name="Text 21"/>
+          <p:cNvSpPr/>
+          <p:nvPr/>
+        </p:nvSpPr>
+        <p:spPr>
+          <a:xfrm>
+            <a:off x="5329123" y="2258568"/>
+            <a:ext cx="1581912" cy="292608"/>
+          </a:xfrm>
+          <a:prstGeom prst="rect">
+            <a:avLst/>
+          </a:prstGeom>
+          <a:noFill/>
+          <a:ln/>
+        </p:spPr>
+        <p:txBody>
+          <a:bodyPr wrap="square" lIns="0" tIns="0" rIns="0" bIns="0" rtlCol="0" anchor="ctr"/>
+          <a:lstStyle/>
+          <a:p>
+            <a:pPr algn="ctr" indent="0" marL="0">
+              <a:buNone/>
+            </a:pPr>
+            <a:r>
+              <a:rPr lang="en-US" sz="1300" b="1" dirty="0">
+                <a:solidFill>
+                  <a:srgbClr val="9D174D"/>
+                </a:solidFill>
+                <a:latin typeface="Trebuchet MS" pitchFamily="34" charset="0"/>
+                <a:ea typeface="Trebuchet MS" pitchFamily="34" charset="-122"/>
+                <a:cs typeface="Trebuchet MS" pitchFamily="34" charset="-120"/>
+              </a:rPr>
+              <a:t>ing</a:t>
+            </a:r>
+            <a:endParaRPr lang="en-US" sz="1300" dirty="0"/>
+          </a:p>
+        </p:txBody>
+      </p:sp>
+      <p:sp>
+        <p:nvSpPr>
+          <p:cNvPr id="24" name="Text 22"/>
+          <p:cNvSpPr/>
+          <p:nvPr/>
+        </p:nvSpPr>
+        <p:spPr>
+          <a:xfrm>
+            <a:off x="5329123" y="2569464"/>
+            <a:ext cx="1581912" cy="201168"/>
+          </a:xfrm>
+          <a:prstGeom prst="rect">
+            <a:avLst/>
+          </a:prstGeom>
+          <a:noFill/>
+          <a:ln/>
+        </p:spPr>
+        <p:txBody>
+          <a:bodyPr wrap="square" lIns="0" tIns="0" rIns="0" bIns="0" rtlCol="0" anchor="t"/>
+          <a:lstStyle/>
+          <a:p>
+            <a:pPr algn="ctr" indent="0" marL="0">
+              <a:buNone/>
+            </a:pPr>
+            <a:r>
+              <a:rPr lang="en-US" sz="850" dirty="0">
+                <a:solidFill>
+                  <a:srgbClr val="475569"/>
+                </a:solidFill>
+                <a:latin typeface="Calibri" pitchFamily="34" charset="0"/>
+                <a:ea typeface="Calibri" pitchFamily="34" charset="-122"/>
+                <a:cs typeface="Calibri" pitchFamily="34" charset="-120"/>
+              </a:rPr>
+              <a:t>happening now</a:t>
+            </a:r>
+            <a:endParaRPr lang="en-US" sz="850" dirty="0"/>
+          </a:p>
+        </p:txBody>
+      </p:sp>
+      <p:sp>
+        <p:nvSpPr>
+          <p:cNvPr id="25" name="Shape 23"/>
+          <p:cNvSpPr/>
+          <p:nvPr/>
+        </p:nvSpPr>
+        <p:spPr>
+          <a:xfrm>
+            <a:off x="6998818" y="2258568"/>
+            <a:ext cx="1581912" cy="292608"/>
+          </a:xfrm>
+          <a:prstGeom prst="rect">
+            <a:avLst>
+              <a:gd name="adj" fmla="val 25000"/>
+            </a:avLst>
+          </a:prstGeom>
+          <a:solidFill>
+            <a:srgbClr val="FCE7F3"/>
+          </a:solidFill>
+          <a:ln w="19050">
+            <a:solidFill>
+              <a:srgbClr val="DB2777"/>
+            </a:solidFill>
+            <a:prstDash val="solid"/>
+          </a:ln>
+          <a:effectLst>
+            <a:outerShdw sx="100000" sy="100000" kx="0" ky="0" algn="bl" rotWithShape="0" blurRad="101600" dist="38100" dir="8100000">
+              <a:srgbClr val="000000">
+                <a:alpha val="12000"/>
+              </a:srgbClr>
+            </a:outerShdw>
+          </a:effectLst>
+        </p:spPr>
+      </p:sp>
+      <p:sp>
+        <p:nvSpPr>
+          <p:cNvPr id="26" name="Text 24"/>
+          <p:cNvSpPr/>
+          <p:nvPr/>
+        </p:nvSpPr>
+        <p:spPr>
+          <a:xfrm>
+            <a:off x="6998818" y="2258568"/>
+            <a:ext cx="1581912" cy="292608"/>
+          </a:xfrm>
+          <a:prstGeom prst="rect">
+            <a:avLst/>
+          </a:prstGeom>
+          <a:noFill/>
+          <a:ln/>
+        </p:spPr>
+        <p:txBody>
+          <a:bodyPr wrap="square" lIns="0" tIns="0" rIns="0" bIns="0" rtlCol="0" anchor="ctr"/>
+          <a:lstStyle/>
+          <a:p>
+            <a:pPr algn="ctr" indent="0" marL="0">
+              <a:buNone/>
+            </a:pPr>
+            <a:r>
+              <a:rPr lang="en-US" sz="1300" b="1" dirty="0">
+                <a:solidFill>
+                  <a:srgbClr val="9D174D"/>
+                </a:solidFill>
+                <a:latin typeface="Trebuchet MS" pitchFamily="34" charset="0"/>
+                <a:ea typeface="Trebuchet MS" pitchFamily="34" charset="-122"/>
+                <a:cs typeface="Trebuchet MS" pitchFamily="34" charset="-120"/>
+              </a:rPr>
+              <a:t>s</a:t>
+            </a:r>
+            <a:endParaRPr lang="en-US" sz="1300" dirty="0"/>
+          </a:p>
+        </p:txBody>
+      </p:sp>
+      <p:sp>
+        <p:nvSpPr>
+          <p:cNvPr id="27" name="Text 25"/>
+          <p:cNvSpPr/>
+          <p:nvPr/>
+        </p:nvSpPr>
+        <p:spPr>
+          <a:xfrm>
+            <a:off x="6998818" y="2569464"/>
+            <a:ext cx="1581912" cy="201168"/>
+          </a:xfrm>
+          <a:prstGeom prst="rect">
+            <a:avLst/>
+          </a:prstGeom>
+          <a:noFill/>
+          <a:ln/>
+        </p:spPr>
+        <p:txBody>
+          <a:bodyPr wrap="square" lIns="0" tIns="0" rIns="0" bIns="0" rtlCol="0" anchor="t"/>
+          <a:lstStyle/>
+          <a:p>
+            <a:pPr algn="ctr" indent="0" marL="0">
+              <a:buNone/>
+            </a:pPr>
+            <a:r>
+              <a:rPr lang="en-US" sz="850" dirty="0">
+                <a:solidFill>
+                  <a:srgbClr val="475569"/>
+                </a:solidFill>
+                <a:latin typeface="Calibri" pitchFamily="34" charset="0"/>
+                <a:ea typeface="Calibri" pitchFamily="34" charset="-122"/>
+                <a:cs typeface="Calibri" pitchFamily="34" charset="-120"/>
+              </a:rPr>
+              <a:t>plural or present tense</a:t>
+            </a:r>
+            <a:endParaRPr lang="en-US" sz="850" dirty="0"/>
+          </a:p>
+        </p:txBody>
+      </p:sp>
+      <p:sp>
+        <p:nvSpPr>
+          <p:cNvPr id="28" name="Shape 26"/>
           <p:cNvSpPr/>
           <p:nvPr/>
         </p:nvSpPr>
@@ -29883,7 +30661,7 @@
       </p:sp>
       <p:sp>
         <p:nvSpPr>
-          <p:cNvPr id="23" name="Text 21"/>
+          <p:cNvPr id="29" name="Text 27"/>
           <p:cNvSpPr/>
           <p:nvPr/>
         </p:nvSpPr>
@@ -29922,7 +30700,7 @@
       </p:sp>
       <p:sp>
         <p:nvSpPr>
-          <p:cNvPr id="24" name="Shape 22"/>
+          <p:cNvPr id="30" name="Shape 28"/>
           <p:cNvSpPr/>
           <p:nvPr/>
         </p:nvSpPr>
@@ -29949,13 +30727,13 @@
       </p:sp>
       <p:sp>
         <p:nvSpPr>
-          <p:cNvPr id="25" name="Shape 23"/>
-          <p:cNvSpPr/>
-          <p:nvPr/>
-        </p:nvSpPr>
-        <p:spPr>
-          <a:xfrm>
-            <a:off x="2999232" y="3364992"/>
+          <p:cNvPr id="31" name="Shape 29"/>
+          <p:cNvSpPr/>
+          <p:nvPr/>
+        </p:nvSpPr>
+        <p:spPr>
+          <a:xfrm>
+            <a:off x="2313432" y="3364992"/>
             <a:ext cx="1645920" cy="475488"/>
           </a:xfrm>
           <a:prstGeom prst="rect">
@@ -29976,13 +30754,13 @@
       </p:sp>
       <p:sp>
         <p:nvSpPr>
-          <p:cNvPr id="26" name="Text 24"/>
-          <p:cNvSpPr/>
-          <p:nvPr/>
-        </p:nvSpPr>
-        <p:spPr>
-          <a:xfrm>
-            <a:off x="2999232" y="3364992"/>
+          <p:cNvPr id="32" name="Text 30"/>
+          <p:cNvSpPr/>
+          <p:nvPr/>
+        </p:nvSpPr>
+        <p:spPr>
+          <a:xfrm>
+            <a:off x="2313432" y="3364992"/>
             <a:ext cx="1645920" cy="475488"/>
           </a:xfrm>
           <a:prstGeom prst="rect">
@@ -30007,7 +30785,7 @@
                 <a:ea typeface="Trebuchet MS" pitchFamily="34" charset="-122"/>
                 <a:cs typeface="Trebuchet MS" pitchFamily="34" charset="-120"/>
               </a:rPr>
-              <a:t>trans</a:t>
+              <a:t>of</a:t>
             </a:r>
             <a:endParaRPr lang="en-US" sz="1400" dirty="0"/>
           </a:p>
@@ -30015,14 +30793,14 @@
       </p:sp>
       <p:sp>
         <p:nvSpPr>
-          <p:cNvPr id="27" name="Text 25"/>
-          <p:cNvSpPr/>
-          <p:nvPr/>
-        </p:nvSpPr>
-        <p:spPr>
-          <a:xfrm>
-            <a:off x="4645152" y="3364992"/>
-            <a:ext cx="1097280" cy="475488"/>
+          <p:cNvPr id="33" name="Text 31"/>
+          <p:cNvSpPr/>
+          <p:nvPr/>
+        </p:nvSpPr>
+        <p:spPr>
+          <a:xfrm>
+            <a:off x="3959352" y="3364992"/>
+            <a:ext cx="411480" cy="475488"/>
           </a:xfrm>
           <a:prstGeom prst="rect">
             <a:avLst/>
@@ -30054,13 +30832,13 @@
       </p:sp>
       <p:sp>
         <p:nvSpPr>
-          <p:cNvPr id="28" name="Shape 26"/>
-          <p:cNvSpPr/>
-          <p:nvPr/>
-        </p:nvSpPr>
-        <p:spPr>
-          <a:xfrm>
-            <a:off x="5742432" y="3364992"/>
+          <p:cNvPr id="34" name="Shape 32"/>
+          <p:cNvSpPr/>
+          <p:nvPr/>
+        </p:nvSpPr>
+        <p:spPr>
+          <a:xfrm>
+            <a:off x="4370832" y="3364992"/>
             <a:ext cx="1645920" cy="475488"/>
           </a:xfrm>
           <a:prstGeom prst="rect">
@@ -30081,13 +30859,13 @@
       </p:sp>
       <p:sp>
         <p:nvSpPr>
-          <p:cNvPr id="29" name="Text 27"/>
-          <p:cNvSpPr/>
-          <p:nvPr/>
-        </p:nvSpPr>
-        <p:spPr>
-          <a:xfrm>
-            <a:off x="5742432" y="3364992"/>
+          <p:cNvPr id="35" name="Text 33"/>
+          <p:cNvSpPr/>
+          <p:nvPr/>
+        </p:nvSpPr>
+        <p:spPr>
+          <a:xfrm>
+            <a:off x="4370832" y="3364992"/>
             <a:ext cx="1645920" cy="475488"/>
           </a:xfrm>
           <a:prstGeom prst="rect">
@@ -30120,7 +30898,112 @@
       </p:sp>
       <p:sp>
         <p:nvSpPr>
-          <p:cNvPr id="30" name="Shape 28"/>
+          <p:cNvPr id="36" name="Text 34"/>
+          <p:cNvSpPr/>
+          <p:nvPr/>
+        </p:nvSpPr>
+        <p:spPr>
+          <a:xfrm>
+            <a:off x="6016752" y="3364992"/>
+            <a:ext cx="411480" cy="475488"/>
+          </a:xfrm>
+          <a:prstGeom prst="rect">
+            <a:avLst/>
+          </a:prstGeom>
+          <a:noFill/>
+          <a:ln/>
+        </p:spPr>
+        <p:txBody>
+          <a:bodyPr wrap="square" lIns="0" tIns="0" rIns="0" bIns="0" rtlCol="0" anchor="ctr"/>
+          <a:lstStyle/>
+          <a:p>
+            <a:pPr algn="ctr" indent="0" marL="0">
+              <a:buNone/>
+            </a:pPr>
+            <a:r>
+              <a:rPr lang="en-US" sz="1600" b="1" dirty="0">
+                <a:solidFill>
+                  <a:srgbClr val="0D9488"/>
+                </a:solidFill>
+                <a:latin typeface="Trebuchet MS" pitchFamily="34" charset="0"/>
+                <a:ea typeface="Trebuchet MS" pitchFamily="34" charset="-122"/>
+                <a:cs typeface="Trebuchet MS" pitchFamily="34" charset="-120"/>
+              </a:rPr>
+              <a:t>·</a:t>
+            </a:r>
+            <a:endParaRPr lang="en-US" sz="1600" dirty="0"/>
+          </a:p>
+        </p:txBody>
+      </p:sp>
+      <p:sp>
+        <p:nvSpPr>
+          <p:cNvPr id="37" name="Shape 35"/>
+          <p:cNvSpPr/>
+          <p:nvPr/>
+        </p:nvSpPr>
+        <p:spPr>
+          <a:xfrm>
+            <a:off x="6428232" y="3364992"/>
+            <a:ext cx="1645920" cy="475488"/>
+          </a:xfrm>
+          <a:prstGeom prst="rect">
+            <a:avLst>
+              <a:gd name="adj" fmla="val 9615"/>
+            </a:avLst>
+          </a:prstGeom>
+          <a:solidFill>
+            <a:srgbClr val="FFFFFF"/>
+          </a:solidFill>
+          <a:ln w="12700">
+            <a:solidFill>
+              <a:srgbClr val="0D9488"/>
+            </a:solidFill>
+            <a:prstDash val="solid"/>
+          </a:ln>
+        </p:spPr>
+      </p:sp>
+      <p:sp>
+        <p:nvSpPr>
+          <p:cNvPr id="38" name="Text 36"/>
+          <p:cNvSpPr/>
+          <p:nvPr/>
+        </p:nvSpPr>
+        <p:spPr>
+          <a:xfrm>
+            <a:off x="6428232" y="3364992"/>
+            <a:ext cx="1645920" cy="475488"/>
+          </a:xfrm>
+          <a:prstGeom prst="rect">
+            <a:avLst/>
+          </a:prstGeom>
+          <a:noFill/>
+          <a:ln/>
+        </p:spPr>
+        <p:txBody>
+          <a:bodyPr wrap="square" lIns="0" tIns="0" rIns="0" bIns="0" rtlCol="0" anchor="ctr"/>
+          <a:lstStyle/>
+          <a:p>
+            <a:pPr algn="ctr" indent="0" marL="0">
+              <a:buNone/>
+            </a:pPr>
+            <a:r>
+              <a:rPr lang="en-US" sz="1400" b="1" dirty="0">
+                <a:solidFill>
+                  <a:srgbClr val="0D9488"/>
+                </a:solidFill>
+                <a:latin typeface="Trebuchet MS" pitchFamily="34" charset="0"/>
+                <a:ea typeface="Trebuchet MS" pitchFamily="34" charset="-122"/>
+                <a:cs typeface="Trebuchet MS" pitchFamily="34" charset="-120"/>
+              </a:rPr>
+              <a:t>ings</a:t>
+            </a:r>
+            <a:endParaRPr lang="en-US" sz="1400" dirty="0"/>
+          </a:p>
+        </p:txBody>
+      </p:sp>
+      <p:sp>
+        <p:nvSpPr>
+          <p:cNvPr id="39" name="Shape 37"/>
           <p:cNvSpPr/>
           <p:nvPr/>
         </p:nvSpPr>
@@ -30147,7 +31030,7 @@
       </p:sp>
       <p:sp>
         <p:nvSpPr>
-          <p:cNvPr id="31" name="Text 29"/>
+          <p:cNvPr id="40" name="Text 38"/>
           <p:cNvSpPr/>
           <p:nvPr/>
         </p:nvSpPr>
@@ -30186,7 +31069,7 @@
       </p:sp>
       <p:sp>
         <p:nvSpPr>
-          <p:cNvPr id="32" name="Shape 30"/>
+          <p:cNvPr id="41" name="Shape 39"/>
           <p:cNvSpPr/>
           <p:nvPr/>
         </p:nvSpPr>
@@ -30213,7 +31096,7 @@
       </p:sp>
       <p:sp>
         <p:nvSpPr>
-          <p:cNvPr id="33" name="Text 31"/>
+          <p:cNvPr id="42" name="Text 40"/>
           <p:cNvSpPr/>
           <p:nvPr/>
         </p:nvSpPr>
@@ -30536,7 +31419,7 @@
                 <a:ea typeface="Calibri" pitchFamily="34" charset="-122"/>
                 <a:cs typeface="Calibri" pitchFamily="34" charset="-120"/>
               </a:rPr>
-              <a:t>Word Labs  •  wordlabs.app  •  Root: 'fer' = to carry, bring, bear</a:t>
+              <a:t>Word Labs  •  wordlabs.app  •  Root: 'fer' = carry; bring</a:t>
             </a:r>
             <a:endParaRPr lang="en-US" sz="800" dirty="0"/>
           </a:p>
@@ -30675,7 +31558,7 @@
                 <a:ea typeface="Trebuchet MS" pitchFamily="34" charset="-122"/>
                 <a:cs typeface="Trebuchet MS" pitchFamily="34" charset="-120"/>
               </a:rPr>
-              <a:t>transfer</a:t>
+              <a:t>offerings</a:t>
             </a:r>
             <a:endParaRPr lang="en-US" sz="2800" dirty="0"/>
           </a:p>
@@ -30755,8 +31638,8 @@
         </p:nvSpPr>
         <p:spPr>
           <a:xfrm>
-            <a:off x="2938272" y="2258568"/>
-            <a:ext cx="1828800" cy="292608"/>
+            <a:off x="1989734" y="2258568"/>
+            <a:ext cx="1581912" cy="292608"/>
           </a:xfrm>
           <a:prstGeom prst="rect">
             <a:avLst>
@@ -30789,8 +31672,8 @@
         </p:nvSpPr>
         <p:spPr>
           <a:xfrm>
-            <a:off x="2938272" y="2258568"/>
-            <a:ext cx="1828800" cy="292608"/>
+            <a:off x="1989734" y="2258568"/>
+            <a:ext cx="1581912" cy="292608"/>
           </a:xfrm>
           <a:prstGeom prst="rect">
             <a:avLst/>
@@ -30814,7 +31697,7 @@
                 <a:ea typeface="Trebuchet MS" pitchFamily="34" charset="-122"/>
                 <a:cs typeface="Trebuchet MS" pitchFamily="34" charset="-120"/>
               </a:rPr>
-              <a:t>trans</a:t>
+              <a:t>ob</a:t>
             </a:r>
             <a:endParaRPr lang="en-US" sz="1300" dirty="0"/>
           </a:p>
@@ -30828,8 +31711,8 @@
         </p:nvSpPr>
         <p:spPr>
           <a:xfrm>
-            <a:off x="2938272" y="2569464"/>
-            <a:ext cx="1828800" cy="201168"/>
+            <a:off x="1989734" y="2569464"/>
+            <a:ext cx="1581912" cy="201168"/>
           </a:xfrm>
           <a:prstGeom prst="rect">
             <a:avLst/>
@@ -30853,7 +31736,7 @@
                 <a:ea typeface="Calibri" pitchFamily="34" charset="-122"/>
                 <a:cs typeface="Calibri" pitchFamily="34" charset="-120"/>
               </a:rPr>
-              <a:t>across, through</a:t>
+              <a:t>against; in the way of; towards</a:t>
             </a:r>
             <a:endParaRPr lang="en-US" sz="850" dirty="0"/>
           </a:p>
@@ -30867,8 +31750,8 @@
         </p:nvSpPr>
         <p:spPr>
           <a:xfrm>
-            <a:off x="5803392" y="2258568"/>
-            <a:ext cx="1828800" cy="292608"/>
+            <a:off x="3659429" y="2258568"/>
+            <a:ext cx="1581912" cy="292608"/>
           </a:xfrm>
           <a:prstGeom prst="rect">
             <a:avLst>
@@ -30901,8 +31784,8 @@
         </p:nvSpPr>
         <p:spPr>
           <a:xfrm>
-            <a:off x="5803392" y="2258568"/>
-            <a:ext cx="1828800" cy="292608"/>
+            <a:off x="3659429" y="2258568"/>
+            <a:ext cx="1581912" cy="292608"/>
           </a:xfrm>
           <a:prstGeom prst="rect">
             <a:avLst/>
@@ -30940,8 +31823,8 @@
         </p:nvSpPr>
         <p:spPr>
           <a:xfrm>
-            <a:off x="5803392" y="2569464"/>
-            <a:ext cx="1828800" cy="201168"/>
+            <a:off x="3659429" y="2569464"/>
+            <a:ext cx="1581912" cy="201168"/>
           </a:xfrm>
           <a:prstGeom prst="rect">
             <a:avLst/>
@@ -30965,7 +31848,7 @@
                 <a:ea typeface="Calibri" pitchFamily="34" charset="-122"/>
                 <a:cs typeface="Calibri" pitchFamily="34" charset="-120"/>
               </a:rPr>
-              <a:t>to carry, bring</a:t>
+              <a:t>carry; bring</a:t>
             </a:r>
             <a:endParaRPr lang="en-US" sz="850" dirty="0"/>
           </a:p>
@@ -30974,6 +31857,230 @@
       <p:sp>
         <p:nvSpPr>
           <p:cNvPr id="22" name="Shape 20"/>
+          <p:cNvSpPr/>
+          <p:nvPr/>
+        </p:nvSpPr>
+        <p:spPr>
+          <a:xfrm>
+            <a:off x="5329123" y="2258568"/>
+            <a:ext cx="1581912" cy="292608"/>
+          </a:xfrm>
+          <a:prstGeom prst="rect">
+            <a:avLst>
+              <a:gd name="adj" fmla="val 25000"/>
+            </a:avLst>
+          </a:prstGeom>
+          <a:solidFill>
+            <a:srgbClr val="FCE7F3"/>
+          </a:solidFill>
+          <a:ln w="19050">
+            <a:solidFill>
+              <a:srgbClr val="DB2777"/>
+            </a:solidFill>
+            <a:prstDash val="solid"/>
+          </a:ln>
+          <a:effectLst>
+            <a:outerShdw sx="100000" sy="100000" kx="0" ky="0" algn="bl" rotWithShape="0" blurRad="101600" dist="38100" dir="8100000">
+              <a:srgbClr val="000000">
+                <a:alpha val="12000"/>
+              </a:srgbClr>
+            </a:outerShdw>
+          </a:effectLst>
+        </p:spPr>
+      </p:sp>
+      <p:sp>
+        <p:nvSpPr>
+          <p:cNvPr id="23" name="Text 21"/>
+          <p:cNvSpPr/>
+          <p:nvPr/>
+        </p:nvSpPr>
+        <p:spPr>
+          <a:xfrm>
+            <a:off x="5329123" y="2258568"/>
+            <a:ext cx="1581912" cy="292608"/>
+          </a:xfrm>
+          <a:prstGeom prst="rect">
+            <a:avLst/>
+          </a:prstGeom>
+          <a:noFill/>
+          <a:ln/>
+        </p:spPr>
+        <p:txBody>
+          <a:bodyPr wrap="square" lIns="0" tIns="0" rIns="0" bIns="0" rtlCol="0" anchor="ctr"/>
+          <a:lstStyle/>
+          <a:p>
+            <a:pPr algn="ctr" indent="0" marL="0">
+              <a:buNone/>
+            </a:pPr>
+            <a:r>
+              <a:rPr lang="en-US" sz="1300" b="1" dirty="0">
+                <a:solidFill>
+                  <a:srgbClr val="9D174D"/>
+                </a:solidFill>
+                <a:latin typeface="Trebuchet MS" pitchFamily="34" charset="0"/>
+                <a:ea typeface="Trebuchet MS" pitchFamily="34" charset="-122"/>
+                <a:cs typeface="Trebuchet MS" pitchFamily="34" charset="-120"/>
+              </a:rPr>
+              <a:t>ing</a:t>
+            </a:r>
+            <a:endParaRPr lang="en-US" sz="1300" dirty="0"/>
+          </a:p>
+        </p:txBody>
+      </p:sp>
+      <p:sp>
+        <p:nvSpPr>
+          <p:cNvPr id="24" name="Text 22"/>
+          <p:cNvSpPr/>
+          <p:nvPr/>
+        </p:nvSpPr>
+        <p:spPr>
+          <a:xfrm>
+            <a:off x="5329123" y="2569464"/>
+            <a:ext cx="1581912" cy="201168"/>
+          </a:xfrm>
+          <a:prstGeom prst="rect">
+            <a:avLst/>
+          </a:prstGeom>
+          <a:noFill/>
+          <a:ln/>
+        </p:spPr>
+        <p:txBody>
+          <a:bodyPr wrap="square" lIns="0" tIns="0" rIns="0" bIns="0" rtlCol="0" anchor="t"/>
+          <a:lstStyle/>
+          <a:p>
+            <a:pPr algn="ctr" indent="0" marL="0">
+              <a:buNone/>
+            </a:pPr>
+            <a:r>
+              <a:rPr lang="en-US" sz="850" dirty="0">
+                <a:solidFill>
+                  <a:srgbClr val="475569"/>
+                </a:solidFill>
+                <a:latin typeface="Calibri" pitchFamily="34" charset="0"/>
+                <a:ea typeface="Calibri" pitchFamily="34" charset="-122"/>
+                <a:cs typeface="Calibri" pitchFamily="34" charset="-120"/>
+              </a:rPr>
+              <a:t>happening now</a:t>
+            </a:r>
+            <a:endParaRPr lang="en-US" sz="850" dirty="0"/>
+          </a:p>
+        </p:txBody>
+      </p:sp>
+      <p:sp>
+        <p:nvSpPr>
+          <p:cNvPr id="25" name="Shape 23"/>
+          <p:cNvSpPr/>
+          <p:nvPr/>
+        </p:nvSpPr>
+        <p:spPr>
+          <a:xfrm>
+            <a:off x="6998818" y="2258568"/>
+            <a:ext cx="1581912" cy="292608"/>
+          </a:xfrm>
+          <a:prstGeom prst="rect">
+            <a:avLst>
+              <a:gd name="adj" fmla="val 25000"/>
+            </a:avLst>
+          </a:prstGeom>
+          <a:solidFill>
+            <a:srgbClr val="FCE7F3"/>
+          </a:solidFill>
+          <a:ln w="19050">
+            <a:solidFill>
+              <a:srgbClr val="DB2777"/>
+            </a:solidFill>
+            <a:prstDash val="solid"/>
+          </a:ln>
+          <a:effectLst>
+            <a:outerShdw sx="100000" sy="100000" kx="0" ky="0" algn="bl" rotWithShape="0" blurRad="101600" dist="38100" dir="8100000">
+              <a:srgbClr val="000000">
+                <a:alpha val="12000"/>
+              </a:srgbClr>
+            </a:outerShdw>
+          </a:effectLst>
+        </p:spPr>
+      </p:sp>
+      <p:sp>
+        <p:nvSpPr>
+          <p:cNvPr id="26" name="Text 24"/>
+          <p:cNvSpPr/>
+          <p:nvPr/>
+        </p:nvSpPr>
+        <p:spPr>
+          <a:xfrm>
+            <a:off x="6998818" y="2258568"/>
+            <a:ext cx="1581912" cy="292608"/>
+          </a:xfrm>
+          <a:prstGeom prst="rect">
+            <a:avLst/>
+          </a:prstGeom>
+          <a:noFill/>
+          <a:ln/>
+        </p:spPr>
+        <p:txBody>
+          <a:bodyPr wrap="square" lIns="0" tIns="0" rIns="0" bIns="0" rtlCol="0" anchor="ctr"/>
+          <a:lstStyle/>
+          <a:p>
+            <a:pPr algn="ctr" indent="0" marL="0">
+              <a:buNone/>
+            </a:pPr>
+            <a:r>
+              <a:rPr lang="en-US" sz="1300" b="1" dirty="0">
+                <a:solidFill>
+                  <a:srgbClr val="9D174D"/>
+                </a:solidFill>
+                <a:latin typeface="Trebuchet MS" pitchFamily="34" charset="0"/>
+                <a:ea typeface="Trebuchet MS" pitchFamily="34" charset="-122"/>
+                <a:cs typeface="Trebuchet MS" pitchFamily="34" charset="-120"/>
+              </a:rPr>
+              <a:t>s</a:t>
+            </a:r>
+            <a:endParaRPr lang="en-US" sz="1300" dirty="0"/>
+          </a:p>
+        </p:txBody>
+      </p:sp>
+      <p:sp>
+        <p:nvSpPr>
+          <p:cNvPr id="27" name="Text 25"/>
+          <p:cNvSpPr/>
+          <p:nvPr/>
+        </p:nvSpPr>
+        <p:spPr>
+          <a:xfrm>
+            <a:off x="6998818" y="2569464"/>
+            <a:ext cx="1581912" cy="201168"/>
+          </a:xfrm>
+          <a:prstGeom prst="rect">
+            <a:avLst/>
+          </a:prstGeom>
+          <a:noFill/>
+          <a:ln/>
+        </p:spPr>
+        <p:txBody>
+          <a:bodyPr wrap="square" lIns="0" tIns="0" rIns="0" bIns="0" rtlCol="0" anchor="t"/>
+          <a:lstStyle/>
+          <a:p>
+            <a:pPr algn="ctr" indent="0" marL="0">
+              <a:buNone/>
+            </a:pPr>
+            <a:r>
+              <a:rPr lang="en-US" sz="850" dirty="0">
+                <a:solidFill>
+                  <a:srgbClr val="475569"/>
+                </a:solidFill>
+                <a:latin typeface="Calibri" pitchFamily="34" charset="0"/>
+                <a:ea typeface="Calibri" pitchFamily="34" charset="-122"/>
+                <a:cs typeface="Calibri" pitchFamily="34" charset="-120"/>
+              </a:rPr>
+              <a:t>plural or present tense</a:t>
+            </a:r>
+            <a:endParaRPr lang="en-US" sz="850" dirty="0"/>
+          </a:p>
+        </p:txBody>
+      </p:sp>
+      <p:sp>
+        <p:nvSpPr>
+          <p:cNvPr id="28" name="Shape 26"/>
           <p:cNvSpPr/>
           <p:nvPr/>
         </p:nvSpPr>
@@ -31000,7 +32107,7 @@
       </p:sp>
       <p:sp>
         <p:nvSpPr>
-          <p:cNvPr id="23" name="Text 21"/>
+          <p:cNvPr id="29" name="Text 27"/>
           <p:cNvSpPr/>
           <p:nvPr/>
         </p:nvSpPr>
@@ -31039,7 +32146,7 @@
       </p:sp>
       <p:sp>
         <p:nvSpPr>
-          <p:cNvPr id="24" name="Shape 22"/>
+          <p:cNvPr id="30" name="Shape 28"/>
           <p:cNvSpPr/>
           <p:nvPr/>
         </p:nvSpPr>
@@ -31066,13 +32173,13 @@
       </p:sp>
       <p:sp>
         <p:nvSpPr>
-          <p:cNvPr id="25" name="Shape 23"/>
-          <p:cNvSpPr/>
-          <p:nvPr/>
-        </p:nvSpPr>
-        <p:spPr>
-          <a:xfrm>
-            <a:off x="2999232" y="3364992"/>
+          <p:cNvPr id="31" name="Shape 29"/>
+          <p:cNvSpPr/>
+          <p:nvPr/>
+        </p:nvSpPr>
+        <p:spPr>
+          <a:xfrm>
+            <a:off x="2313432" y="3364992"/>
             <a:ext cx="1645920" cy="475488"/>
           </a:xfrm>
           <a:prstGeom prst="rect">
@@ -31093,13 +32200,13 @@
       </p:sp>
       <p:sp>
         <p:nvSpPr>
-          <p:cNvPr id="26" name="Text 24"/>
-          <p:cNvSpPr/>
-          <p:nvPr/>
-        </p:nvSpPr>
-        <p:spPr>
-          <a:xfrm>
-            <a:off x="2999232" y="3364992"/>
+          <p:cNvPr id="32" name="Text 30"/>
+          <p:cNvSpPr/>
+          <p:nvPr/>
+        </p:nvSpPr>
+        <p:spPr>
+          <a:xfrm>
+            <a:off x="2313432" y="3364992"/>
             <a:ext cx="1645920" cy="475488"/>
           </a:xfrm>
           <a:prstGeom prst="rect">
@@ -31124,7 +32231,7 @@
                 <a:ea typeface="Trebuchet MS" pitchFamily="34" charset="-122"/>
                 <a:cs typeface="Trebuchet MS" pitchFamily="34" charset="-120"/>
               </a:rPr>
-              <a:t>trans</a:t>
+              <a:t>of</a:t>
             </a:r>
             <a:endParaRPr lang="en-US" sz="1400" dirty="0"/>
           </a:p>
@@ -31132,14 +32239,14 @@
       </p:sp>
       <p:sp>
         <p:nvSpPr>
-          <p:cNvPr id="27" name="Text 25"/>
-          <p:cNvSpPr/>
-          <p:nvPr/>
-        </p:nvSpPr>
-        <p:spPr>
-          <a:xfrm>
-            <a:off x="4645152" y="3364992"/>
-            <a:ext cx="1097280" cy="475488"/>
+          <p:cNvPr id="33" name="Text 31"/>
+          <p:cNvSpPr/>
+          <p:nvPr/>
+        </p:nvSpPr>
+        <p:spPr>
+          <a:xfrm>
+            <a:off x="3959352" y="3364992"/>
+            <a:ext cx="411480" cy="475488"/>
           </a:xfrm>
           <a:prstGeom prst="rect">
             <a:avLst/>
@@ -31171,13 +32278,13 @@
       </p:sp>
       <p:sp>
         <p:nvSpPr>
-          <p:cNvPr id="28" name="Shape 26"/>
-          <p:cNvSpPr/>
-          <p:nvPr/>
-        </p:nvSpPr>
-        <p:spPr>
-          <a:xfrm>
-            <a:off x="5742432" y="3364992"/>
+          <p:cNvPr id="34" name="Shape 32"/>
+          <p:cNvSpPr/>
+          <p:nvPr/>
+        </p:nvSpPr>
+        <p:spPr>
+          <a:xfrm>
+            <a:off x="4370832" y="3364992"/>
             <a:ext cx="1645920" cy="475488"/>
           </a:xfrm>
           <a:prstGeom prst="rect">
@@ -31198,13 +32305,13 @@
       </p:sp>
       <p:sp>
         <p:nvSpPr>
-          <p:cNvPr id="29" name="Text 27"/>
-          <p:cNvSpPr/>
-          <p:nvPr/>
-        </p:nvSpPr>
-        <p:spPr>
-          <a:xfrm>
-            <a:off x="5742432" y="3364992"/>
+          <p:cNvPr id="35" name="Text 33"/>
+          <p:cNvSpPr/>
+          <p:nvPr/>
+        </p:nvSpPr>
+        <p:spPr>
+          <a:xfrm>
+            <a:off x="4370832" y="3364992"/>
             <a:ext cx="1645920" cy="475488"/>
           </a:xfrm>
           <a:prstGeom prst="rect">
@@ -31237,7 +32344,112 @@
       </p:sp>
       <p:sp>
         <p:nvSpPr>
-          <p:cNvPr id="30" name="Shape 28"/>
+          <p:cNvPr id="36" name="Text 34"/>
+          <p:cNvSpPr/>
+          <p:nvPr/>
+        </p:nvSpPr>
+        <p:spPr>
+          <a:xfrm>
+            <a:off x="6016752" y="3364992"/>
+            <a:ext cx="411480" cy="475488"/>
+          </a:xfrm>
+          <a:prstGeom prst="rect">
+            <a:avLst/>
+          </a:prstGeom>
+          <a:noFill/>
+          <a:ln/>
+        </p:spPr>
+        <p:txBody>
+          <a:bodyPr wrap="square" lIns="0" tIns="0" rIns="0" bIns="0" rtlCol="0" anchor="ctr"/>
+          <a:lstStyle/>
+          <a:p>
+            <a:pPr algn="ctr" indent="0" marL="0">
+              <a:buNone/>
+            </a:pPr>
+            <a:r>
+              <a:rPr lang="en-US" sz="1600" b="1" dirty="0">
+                <a:solidFill>
+                  <a:srgbClr val="0D9488"/>
+                </a:solidFill>
+                <a:latin typeface="Trebuchet MS" pitchFamily="34" charset="0"/>
+                <a:ea typeface="Trebuchet MS" pitchFamily="34" charset="-122"/>
+                <a:cs typeface="Trebuchet MS" pitchFamily="34" charset="-120"/>
+              </a:rPr>
+              <a:t>·</a:t>
+            </a:r>
+            <a:endParaRPr lang="en-US" sz="1600" dirty="0"/>
+          </a:p>
+        </p:txBody>
+      </p:sp>
+      <p:sp>
+        <p:nvSpPr>
+          <p:cNvPr id="37" name="Shape 35"/>
+          <p:cNvSpPr/>
+          <p:nvPr/>
+        </p:nvSpPr>
+        <p:spPr>
+          <a:xfrm>
+            <a:off x="6428232" y="3364992"/>
+            <a:ext cx="1645920" cy="475488"/>
+          </a:xfrm>
+          <a:prstGeom prst="rect">
+            <a:avLst>
+              <a:gd name="adj" fmla="val 9615"/>
+            </a:avLst>
+          </a:prstGeom>
+          <a:solidFill>
+            <a:srgbClr val="FFFFFF"/>
+          </a:solidFill>
+          <a:ln w="12700">
+            <a:solidFill>
+              <a:srgbClr val="0D9488"/>
+            </a:solidFill>
+            <a:prstDash val="solid"/>
+          </a:ln>
+        </p:spPr>
+      </p:sp>
+      <p:sp>
+        <p:nvSpPr>
+          <p:cNvPr id="38" name="Text 36"/>
+          <p:cNvSpPr/>
+          <p:nvPr/>
+        </p:nvSpPr>
+        <p:spPr>
+          <a:xfrm>
+            <a:off x="6428232" y="3364992"/>
+            <a:ext cx="1645920" cy="475488"/>
+          </a:xfrm>
+          <a:prstGeom prst="rect">
+            <a:avLst/>
+          </a:prstGeom>
+          <a:noFill/>
+          <a:ln/>
+        </p:spPr>
+        <p:txBody>
+          <a:bodyPr wrap="square" lIns="0" tIns="0" rIns="0" bIns="0" rtlCol="0" anchor="ctr"/>
+          <a:lstStyle/>
+          <a:p>
+            <a:pPr algn="ctr" indent="0" marL="0">
+              <a:buNone/>
+            </a:pPr>
+            <a:r>
+              <a:rPr lang="en-US" sz="1400" b="1" dirty="0">
+                <a:solidFill>
+                  <a:srgbClr val="0D9488"/>
+                </a:solidFill>
+                <a:latin typeface="Trebuchet MS" pitchFamily="34" charset="0"/>
+                <a:ea typeface="Trebuchet MS" pitchFamily="34" charset="-122"/>
+                <a:cs typeface="Trebuchet MS" pitchFamily="34" charset="-120"/>
+              </a:rPr>
+              <a:t>ings</a:t>
+            </a:r>
+            <a:endParaRPr lang="en-US" sz="1400" dirty="0"/>
+          </a:p>
+        </p:txBody>
+      </p:sp>
+      <p:sp>
+        <p:nvSpPr>
+          <p:cNvPr id="39" name="Shape 37"/>
           <p:cNvSpPr/>
           <p:nvPr/>
         </p:nvSpPr>
@@ -31264,7 +32476,7 @@
       </p:sp>
       <p:sp>
         <p:nvSpPr>
-          <p:cNvPr id="31" name="Text 29"/>
+          <p:cNvPr id="40" name="Text 38"/>
           <p:cNvSpPr/>
           <p:nvPr/>
         </p:nvSpPr>
@@ -31303,7 +32515,7 @@
       </p:sp>
       <p:sp>
         <p:nvSpPr>
-          <p:cNvPr id="32" name="Shape 30"/>
+          <p:cNvPr id="41" name="Shape 39"/>
           <p:cNvSpPr/>
           <p:nvPr/>
         </p:nvSpPr>
@@ -31330,13 +32542,13 @@
       </p:sp>
       <p:sp>
         <p:nvSpPr>
-          <p:cNvPr id="33" name="Shape 31"/>
-          <p:cNvSpPr/>
-          <p:nvPr/>
-        </p:nvSpPr>
-        <p:spPr>
-          <a:xfrm>
-            <a:off x="2124837" y="4169664"/>
+          <p:cNvPr id="42" name="Shape 40"/>
+          <p:cNvSpPr/>
+          <p:nvPr/>
+        </p:nvSpPr>
+        <p:spPr>
+          <a:xfrm>
+            <a:off x="2254649" y="4169664"/>
             <a:ext cx="685800" cy="475488"/>
           </a:xfrm>
           <a:prstGeom prst="rect">
@@ -31357,13 +32569,13 @@
       </p:sp>
       <p:sp>
         <p:nvSpPr>
-          <p:cNvPr id="34" name="Text 32"/>
-          <p:cNvSpPr/>
-          <p:nvPr/>
-        </p:nvSpPr>
-        <p:spPr>
-          <a:xfrm>
-            <a:off x="2124837" y="4169664"/>
+          <p:cNvPr id="43" name="Text 41"/>
+          <p:cNvSpPr/>
+          <p:nvPr/>
+        </p:nvSpPr>
+        <p:spPr>
+          <a:xfrm>
+            <a:off x="2254649" y="4169664"/>
             <a:ext cx="685800" cy="475488"/>
           </a:xfrm>
           <a:prstGeom prst="rect">
@@ -31388,7 +32600,7 @@
                 <a:ea typeface="Trebuchet MS" pitchFamily="34" charset="-122"/>
                 <a:cs typeface="Trebuchet MS" pitchFamily="34" charset="-120"/>
               </a:rPr>
-              <a:t>t</a:t>
+              <a:t>o</a:t>
             </a:r>
             <a:endParaRPr lang="en-US" sz="900" dirty="0"/>
           </a:p>
@@ -31396,13 +32608,13 @@
       </p:sp>
       <p:sp>
         <p:nvSpPr>
-          <p:cNvPr id="35" name="Shape 33"/>
-          <p:cNvSpPr/>
-          <p:nvPr/>
-        </p:nvSpPr>
-        <p:spPr>
-          <a:xfrm>
-            <a:off x="3033522" y="4169664"/>
+          <p:cNvPr id="44" name="Shape 42"/>
+          <p:cNvSpPr/>
+          <p:nvPr/>
+        </p:nvSpPr>
+        <p:spPr>
+          <a:xfrm>
+            <a:off x="3293146" y="4169664"/>
             <a:ext cx="685800" cy="475488"/>
           </a:xfrm>
           <a:prstGeom prst="rect">
@@ -31423,13 +32635,13 @@
       </p:sp>
       <p:sp>
         <p:nvSpPr>
-          <p:cNvPr id="36" name="Text 34"/>
-          <p:cNvSpPr/>
-          <p:nvPr/>
-        </p:nvSpPr>
-        <p:spPr>
-          <a:xfrm>
-            <a:off x="3033522" y="4169664"/>
+          <p:cNvPr id="45" name="Text 43"/>
+          <p:cNvSpPr/>
+          <p:nvPr/>
+        </p:nvSpPr>
+        <p:spPr>
+          <a:xfrm>
+            <a:off x="3293146" y="4169664"/>
             <a:ext cx="685800" cy="475488"/>
           </a:xfrm>
           <a:prstGeom prst="rect">
@@ -31454,7 +32666,7 @@
                 <a:ea typeface="Trebuchet MS" pitchFamily="34" charset="-122"/>
                 <a:cs typeface="Trebuchet MS" pitchFamily="34" charset="-120"/>
               </a:rPr>
-              <a:t>r</a:t>
+              <a:t>ff</a:t>
             </a:r>
             <a:endParaRPr lang="en-US" sz="900" dirty="0"/>
           </a:p>
@@ -31462,13 +32674,13 @@
       </p:sp>
       <p:sp>
         <p:nvSpPr>
-          <p:cNvPr id="37" name="Shape 35"/>
-          <p:cNvSpPr/>
-          <p:nvPr/>
-        </p:nvSpPr>
-        <p:spPr>
-          <a:xfrm>
-            <a:off x="3942207" y="4169664"/>
+          <p:cNvPr id="46" name="Shape 44"/>
+          <p:cNvSpPr/>
+          <p:nvPr/>
+        </p:nvSpPr>
+        <p:spPr>
+          <a:xfrm>
+            <a:off x="4331643" y="4169664"/>
             <a:ext cx="685800" cy="475488"/>
           </a:xfrm>
           <a:prstGeom prst="rect">
@@ -31489,13 +32701,13 @@
       </p:sp>
       <p:sp>
         <p:nvSpPr>
-          <p:cNvPr id="38" name="Text 36"/>
-          <p:cNvSpPr/>
-          <p:nvPr/>
-        </p:nvSpPr>
-        <p:spPr>
-          <a:xfrm>
-            <a:off x="3942207" y="4169664"/>
+          <p:cNvPr id="47" name="Text 45"/>
+          <p:cNvSpPr/>
+          <p:nvPr/>
+        </p:nvSpPr>
+        <p:spPr>
+          <a:xfrm>
+            <a:off x="4331643" y="4169664"/>
             <a:ext cx="685800" cy="475488"/>
           </a:xfrm>
           <a:prstGeom prst="rect">
@@ -31520,7 +32732,7 @@
                 <a:ea typeface="Trebuchet MS" pitchFamily="34" charset="-122"/>
                 <a:cs typeface="Trebuchet MS" pitchFamily="34" charset="-120"/>
               </a:rPr>
-              <a:t>a</a:t>
+              <a:t>er</a:t>
             </a:r>
             <a:endParaRPr lang="en-US" sz="900" dirty="0"/>
           </a:p>
@@ -31528,13 +32740,13 @@
       </p:sp>
       <p:sp>
         <p:nvSpPr>
-          <p:cNvPr id="39" name="Shape 37"/>
-          <p:cNvSpPr/>
-          <p:nvPr/>
-        </p:nvSpPr>
-        <p:spPr>
-          <a:xfrm>
-            <a:off x="4850892" y="4169664"/>
+          <p:cNvPr id="48" name="Shape 46"/>
+          <p:cNvSpPr/>
+          <p:nvPr/>
+        </p:nvSpPr>
+        <p:spPr>
+          <a:xfrm>
+            <a:off x="5370141" y="4169664"/>
             <a:ext cx="685800" cy="475488"/>
           </a:xfrm>
           <a:prstGeom prst="rect">
@@ -31555,13 +32767,13 @@
       </p:sp>
       <p:sp>
         <p:nvSpPr>
-          <p:cNvPr id="40" name="Text 38"/>
-          <p:cNvSpPr/>
-          <p:nvPr/>
-        </p:nvSpPr>
-        <p:spPr>
-          <a:xfrm>
-            <a:off x="4850892" y="4169664"/>
+          <p:cNvPr id="49" name="Text 47"/>
+          <p:cNvSpPr/>
+          <p:nvPr/>
+        </p:nvSpPr>
+        <p:spPr>
+          <a:xfrm>
+            <a:off x="5370141" y="4169664"/>
             <a:ext cx="685800" cy="475488"/>
           </a:xfrm>
           <a:prstGeom prst="rect">
@@ -31586,7 +32798,7 @@
                 <a:ea typeface="Trebuchet MS" pitchFamily="34" charset="-122"/>
                 <a:cs typeface="Trebuchet MS" pitchFamily="34" charset="-120"/>
               </a:rPr>
-              <a:t>n</a:t>
+              <a:t>i</a:t>
             </a:r>
             <a:endParaRPr lang="en-US" sz="900" dirty="0"/>
           </a:p>
@@ -31594,13 +32806,13 @@
       </p:sp>
       <p:sp>
         <p:nvSpPr>
-          <p:cNvPr id="41" name="Shape 39"/>
-          <p:cNvSpPr/>
-          <p:nvPr/>
-        </p:nvSpPr>
-        <p:spPr>
-          <a:xfrm>
-            <a:off x="5759577" y="4169664"/>
+          <p:cNvPr id="50" name="Shape 48"/>
+          <p:cNvSpPr/>
+          <p:nvPr/>
+        </p:nvSpPr>
+        <p:spPr>
+          <a:xfrm>
+            <a:off x="6408638" y="4169664"/>
             <a:ext cx="685800" cy="475488"/>
           </a:xfrm>
           <a:prstGeom prst="rect">
@@ -31621,13 +32833,13 @@
       </p:sp>
       <p:sp>
         <p:nvSpPr>
-          <p:cNvPr id="42" name="Text 40"/>
-          <p:cNvSpPr/>
-          <p:nvPr/>
-        </p:nvSpPr>
-        <p:spPr>
-          <a:xfrm>
-            <a:off x="5759577" y="4169664"/>
+          <p:cNvPr id="51" name="Text 49"/>
+          <p:cNvSpPr/>
+          <p:nvPr/>
+        </p:nvSpPr>
+        <p:spPr>
+          <a:xfrm>
+            <a:off x="6408638" y="4169664"/>
             <a:ext cx="685800" cy="475488"/>
           </a:xfrm>
           <a:prstGeom prst="rect">
@@ -31652,7 +32864,7 @@
                 <a:ea typeface="Trebuchet MS" pitchFamily="34" charset="-122"/>
                 <a:cs typeface="Trebuchet MS" pitchFamily="34" charset="-120"/>
               </a:rPr>
-              <a:t>s</a:t>
+              <a:t>ng</a:t>
             </a:r>
             <a:endParaRPr lang="en-US" sz="900" dirty="0"/>
           </a:p>
@@ -31660,13 +32872,13 @@
       </p:sp>
       <p:sp>
         <p:nvSpPr>
-          <p:cNvPr id="43" name="Shape 41"/>
-          <p:cNvSpPr/>
-          <p:nvPr/>
-        </p:nvSpPr>
-        <p:spPr>
-          <a:xfrm>
-            <a:off x="6668262" y="4169664"/>
+          <p:cNvPr id="52" name="Shape 50"/>
+          <p:cNvSpPr/>
+          <p:nvPr/>
+        </p:nvSpPr>
+        <p:spPr>
+          <a:xfrm>
+            <a:off x="7447135" y="4169664"/>
             <a:ext cx="685800" cy="475488"/>
           </a:xfrm>
           <a:prstGeom prst="rect">
@@ -31687,13 +32899,13 @@
       </p:sp>
       <p:sp>
         <p:nvSpPr>
-          <p:cNvPr id="44" name="Text 42"/>
-          <p:cNvSpPr/>
-          <p:nvPr/>
-        </p:nvSpPr>
-        <p:spPr>
-          <a:xfrm>
-            <a:off x="6668262" y="4169664"/>
+          <p:cNvPr id="53" name="Text 51"/>
+          <p:cNvSpPr/>
+          <p:nvPr/>
+        </p:nvSpPr>
+        <p:spPr>
+          <a:xfrm>
+            <a:off x="7447135" y="4169664"/>
             <a:ext cx="685800" cy="475488"/>
           </a:xfrm>
           <a:prstGeom prst="rect">
@@ -31718,73 +32930,7 @@
                 <a:ea typeface="Trebuchet MS" pitchFamily="34" charset="-122"/>
                 <a:cs typeface="Trebuchet MS" pitchFamily="34" charset="-120"/>
               </a:rPr>
-              <a:t>f</a:t>
-            </a:r>
-            <a:endParaRPr lang="en-US" sz="900" dirty="0"/>
-          </a:p>
-        </p:txBody>
-      </p:sp>
-      <p:sp>
-        <p:nvSpPr>
-          <p:cNvPr id="45" name="Shape 43"/>
-          <p:cNvSpPr/>
-          <p:nvPr/>
-        </p:nvSpPr>
-        <p:spPr>
-          <a:xfrm>
-            <a:off x="7576947" y="4169664"/>
-            <a:ext cx="685800" cy="475488"/>
-          </a:xfrm>
-          <a:prstGeom prst="rect">
-            <a:avLst>
-              <a:gd name="adj" fmla="val 7692"/>
-            </a:avLst>
-          </a:prstGeom>
-          <a:solidFill>
-            <a:srgbClr val="FFFFFF"/>
-          </a:solidFill>
-          <a:ln w="12700">
-            <a:solidFill>
-              <a:srgbClr val="DB2777"/>
-            </a:solidFill>
-            <a:prstDash val="solid"/>
-          </a:ln>
-        </p:spPr>
-      </p:sp>
-      <p:sp>
-        <p:nvSpPr>
-          <p:cNvPr id="46" name="Text 44"/>
-          <p:cNvSpPr/>
-          <p:nvPr/>
-        </p:nvSpPr>
-        <p:spPr>
-          <a:xfrm>
-            <a:off x="7576947" y="4169664"/>
-            <a:ext cx="685800" cy="475488"/>
-          </a:xfrm>
-          <a:prstGeom prst="rect">
-            <a:avLst/>
-          </a:prstGeom>
-          <a:noFill/>
-          <a:ln/>
-        </p:spPr>
-        <p:txBody>
-          <a:bodyPr wrap="square" lIns="0" tIns="0" rIns="0" bIns="0" rtlCol="0" anchor="ctr"/>
-          <a:lstStyle/>
-          <a:p>
-            <a:pPr algn="ctr" indent="0" marL="0">
-              <a:buNone/>
-            </a:pPr>
-            <a:r>
-              <a:rPr lang="en-US" sz="900" b="1" dirty="0">
-                <a:solidFill>
-                  <a:srgbClr val="9D174D"/>
-                </a:solidFill>
-                <a:latin typeface="Trebuchet MS" pitchFamily="34" charset="0"/>
-                <a:ea typeface="Trebuchet MS" pitchFamily="34" charset="-122"/>
-                <a:cs typeface="Trebuchet MS" pitchFamily="34" charset="-120"/>
-              </a:rPr>
-              <a:t>er</a:t>
+              <a:t>s</a:t>
             </a:r>
             <a:endParaRPr lang="en-US" sz="900" dirty="0"/>
           </a:p>
@@ -32076,7 +33222,7 @@
                 <a:ea typeface="Calibri" pitchFamily="34" charset="-122"/>
                 <a:cs typeface="Calibri" pitchFamily="34" charset="-120"/>
               </a:rPr>
-              <a:t>Word Labs  •  wordlabs.app  •  Root: 'fer' = to carry, bring, bear</a:t>
+              <a:t>Word Labs  •  wordlabs.app  •  Root: 'fer' = carry; bring</a:t>
             </a:r>
             <a:endParaRPr lang="en-US" sz="800" dirty="0"/>
           </a:p>
@@ -33245,7 +34391,7 @@
                 <a:ea typeface="Calibri" pitchFamily="34" charset="-122"/>
                 <a:cs typeface="Calibri" pitchFamily="34" charset="-120"/>
               </a:rPr>
-              <a:t>Word Labs  •  wordlabs.app  •  Root: 'fer' = to carry, bring, bear</a:t>
+              <a:t>Word Labs  •  wordlabs.app  •  Root: 'fer' = carry; bring</a:t>
             </a:r>
             <a:endParaRPr lang="en-US" sz="800" dirty="0"/>
           </a:p>
@@ -33546,7 +34692,7 @@
                 <a:ea typeface="Trebuchet MS" pitchFamily="34" charset="-122"/>
                 <a:cs typeface="Trebuchet MS" pitchFamily="34" charset="-120"/>
               </a:rPr>
-              <a:t>trans-</a:t>
+              <a:t>circum-</a:t>
             </a:r>
             <a:endParaRPr lang="en-US" sz="1300" dirty="0"/>
           </a:p>
@@ -33738,7 +34884,7 @@
                 <a:ea typeface="Trebuchet MS" pitchFamily="34" charset="-122"/>
                 <a:cs typeface="Trebuchet MS" pitchFamily="34" charset="-120"/>
               </a:rPr>
-              <a:t>re-</a:t>
+              <a:t>con-</a:t>
             </a:r>
             <a:endParaRPr lang="en-US" sz="1300" dirty="0"/>
           </a:p>
@@ -33827,7 +34973,7 @@
                 <a:ea typeface="Trebuchet MS" pitchFamily="34" charset="-122"/>
                 <a:cs typeface="Trebuchet MS" pitchFamily="34" charset="-120"/>
               </a:rPr>
-              <a:t>-ent</a:t>
+              <a:t>-y</a:t>
             </a:r>
             <a:endParaRPr lang="en-US" sz="1300" dirty="0"/>
           </a:p>
@@ -33891,7 +35037,7 @@
                 <a:ea typeface="Trebuchet MS" pitchFamily="34" charset="-122"/>
                 <a:cs typeface="Trebuchet MS" pitchFamily="34" charset="-120"/>
               </a:rPr>
-              <a:t>con-</a:t>
+              <a:t>in-</a:t>
             </a:r>
             <a:endParaRPr lang="en-US" sz="1300" dirty="0"/>
           </a:p>
@@ -33980,7 +35126,7 @@
                 <a:ea typeface="Trebuchet MS" pitchFamily="34" charset="-122"/>
                 <a:cs typeface="Trebuchet MS" pitchFamily="34" charset="-120"/>
               </a:rPr>
-              <a:t>-al</a:t>
+              <a:t>-ed</a:t>
             </a:r>
             <a:endParaRPr lang="en-US" sz="1300" dirty="0"/>
           </a:p>
@@ -34044,7 +35190,7 @@
                 <a:ea typeface="Trebuchet MS" pitchFamily="34" charset="-122"/>
                 <a:cs typeface="Trebuchet MS" pitchFamily="34" charset="-120"/>
               </a:rPr>
-              <a:t>in-</a:t>
+              <a:t>inter-</a:t>
             </a:r>
             <a:endParaRPr lang="en-US" sz="1300" dirty="0"/>
           </a:p>
@@ -34197,7 +35343,7 @@
                 <a:ea typeface="Trebuchet MS" pitchFamily="34" charset="-122"/>
                 <a:cs typeface="Trebuchet MS" pitchFamily="34" charset="-120"/>
               </a:rPr>
-              <a:t>of-</a:t>
+              <a:t>ob-</a:t>
             </a:r>
             <a:endParaRPr lang="en-US" sz="1300" dirty="0"/>
           </a:p>
@@ -34286,7 +35432,7 @@
                 <a:ea typeface="Trebuchet MS" pitchFamily="34" charset="-122"/>
                 <a:cs typeface="Trebuchet MS" pitchFamily="34" charset="-120"/>
               </a:rPr>
-              <a:t>-ed</a:t>
+              <a:t>-s</a:t>
             </a:r>
             <a:endParaRPr lang="en-US" sz="1300" dirty="0"/>
           </a:p>
@@ -34294,14 +35440,39 @@
       </p:sp>
       <p:sp>
         <p:nvSpPr>
-          <p:cNvPr id="43" name="Text 41"/>
-          <p:cNvSpPr/>
-          <p:nvPr/>
-        </p:nvSpPr>
-        <p:spPr>
-          <a:xfrm>
-            <a:off x="365760" y="3611880"/>
-            <a:ext cx="1828800" cy="347472"/>
+          <p:cNvPr id="43" name="Shape 41"/>
+          <p:cNvSpPr/>
+          <p:nvPr/>
+        </p:nvSpPr>
+        <p:spPr>
+          <a:xfrm>
+            <a:off x="365760" y="3666744"/>
+            <a:ext cx="2468880" cy="402336"/>
+          </a:xfrm>
+          <a:prstGeom prst="rect">
+            <a:avLst/>
+          </a:prstGeom>
+          <a:solidFill>
+            <a:srgbClr val="DDD6FE"/>
+          </a:solidFill>
+          <a:ln w="12700">
+            <a:solidFill>
+              <a:srgbClr val="E2E8F0"/>
+            </a:solidFill>
+            <a:prstDash val="solid"/>
+          </a:ln>
+        </p:spPr>
+      </p:sp>
+      <p:sp>
+        <p:nvSpPr>
+          <p:cNvPr id="44" name="Text 42"/>
+          <p:cNvSpPr/>
+          <p:nvPr/>
+        </p:nvSpPr>
+        <p:spPr>
+          <a:xfrm>
+            <a:off x="365760" y="3666744"/>
+            <a:ext cx="2468880" cy="402336"/>
           </a:xfrm>
           <a:prstGeom prst="rect">
             <a:avLst/>
@@ -34313,18 +35484,146 @@
           <a:bodyPr wrap="square" lIns="0" tIns="0" rIns="0" bIns="0" rtlCol="0" anchor="ctr"/>
           <a:lstStyle/>
           <a:p>
-            <a:pPr algn="l" indent="0" marL="0">
-              <a:buNone/>
-            </a:pPr>
-            <a:r>
-              <a:rPr lang="en-US" sz="1200" b="1" dirty="0">
-                <a:solidFill>
-                  <a:srgbClr val="0F172A"/>
+            <a:pPr algn="ctr" indent="0" marL="0">
+              <a:buNone/>
+            </a:pPr>
+            <a:r>
+              <a:rPr lang="en-US" sz="1300" b="1" dirty="0">
+                <a:solidFill>
+                  <a:srgbClr val="4C1D95"/>
                 </a:solidFill>
                 <a:latin typeface="Trebuchet MS" pitchFamily="34" charset="0"/>
                 <a:ea typeface="Trebuchet MS" pitchFamily="34" charset="-122"/>
                 <a:cs typeface="Trebuchet MS" pitchFamily="34" charset="-120"/>
               </a:rPr>
+              <a:t>pre-</a:t>
+            </a:r>
+            <a:endParaRPr lang="en-US" sz="1300" dirty="0"/>
+          </a:p>
+        </p:txBody>
+      </p:sp>
+      <p:sp>
+        <p:nvSpPr>
+          <p:cNvPr id="45" name="Shape 43"/>
+          <p:cNvSpPr/>
+          <p:nvPr/>
+        </p:nvSpPr>
+        <p:spPr>
+          <a:xfrm>
+            <a:off x="2971800" y="3666744"/>
+            <a:ext cx="2834640" cy="402336"/>
+          </a:xfrm>
+          <a:prstGeom prst="rect">
+            <a:avLst/>
+          </a:prstGeom>
+          <a:solidFill>
+            <a:srgbClr val="F1F5F9"/>
+          </a:solidFill>
+          <a:ln w="12700">
+            <a:solidFill>
+              <a:srgbClr val="E2E8F0"/>
+            </a:solidFill>
+            <a:prstDash val="solid"/>
+          </a:ln>
+        </p:spPr>
+      </p:sp>
+      <p:sp>
+        <p:nvSpPr>
+          <p:cNvPr id="46" name="Shape 44"/>
+          <p:cNvSpPr/>
+          <p:nvPr/>
+        </p:nvSpPr>
+        <p:spPr>
+          <a:xfrm>
+            <a:off x="5943600" y="3666744"/>
+            <a:ext cx="2834640" cy="402336"/>
+          </a:xfrm>
+          <a:prstGeom prst="rect">
+            <a:avLst/>
+          </a:prstGeom>
+          <a:solidFill>
+            <a:srgbClr val="FCE7F3"/>
+          </a:solidFill>
+          <a:ln w="12700">
+            <a:solidFill>
+              <a:srgbClr val="E2E8F0"/>
+            </a:solidFill>
+            <a:prstDash val="solid"/>
+          </a:ln>
+        </p:spPr>
+      </p:sp>
+      <p:sp>
+        <p:nvSpPr>
+          <p:cNvPr id="47" name="Text 45"/>
+          <p:cNvSpPr/>
+          <p:nvPr/>
+        </p:nvSpPr>
+        <p:spPr>
+          <a:xfrm>
+            <a:off x="5943600" y="3666744"/>
+            <a:ext cx="2834640" cy="402336"/>
+          </a:xfrm>
+          <a:prstGeom prst="rect">
+            <a:avLst/>
+          </a:prstGeom>
+          <a:noFill/>
+          <a:ln/>
+        </p:spPr>
+        <p:txBody>
+          <a:bodyPr wrap="square" lIns="0" tIns="0" rIns="0" bIns="0" rtlCol="0" anchor="ctr"/>
+          <a:lstStyle/>
+          <a:p>
+            <a:pPr algn="ctr" indent="0" marL="0">
+              <a:buNone/>
+            </a:pPr>
+            <a:r>
+              <a:rPr lang="en-US" sz="1300" b="1" dirty="0">
+                <a:solidFill>
+                  <a:srgbClr val="9D174D"/>
+                </a:solidFill>
+                <a:latin typeface="Trebuchet MS" pitchFamily="34" charset="0"/>
+                <a:ea typeface="Trebuchet MS" pitchFamily="34" charset="-122"/>
+                <a:cs typeface="Trebuchet MS" pitchFamily="34" charset="-120"/>
+              </a:rPr>
+              <a:t>-able</a:t>
+            </a:r>
+            <a:endParaRPr lang="en-US" sz="1300" dirty="0"/>
+          </a:p>
+        </p:txBody>
+      </p:sp>
+      <p:sp>
+        <p:nvSpPr>
+          <p:cNvPr id="48" name="Text 46"/>
+          <p:cNvSpPr/>
+          <p:nvPr/>
+        </p:nvSpPr>
+        <p:spPr>
+          <a:xfrm>
+            <a:off x="365760" y="3611880"/>
+            <a:ext cx="1828800" cy="347472"/>
+          </a:xfrm>
+          <a:prstGeom prst="rect">
+            <a:avLst/>
+          </a:prstGeom>
+          <a:noFill/>
+          <a:ln/>
+        </p:spPr>
+        <p:txBody>
+          <a:bodyPr wrap="square" lIns="0" tIns="0" rIns="0" bIns="0" rtlCol="0" anchor="ctr"/>
+          <a:lstStyle/>
+          <a:p>
+            <a:pPr algn="l" indent="0" marL="0">
+              <a:buNone/>
+            </a:pPr>
+            <a:r>
+              <a:rPr lang="en-US" sz="1200" b="1" dirty="0">
+                <a:solidFill>
+                  <a:srgbClr val="0F172A"/>
+                </a:solidFill>
+                <a:latin typeface="Trebuchet MS" pitchFamily="34" charset="0"/>
+                <a:ea typeface="Trebuchet MS" pitchFamily="34" charset="-122"/>
+                <a:cs typeface="Trebuchet MS" pitchFamily="34" charset="-120"/>
+              </a:rPr>
               <a:t>Sample words:</a:t>
             </a:r>
             <a:endParaRPr lang="en-US" sz="1200" dirty="0"/>
@@ -34333,7 +35632,7 @@
       </p:sp>
       <p:sp>
         <p:nvSpPr>
-          <p:cNvPr id="44" name="Shape 42"/>
+          <p:cNvPr id="49" name="Shape 47"/>
           <p:cNvSpPr/>
           <p:nvPr/>
         </p:nvSpPr>
@@ -34360,7 +35659,7 @@
       </p:sp>
       <p:sp>
         <p:nvSpPr>
-          <p:cNvPr id="45" name="Text 43"/>
+          <p:cNvPr id="50" name="Text 48"/>
           <p:cNvSpPr/>
           <p:nvPr/>
         </p:nvSpPr>
@@ -34391,7 +35690,7 @@
                 <a:ea typeface="Trebuchet MS" pitchFamily="34" charset="-122"/>
                 <a:cs typeface="Trebuchet MS" pitchFamily="34" charset="-120"/>
               </a:rPr>
-              <a:t>transfer</a:t>
+              <a:t>refer</a:t>
             </a:r>
             <a:endParaRPr lang="en-US" sz="1200" dirty="0"/>
           </a:p>
@@ -34399,7 +35698,7 @@
       </p:sp>
       <p:sp>
         <p:nvSpPr>
-          <p:cNvPr id="46" name="Shape 44"/>
+          <p:cNvPr id="51" name="Shape 49"/>
           <p:cNvSpPr/>
           <p:nvPr/>
         </p:nvSpPr>
@@ -34426,7 +35725,7 @@
       </p:sp>
       <p:sp>
         <p:nvSpPr>
-          <p:cNvPr id="47" name="Text 45"/>
+          <p:cNvPr id="52" name="Text 50"/>
           <p:cNvSpPr/>
           <p:nvPr/>
         </p:nvSpPr>
@@ -34457,7 +35756,7 @@
                 <a:ea typeface="Trebuchet MS" pitchFamily="34" charset="-122"/>
                 <a:cs typeface="Trebuchet MS" pitchFamily="34" charset="-120"/>
               </a:rPr>
-              <a:t>refer</a:t>
+              <a:t>prefer</a:t>
             </a:r>
             <a:endParaRPr lang="en-US" sz="1200" dirty="0"/>
           </a:p>
@@ -34465,7 +35764,7 @@
       </p:sp>
       <p:sp>
         <p:nvSpPr>
-          <p:cNvPr id="48" name="Shape 46"/>
+          <p:cNvPr id="53" name="Shape 51"/>
           <p:cNvSpPr/>
           <p:nvPr/>
         </p:nvSpPr>
@@ -34492,7 +35791,7 @@
       </p:sp>
       <p:sp>
         <p:nvSpPr>
-          <p:cNvPr id="49" name="Text 47"/>
+          <p:cNvPr id="54" name="Text 52"/>
           <p:cNvSpPr/>
           <p:nvPr/>
         </p:nvSpPr>
@@ -34523,7 +35822,7 @@
                 <a:ea typeface="Trebuchet MS" pitchFamily="34" charset="-122"/>
                 <a:cs typeface="Trebuchet MS" pitchFamily="34" charset="-120"/>
               </a:rPr>
-              <a:t>conference</a:t>
+              <a:t>refers</a:t>
             </a:r>
             <a:endParaRPr lang="en-US" sz="1200" dirty="0"/>
           </a:p>
@@ -34531,7 +35830,7 @@
       </p:sp>
       <p:sp>
         <p:nvSpPr>
-          <p:cNvPr id="50" name="Shape 48"/>
+          <p:cNvPr id="55" name="Shape 53"/>
           <p:cNvSpPr/>
           <p:nvPr/>
         </p:nvSpPr>
@@ -34558,7 +35857,7 @@
       </p:sp>
       <p:sp>
         <p:nvSpPr>
-          <p:cNvPr id="51" name="Text 49"/>
+          <p:cNvPr id="56" name="Text 54"/>
           <p:cNvSpPr/>
           <p:nvPr/>
         </p:nvSpPr>
@@ -34589,7 +35888,7 @@
                 <a:ea typeface="Trebuchet MS" pitchFamily="34" charset="-122"/>
                 <a:cs typeface="Trebuchet MS" pitchFamily="34" charset="-120"/>
               </a:rPr>
-              <a:t>infer</a:t>
+              <a:t>suffer</a:t>
             </a:r>
             <a:endParaRPr lang="en-US" sz="1200" dirty="0"/>
           </a:p>
@@ -34597,7 +35896,7 @@
       </p:sp>
       <p:sp>
         <p:nvSpPr>
-          <p:cNvPr id="52" name="Shape 50"/>
+          <p:cNvPr id="57" name="Shape 55"/>
           <p:cNvSpPr/>
           <p:nvPr/>
         </p:nvSpPr>
@@ -34624,7 +35923,7 @@
       </p:sp>
       <p:sp>
         <p:nvSpPr>
-          <p:cNvPr id="53" name="Text 51"/>
+          <p:cNvPr id="58" name="Text 56"/>
           <p:cNvSpPr/>
           <p:nvPr/>
         </p:nvSpPr>
@@ -34655,7 +35954,7 @@
                 <a:ea typeface="Trebuchet MS" pitchFamily="34" charset="-122"/>
                 <a:cs typeface="Trebuchet MS" pitchFamily="34" charset="-120"/>
               </a:rPr>
-              <a:t>offer</a:t>
+              <a:t>prefers</a:t>
             </a:r>
             <a:endParaRPr lang="en-US" sz="1200" dirty="0"/>
           </a:p>
@@ -34663,7 +35962,7 @@
       </p:sp>
       <p:sp>
         <p:nvSpPr>
-          <p:cNvPr id="54" name="Shape 52"/>
+          <p:cNvPr id="59" name="Shape 57"/>
           <p:cNvSpPr/>
           <p:nvPr/>
         </p:nvSpPr>
@@ -34690,7 +35989,7 @@
       </p:sp>
       <p:sp>
         <p:nvSpPr>
-          <p:cNvPr id="55" name="Text 53"/>
+          <p:cNvPr id="60" name="Text 58"/>
           <p:cNvSpPr/>
           <p:nvPr/>
         </p:nvSpPr>
@@ -34721,7 +36020,7 @@
                 <a:ea typeface="Trebuchet MS" pitchFamily="34" charset="-122"/>
                 <a:cs typeface="Trebuchet MS" pitchFamily="34" charset="-120"/>
               </a:rPr>
-              <a:t>prefer</a:t>
+              <a:t>referee</a:t>
             </a:r>
             <a:endParaRPr lang="en-US" sz="1200" dirty="0"/>
           </a:p>
@@ -34729,7 +36028,7 @@
       </p:sp>
       <p:sp>
         <p:nvSpPr>
-          <p:cNvPr id="56" name="Shape 54"/>
+          <p:cNvPr id="61" name="Shape 59"/>
           <p:cNvSpPr/>
           <p:nvPr/>
         </p:nvSpPr>
@@ -34756,7 +36055,7 @@
       </p:sp>
       <p:sp>
         <p:nvSpPr>
-          <p:cNvPr id="57" name="Text 55"/>
+          <p:cNvPr id="62" name="Text 60"/>
           <p:cNvSpPr/>
           <p:nvPr/>
         </p:nvSpPr>
@@ -34787,73 +36086,7 @@
                 <a:ea typeface="Trebuchet MS" pitchFamily="34" charset="-122"/>
                 <a:cs typeface="Trebuchet MS" pitchFamily="34" charset="-120"/>
               </a:rPr>
-              <a:t>different</a:t>
-            </a:r>
-            <a:endParaRPr lang="en-US" sz="1200" dirty="0"/>
-          </a:p>
-        </p:txBody>
-      </p:sp>
-      <p:sp>
-        <p:nvSpPr>
-          <p:cNvPr id="58" name="Shape 56"/>
-          <p:cNvSpPr/>
-          <p:nvPr/>
-        </p:nvSpPr>
-        <p:spPr>
-          <a:xfrm>
-            <a:off x="6894576" y="4498848"/>
-            <a:ext cx="2011680" cy="402336"/>
-          </a:xfrm>
-          <a:prstGeom prst="rect">
-            <a:avLst>
-              <a:gd name="adj" fmla="val 13636"/>
-            </a:avLst>
-          </a:prstGeom>
-          <a:solidFill>
-            <a:srgbClr val="EEF2FF"/>
-          </a:solidFill>
-          <a:ln w="12700">
-            <a:solidFill>
-              <a:srgbClr val="6366F1"/>
-            </a:solidFill>
-            <a:prstDash val="solid"/>
-          </a:ln>
-        </p:spPr>
-      </p:sp>
-      <p:sp>
-        <p:nvSpPr>
-          <p:cNvPr id="59" name="Text 57"/>
-          <p:cNvSpPr/>
-          <p:nvPr/>
-        </p:nvSpPr>
-        <p:spPr>
-          <a:xfrm>
-            <a:off x="6894576" y="4498848"/>
-            <a:ext cx="2011680" cy="402336"/>
-          </a:xfrm>
-          <a:prstGeom prst="rect">
-            <a:avLst/>
-          </a:prstGeom>
-          <a:noFill/>
-          <a:ln/>
-        </p:spPr>
-        <p:txBody>
-          <a:bodyPr wrap="square" lIns="0" tIns="0" rIns="0" bIns="0" rtlCol="0" anchor="ctr"/>
-          <a:lstStyle/>
-          <a:p>
-            <a:pPr algn="ctr" indent="0" marL="0">
-              <a:buNone/>
-            </a:pPr>
-            <a:r>
-              <a:rPr lang="en-US" sz="1200" b="1" dirty="0">
-                <a:solidFill>
-                  <a:srgbClr val="4338CA"/>
-                </a:solidFill>
-                <a:latin typeface="Trebuchet MS" pitchFamily="34" charset="0"/>
-                <a:ea typeface="Trebuchet MS" pitchFamily="34" charset="-122"/>
-                <a:cs typeface="Trebuchet MS" pitchFamily="34" charset="-120"/>
-              </a:rPr>
-              <a:t>fertile</a:t>
+              <a:t>suffers</a:t>
             </a:r>
             <a:endParaRPr lang="en-US" sz="1200" dirty="0"/>
           </a:p>
@@ -35145,7 +36378,7 @@
                 <a:ea typeface="Calibri" pitchFamily="34" charset="-122"/>
                 <a:cs typeface="Calibri" pitchFamily="34" charset="-120"/>
               </a:rPr>
-              <a:t>Word Labs  •  wordlabs.app  •  Root: 'fer' = to carry, bring, bear</a:t>
+              <a:t>Word Labs  •  wordlabs.app  •  Root: 'fer' = carry; bring</a:t>
             </a:r>
             <a:endParaRPr lang="en-US" sz="800" dirty="0"/>
           </a:p>
@@ -35309,7 +36542,7 @@
                 <a:ea typeface="Calibri" pitchFamily="34" charset="-122"/>
                 <a:cs typeface="Calibri" pitchFamily="34" charset="-120"/>
               </a:rPr>
-              <a:t>The core part of a word carrying its basic meaning. For example, 'fer' means 'to carry, bring, bear'.</a:t>
+              <a:t>The core part of a word carrying its basic meaning. For example, 'fer' means 'carry; bring'.</a:t>
             </a:r>
             <a:endParaRPr lang="en-US" sz="1350" dirty="0"/>
           </a:p>
@@ -35929,7 +37162,7 @@
                 <a:ea typeface="Calibri" pitchFamily="34" charset="-122"/>
                 <a:cs typeface="Calibri" pitchFamily="34" charset="-120"/>
               </a:rPr>
-              <a:t>Word Labs  •  wordlabs.app  •  Root: 'fer' = to carry, bring, bear</a:t>
+              <a:t>Word Labs  •  wordlabs.app  •  Root: 'fer' = carry; bring</a:t>
             </a:r>
             <a:endParaRPr lang="en-US" sz="800" dirty="0"/>
           </a:p>
@@ -36041,7 +37274,7 @@
                 <a:ea typeface="Calibri" pitchFamily="34" charset="-122"/>
                 <a:cs typeface="Calibri" pitchFamily="34" charset="-120"/>
               </a:rPr>
-              <a:t>1.  The root 'fer' originally comes from Greek and means to speak.</a:t>
+              <a:t>1.  'prefer' means 'to fix something broken'.</a:t>
             </a:r>
             <a:endParaRPr lang="en-US" sz="1300" dirty="0"/>
           </a:p>
@@ -36180,7 +37413,7 @@
                 <a:ea typeface="Calibri" pitchFamily="34" charset="-122"/>
                 <a:cs typeface="Calibri" pitchFamily="34" charset="-120"/>
               </a:rPr>
-              <a:t>2.  In the word 'conference', the root 'fer' helps carry the idea of bringing people together.</a:t>
+              <a:t>2.  'refer' means 'to mention or direct attention to something'.</a:t>
             </a:r>
             <a:endParaRPr lang="en-US" sz="1300" dirty="0"/>
           </a:p>
@@ -36319,7 +37552,7 @@
                 <a:ea typeface="Calibri" pitchFamily="34" charset="-122"/>
                 <a:cs typeface="Calibri" pitchFamily="34" charset="-120"/>
               </a:rPr>
-              <a:t>3.  The root 'fer' comes from a Latin word meaning to carry or bring.</a:t>
+              <a:t>3.  'fer' means 'carry; bring'.</a:t>
             </a:r>
             <a:endParaRPr lang="en-US" sz="1300" dirty="0"/>
           </a:p>
@@ -36458,7 +37691,7 @@
                 <a:ea typeface="Calibri" pitchFamily="34" charset="-122"/>
                 <a:cs typeface="Calibri" pitchFamily="34" charset="-120"/>
               </a:rPr>
-              <a:t>4.  The word 'transfer' means to keep something in the same place.</a:t>
+              <a:t>4.  'prefer' means 'to like one thing more than another'.</a:t>
             </a:r>
             <a:endParaRPr lang="en-US" sz="1300" dirty="0"/>
           </a:p>
@@ -36481,11 +37714,11 @@
             </a:avLst>
           </a:prstGeom>
           <a:solidFill>
-            <a:srgbClr val="FEE2E2"/>
-          </a:solidFill>
-          <a:ln w="12700">
-            <a:solidFill>
-              <a:srgbClr val="DC2626"/>
+            <a:srgbClr val="DCFCE7"/>
+          </a:solidFill>
+          <a:ln w="12700">
+            <a:solidFill>
+              <a:srgbClr val="16A34A"/>
             </a:solidFill>
             <a:prstDash val="solid"/>
           </a:ln>
@@ -36518,13 +37751,13 @@
             <a:r>
               <a:rPr lang="en-US" sz="1100" b="1" dirty="0">
                 <a:solidFill>
-                  <a:srgbClr val="DC2626"/>
+                  <a:srgbClr val="16A34A"/>
                 </a:solidFill>
                 <a:latin typeface="Trebuchet MS" pitchFamily="34" charset="0"/>
                 <a:ea typeface="Trebuchet MS" pitchFamily="34" charset="-122"/>
                 <a:cs typeface="Trebuchet MS" pitchFamily="34" charset="-120"/>
               </a:rPr>
-              <a:t>FALSE</a:t>
+              <a:t>TRUE</a:t>
             </a:r>
             <a:endParaRPr lang="en-US" sz="1100" dirty="0"/>
           </a:p>
@@ -36597,7 +37830,7 @@
                 <a:ea typeface="Calibri" pitchFamily="34" charset="-122"/>
                 <a:cs typeface="Calibri" pitchFamily="34" charset="-120"/>
               </a:rPr>
-              <a:t>5.  The word 'prefer' contains the root 'fer', meaning to carry or bring.</a:t>
+              <a:t>5.  'refer' means 'to completely forget about something'.</a:t>
             </a:r>
             <a:endParaRPr lang="en-US" sz="1300" dirty="0"/>
           </a:p>
@@ -36620,11 +37853,11 @@
             </a:avLst>
           </a:prstGeom>
           <a:solidFill>
-            <a:srgbClr val="DCFCE7"/>
-          </a:solidFill>
-          <a:ln w="12700">
-            <a:solidFill>
-              <a:srgbClr val="16A34A"/>
+            <a:srgbClr val="FEE2E2"/>
+          </a:solidFill>
+          <a:ln w="12700">
+            <a:solidFill>
+              <a:srgbClr val="DC2626"/>
             </a:solidFill>
             <a:prstDash val="solid"/>
           </a:ln>
@@ -36657,13 +37890,13 @@
             <a:r>
               <a:rPr lang="en-US" sz="1100" b="1" dirty="0">
                 <a:solidFill>
-                  <a:srgbClr val="16A34A"/>
+                  <a:srgbClr val="DC2626"/>
                 </a:solidFill>
                 <a:latin typeface="Trebuchet MS" pitchFamily="34" charset="0"/>
                 <a:ea typeface="Trebuchet MS" pitchFamily="34" charset="-122"/>
                 <a:cs typeface="Trebuchet MS" pitchFamily="34" charset="-120"/>
               </a:rPr>
-              <a:t>TRUE</a:t>
+              <a:t>FALSE</a:t>
             </a:r>
             <a:endParaRPr lang="en-US" sz="1100" dirty="0"/>
           </a:p>
@@ -36955,7 +38188,7 @@
                 <a:ea typeface="Calibri" pitchFamily="34" charset="-122"/>
                 <a:cs typeface="Calibri" pitchFamily="34" charset="-120"/>
               </a:rPr>
-              <a:t>Word Labs  •  wordlabs.app  •  Root: 'fer' = to carry, bring, bear</a:t>
+              <a:t>Word Labs  •  wordlabs.app  •  Root: 'fer' = carry; bring</a:t>
             </a:r>
             <a:endParaRPr lang="en-US" sz="800" dirty="0"/>
           </a:p>
@@ -37092,7 +38325,7 @@
                 <a:ea typeface="Trebuchet MS" pitchFamily="34" charset="-122"/>
                 <a:cs typeface="Trebuchet MS" pitchFamily="34" charset="-120"/>
               </a:rPr>
-              <a:t>to carry, bring, bear</a:t>
+              <a:t>carry; bring</a:t>
             </a:r>
             <a:endParaRPr lang="en-US" sz="2000" dirty="0"/>
           </a:p>
@@ -37131,7 +38364,7 @@
                 <a:ea typeface="Calibri" pitchFamily="34" charset="-122"/>
                 <a:cs typeface="Calibri" pitchFamily="34" charset="-120"/>
               </a:rPr>
-              <a:t>Origin: Latin: ferre</a:t>
+              <a:t>Origin: Latin root</a:t>
             </a:r>
             <a:endParaRPr lang="en-US" sz="1100" dirty="0"/>
           </a:p>
@@ -37236,7 +38469,7 @@
                 <a:ea typeface="Trebuchet MS" pitchFamily="34" charset="-122"/>
                 <a:cs typeface="Trebuchet MS" pitchFamily="34" charset="-120"/>
               </a:rPr>
-              <a:t>transfer</a:t>
+              <a:t>refer</a:t>
             </a:r>
             <a:endParaRPr lang="en-US" sz="1300" dirty="0"/>
           </a:p>
@@ -37302,7 +38535,7 @@
                 <a:ea typeface="Trebuchet MS" pitchFamily="34" charset="-122"/>
                 <a:cs typeface="Trebuchet MS" pitchFamily="34" charset="-120"/>
               </a:rPr>
-              <a:t>refer</a:t>
+              <a:t>prefer</a:t>
             </a:r>
             <a:endParaRPr lang="en-US" sz="1300" dirty="0"/>
           </a:p>
@@ -37368,7 +38601,7 @@
                 <a:ea typeface="Trebuchet MS" pitchFamily="34" charset="-122"/>
                 <a:cs typeface="Trebuchet MS" pitchFamily="34" charset="-120"/>
               </a:rPr>
-              <a:t>conference</a:t>
+              <a:t>refers</a:t>
             </a:r>
             <a:endParaRPr lang="en-US" sz="1300" dirty="0"/>
           </a:p>
@@ -37434,7 +38667,7 @@
                 <a:ea typeface="Trebuchet MS" pitchFamily="34" charset="-122"/>
                 <a:cs typeface="Trebuchet MS" pitchFamily="34" charset="-120"/>
               </a:rPr>
-              <a:t>infer</a:t>
+              <a:t>suffer</a:t>
             </a:r>
             <a:endParaRPr lang="en-US" sz="1300" dirty="0"/>
           </a:p>
@@ -37500,7 +38733,7 @@
                 <a:ea typeface="Trebuchet MS" pitchFamily="34" charset="-122"/>
                 <a:cs typeface="Trebuchet MS" pitchFamily="34" charset="-120"/>
               </a:rPr>
-              <a:t>offer</a:t>
+              <a:t>prefers</a:t>
             </a:r>
             <a:endParaRPr lang="en-US" sz="1300" dirty="0"/>
           </a:p>
@@ -37566,7 +38799,7 @@
                 <a:ea typeface="Trebuchet MS" pitchFamily="34" charset="-122"/>
                 <a:cs typeface="Trebuchet MS" pitchFamily="34" charset="-120"/>
               </a:rPr>
-              <a:t>prefer</a:t>
+              <a:t>referee</a:t>
             </a:r>
             <a:endParaRPr lang="en-US" sz="1300" dirty="0"/>
           </a:p>
@@ -37632,7 +38865,7 @@
                 <a:ea typeface="Trebuchet MS" pitchFamily="34" charset="-122"/>
                 <a:cs typeface="Trebuchet MS" pitchFamily="34" charset="-120"/>
               </a:rPr>
-              <a:t>different</a:t>
+              <a:t>suffers</a:t>
             </a:r>
             <a:endParaRPr lang="en-US" sz="1300" dirty="0"/>
           </a:p>
@@ -37924,7 +39157,7 @@
                 <a:ea typeface="Calibri" pitchFamily="34" charset="-122"/>
                 <a:cs typeface="Calibri" pitchFamily="34" charset="-120"/>
               </a:rPr>
-              <a:t>Word Labs  •  wordlabs.app  •  Root: 'fer' = to carry, bring, bear</a:t>
+              <a:t>Word Labs  •  wordlabs.app  •  Root: 'fer' = carry; bring</a:t>
             </a:r>
             <a:endParaRPr lang="en-US" sz="800" dirty="0"/>
           </a:p>
@@ -38225,7 +39458,7 @@
                 <a:ea typeface="Trebuchet MS" pitchFamily="34" charset="-122"/>
                 <a:cs typeface="Trebuchet MS" pitchFamily="34" charset="-120"/>
               </a:rPr>
-              <a:t>trans-</a:t>
+              <a:t>circum-</a:t>
             </a:r>
             <a:endParaRPr lang="en-US" sz="1300" dirty="0"/>
           </a:p>
@@ -38417,7 +39650,7 @@
                 <a:ea typeface="Trebuchet MS" pitchFamily="34" charset="-122"/>
                 <a:cs typeface="Trebuchet MS" pitchFamily="34" charset="-120"/>
               </a:rPr>
-              <a:t>re-</a:t>
+              <a:t>con-</a:t>
             </a:r>
             <a:endParaRPr lang="en-US" sz="1300" dirty="0"/>
           </a:p>
@@ -38506,7 +39739,7 @@
                 <a:ea typeface="Trebuchet MS" pitchFamily="34" charset="-122"/>
                 <a:cs typeface="Trebuchet MS" pitchFamily="34" charset="-120"/>
               </a:rPr>
-              <a:t>-ent</a:t>
+              <a:t>-y</a:t>
             </a:r>
             <a:endParaRPr lang="en-US" sz="1300" dirty="0"/>
           </a:p>
@@ -38570,7 +39803,7 @@
                 <a:ea typeface="Trebuchet MS" pitchFamily="34" charset="-122"/>
                 <a:cs typeface="Trebuchet MS" pitchFamily="34" charset="-120"/>
               </a:rPr>
-              <a:t>con-</a:t>
+              <a:t>in-</a:t>
             </a:r>
             <a:endParaRPr lang="en-US" sz="1300" dirty="0"/>
           </a:p>
@@ -38659,7 +39892,7 @@
                 <a:ea typeface="Trebuchet MS" pitchFamily="34" charset="-122"/>
                 <a:cs typeface="Trebuchet MS" pitchFamily="34" charset="-120"/>
               </a:rPr>
-              <a:t>-al</a:t>
+              <a:t>-ed</a:t>
             </a:r>
             <a:endParaRPr lang="en-US" sz="1300" dirty="0"/>
           </a:p>
@@ -38723,7 +39956,7 @@
                 <a:ea typeface="Trebuchet MS" pitchFamily="34" charset="-122"/>
                 <a:cs typeface="Trebuchet MS" pitchFamily="34" charset="-120"/>
               </a:rPr>
-              <a:t>in-</a:t>
+              <a:t>inter-</a:t>
             </a:r>
             <a:endParaRPr lang="en-US" sz="1300" dirty="0"/>
           </a:p>
@@ -38876,7 +40109,7 @@
                 <a:ea typeface="Trebuchet MS" pitchFamily="34" charset="-122"/>
                 <a:cs typeface="Trebuchet MS" pitchFamily="34" charset="-120"/>
               </a:rPr>
-              <a:t>of-</a:t>
+              <a:t>ob-</a:t>
             </a:r>
             <a:endParaRPr lang="en-US" sz="1300" dirty="0"/>
           </a:p>
@@ -38965,7 +40198,7 @@
                 <a:ea typeface="Trebuchet MS" pitchFamily="34" charset="-122"/>
                 <a:cs typeface="Trebuchet MS" pitchFamily="34" charset="-120"/>
               </a:rPr>
-              <a:t>-ed</a:t>
+              <a:t>-s</a:t>
             </a:r>
             <a:endParaRPr lang="en-US" sz="1300" dirty="0"/>
           </a:p>
@@ -38973,13 +40206,166 @@
       </p:sp>
       <p:sp>
         <p:nvSpPr>
-          <p:cNvPr id="43" name="Text 41"/>
-          <p:cNvSpPr/>
-          <p:nvPr/>
-        </p:nvSpPr>
-        <p:spPr>
-          <a:xfrm>
-            <a:off x="365760" y="4178808"/>
+          <p:cNvPr id="43" name="Shape 41"/>
+          <p:cNvSpPr/>
+          <p:nvPr/>
+        </p:nvSpPr>
+        <p:spPr>
+          <a:xfrm>
+            <a:off x="640080" y="4041648"/>
+            <a:ext cx="1463040" cy="420624"/>
+          </a:xfrm>
+          <a:prstGeom prst="rect">
+            <a:avLst/>
+          </a:prstGeom>
+          <a:solidFill>
+            <a:srgbClr val="DDD6FE"/>
+          </a:solidFill>
+          <a:ln w="12700">
+            <a:solidFill>
+              <a:srgbClr val="E5E7EB"/>
+            </a:solidFill>
+            <a:prstDash val="solid"/>
+          </a:ln>
+        </p:spPr>
+      </p:sp>
+      <p:sp>
+        <p:nvSpPr>
+          <p:cNvPr id="44" name="Text 42"/>
+          <p:cNvSpPr/>
+          <p:nvPr/>
+        </p:nvSpPr>
+        <p:spPr>
+          <a:xfrm>
+            <a:off x="640080" y="4041648"/>
+            <a:ext cx="1463040" cy="420624"/>
+          </a:xfrm>
+          <a:prstGeom prst="rect">
+            <a:avLst/>
+          </a:prstGeom>
+          <a:noFill/>
+          <a:ln/>
+        </p:spPr>
+        <p:txBody>
+          <a:bodyPr wrap="square" lIns="0" tIns="0" rIns="0" bIns="0" rtlCol="0" anchor="ctr"/>
+          <a:lstStyle/>
+          <a:p>
+            <a:pPr algn="ctr" indent="0" marL="0">
+              <a:buNone/>
+            </a:pPr>
+            <a:r>
+              <a:rPr lang="en-US" sz="1300" b="1" dirty="0">
+                <a:solidFill>
+                  <a:srgbClr val="4C1D95"/>
+                </a:solidFill>
+                <a:latin typeface="Trebuchet MS" pitchFamily="34" charset="0"/>
+                <a:ea typeface="Trebuchet MS" pitchFamily="34" charset="-122"/>
+                <a:cs typeface="Trebuchet MS" pitchFamily="34" charset="-120"/>
+              </a:rPr>
+              <a:t>pre-</a:t>
+            </a:r>
+            <a:endParaRPr lang="en-US" sz="1300" dirty="0"/>
+          </a:p>
+        </p:txBody>
+      </p:sp>
+      <p:sp>
+        <p:nvSpPr>
+          <p:cNvPr id="45" name="Shape 43"/>
+          <p:cNvSpPr/>
+          <p:nvPr/>
+        </p:nvSpPr>
+        <p:spPr>
+          <a:xfrm>
+            <a:off x="3291840" y="4041648"/>
+            <a:ext cx="1645920" cy="420624"/>
+          </a:xfrm>
+          <a:prstGeom prst="rect">
+            <a:avLst/>
+          </a:prstGeom>
+          <a:solidFill>
+            <a:srgbClr val="F1F5F9"/>
+          </a:solidFill>
+          <a:ln w="12700">
+            <a:solidFill>
+              <a:srgbClr val="E5E7EB"/>
+            </a:solidFill>
+            <a:prstDash val="solid"/>
+          </a:ln>
+        </p:spPr>
+      </p:sp>
+      <p:sp>
+        <p:nvSpPr>
+          <p:cNvPr id="46" name="Shape 44"/>
+          <p:cNvSpPr/>
+          <p:nvPr/>
+        </p:nvSpPr>
+        <p:spPr>
+          <a:xfrm>
+            <a:off x="5943600" y="4041648"/>
+            <a:ext cx="1463040" cy="420624"/>
+          </a:xfrm>
+          <a:prstGeom prst="rect">
+            <a:avLst/>
+          </a:prstGeom>
+          <a:solidFill>
+            <a:srgbClr val="FCE7F3"/>
+          </a:solidFill>
+          <a:ln w="12700">
+            <a:solidFill>
+              <a:srgbClr val="E5E7EB"/>
+            </a:solidFill>
+            <a:prstDash val="solid"/>
+          </a:ln>
+        </p:spPr>
+      </p:sp>
+      <p:sp>
+        <p:nvSpPr>
+          <p:cNvPr id="47" name="Text 45"/>
+          <p:cNvSpPr/>
+          <p:nvPr/>
+        </p:nvSpPr>
+        <p:spPr>
+          <a:xfrm>
+            <a:off x="5943600" y="4041648"/>
+            <a:ext cx="1463040" cy="420624"/>
+          </a:xfrm>
+          <a:prstGeom prst="rect">
+            <a:avLst/>
+          </a:prstGeom>
+          <a:noFill/>
+          <a:ln/>
+        </p:spPr>
+        <p:txBody>
+          <a:bodyPr wrap="square" lIns="0" tIns="0" rIns="0" bIns="0" rtlCol="0" anchor="ctr"/>
+          <a:lstStyle/>
+          <a:p>
+            <a:pPr algn="ctr" indent="0" marL="0">
+              <a:buNone/>
+            </a:pPr>
+            <a:r>
+              <a:rPr lang="en-US" sz="1300" b="1" dirty="0">
+                <a:solidFill>
+                  <a:srgbClr val="9D174D"/>
+                </a:solidFill>
+                <a:latin typeface="Trebuchet MS" pitchFamily="34" charset="0"/>
+                <a:ea typeface="Trebuchet MS" pitchFamily="34" charset="-122"/>
+                <a:cs typeface="Trebuchet MS" pitchFamily="34" charset="-120"/>
+              </a:rPr>
+              <a:t>-able</a:t>
+            </a:r>
+            <a:endParaRPr lang="en-US" sz="1300" dirty="0"/>
+          </a:p>
+        </p:txBody>
+      </p:sp>
+      <p:sp>
+        <p:nvSpPr>
+          <p:cNvPr id="48" name="Text 46"/>
+          <p:cNvSpPr/>
+          <p:nvPr/>
+        </p:nvSpPr>
+        <p:spPr>
+          <a:xfrm>
+            <a:off x="365760" y="4636008"/>
             <a:ext cx="1097280" cy="420624"/>
           </a:xfrm>
           <a:prstGeom prst="rect">
@@ -39012,14 +40398,14 @@
       </p:sp>
       <p:sp>
         <p:nvSpPr>
-          <p:cNvPr id="44" name="Shape 42"/>
-          <p:cNvSpPr/>
-          <p:nvPr/>
-        </p:nvSpPr>
-        <p:spPr>
-          <a:xfrm>
-            <a:off x="1508760" y="4178808"/>
-            <a:ext cx="1243584" cy="420624"/>
+          <p:cNvPr id="49" name="Shape 47"/>
+          <p:cNvSpPr/>
+          <p:nvPr/>
+        </p:nvSpPr>
+        <p:spPr>
+          <a:xfrm>
+            <a:off x="1508760" y="4636008"/>
+            <a:ext cx="1389888" cy="420624"/>
           </a:xfrm>
           <a:prstGeom prst="rect">
             <a:avLst>
@@ -39046,14 +40432,14 @@
       </p:sp>
       <p:sp>
         <p:nvSpPr>
-          <p:cNvPr id="45" name="Text 43"/>
-          <p:cNvSpPr/>
-          <p:nvPr/>
-        </p:nvSpPr>
-        <p:spPr>
-          <a:xfrm>
-            <a:off x="1508760" y="4178808"/>
-            <a:ext cx="1243584" cy="420624"/>
+          <p:cNvPr id="50" name="Text 48"/>
+          <p:cNvSpPr/>
+          <p:nvPr/>
+        </p:nvSpPr>
+        <p:spPr>
+          <a:xfrm>
+            <a:off x="1508760" y="4636008"/>
+            <a:ext cx="1389888" cy="420624"/>
           </a:xfrm>
           <a:prstGeom prst="rect">
             <a:avLst/>
@@ -39077,7 +40463,7 @@
                 <a:ea typeface="Trebuchet MS" pitchFamily="34" charset="-122"/>
                 <a:cs typeface="Trebuchet MS" pitchFamily="34" charset="-120"/>
               </a:rPr>
-              <a:t>trans-</a:t>
+              <a:t>circum-</a:t>
             </a:r>
             <a:endParaRPr lang="en-US" sz="1300" dirty="0"/>
           </a:p>
@@ -39085,13 +40471,13 @@
       </p:sp>
       <p:sp>
         <p:nvSpPr>
-          <p:cNvPr id="46" name="Text 44"/>
-          <p:cNvSpPr/>
-          <p:nvPr/>
-        </p:nvSpPr>
-        <p:spPr>
-          <a:xfrm>
-            <a:off x="2779776" y="4178808"/>
+          <p:cNvPr id="51" name="Text 49"/>
+          <p:cNvSpPr/>
+          <p:nvPr/>
+        </p:nvSpPr>
+        <p:spPr>
+          <a:xfrm>
+            <a:off x="2926080" y="4636008"/>
             <a:ext cx="320040" cy="420624"/>
           </a:xfrm>
           <a:prstGeom prst="rect">
@@ -39124,13 +40510,13 @@
       </p:sp>
       <p:sp>
         <p:nvSpPr>
-          <p:cNvPr id="47" name="Shape 45"/>
-          <p:cNvSpPr/>
-          <p:nvPr/>
-        </p:nvSpPr>
-        <p:spPr>
-          <a:xfrm>
-            <a:off x="3127248" y="4178808"/>
+          <p:cNvPr id="52" name="Shape 50"/>
+          <p:cNvSpPr/>
+          <p:nvPr/>
+        </p:nvSpPr>
+        <p:spPr>
+          <a:xfrm>
+            <a:off x="3273552" y="4636008"/>
             <a:ext cx="1097280" cy="420624"/>
           </a:xfrm>
           <a:prstGeom prst="rect">
@@ -39158,13 +40544,13 @@
       </p:sp>
       <p:sp>
         <p:nvSpPr>
-          <p:cNvPr id="48" name="Text 46"/>
-          <p:cNvSpPr/>
-          <p:nvPr/>
-        </p:nvSpPr>
-        <p:spPr>
-          <a:xfrm>
-            <a:off x="3127248" y="4178808"/>
+          <p:cNvPr id="53" name="Text 51"/>
+          <p:cNvSpPr/>
+          <p:nvPr/>
+        </p:nvSpPr>
+        <p:spPr>
+          <a:xfrm>
+            <a:off x="3273552" y="4636008"/>
             <a:ext cx="1097280" cy="420624"/>
           </a:xfrm>
           <a:prstGeom prst="rect">
@@ -39197,13 +40583,13 @@
       </p:sp>
       <p:sp>
         <p:nvSpPr>
-          <p:cNvPr id="49" name="Text 47"/>
-          <p:cNvSpPr/>
-          <p:nvPr/>
-        </p:nvSpPr>
-        <p:spPr>
-          <a:xfrm>
-            <a:off x="4251960" y="4178808"/>
+          <p:cNvPr id="54" name="Text 52"/>
+          <p:cNvSpPr/>
+          <p:nvPr/>
+        </p:nvSpPr>
+        <p:spPr>
+          <a:xfrm>
+            <a:off x="4398264" y="4636008"/>
             <a:ext cx="320040" cy="420624"/>
           </a:xfrm>
           <a:prstGeom prst="rect">
@@ -39236,13 +40622,13 @@
       </p:sp>
       <p:sp>
         <p:nvSpPr>
-          <p:cNvPr id="50" name="Shape 48"/>
-          <p:cNvSpPr/>
-          <p:nvPr/>
-        </p:nvSpPr>
-        <p:spPr>
-          <a:xfrm>
-            <a:off x="4599432" y="4178808"/>
+          <p:cNvPr id="55" name="Shape 53"/>
+          <p:cNvSpPr/>
+          <p:nvPr/>
+        </p:nvSpPr>
+        <p:spPr>
+          <a:xfrm>
+            <a:off x="4745736" y="4636008"/>
             <a:ext cx="1097280" cy="420624"/>
           </a:xfrm>
           <a:prstGeom prst="rect">
@@ -39270,13 +40656,13 @@
       </p:sp>
       <p:sp>
         <p:nvSpPr>
-          <p:cNvPr id="51" name="Text 49"/>
-          <p:cNvSpPr/>
-          <p:nvPr/>
-        </p:nvSpPr>
-        <p:spPr>
-          <a:xfrm>
-            <a:off x="4599432" y="4178808"/>
+          <p:cNvPr id="56" name="Text 54"/>
+          <p:cNvSpPr/>
+          <p:nvPr/>
+        </p:nvSpPr>
+        <p:spPr>
+          <a:xfrm>
+            <a:off x="4745736" y="4636008"/>
             <a:ext cx="1097280" cy="420624"/>
           </a:xfrm>
           <a:prstGeom prst="rect">
@@ -39309,13 +40695,13 @@
       </p:sp>
       <p:sp>
         <p:nvSpPr>
-          <p:cNvPr id="52" name="Text 50"/>
-          <p:cNvSpPr/>
-          <p:nvPr/>
-        </p:nvSpPr>
-        <p:spPr>
-          <a:xfrm>
-            <a:off x="5769864" y="4178808"/>
+          <p:cNvPr id="57" name="Text 55"/>
+          <p:cNvSpPr/>
+          <p:nvPr/>
+        </p:nvSpPr>
+        <p:spPr>
+          <a:xfrm>
+            <a:off x="5916168" y="4636008"/>
             <a:ext cx="365760" cy="420624"/>
           </a:xfrm>
           <a:prstGeom prst="rect">
@@ -39348,13 +40734,13 @@
       </p:sp>
       <p:sp>
         <p:nvSpPr>
-          <p:cNvPr id="53" name="Shape 51"/>
-          <p:cNvSpPr/>
-          <p:nvPr/>
-        </p:nvSpPr>
-        <p:spPr>
-          <a:xfrm>
-            <a:off x="6181344" y="4178808"/>
+          <p:cNvPr id="58" name="Shape 56"/>
+          <p:cNvSpPr/>
+          <p:nvPr/>
+        </p:nvSpPr>
+        <p:spPr>
+          <a:xfrm>
+            <a:off x="6327648" y="4636008"/>
             <a:ext cx="2194560" cy="420624"/>
           </a:xfrm>
           <a:prstGeom prst="rect">
@@ -39375,13 +40761,13 @@
       </p:sp>
       <p:sp>
         <p:nvSpPr>
-          <p:cNvPr id="54" name="Text 52"/>
-          <p:cNvSpPr/>
-          <p:nvPr/>
-        </p:nvSpPr>
-        <p:spPr>
-          <a:xfrm>
-            <a:off x="6181344" y="4178808"/>
+          <p:cNvPr id="59" name="Text 57"/>
+          <p:cNvSpPr/>
+          <p:nvPr/>
+        </p:nvSpPr>
+        <p:spPr>
+          <a:xfrm>
+            <a:off x="6327648" y="4636008"/>
             <a:ext cx="2194560" cy="420624"/>
           </a:xfrm>
           <a:prstGeom prst="rect">
@@ -39406,7 +40792,7 @@
                 <a:ea typeface="Trebuchet MS" pitchFamily="34" charset="-122"/>
                 <a:cs typeface="Trebuchet MS" pitchFamily="34" charset="-120"/>
               </a:rPr>
-              <a:t>transfer</a:t>
+              <a:t>refer</a:t>
             </a:r>
             <a:endParaRPr lang="en-US" sz="1400" dirty="0"/>
           </a:p>
@@ -39698,7 +41084,7 @@
                 <a:ea typeface="Calibri" pitchFamily="34" charset="-122"/>
                 <a:cs typeface="Calibri" pitchFamily="34" charset="-120"/>
               </a:rPr>
-              <a:t>Word Labs  •  wordlabs.app  •  Root: 'fer' = to carry, bring, bear</a:t>
+              <a:t>Word Labs  •  wordlabs.app  •  Root: 'fer' = carry; bring</a:t>
             </a:r>
             <a:endParaRPr lang="en-US" sz="800" dirty="0"/>
           </a:p>
@@ -39810,7 +41196,7 @@
                 <a:ea typeface="Trebuchet MS" pitchFamily="34" charset="-122"/>
                 <a:cs typeface="Trebuchet MS" pitchFamily="34" charset="-120"/>
               </a:rPr>
-              <a:t>transfer</a:t>
+              <a:t>refer</a:t>
             </a:r>
             <a:endParaRPr lang="en-US" sz="1200" dirty="0"/>
           </a:p>
@@ -39876,7 +41262,7 @@
                 <a:ea typeface="Calibri" pitchFamily="34" charset="-122"/>
                 <a:cs typeface="Calibri" pitchFamily="34" charset="-120"/>
               </a:rPr>
-              <a:t>To move something from one place to another, like transferring money to a friend.</a:t>
+              <a:t>to mention or direct attention to something</a:t>
             </a:r>
             <a:endParaRPr lang="en-US" sz="1200" dirty="0"/>
           </a:p>
@@ -39949,7 +41335,7 @@
                 <a:ea typeface="Trebuchet MS" pitchFamily="34" charset="-122"/>
                 <a:cs typeface="Trebuchet MS" pitchFamily="34" charset="-120"/>
               </a:rPr>
-              <a:t>refer</a:t>
+              <a:t>prefer</a:t>
             </a:r>
             <a:endParaRPr lang="en-US" sz="1200" dirty="0"/>
           </a:p>
@@ -40015,7 +41401,7 @@
                 <a:ea typeface="Calibri" pitchFamily="34" charset="-122"/>
                 <a:cs typeface="Calibri" pitchFamily="34" charset="-120"/>
               </a:rPr>
-              <a:t>To figure something out from clues, even if it isn't directly stated.</a:t>
+              <a:t>to experience pain, distress or hardship</a:t>
             </a:r>
             <a:endParaRPr lang="en-US" sz="1200" dirty="0"/>
           </a:p>
@@ -40088,7 +41474,7 @@
                 <a:ea typeface="Trebuchet MS" pitchFamily="34" charset="-122"/>
                 <a:cs typeface="Trebuchet MS" pitchFamily="34" charset="-120"/>
               </a:rPr>
-              <a:t>conference</a:t>
+              <a:t>refers</a:t>
             </a:r>
             <a:endParaRPr lang="en-US" sz="1200" dirty="0"/>
           </a:p>
@@ -40154,7 +41540,7 @@
                 <a:ea typeface="Calibri" pitchFamily="34" charset="-122"/>
                 <a:cs typeface="Calibri" pitchFamily="34" charset="-120"/>
               </a:rPr>
-              <a:t>A meeting where people come together to talk and share ideas.</a:t>
+              <a:t>mentions or points to something</a:t>
             </a:r>
             <a:endParaRPr lang="en-US" sz="1200" dirty="0"/>
           </a:p>
@@ -40227,7 +41613,7 @@
                 <a:ea typeface="Trebuchet MS" pitchFamily="34" charset="-122"/>
                 <a:cs typeface="Trebuchet MS" pitchFamily="34" charset="-120"/>
               </a:rPr>
-              <a:t>infer</a:t>
+              <a:t>suffer</a:t>
             </a:r>
             <a:endParaRPr lang="en-US" sz="1200" dirty="0"/>
           </a:p>
@@ -40293,7 +41679,7 @@
                 <a:ea typeface="Calibri" pitchFamily="34" charset="-122"/>
                 <a:cs typeface="Calibri" pitchFamily="34" charset="-120"/>
               </a:rPr>
-              <a:t>To give or present something to someone for them to take or accept.</a:t>
+              <a:t>he or she likes one thing more than another</a:t>
             </a:r>
             <a:endParaRPr lang="en-US" sz="1200" dirty="0"/>
           </a:p>
@@ -40366,7 +41752,7 @@
                 <a:ea typeface="Trebuchet MS" pitchFamily="34" charset="-122"/>
                 <a:cs typeface="Trebuchet MS" pitchFamily="34" charset="-120"/>
               </a:rPr>
-              <a:t>offer</a:t>
+              <a:t>prefers</a:t>
             </a:r>
             <a:endParaRPr lang="en-US" sz="1200" dirty="0"/>
           </a:p>
@@ -40432,7 +41818,7 @@
                 <a:ea typeface="Calibri" pitchFamily="34" charset="-122"/>
                 <a:cs typeface="Calibri" pitchFamily="34" charset="-120"/>
               </a:rPr>
-              <a:t>Not the same as something else; having qualities that set it apart.</a:t>
+              <a:t>experiences pain or hardship</a:t>
             </a:r>
             <a:endParaRPr lang="en-US" sz="1200" dirty="0"/>
           </a:p>
@@ -40505,7 +41891,7 @@
                 <a:ea typeface="Trebuchet MS" pitchFamily="34" charset="-122"/>
                 <a:cs typeface="Trebuchet MS" pitchFamily="34" charset="-120"/>
               </a:rPr>
-              <a:t>prefer</a:t>
+              <a:t>referee</a:t>
             </a:r>
             <a:endParaRPr lang="en-US" sz="1200" dirty="0"/>
           </a:p>
@@ -40571,7 +41957,7 @@
                 <a:ea typeface="Calibri" pitchFamily="34" charset="-122"/>
                 <a:cs typeface="Calibri" pitchFamily="34" charset="-120"/>
               </a:rPr>
-              <a:t>To like one thing more than another thing.</a:t>
+              <a:t>an official who makes sure players follow the rules in a sport</a:t>
             </a:r>
             <a:endParaRPr lang="en-US" sz="1200" dirty="0"/>
           </a:p>
@@ -40644,7 +42030,7 @@
                 <a:ea typeface="Trebuchet MS" pitchFamily="34" charset="-122"/>
                 <a:cs typeface="Trebuchet MS" pitchFamily="34" charset="-120"/>
               </a:rPr>
-              <a:t>different</a:t>
+              <a:t>suffers</a:t>
             </a:r>
             <a:endParaRPr lang="en-US" sz="1200" dirty="0"/>
           </a:p>
@@ -40710,7 +42096,7 @@
                 <a:ea typeface="Calibri" pitchFamily="34" charset="-122"/>
                 <a:cs typeface="Calibri" pitchFamily="34" charset="-120"/>
               </a:rPr>
-              <a:t>To send someone to another person or place for help or information.</a:t>
+              <a:t>to like one thing more than another</a:t>
             </a:r>
             <a:endParaRPr lang="en-US" sz="1200" dirty="0"/>
           </a:p>
@@ -41002,7 +42388,7 @@
                 <a:ea typeface="Calibri" pitchFamily="34" charset="-122"/>
                 <a:cs typeface="Calibri" pitchFamily="34" charset="-120"/>
               </a:rPr>
-              <a:t>Word Labs  •  wordlabs.app  •  Root: 'fer' = to carry, bring, bear</a:t>
+              <a:t>Word Labs  •  wordlabs.app  •  Root: 'fer' = carry; bring</a:t>
             </a:r>
             <a:endParaRPr lang="en-US" sz="800" dirty="0"/>
           </a:p>
@@ -41205,7 +42591,7 @@
                 <a:ea typeface="Calibri" pitchFamily="34" charset="-122"/>
                 <a:cs typeface="Calibri" pitchFamily="34" charset="-120"/>
               </a:rPr>
-              <a:t>The teacher asked us to refer to our textbooks when we needed help with the questions.</a:t>
+              <a:t>Please refer to page ten for the instructions.</a:t>
             </a:r>
             <a:endParaRPr lang="en-US" sz="1500" dirty="0"/>
           </a:p>
@@ -41369,7 +42755,7 @@
                 <a:ea typeface="Calibri" pitchFamily="34" charset="-122"/>
                 <a:cs typeface="Calibri" pitchFamily="34" charset="-120"/>
               </a:rPr>
-              <a:t>We had to transfer all of our work from our rough drafts into our good copies.</a:t>
+              <a:t>I prefer tea to coffee in the mornings.</a:t>
             </a:r>
             <a:endParaRPr lang="en-US" sz="1500" dirty="0"/>
           </a:p>
@@ -41533,7 +42919,7 @@
                 <a:ea typeface="Calibri" pitchFamily="34" charset="-122"/>
                 <a:cs typeface="Calibri" pitchFamily="34" charset="-120"/>
               </a:rPr>
-              <a:t>I prefer reading adventure stories over watching television on a rainy afternoon.</a:t>
+              <a:t>The author often refers to her own childhood in the book.</a:t>
             </a:r>
             <a:endParaRPr lang="en-US" sz="1500" dirty="0"/>
           </a:p>
